--- a/frontend/public/downloads/FTSLine-Detayli-Sunum.pptx
+++ b/frontend/public/downloads/FTSLine-Detayli-Sunum.pptx
@@ -2,39 +2,39 @@
 <file path=ppt/presentation.xml><?xml version="1.0" encoding="utf-8"?>
 <p:presentation xmlns:p="http://schemas.openxmlformats.org/presentationml/2006/main">
   <p:sldMasterIdLst>
-    <p:sldMasterId xmlns:r="http://schemas.openxmlformats.org/officeDocument/2006/relationships" id="2147483648" r:id="Rcde7decaffe14212"/>
+    <p:sldMasterId xmlns:r="http://schemas.openxmlformats.org/officeDocument/2006/relationships" id="2147483648" r:id="Rf7c4a5a34f3243d9"/>
   </p:sldMasterIdLst>
   <p:notesMasterIdLst>
-    <p:notesMasterId xmlns:r="http://schemas.openxmlformats.org/officeDocument/2006/relationships" r:id="R85fa33a73c9246fb"/>
+    <p:notesMasterId xmlns:r="http://schemas.openxmlformats.org/officeDocument/2006/relationships" r:id="R6dbf858062d34214"/>
   </p:notesMasterIdLst>
   <p:sldIdLst>
-    <p:sldId xmlns:r="http://schemas.openxmlformats.org/officeDocument/2006/relationships" id="256" r:id="R1b1503bbd9ea4722"/>
-    <p:sldId xmlns:r="http://schemas.openxmlformats.org/officeDocument/2006/relationships" id="257" r:id="R28e223b9e5b442c1"/>
-    <p:sldId xmlns:r="http://schemas.openxmlformats.org/officeDocument/2006/relationships" id="258" r:id="R7199a450462e41fd"/>
-    <p:sldId xmlns:r="http://schemas.openxmlformats.org/officeDocument/2006/relationships" id="259" r:id="R55acafb3fc334040"/>
-    <p:sldId xmlns:r="http://schemas.openxmlformats.org/officeDocument/2006/relationships" id="260" r:id="Rffa15e488c0740aa"/>
-    <p:sldId xmlns:r="http://schemas.openxmlformats.org/officeDocument/2006/relationships" id="261" r:id="R60431ef4e99b4aa8"/>
-    <p:sldId xmlns:r="http://schemas.openxmlformats.org/officeDocument/2006/relationships" id="262" r:id="R306cd52a5ab2431b"/>
-    <p:sldId xmlns:r="http://schemas.openxmlformats.org/officeDocument/2006/relationships" id="263" r:id="Rd6d17ddf22fe40d5"/>
-    <p:sldId xmlns:r="http://schemas.openxmlformats.org/officeDocument/2006/relationships" id="264" r:id="R3ce5c722a6ac4018"/>
-    <p:sldId xmlns:r="http://schemas.openxmlformats.org/officeDocument/2006/relationships" id="265" r:id="R16d520390ca04de4"/>
-    <p:sldId xmlns:r="http://schemas.openxmlformats.org/officeDocument/2006/relationships" id="266" r:id="R124ce2a1523a4be1"/>
-    <p:sldId xmlns:r="http://schemas.openxmlformats.org/officeDocument/2006/relationships" id="267" r:id="Rd7d0a0e0c2cd41b1"/>
-    <p:sldId xmlns:r="http://schemas.openxmlformats.org/officeDocument/2006/relationships" id="268" r:id="R60ecefd640d948ad"/>
-    <p:sldId xmlns:r="http://schemas.openxmlformats.org/officeDocument/2006/relationships" id="269" r:id="Rc87a58a25cc04233"/>
-    <p:sldId xmlns:r="http://schemas.openxmlformats.org/officeDocument/2006/relationships" id="270" r:id="R189c39ffc25047fb"/>
-    <p:sldId xmlns:r="http://schemas.openxmlformats.org/officeDocument/2006/relationships" id="271" r:id="Rd053fc68795c48e3"/>
-    <p:sldId xmlns:r="http://schemas.openxmlformats.org/officeDocument/2006/relationships" id="272" r:id="R116287b3126a4728"/>
-    <p:sldId xmlns:r="http://schemas.openxmlformats.org/officeDocument/2006/relationships" id="273" r:id="R3704092b1b194cb3"/>
-    <p:sldId xmlns:r="http://schemas.openxmlformats.org/officeDocument/2006/relationships" id="274" r:id="Rb7824fa3a3164e4a"/>
-    <p:sldId xmlns:r="http://schemas.openxmlformats.org/officeDocument/2006/relationships" id="275" r:id="R5e47f7d6a46e4922"/>
-    <p:sldId xmlns:r="http://schemas.openxmlformats.org/officeDocument/2006/relationships" id="276" r:id="R3559f2d09a6a4232"/>
-    <p:sldId xmlns:r="http://schemas.openxmlformats.org/officeDocument/2006/relationships" id="277" r:id="R9488b6135fe8404c"/>
-    <p:sldId xmlns:r="http://schemas.openxmlformats.org/officeDocument/2006/relationships" id="278" r:id="R39d15eaae4c54306"/>
-    <p:sldId xmlns:r="http://schemas.openxmlformats.org/officeDocument/2006/relationships" id="279" r:id="R688c3849c3464d0e"/>
-    <p:sldId xmlns:r="http://schemas.openxmlformats.org/officeDocument/2006/relationships" id="280" r:id="R3fc7f739debc4b12"/>
-    <p:sldId xmlns:r="http://schemas.openxmlformats.org/officeDocument/2006/relationships" id="281" r:id="Rf8a7fc8585224cb6"/>
-    <p:sldId xmlns:r="http://schemas.openxmlformats.org/officeDocument/2006/relationships" id="282" r:id="Rdc43b48aeac94138"/>
+    <p:sldId xmlns:r="http://schemas.openxmlformats.org/officeDocument/2006/relationships" id="256" r:id="R7f598180f4cd441e"/>
+    <p:sldId xmlns:r="http://schemas.openxmlformats.org/officeDocument/2006/relationships" id="257" r:id="Rd213c48687df4289"/>
+    <p:sldId xmlns:r="http://schemas.openxmlformats.org/officeDocument/2006/relationships" id="258" r:id="Rad7d4c0226634666"/>
+    <p:sldId xmlns:r="http://schemas.openxmlformats.org/officeDocument/2006/relationships" id="259" r:id="R230d2ef7ce8c4df3"/>
+    <p:sldId xmlns:r="http://schemas.openxmlformats.org/officeDocument/2006/relationships" id="260" r:id="Rcf3dcfa55ba745c0"/>
+    <p:sldId xmlns:r="http://schemas.openxmlformats.org/officeDocument/2006/relationships" id="261" r:id="R409363b0349742c9"/>
+    <p:sldId xmlns:r="http://schemas.openxmlformats.org/officeDocument/2006/relationships" id="262" r:id="R4d515efaee69473e"/>
+    <p:sldId xmlns:r="http://schemas.openxmlformats.org/officeDocument/2006/relationships" id="263" r:id="R6a2804c18d29495b"/>
+    <p:sldId xmlns:r="http://schemas.openxmlformats.org/officeDocument/2006/relationships" id="264" r:id="Rc9c9ef590dd74b42"/>
+    <p:sldId xmlns:r="http://schemas.openxmlformats.org/officeDocument/2006/relationships" id="265" r:id="R8678061500ee47be"/>
+    <p:sldId xmlns:r="http://schemas.openxmlformats.org/officeDocument/2006/relationships" id="266" r:id="R188b46c5db4d4026"/>
+    <p:sldId xmlns:r="http://schemas.openxmlformats.org/officeDocument/2006/relationships" id="267" r:id="Ra1596e8be2ca43aa"/>
+    <p:sldId xmlns:r="http://schemas.openxmlformats.org/officeDocument/2006/relationships" id="268" r:id="R7377313bf8824a7b"/>
+    <p:sldId xmlns:r="http://schemas.openxmlformats.org/officeDocument/2006/relationships" id="269" r:id="Rb47f8d693de243ef"/>
+    <p:sldId xmlns:r="http://schemas.openxmlformats.org/officeDocument/2006/relationships" id="270" r:id="Rcf097e11594b4654"/>
+    <p:sldId xmlns:r="http://schemas.openxmlformats.org/officeDocument/2006/relationships" id="271" r:id="Rb680f4a428274587"/>
+    <p:sldId xmlns:r="http://schemas.openxmlformats.org/officeDocument/2006/relationships" id="272" r:id="R64ce3b54863f4035"/>
+    <p:sldId xmlns:r="http://schemas.openxmlformats.org/officeDocument/2006/relationships" id="273" r:id="R63661edfccc94840"/>
+    <p:sldId xmlns:r="http://schemas.openxmlformats.org/officeDocument/2006/relationships" id="274" r:id="Rf809deefb5124727"/>
+    <p:sldId xmlns:r="http://schemas.openxmlformats.org/officeDocument/2006/relationships" id="275" r:id="R3e4b977221b0414a"/>
+    <p:sldId xmlns:r="http://schemas.openxmlformats.org/officeDocument/2006/relationships" id="276" r:id="Rae412f53fe9b4622"/>
+    <p:sldId xmlns:r="http://schemas.openxmlformats.org/officeDocument/2006/relationships" id="277" r:id="R3a4b585de5474b54"/>
+    <p:sldId xmlns:r="http://schemas.openxmlformats.org/officeDocument/2006/relationships" id="278" r:id="R4220d0a8ff5a414f"/>
+    <p:sldId xmlns:r="http://schemas.openxmlformats.org/officeDocument/2006/relationships" id="279" r:id="R657142af63194015"/>
+    <p:sldId xmlns:r="http://schemas.openxmlformats.org/officeDocument/2006/relationships" id="280" r:id="Rd0dde74490a8409e"/>
+    <p:sldId xmlns:r="http://schemas.openxmlformats.org/officeDocument/2006/relationships" id="281" r:id="R57d257e248d54ba4"/>
+    <p:sldId xmlns:r="http://schemas.openxmlformats.org/officeDocument/2006/relationships" id="282" r:id="R297b7b96add14242"/>
   </p:sldIdLst>
   <p:sldSz cx="12192000" cy="6858000"/>
   <p:notesSz cx="6858000" cy="9144000"/>
@@ -2308,7 +2308,7 @@
           </a:p>
           <a:p xmlns:a="http://schemas.openxmlformats.org/drawingml/2006/main">
             <a:r>
-              <a:t>- https://ftsline.vercel.app/dashboard</a:t>
+              <a:t>- https://ftsline.net</a:t>
             </a:r>
           </a:p>
           <a:p xmlns:a="http://schemas.openxmlformats.org/drawingml/2006/main">
@@ -3066,7 +3066,7 @@
   </p:cSld>
   <p:clrMap bg1="lt1" tx1="dk1" bg2="lt2" tx2="dk2" accent1="accent1" accent2="accent2" accent3="accent3" accent4="accent4" accent5="accent5" accent6="accent6" hlink="hlink" folHlink="folHlink"/>
   <p:sldLayoutIdLst>
-    <p:sldLayoutId xmlns:r="http://schemas.openxmlformats.org/officeDocument/2006/relationships" id="2147483649" r:id="Raf972e02273c45e4"/>
+    <p:sldLayoutId xmlns:r="http://schemas.openxmlformats.org/officeDocument/2006/relationships" id="2147483649" r:id="R3ce0ee1c9f8345ca"/>
   </p:sldLayoutIdLst>
   <p:txStyles>
     <p:titleStyle>
@@ -3621,7 +3621,7 @@
           <p:nvPr/>
         </p:nvPicPr>
         <p:blipFill>
-          <a:blip xmlns:r="http://schemas.openxmlformats.org/officeDocument/2006/relationships" xmlns:a="http://schemas.openxmlformats.org/drawingml/2006/main" r:embed="R2f8061cdf3734f04"/>
+          <a:blip xmlns:r="http://schemas.openxmlformats.org/officeDocument/2006/relationships" xmlns:a="http://schemas.openxmlformats.org/drawingml/2006/main" r:embed="R4595d805abfd42c6"/>
           <a:stretch xmlns:a="http://schemas.openxmlformats.org/drawingml/2006/main"/>
         </p:blipFill>
         <p:spPr>
@@ -3639,7 +3639,7 @@
           <p:cNvPr id="2" name="">
             <a:extLst xmlns:a="http://schemas.openxmlformats.org/drawingml/2006/main">
               <a:ext uri="{FF2B5EF4-FFF2-40B4-BE49-F238E27FC236}">
-                <a16:creationId xmlns:a16="http://schemas.microsoft.com/office/drawing/2014/main" id="{37FD1705-F709-4481-AB39-2D3A91EE99A1}"/>
+                <a16:creationId xmlns:a16="http://schemas.microsoft.com/office/drawing/2014/main" id="{4BDA697A-024F-450B-95DB-F6451BC3B8E8}"/>
               </a:ext>
             </a:extLst>
           </p:cNvPr>
@@ -3689,7 +3689,7 @@
           <p:cNvPr id="3" name="">
             <a:extLst xmlns:a="http://schemas.openxmlformats.org/drawingml/2006/main">
               <a:ext uri="{FF2B5EF4-FFF2-40B4-BE49-F238E27FC236}">
-                <a16:creationId xmlns:a16="http://schemas.microsoft.com/office/drawing/2014/main" id="{54738C22-5D66-40AF-9D7E-25EDDB795151}"/>
+                <a16:creationId xmlns:a16="http://schemas.microsoft.com/office/drawing/2014/main" id="{AC2B0990-19FC-4839-AC95-91D599BE7533}"/>
               </a:ext>
             </a:extLst>
           </p:cNvPr>
@@ -3739,7 +3739,7 @@
           <p:cNvPr id="4" name="">
             <a:extLst xmlns:a="http://schemas.openxmlformats.org/drawingml/2006/main">
               <a:ext uri="{FF2B5EF4-FFF2-40B4-BE49-F238E27FC236}">
-                <a16:creationId xmlns:a16="http://schemas.microsoft.com/office/drawing/2014/main" id="{F91E080F-18AD-4E44-8D62-733E07AF7BD5}"/>
+                <a16:creationId xmlns:a16="http://schemas.microsoft.com/office/drawing/2014/main" id="{4EAEBBB5-9ACB-4747-9B11-B3838778F848}"/>
               </a:ext>
             </a:extLst>
           </p:cNvPr>
@@ -3789,7 +3789,7 @@
           <p:cNvPr id="5" name="">
             <a:extLst xmlns:a="http://schemas.openxmlformats.org/drawingml/2006/main">
               <a:ext uri="{FF2B5EF4-FFF2-40B4-BE49-F238E27FC236}">
-                <a16:creationId xmlns:a16="http://schemas.microsoft.com/office/drawing/2014/main" id="{95D9115B-D075-4764-B917-BCB37840488E}"/>
+                <a16:creationId xmlns:a16="http://schemas.microsoft.com/office/drawing/2014/main" id="{49BE01E7-1922-40E6-B2D5-75C8B6AA2883}"/>
               </a:ext>
             </a:extLst>
           </p:cNvPr>
@@ -3824,7 +3824,7 @@
           <p:cNvPr id="6" name="">
             <a:extLst xmlns:a="http://schemas.openxmlformats.org/drawingml/2006/main">
               <a:ext uri="{FF2B5EF4-FFF2-40B4-BE49-F238E27FC236}">
-                <a16:creationId xmlns:a16="http://schemas.microsoft.com/office/drawing/2014/main" id="{445F80CE-FF02-4B97-99B7-56C6B218777F}"/>
+                <a16:creationId xmlns:a16="http://schemas.microsoft.com/office/drawing/2014/main" id="{C021FE97-4017-483B-93D5-C4D7093193AD}"/>
               </a:ext>
             </a:extLst>
           </p:cNvPr>
@@ -3874,7 +3874,7 @@
           <p:cNvPr id="7" name="">
             <a:extLst xmlns:a="http://schemas.openxmlformats.org/drawingml/2006/main">
               <a:ext uri="{FF2B5EF4-FFF2-40B4-BE49-F238E27FC236}">
-                <a16:creationId xmlns:a16="http://schemas.microsoft.com/office/drawing/2014/main" id="{F9B81AE9-7B10-4C93-BE4A-3C086C4C5C60}"/>
+                <a16:creationId xmlns:a16="http://schemas.microsoft.com/office/drawing/2014/main" id="{9E356A34-84D8-4D27-A2A7-32722078F59A}"/>
               </a:ext>
             </a:extLst>
           </p:cNvPr>
@@ -3905,7 +3905,7 @@
           <p:cNvPr id="8" name="">
             <a:extLst xmlns:a="http://schemas.openxmlformats.org/drawingml/2006/main">
               <a:ext uri="{FF2B5EF4-FFF2-40B4-BE49-F238E27FC236}">
-                <a16:creationId xmlns:a16="http://schemas.microsoft.com/office/drawing/2014/main" id="{10EE3E30-2419-4433-98C7-9BD4BB4A5AA0}"/>
+                <a16:creationId xmlns:a16="http://schemas.microsoft.com/office/drawing/2014/main" id="{62085C0A-0211-4378-9C70-8CA2D07CFBA7}"/>
               </a:ext>
             </a:extLst>
           </p:cNvPr>
@@ -3955,7 +3955,7 @@
           <p:cNvPr id="9" name="">
             <a:extLst xmlns:a="http://schemas.openxmlformats.org/drawingml/2006/main">
               <a:ext uri="{FF2B5EF4-FFF2-40B4-BE49-F238E27FC236}">
-                <a16:creationId xmlns:a16="http://schemas.microsoft.com/office/drawing/2014/main" id="{CDFF4327-E220-4F90-AC88-AFF361AC7DC9}"/>
+                <a16:creationId xmlns:a16="http://schemas.microsoft.com/office/drawing/2014/main" id="{11BFEA5E-13B4-41BD-92A5-2EDED862D764}"/>
               </a:ext>
             </a:extLst>
           </p:cNvPr>
@@ -3986,7 +3986,7 @@
           <p:cNvPr id="10" name="">
             <a:extLst xmlns:a="http://schemas.openxmlformats.org/drawingml/2006/main">
               <a:ext uri="{FF2B5EF4-FFF2-40B4-BE49-F238E27FC236}">
-                <a16:creationId xmlns:a16="http://schemas.microsoft.com/office/drawing/2014/main" id="{318F6EF6-E9E8-407A-B89D-02662DD83517}"/>
+                <a16:creationId xmlns:a16="http://schemas.microsoft.com/office/drawing/2014/main" id="{900C3920-976D-40E3-A1CD-C767F16D0887}"/>
               </a:ext>
             </a:extLst>
           </p:cNvPr>
@@ -4036,7 +4036,7 @@
           <p:cNvPr id="11" name="">
             <a:extLst xmlns:a="http://schemas.openxmlformats.org/drawingml/2006/main">
               <a:ext uri="{FF2B5EF4-FFF2-40B4-BE49-F238E27FC236}">
-                <a16:creationId xmlns:a16="http://schemas.microsoft.com/office/drawing/2014/main" id="{9465716A-D6F8-40E5-811C-354426B8AD6E}"/>
+                <a16:creationId xmlns:a16="http://schemas.microsoft.com/office/drawing/2014/main" id="{3F6E31E1-DCBD-4FDE-ADF0-73F1872CD634}"/>
               </a:ext>
             </a:extLst>
           </p:cNvPr>
@@ -4067,7 +4067,7 @@
           <p:cNvPr id="12" name="">
             <a:extLst xmlns:a="http://schemas.openxmlformats.org/drawingml/2006/main">
               <a:ext uri="{FF2B5EF4-FFF2-40B4-BE49-F238E27FC236}">
-                <a16:creationId xmlns:a16="http://schemas.microsoft.com/office/drawing/2014/main" id="{302B2C0B-E22C-404F-9078-DCA419B1626B}"/>
+                <a16:creationId xmlns:a16="http://schemas.microsoft.com/office/drawing/2014/main" id="{121A4E31-1885-4003-89AE-50CC9EEFFF57}"/>
               </a:ext>
             </a:extLst>
           </p:cNvPr>
@@ -4117,7 +4117,7 @@
           <p:cNvPr id="13" name="">
             <a:extLst xmlns:a="http://schemas.openxmlformats.org/drawingml/2006/main">
               <a:ext uri="{FF2B5EF4-FFF2-40B4-BE49-F238E27FC236}">
-                <a16:creationId xmlns:a16="http://schemas.microsoft.com/office/drawing/2014/main" id="{215C946B-6DF6-4157-BF7E-7A8D65C253B8}"/>
+                <a16:creationId xmlns:a16="http://schemas.microsoft.com/office/drawing/2014/main" id="{3AC41013-61BC-4CE8-8476-B2A4DB20D9B1}"/>
               </a:ext>
             </a:extLst>
           </p:cNvPr>
@@ -4148,7 +4148,7 @@
           <p:cNvPr id="14" name="">
             <a:extLst xmlns:a="http://schemas.openxmlformats.org/drawingml/2006/main">
               <a:ext uri="{FF2B5EF4-FFF2-40B4-BE49-F238E27FC236}">
-                <a16:creationId xmlns:a16="http://schemas.microsoft.com/office/drawing/2014/main" id="{DF555678-A9DB-48F0-BD51-9855C94AC005}"/>
+                <a16:creationId xmlns:a16="http://schemas.microsoft.com/office/drawing/2014/main" id="{D2992850-2674-49AE-8171-31AC7425DFAA}"/>
               </a:ext>
             </a:extLst>
           </p:cNvPr>
@@ -4198,7 +4198,7 @@
           <p:cNvPr id="15" name="">
             <a:extLst xmlns:a="http://schemas.openxmlformats.org/drawingml/2006/main">
               <a:ext uri="{FF2B5EF4-FFF2-40B4-BE49-F238E27FC236}">
-                <a16:creationId xmlns:a16="http://schemas.microsoft.com/office/drawing/2014/main" id="{DA8EA3DD-0EC6-4E2C-8BEA-36091178C14B}"/>
+                <a16:creationId xmlns:a16="http://schemas.microsoft.com/office/drawing/2014/main" id="{88E60067-F790-4CB2-886D-62C9A5CAFA13}"/>
               </a:ext>
             </a:extLst>
           </p:cNvPr>
@@ -4246,7 +4246,7 @@
     </p:spTree>
     <p:extLst>
       <p:ext uri="{BB962C8B-B14F-4D97-AF65-F5344CB8AC3E}">
-        <p14:creationId xmlns:p14="http://schemas.microsoft.com/office/powerpoint/2010/main" val="162240020"/>
+        <p14:creationId xmlns:p14="http://schemas.microsoft.com/office/powerpoint/2010/main" val="267211596"/>
       </p:ext>
     </p:extLst>
   </p:cSld>
@@ -4277,7 +4277,7 @@
           <p:cNvPr id="56" name="">
             <a:extLst xmlns:a="http://schemas.openxmlformats.org/drawingml/2006/main">
               <a:ext uri="{FF2B5EF4-FFF2-40B4-BE49-F238E27FC236}">
-                <a16:creationId xmlns:a16="http://schemas.microsoft.com/office/drawing/2014/main" id="{17121B84-3F4C-49C1-9FB2-FF871B7A56DF}"/>
+                <a16:creationId xmlns:a16="http://schemas.microsoft.com/office/drawing/2014/main" id="{3BB678C4-77CE-4DF7-A8D8-6413CE8895F5}"/>
               </a:ext>
             </a:extLst>
           </p:cNvPr>
@@ -4327,7 +4327,7 @@
           <p:cNvPr id="2" name="">
             <a:extLst xmlns:a="http://schemas.openxmlformats.org/drawingml/2006/main">
               <a:ext uri="{FF2B5EF4-FFF2-40B4-BE49-F238E27FC236}">
-                <a16:creationId xmlns:a16="http://schemas.microsoft.com/office/drawing/2014/main" id="{C0C5174D-7E85-4A0F-8847-02ED6B61BF06}"/>
+                <a16:creationId xmlns:a16="http://schemas.microsoft.com/office/drawing/2014/main" id="{4C51898B-37C8-4531-94D2-B3E511040B3D}"/>
               </a:ext>
             </a:extLst>
           </p:cNvPr>
@@ -4377,7 +4377,7 @@
           <p:cNvPr id="3" name="">
             <a:extLst xmlns:a="http://schemas.openxmlformats.org/drawingml/2006/main">
               <a:ext uri="{FF2B5EF4-FFF2-40B4-BE49-F238E27FC236}">
-                <a16:creationId xmlns:a16="http://schemas.microsoft.com/office/drawing/2014/main" id="{D532A2B6-58F6-40C0-BBF1-8892D98C9610}"/>
+                <a16:creationId xmlns:a16="http://schemas.microsoft.com/office/drawing/2014/main" id="{81C7C09D-5A75-4DAA-BA84-F58F9665E4F4}"/>
               </a:ext>
             </a:extLst>
           </p:cNvPr>
@@ -4408,7 +4408,7 @@
           <p:cNvPr id="4" name="">
             <a:extLst xmlns:a="http://schemas.openxmlformats.org/drawingml/2006/main">
               <a:ext uri="{FF2B5EF4-FFF2-40B4-BE49-F238E27FC236}">
-                <a16:creationId xmlns:a16="http://schemas.microsoft.com/office/drawing/2014/main" id="{AEB44360-AF8E-456F-B25B-27199B311769}"/>
+                <a16:creationId xmlns:a16="http://schemas.microsoft.com/office/drawing/2014/main" id="{0C6A024F-DFB0-4675-8EA9-D8A1F97A0568}"/>
               </a:ext>
             </a:extLst>
           </p:cNvPr>
@@ -4458,7 +4458,7 @@
           <p:cNvPr id="5" name="">
             <a:extLst xmlns:a="http://schemas.openxmlformats.org/drawingml/2006/main">
               <a:ext uri="{FF2B5EF4-FFF2-40B4-BE49-F238E27FC236}">
-                <a16:creationId xmlns:a16="http://schemas.microsoft.com/office/drawing/2014/main" id="{4663C464-1248-44F8-840F-131321BD6709}"/>
+                <a16:creationId xmlns:a16="http://schemas.microsoft.com/office/drawing/2014/main" id="{0B4BE933-F42B-4FCF-A144-7C451044ECF8}"/>
               </a:ext>
             </a:extLst>
           </p:cNvPr>
@@ -4508,7 +4508,7 @@
           <p:cNvPr id="6" name="">
             <a:extLst xmlns:a="http://schemas.openxmlformats.org/drawingml/2006/main">
               <a:ext uri="{FF2B5EF4-FFF2-40B4-BE49-F238E27FC236}">
-                <a16:creationId xmlns:a16="http://schemas.microsoft.com/office/drawing/2014/main" id="{F35748F1-0BDC-43F8-91C9-6338DFAA7DAF}"/>
+                <a16:creationId xmlns:a16="http://schemas.microsoft.com/office/drawing/2014/main" id="{CFA99618-8B7D-4B70-B635-7D58F9CCEFAC}"/>
               </a:ext>
             </a:extLst>
           </p:cNvPr>
@@ -4543,7 +4543,7 @@
           <p:cNvPr id="7" name="">
             <a:extLst xmlns:a="http://schemas.openxmlformats.org/drawingml/2006/main">
               <a:ext uri="{FF2B5EF4-FFF2-40B4-BE49-F238E27FC236}">
-                <a16:creationId xmlns:a16="http://schemas.microsoft.com/office/drawing/2014/main" id="{2FD088EB-ADFE-44FB-BC87-C21C55CAA38C}"/>
+                <a16:creationId xmlns:a16="http://schemas.microsoft.com/office/drawing/2014/main" id="{0202E7E7-0EEC-49EB-A18B-E7369CD6EFFE}"/>
               </a:ext>
             </a:extLst>
           </p:cNvPr>
@@ -4578,7 +4578,7 @@
           <p:cNvPr id="8" name="">
             <a:extLst xmlns:a="http://schemas.openxmlformats.org/drawingml/2006/main">
               <a:ext uri="{FF2B5EF4-FFF2-40B4-BE49-F238E27FC236}">
-                <a16:creationId xmlns:a16="http://schemas.microsoft.com/office/drawing/2014/main" id="{76496007-562A-40B8-A0F4-A10B523AB2F7}"/>
+                <a16:creationId xmlns:a16="http://schemas.microsoft.com/office/drawing/2014/main" id="{E444A673-4C96-478E-BAD1-871F7A89AD99}"/>
               </a:ext>
             </a:extLst>
           </p:cNvPr>
@@ -4628,7 +4628,7 @@
           <p:cNvPr id="9" name="">
             <a:extLst xmlns:a="http://schemas.openxmlformats.org/drawingml/2006/main">
               <a:ext uri="{FF2B5EF4-FFF2-40B4-BE49-F238E27FC236}">
-                <a16:creationId xmlns:a16="http://schemas.microsoft.com/office/drawing/2014/main" id="{115D03C1-6140-4941-A8E2-880FBB5B723D}"/>
+                <a16:creationId xmlns:a16="http://schemas.microsoft.com/office/drawing/2014/main" id="{D2085AB1-EAE6-4D25-8091-78C94624143F}"/>
               </a:ext>
             </a:extLst>
           </p:cNvPr>
@@ -4678,7 +4678,7 @@
           <p:cNvPr id="10" name="">
             <a:extLst xmlns:a="http://schemas.openxmlformats.org/drawingml/2006/main">
               <a:ext uri="{FF2B5EF4-FFF2-40B4-BE49-F238E27FC236}">
-                <a16:creationId xmlns:a16="http://schemas.microsoft.com/office/drawing/2014/main" id="{403DFF07-DBFB-4701-BE55-E6EFC778A016}"/>
+                <a16:creationId xmlns:a16="http://schemas.microsoft.com/office/drawing/2014/main" id="{2EBC1778-AB9E-4861-9F77-A6407DB0ABE0}"/>
               </a:ext>
             </a:extLst>
           </p:cNvPr>
@@ -4728,7 +4728,7 @@
           <p:cNvPr id="11" name="">
             <a:extLst xmlns:a="http://schemas.openxmlformats.org/drawingml/2006/main">
               <a:ext uri="{FF2B5EF4-FFF2-40B4-BE49-F238E27FC236}">
-                <a16:creationId xmlns:a16="http://schemas.microsoft.com/office/drawing/2014/main" id="{48A80A32-FB63-4F45-90BD-F431CB1BD545}"/>
+                <a16:creationId xmlns:a16="http://schemas.microsoft.com/office/drawing/2014/main" id="{55AF0E14-5EE2-4DCB-9881-EDDF00719E84}"/>
               </a:ext>
             </a:extLst>
           </p:cNvPr>
@@ -4763,7 +4763,7 @@
           <p:cNvPr id="12" name="">
             <a:extLst xmlns:a="http://schemas.openxmlformats.org/drawingml/2006/main">
               <a:ext uri="{FF2B5EF4-FFF2-40B4-BE49-F238E27FC236}">
-                <a16:creationId xmlns:a16="http://schemas.microsoft.com/office/drawing/2014/main" id="{19AE1C01-26B7-4242-87C2-9B2157D28E18}"/>
+                <a16:creationId xmlns:a16="http://schemas.microsoft.com/office/drawing/2014/main" id="{B8C7599F-4329-44A1-BCF3-9F1FE23BBA56}"/>
               </a:ext>
             </a:extLst>
           </p:cNvPr>
@@ -4798,7 +4798,7 @@
           <p:cNvPr id="13" name="">
             <a:extLst xmlns:a="http://schemas.openxmlformats.org/drawingml/2006/main">
               <a:ext uri="{FF2B5EF4-FFF2-40B4-BE49-F238E27FC236}">
-                <a16:creationId xmlns:a16="http://schemas.microsoft.com/office/drawing/2014/main" id="{9CDB625E-9AB1-4102-89C7-8D8D50A6ED75}"/>
+                <a16:creationId xmlns:a16="http://schemas.microsoft.com/office/drawing/2014/main" id="{D8593EA9-0189-4969-807D-7C563B348FEB}"/>
               </a:ext>
             </a:extLst>
           </p:cNvPr>
@@ -4848,7 +4848,7 @@
           <p:cNvPr id="14" name="">
             <a:extLst xmlns:a="http://schemas.openxmlformats.org/drawingml/2006/main">
               <a:ext uri="{FF2B5EF4-FFF2-40B4-BE49-F238E27FC236}">
-                <a16:creationId xmlns:a16="http://schemas.microsoft.com/office/drawing/2014/main" id="{2AB7B109-290D-44F1-BC87-12CA2054C39A}"/>
+                <a16:creationId xmlns:a16="http://schemas.microsoft.com/office/drawing/2014/main" id="{D841BC1E-CBDE-4EE6-96C0-65F09E07138E}"/>
               </a:ext>
             </a:extLst>
           </p:cNvPr>
@@ -4898,7 +4898,7 @@
           <p:cNvPr id="15" name="">
             <a:extLst xmlns:a="http://schemas.openxmlformats.org/drawingml/2006/main">
               <a:ext uri="{FF2B5EF4-FFF2-40B4-BE49-F238E27FC236}">
-                <a16:creationId xmlns:a16="http://schemas.microsoft.com/office/drawing/2014/main" id="{C32E5F7F-3E80-48C1-B149-02C676A47D0A}"/>
+                <a16:creationId xmlns:a16="http://schemas.microsoft.com/office/drawing/2014/main" id="{2DD40897-0678-48E6-9BE3-CE1A59C78ECB}"/>
               </a:ext>
             </a:extLst>
           </p:cNvPr>
@@ -4948,7 +4948,7 @@
           <p:cNvPr id="16" name="">
             <a:extLst xmlns:a="http://schemas.openxmlformats.org/drawingml/2006/main">
               <a:ext uri="{FF2B5EF4-FFF2-40B4-BE49-F238E27FC236}">
-                <a16:creationId xmlns:a16="http://schemas.microsoft.com/office/drawing/2014/main" id="{F0FC0048-7F9E-4D5E-BA5E-056899E455D8}"/>
+                <a16:creationId xmlns:a16="http://schemas.microsoft.com/office/drawing/2014/main" id="{12BD663C-E8CB-4B6C-B738-D384EA58A037}"/>
               </a:ext>
             </a:extLst>
           </p:cNvPr>
@@ -4983,7 +4983,7 @@
           <p:cNvPr id="17" name="">
             <a:extLst xmlns:a="http://schemas.openxmlformats.org/drawingml/2006/main">
               <a:ext uri="{FF2B5EF4-FFF2-40B4-BE49-F238E27FC236}">
-                <a16:creationId xmlns:a16="http://schemas.microsoft.com/office/drawing/2014/main" id="{256FA780-3AAC-4AAA-A1BE-71CFE3F2B6C3}"/>
+                <a16:creationId xmlns:a16="http://schemas.microsoft.com/office/drawing/2014/main" id="{CBBD2FF0-7159-4B09-85C6-4A53C815547E}"/>
               </a:ext>
             </a:extLst>
           </p:cNvPr>
@@ -5018,7 +5018,7 @@
           <p:cNvPr id="18" name="">
             <a:extLst xmlns:a="http://schemas.openxmlformats.org/drawingml/2006/main">
               <a:ext uri="{FF2B5EF4-FFF2-40B4-BE49-F238E27FC236}">
-                <a16:creationId xmlns:a16="http://schemas.microsoft.com/office/drawing/2014/main" id="{37A30945-2164-415F-BC34-6C39099AC2AF}"/>
+                <a16:creationId xmlns:a16="http://schemas.microsoft.com/office/drawing/2014/main" id="{744D9F2B-B000-411F-BC1A-24ACCD3301DE}"/>
               </a:ext>
             </a:extLst>
           </p:cNvPr>
@@ -5068,7 +5068,7 @@
           <p:cNvPr id="19" name="">
             <a:extLst xmlns:a="http://schemas.openxmlformats.org/drawingml/2006/main">
               <a:ext uri="{FF2B5EF4-FFF2-40B4-BE49-F238E27FC236}">
-                <a16:creationId xmlns:a16="http://schemas.microsoft.com/office/drawing/2014/main" id="{71E82F82-18F0-44EB-83B1-41227FE4E21C}"/>
+                <a16:creationId xmlns:a16="http://schemas.microsoft.com/office/drawing/2014/main" id="{D6323B26-FE56-4CCD-B3F0-518FFE4E81E8}"/>
               </a:ext>
             </a:extLst>
           </p:cNvPr>
@@ -5118,7 +5118,7 @@
           <p:cNvPr id="20" name="">
             <a:extLst xmlns:a="http://schemas.openxmlformats.org/drawingml/2006/main">
               <a:ext uri="{FF2B5EF4-FFF2-40B4-BE49-F238E27FC236}">
-                <a16:creationId xmlns:a16="http://schemas.microsoft.com/office/drawing/2014/main" id="{0EB27EC4-6663-40B4-8161-E352113416E3}"/>
+                <a16:creationId xmlns:a16="http://schemas.microsoft.com/office/drawing/2014/main" id="{4989118F-E2E3-4A07-B14B-9F5D24FCBB75}"/>
               </a:ext>
             </a:extLst>
           </p:cNvPr>
@@ -5168,7 +5168,7 @@
           <p:cNvPr id="21" name="">
             <a:extLst xmlns:a="http://schemas.openxmlformats.org/drawingml/2006/main">
               <a:ext uri="{FF2B5EF4-FFF2-40B4-BE49-F238E27FC236}">
-                <a16:creationId xmlns:a16="http://schemas.microsoft.com/office/drawing/2014/main" id="{08F6ABB9-DFF7-491B-B1C9-2FCD5B49F91D}"/>
+                <a16:creationId xmlns:a16="http://schemas.microsoft.com/office/drawing/2014/main" id="{E0C98CDA-CDB9-47A1-8ED3-527F8E4FBB01}"/>
               </a:ext>
             </a:extLst>
           </p:cNvPr>
@@ -5203,7 +5203,7 @@
           <p:cNvPr id="22" name="">
             <a:extLst xmlns:a="http://schemas.openxmlformats.org/drawingml/2006/main">
               <a:ext uri="{FF2B5EF4-FFF2-40B4-BE49-F238E27FC236}">
-                <a16:creationId xmlns:a16="http://schemas.microsoft.com/office/drawing/2014/main" id="{E589E2F2-C097-41F8-954E-50BED2DC2560}"/>
+                <a16:creationId xmlns:a16="http://schemas.microsoft.com/office/drawing/2014/main" id="{6AAF74A5-7155-479C-A7FE-EDFA183E122A}"/>
               </a:ext>
             </a:extLst>
           </p:cNvPr>
@@ -5238,7 +5238,7 @@
           <p:cNvPr id="23" name="">
             <a:extLst xmlns:a="http://schemas.openxmlformats.org/drawingml/2006/main">
               <a:ext uri="{FF2B5EF4-FFF2-40B4-BE49-F238E27FC236}">
-                <a16:creationId xmlns:a16="http://schemas.microsoft.com/office/drawing/2014/main" id="{E9B84595-4FE9-40DF-8B20-C72EBB0B4023}"/>
+                <a16:creationId xmlns:a16="http://schemas.microsoft.com/office/drawing/2014/main" id="{D713F1DF-AAD4-4418-92B6-B7EFA9FCC649}"/>
               </a:ext>
             </a:extLst>
           </p:cNvPr>
@@ -5288,7 +5288,7 @@
           <p:cNvPr id="24" name="">
             <a:extLst xmlns:a="http://schemas.openxmlformats.org/drawingml/2006/main">
               <a:ext uri="{FF2B5EF4-FFF2-40B4-BE49-F238E27FC236}">
-                <a16:creationId xmlns:a16="http://schemas.microsoft.com/office/drawing/2014/main" id="{81174A52-1C95-4502-A59E-6DE6FD7E3B35}"/>
+                <a16:creationId xmlns:a16="http://schemas.microsoft.com/office/drawing/2014/main" id="{92027EB5-F7FE-4430-B8C8-9E84242F59CB}"/>
               </a:ext>
             </a:extLst>
           </p:cNvPr>
@@ -5338,7 +5338,7 @@
           <p:cNvPr id="25" name="">
             <a:extLst xmlns:a="http://schemas.openxmlformats.org/drawingml/2006/main">
               <a:ext uri="{FF2B5EF4-FFF2-40B4-BE49-F238E27FC236}">
-                <a16:creationId xmlns:a16="http://schemas.microsoft.com/office/drawing/2014/main" id="{74774E40-E770-4277-B529-8379087F7F0A}"/>
+                <a16:creationId xmlns:a16="http://schemas.microsoft.com/office/drawing/2014/main" id="{2BA3438D-8B69-48FA-A76D-C3A9AF78AA69}"/>
               </a:ext>
             </a:extLst>
           </p:cNvPr>
@@ -5388,7 +5388,7 @@
           <p:cNvPr id="26" name="">
             <a:extLst xmlns:a="http://schemas.openxmlformats.org/drawingml/2006/main">
               <a:ext uri="{FF2B5EF4-FFF2-40B4-BE49-F238E27FC236}">
-                <a16:creationId xmlns:a16="http://schemas.microsoft.com/office/drawing/2014/main" id="{EC594914-7CAB-43F9-97AC-AC03062231B6}"/>
+                <a16:creationId xmlns:a16="http://schemas.microsoft.com/office/drawing/2014/main" id="{F045759D-A7BB-437E-8AC2-2B0452A97253}"/>
               </a:ext>
             </a:extLst>
           </p:cNvPr>
@@ -5423,7 +5423,7 @@
           <p:cNvPr id="27" name="">
             <a:extLst xmlns:a="http://schemas.openxmlformats.org/drawingml/2006/main">
               <a:ext uri="{FF2B5EF4-FFF2-40B4-BE49-F238E27FC236}">
-                <a16:creationId xmlns:a16="http://schemas.microsoft.com/office/drawing/2014/main" id="{02EB5E4A-FA6B-4D83-8D70-CE0B47AABD72}"/>
+                <a16:creationId xmlns:a16="http://schemas.microsoft.com/office/drawing/2014/main" id="{DD33B828-0F10-41E3-9F49-1C47F1D6C104}"/>
               </a:ext>
             </a:extLst>
           </p:cNvPr>
@@ -5458,7 +5458,7 @@
           <p:cNvPr id="28" name="">
             <a:extLst xmlns:a="http://schemas.openxmlformats.org/drawingml/2006/main">
               <a:ext uri="{FF2B5EF4-FFF2-40B4-BE49-F238E27FC236}">
-                <a16:creationId xmlns:a16="http://schemas.microsoft.com/office/drawing/2014/main" id="{23D2D42D-BF18-4575-9941-FBDCE8A9BB54}"/>
+                <a16:creationId xmlns:a16="http://schemas.microsoft.com/office/drawing/2014/main" id="{1977A1B1-4848-43DE-9BA4-069B68AFAE04}"/>
               </a:ext>
             </a:extLst>
           </p:cNvPr>
@@ -5508,7 +5508,7 @@
           <p:cNvPr id="29" name="">
             <a:extLst xmlns:a="http://schemas.openxmlformats.org/drawingml/2006/main">
               <a:ext uri="{FF2B5EF4-FFF2-40B4-BE49-F238E27FC236}">
-                <a16:creationId xmlns:a16="http://schemas.microsoft.com/office/drawing/2014/main" id="{3CB9EECB-F2FD-41C3-BC6A-9AB9358F3DDC}"/>
+                <a16:creationId xmlns:a16="http://schemas.microsoft.com/office/drawing/2014/main" id="{59A9BA25-A6B7-421A-A4FD-1B75C766BDEE}"/>
               </a:ext>
             </a:extLst>
           </p:cNvPr>
@@ -5558,7 +5558,7 @@
           <p:cNvPr id="30" name="">
             <a:extLst xmlns:a="http://schemas.openxmlformats.org/drawingml/2006/main">
               <a:ext uri="{FF2B5EF4-FFF2-40B4-BE49-F238E27FC236}">
-                <a16:creationId xmlns:a16="http://schemas.microsoft.com/office/drawing/2014/main" id="{F313D6E8-317E-47D2-B8B9-475B5F685BEB}"/>
+                <a16:creationId xmlns:a16="http://schemas.microsoft.com/office/drawing/2014/main" id="{5CD5BC01-C29C-464F-9E7F-6A02099F725B}"/>
               </a:ext>
             </a:extLst>
           </p:cNvPr>
@@ -5608,7 +5608,7 @@
           <p:cNvPr id="31" name="">
             <a:extLst xmlns:a="http://schemas.openxmlformats.org/drawingml/2006/main">
               <a:ext uri="{FF2B5EF4-FFF2-40B4-BE49-F238E27FC236}">
-                <a16:creationId xmlns:a16="http://schemas.microsoft.com/office/drawing/2014/main" id="{7E08E94A-356B-4FB4-B991-F6871EE3DCD4}"/>
+                <a16:creationId xmlns:a16="http://schemas.microsoft.com/office/drawing/2014/main" id="{7708BB22-2846-4749-BEC6-AADFE14BD656}"/>
               </a:ext>
             </a:extLst>
           </p:cNvPr>
@@ -5643,7 +5643,7 @@
           <p:cNvPr id="32" name="">
             <a:extLst xmlns:a="http://schemas.openxmlformats.org/drawingml/2006/main">
               <a:ext uri="{FF2B5EF4-FFF2-40B4-BE49-F238E27FC236}">
-                <a16:creationId xmlns:a16="http://schemas.microsoft.com/office/drawing/2014/main" id="{7FB8C89C-466C-46D7-B8DF-E9F63B676A61}"/>
+                <a16:creationId xmlns:a16="http://schemas.microsoft.com/office/drawing/2014/main" id="{9D9BE100-FC7A-4281-B625-A4A54A1FC229}"/>
               </a:ext>
             </a:extLst>
           </p:cNvPr>
@@ -5678,7 +5678,7 @@
           <p:cNvPr id="33" name="">
             <a:extLst xmlns:a="http://schemas.openxmlformats.org/drawingml/2006/main">
               <a:ext uri="{FF2B5EF4-FFF2-40B4-BE49-F238E27FC236}">
-                <a16:creationId xmlns:a16="http://schemas.microsoft.com/office/drawing/2014/main" id="{B2979F96-4313-4996-849B-EFC2CB774DBD}"/>
+                <a16:creationId xmlns:a16="http://schemas.microsoft.com/office/drawing/2014/main" id="{7655DCA5-663A-48CB-8BF5-394CF2343C70}"/>
               </a:ext>
             </a:extLst>
           </p:cNvPr>
@@ -5728,7 +5728,7 @@
           <p:cNvPr id="34" name="">
             <a:extLst xmlns:a="http://schemas.openxmlformats.org/drawingml/2006/main">
               <a:ext uri="{FF2B5EF4-FFF2-40B4-BE49-F238E27FC236}">
-                <a16:creationId xmlns:a16="http://schemas.microsoft.com/office/drawing/2014/main" id="{5477D5A8-E31D-4225-A94C-924677513B2C}"/>
+                <a16:creationId xmlns:a16="http://schemas.microsoft.com/office/drawing/2014/main" id="{4CE31A21-6C0F-46E9-8DB6-87B24641ADC5}"/>
               </a:ext>
             </a:extLst>
           </p:cNvPr>
@@ -5778,7 +5778,7 @@
           <p:cNvPr id="35" name="">
             <a:extLst xmlns:a="http://schemas.openxmlformats.org/drawingml/2006/main">
               <a:ext uri="{FF2B5EF4-FFF2-40B4-BE49-F238E27FC236}">
-                <a16:creationId xmlns:a16="http://schemas.microsoft.com/office/drawing/2014/main" id="{01E79DA6-9BB8-4ED9-84B4-3B8BF1E1694E}"/>
+                <a16:creationId xmlns:a16="http://schemas.microsoft.com/office/drawing/2014/main" id="{89E90190-E89F-486D-B8B7-3ECFAA3483CF}"/>
               </a:ext>
             </a:extLst>
           </p:cNvPr>
@@ -5828,7 +5828,7 @@
           <p:cNvPr id="36" name="">
             <a:extLst xmlns:a="http://schemas.openxmlformats.org/drawingml/2006/main">
               <a:ext uri="{FF2B5EF4-FFF2-40B4-BE49-F238E27FC236}">
-                <a16:creationId xmlns:a16="http://schemas.microsoft.com/office/drawing/2014/main" id="{46EF08CE-7F9B-4489-93C4-FAAB88C8277B}"/>
+                <a16:creationId xmlns:a16="http://schemas.microsoft.com/office/drawing/2014/main" id="{41AF0620-A950-4D8C-89A8-913A1560DAB3}"/>
               </a:ext>
             </a:extLst>
           </p:cNvPr>
@@ -5863,7 +5863,7 @@
           <p:cNvPr id="37" name="">
             <a:extLst xmlns:a="http://schemas.openxmlformats.org/drawingml/2006/main">
               <a:ext uri="{FF2B5EF4-FFF2-40B4-BE49-F238E27FC236}">
-                <a16:creationId xmlns:a16="http://schemas.microsoft.com/office/drawing/2014/main" id="{74ADCB6B-2404-438F-BDA7-12637EE70EA4}"/>
+                <a16:creationId xmlns:a16="http://schemas.microsoft.com/office/drawing/2014/main" id="{0A4420C3-E84E-43D1-B473-63CAA4182F27}"/>
               </a:ext>
             </a:extLst>
           </p:cNvPr>
@@ -5898,7 +5898,7 @@
           <p:cNvPr id="38" name="">
             <a:extLst xmlns:a="http://schemas.openxmlformats.org/drawingml/2006/main">
               <a:ext uri="{FF2B5EF4-FFF2-40B4-BE49-F238E27FC236}">
-                <a16:creationId xmlns:a16="http://schemas.microsoft.com/office/drawing/2014/main" id="{D74E522D-5B56-4D76-83E3-B83FE0551567}"/>
+                <a16:creationId xmlns:a16="http://schemas.microsoft.com/office/drawing/2014/main" id="{B21D5C71-5C2C-4290-BA04-0CE143DD969A}"/>
               </a:ext>
             </a:extLst>
           </p:cNvPr>
@@ -5948,7 +5948,7 @@
           <p:cNvPr id="39" name="">
             <a:extLst xmlns:a="http://schemas.openxmlformats.org/drawingml/2006/main">
               <a:ext uri="{FF2B5EF4-FFF2-40B4-BE49-F238E27FC236}">
-                <a16:creationId xmlns:a16="http://schemas.microsoft.com/office/drawing/2014/main" id="{D5F429D1-AE6C-4FBA-B75D-328D96A11C43}"/>
+                <a16:creationId xmlns:a16="http://schemas.microsoft.com/office/drawing/2014/main" id="{CA162295-94AD-4E4F-8A95-A97B95F1E60A}"/>
               </a:ext>
             </a:extLst>
           </p:cNvPr>
@@ -5998,7 +5998,7 @@
           <p:cNvPr id="40" name="">
             <a:extLst xmlns:a="http://schemas.openxmlformats.org/drawingml/2006/main">
               <a:ext uri="{FF2B5EF4-FFF2-40B4-BE49-F238E27FC236}">
-                <a16:creationId xmlns:a16="http://schemas.microsoft.com/office/drawing/2014/main" id="{9FCC3272-F1F8-4A5A-8C7D-C7A6152A0C62}"/>
+                <a16:creationId xmlns:a16="http://schemas.microsoft.com/office/drawing/2014/main" id="{F4F53A22-5A28-4556-BD8D-045E44265F7D}"/>
               </a:ext>
             </a:extLst>
           </p:cNvPr>
@@ -6048,7 +6048,7 @@
           <p:cNvPr id="41" name="">
             <a:extLst xmlns:a="http://schemas.openxmlformats.org/drawingml/2006/main">
               <a:ext uri="{FF2B5EF4-FFF2-40B4-BE49-F238E27FC236}">
-                <a16:creationId xmlns:a16="http://schemas.microsoft.com/office/drawing/2014/main" id="{10EDDCF1-A55B-49E8-9646-0A9DB58B34F7}"/>
+                <a16:creationId xmlns:a16="http://schemas.microsoft.com/office/drawing/2014/main" id="{FB1D0F39-840B-4A5A-A5C8-738EAB723AD2}"/>
               </a:ext>
             </a:extLst>
           </p:cNvPr>
@@ -6083,7 +6083,7 @@
           <p:cNvPr id="42" name="">
             <a:extLst xmlns:a="http://schemas.openxmlformats.org/drawingml/2006/main">
               <a:ext uri="{FF2B5EF4-FFF2-40B4-BE49-F238E27FC236}">
-                <a16:creationId xmlns:a16="http://schemas.microsoft.com/office/drawing/2014/main" id="{E0A6E854-5F0E-41B7-B7F9-6CF9BF106EEF}"/>
+                <a16:creationId xmlns:a16="http://schemas.microsoft.com/office/drawing/2014/main" id="{30046D72-1E4F-4677-A353-201C25DC105F}"/>
               </a:ext>
             </a:extLst>
           </p:cNvPr>
@@ -6118,7 +6118,7 @@
           <p:cNvPr id="43" name="">
             <a:extLst xmlns:a="http://schemas.openxmlformats.org/drawingml/2006/main">
               <a:ext uri="{FF2B5EF4-FFF2-40B4-BE49-F238E27FC236}">
-                <a16:creationId xmlns:a16="http://schemas.microsoft.com/office/drawing/2014/main" id="{AC227DBE-D725-4EBE-877C-03E7D6DD0834}"/>
+                <a16:creationId xmlns:a16="http://schemas.microsoft.com/office/drawing/2014/main" id="{F68341E6-53E0-4185-BBD0-90453F044E8E}"/>
               </a:ext>
             </a:extLst>
           </p:cNvPr>
@@ -6168,7 +6168,7 @@
           <p:cNvPr id="44" name="">
             <a:extLst xmlns:a="http://schemas.openxmlformats.org/drawingml/2006/main">
               <a:ext uri="{FF2B5EF4-FFF2-40B4-BE49-F238E27FC236}">
-                <a16:creationId xmlns:a16="http://schemas.microsoft.com/office/drawing/2014/main" id="{5BEC7AE1-1A41-4408-958A-E93255E577F0}"/>
+                <a16:creationId xmlns:a16="http://schemas.microsoft.com/office/drawing/2014/main" id="{CE6503FA-28FA-4CC6-8F41-631F6D24F2D8}"/>
               </a:ext>
             </a:extLst>
           </p:cNvPr>
@@ -6218,7 +6218,7 @@
           <p:cNvPr id="45" name="">
             <a:extLst xmlns:a="http://schemas.openxmlformats.org/drawingml/2006/main">
               <a:ext uri="{FF2B5EF4-FFF2-40B4-BE49-F238E27FC236}">
-                <a16:creationId xmlns:a16="http://schemas.microsoft.com/office/drawing/2014/main" id="{3FC069ED-57A9-4D9A-A705-A02603B2D319}"/>
+                <a16:creationId xmlns:a16="http://schemas.microsoft.com/office/drawing/2014/main" id="{88AC4044-08D5-40B2-BFBF-CCBA5F1DAC6D}"/>
               </a:ext>
             </a:extLst>
           </p:cNvPr>
@@ -6268,7 +6268,7 @@
           <p:cNvPr id="46" name="">
             <a:extLst xmlns:a="http://schemas.openxmlformats.org/drawingml/2006/main">
               <a:ext uri="{FF2B5EF4-FFF2-40B4-BE49-F238E27FC236}">
-                <a16:creationId xmlns:a16="http://schemas.microsoft.com/office/drawing/2014/main" id="{A08DC276-DC45-4DAF-9249-B2646E64A230}"/>
+                <a16:creationId xmlns:a16="http://schemas.microsoft.com/office/drawing/2014/main" id="{E163F8BD-EEEA-423D-8DA7-9B63154FF14C}"/>
               </a:ext>
             </a:extLst>
           </p:cNvPr>
@@ -6303,7 +6303,7 @@
           <p:cNvPr id="47" name="">
             <a:extLst xmlns:a="http://schemas.openxmlformats.org/drawingml/2006/main">
               <a:ext uri="{FF2B5EF4-FFF2-40B4-BE49-F238E27FC236}">
-                <a16:creationId xmlns:a16="http://schemas.microsoft.com/office/drawing/2014/main" id="{5672CA1D-4483-4065-8107-1B2CC73CEB67}"/>
+                <a16:creationId xmlns:a16="http://schemas.microsoft.com/office/drawing/2014/main" id="{D5335B9A-E908-41EE-80B5-3C85BE4B4998}"/>
               </a:ext>
             </a:extLst>
           </p:cNvPr>
@@ -6338,7 +6338,7 @@
           <p:cNvPr id="48" name="">
             <a:extLst xmlns:a="http://schemas.openxmlformats.org/drawingml/2006/main">
               <a:ext uri="{FF2B5EF4-FFF2-40B4-BE49-F238E27FC236}">
-                <a16:creationId xmlns:a16="http://schemas.microsoft.com/office/drawing/2014/main" id="{D31BDEDB-E9AE-470E-A6E0-F396A6E93D63}"/>
+                <a16:creationId xmlns:a16="http://schemas.microsoft.com/office/drawing/2014/main" id="{5CD0F764-21F8-4766-89A7-080FEAA0A9AB}"/>
               </a:ext>
             </a:extLst>
           </p:cNvPr>
@@ -6388,7 +6388,7 @@
           <p:cNvPr id="49" name="">
             <a:extLst xmlns:a="http://schemas.openxmlformats.org/drawingml/2006/main">
               <a:ext uri="{FF2B5EF4-FFF2-40B4-BE49-F238E27FC236}">
-                <a16:creationId xmlns:a16="http://schemas.microsoft.com/office/drawing/2014/main" id="{C3D412E7-E73F-4C92-B603-1DB6E85886CD}"/>
+                <a16:creationId xmlns:a16="http://schemas.microsoft.com/office/drawing/2014/main" id="{67A677A8-82B4-4994-8167-DC1CEB4BC976}"/>
               </a:ext>
             </a:extLst>
           </p:cNvPr>
@@ -6438,7 +6438,7 @@
           <p:cNvPr id="50" name="">
             <a:extLst xmlns:a="http://schemas.openxmlformats.org/drawingml/2006/main">
               <a:ext uri="{FF2B5EF4-FFF2-40B4-BE49-F238E27FC236}">
-                <a16:creationId xmlns:a16="http://schemas.microsoft.com/office/drawing/2014/main" id="{8497A0D3-DCB4-4D81-9661-CC8B660E20CC}"/>
+                <a16:creationId xmlns:a16="http://schemas.microsoft.com/office/drawing/2014/main" id="{6375E6CC-ECA7-467F-A7FB-FF04610BB3FE}"/>
               </a:ext>
             </a:extLst>
           </p:cNvPr>
@@ -6488,7 +6488,7 @@
           <p:cNvPr id="51" name="">
             <a:extLst xmlns:a="http://schemas.openxmlformats.org/drawingml/2006/main">
               <a:ext uri="{FF2B5EF4-FFF2-40B4-BE49-F238E27FC236}">
-                <a16:creationId xmlns:a16="http://schemas.microsoft.com/office/drawing/2014/main" id="{5DA1073E-0756-4B54-BF31-FA36757E3D0A}"/>
+                <a16:creationId xmlns:a16="http://schemas.microsoft.com/office/drawing/2014/main" id="{93EC6F9B-E746-4DEA-BC05-54D4628BDAFC}"/>
               </a:ext>
             </a:extLst>
           </p:cNvPr>
@@ -6523,7 +6523,7 @@
           <p:cNvPr id="52" name="">
             <a:extLst xmlns:a="http://schemas.openxmlformats.org/drawingml/2006/main">
               <a:ext uri="{FF2B5EF4-FFF2-40B4-BE49-F238E27FC236}">
-                <a16:creationId xmlns:a16="http://schemas.microsoft.com/office/drawing/2014/main" id="{86673FBE-53C5-4DCE-B956-0FEB8356196A}"/>
+                <a16:creationId xmlns:a16="http://schemas.microsoft.com/office/drawing/2014/main" id="{43DA5530-531C-45E6-935C-6EED691CB993}"/>
               </a:ext>
             </a:extLst>
           </p:cNvPr>
@@ -6558,7 +6558,7 @@
           <p:cNvPr id="53" name="">
             <a:extLst xmlns:a="http://schemas.openxmlformats.org/drawingml/2006/main">
               <a:ext uri="{FF2B5EF4-FFF2-40B4-BE49-F238E27FC236}">
-                <a16:creationId xmlns:a16="http://schemas.microsoft.com/office/drawing/2014/main" id="{9C50D389-8635-463E-A053-8E4BFFD4133B}"/>
+                <a16:creationId xmlns:a16="http://schemas.microsoft.com/office/drawing/2014/main" id="{8D42A745-02D1-4B26-B0B1-9030A51FE0C9}"/>
               </a:ext>
             </a:extLst>
           </p:cNvPr>
@@ -6608,7 +6608,7 @@
           <p:cNvPr id="54" name="">
             <a:extLst xmlns:a="http://schemas.openxmlformats.org/drawingml/2006/main">
               <a:ext uri="{FF2B5EF4-FFF2-40B4-BE49-F238E27FC236}">
-                <a16:creationId xmlns:a16="http://schemas.microsoft.com/office/drawing/2014/main" id="{E128DEE6-5FDD-4F70-86AD-6BBA06F99C2F}"/>
+                <a16:creationId xmlns:a16="http://schemas.microsoft.com/office/drawing/2014/main" id="{49FCE529-FB53-4E28-81AA-1A3B8191E9D5}"/>
               </a:ext>
             </a:extLst>
           </p:cNvPr>
@@ -6658,7 +6658,7 @@
           <p:cNvPr id="55" name="">
             <a:extLst xmlns:a="http://schemas.openxmlformats.org/drawingml/2006/main">
               <a:ext uri="{FF2B5EF4-FFF2-40B4-BE49-F238E27FC236}">
-                <a16:creationId xmlns:a16="http://schemas.microsoft.com/office/drawing/2014/main" id="{45BB13A8-5047-425F-8466-7737AE14ACAD}"/>
+                <a16:creationId xmlns:a16="http://schemas.microsoft.com/office/drawing/2014/main" id="{BA782FB2-8973-4FB3-BA13-40A6318E2C8B}"/>
               </a:ext>
             </a:extLst>
           </p:cNvPr>
@@ -6706,7 +6706,7 @@
     </p:spTree>
     <p:extLst>
       <p:ext uri="{BB962C8B-B14F-4D97-AF65-F5344CB8AC3E}">
-        <p14:creationId xmlns:p14="http://schemas.microsoft.com/office/powerpoint/2010/main" val="1278185451"/>
+        <p14:creationId xmlns:p14="http://schemas.microsoft.com/office/powerpoint/2010/main" val="857593522"/>
       </p:ext>
     </p:extLst>
   </p:cSld>
@@ -6737,7 +6737,7 @@
           <p:cNvPr id="30" name="">
             <a:extLst xmlns:a="http://schemas.openxmlformats.org/drawingml/2006/main">
               <a:ext uri="{FF2B5EF4-FFF2-40B4-BE49-F238E27FC236}">
-                <a16:creationId xmlns:a16="http://schemas.microsoft.com/office/drawing/2014/main" id="{7EA57F35-EB14-4067-8E44-97AB6C2B914F}"/>
+                <a16:creationId xmlns:a16="http://schemas.microsoft.com/office/drawing/2014/main" id="{AE1AC83D-44BC-42B7-A6A1-82750C7EA94E}"/>
               </a:ext>
             </a:extLst>
           </p:cNvPr>
@@ -6787,7 +6787,7 @@
           <p:cNvPr id="2" name="">
             <a:extLst xmlns:a="http://schemas.openxmlformats.org/drawingml/2006/main">
               <a:ext uri="{FF2B5EF4-FFF2-40B4-BE49-F238E27FC236}">
-                <a16:creationId xmlns:a16="http://schemas.microsoft.com/office/drawing/2014/main" id="{9E9FBC81-E486-417C-A67C-B37553B7B0B7}"/>
+                <a16:creationId xmlns:a16="http://schemas.microsoft.com/office/drawing/2014/main" id="{DCF4FD74-F6D3-4824-8617-7223C10977D9}"/>
               </a:ext>
             </a:extLst>
           </p:cNvPr>
@@ -6837,7 +6837,7 @@
           <p:cNvPr id="3" name="">
             <a:extLst xmlns:a="http://schemas.openxmlformats.org/drawingml/2006/main">
               <a:ext uri="{FF2B5EF4-FFF2-40B4-BE49-F238E27FC236}">
-                <a16:creationId xmlns:a16="http://schemas.microsoft.com/office/drawing/2014/main" id="{E1DB7510-DEA2-4B4B-9DBE-72E3B3C475FC}"/>
+                <a16:creationId xmlns:a16="http://schemas.microsoft.com/office/drawing/2014/main" id="{D72432D4-FC2A-4B28-85A0-6B841F9B5CD6}"/>
               </a:ext>
             </a:extLst>
           </p:cNvPr>
@@ -6868,7 +6868,7 @@
           <p:cNvPr id="4" name="">
             <a:extLst xmlns:a="http://schemas.openxmlformats.org/drawingml/2006/main">
               <a:ext uri="{FF2B5EF4-FFF2-40B4-BE49-F238E27FC236}">
-                <a16:creationId xmlns:a16="http://schemas.microsoft.com/office/drawing/2014/main" id="{F0C23FE9-7EBB-4887-BFA7-3C0B21E72288}"/>
+                <a16:creationId xmlns:a16="http://schemas.microsoft.com/office/drawing/2014/main" id="{5AEB21F2-D3AC-4D7D-B7AB-9EDEF0B144DE}"/>
               </a:ext>
             </a:extLst>
           </p:cNvPr>
@@ -6918,7 +6918,7 @@
           <p:cNvPr id="5" name="">
             <a:extLst xmlns:a="http://schemas.openxmlformats.org/drawingml/2006/main">
               <a:ext uri="{FF2B5EF4-FFF2-40B4-BE49-F238E27FC236}">
-                <a16:creationId xmlns:a16="http://schemas.microsoft.com/office/drawing/2014/main" id="{1D0A307A-6952-42EF-85BA-09D9C4349538}"/>
+                <a16:creationId xmlns:a16="http://schemas.microsoft.com/office/drawing/2014/main" id="{9165FBAE-59AF-4268-8E55-CBE9B319B845}"/>
               </a:ext>
             </a:extLst>
           </p:cNvPr>
@@ -6968,7 +6968,7 @@
           <p:cNvPr id="6" name="">
             <a:extLst xmlns:a="http://schemas.openxmlformats.org/drawingml/2006/main">
               <a:ext uri="{FF2B5EF4-FFF2-40B4-BE49-F238E27FC236}">
-                <a16:creationId xmlns:a16="http://schemas.microsoft.com/office/drawing/2014/main" id="{994823AC-EA1F-4745-80ED-890E45D5B769}"/>
+                <a16:creationId xmlns:a16="http://schemas.microsoft.com/office/drawing/2014/main" id="{60DE21FA-8EDF-4808-BD5A-17EC820EF1A6}"/>
               </a:ext>
             </a:extLst>
           </p:cNvPr>
@@ -6999,7 +6999,7 @@
           <p:cNvPr id="7" name="">
             <a:extLst xmlns:a="http://schemas.openxmlformats.org/drawingml/2006/main">
               <a:ext uri="{FF2B5EF4-FFF2-40B4-BE49-F238E27FC236}">
-                <a16:creationId xmlns:a16="http://schemas.microsoft.com/office/drawing/2014/main" id="{3D3298F1-B7F7-42AE-BD87-8610F188B769}"/>
+                <a16:creationId xmlns:a16="http://schemas.microsoft.com/office/drawing/2014/main" id="{D7B29991-D4BE-47AD-8C40-1C9BCB46DB1A}"/>
               </a:ext>
             </a:extLst>
           </p:cNvPr>
@@ -7049,7 +7049,7 @@
           <p:cNvPr id="8" name="">
             <a:extLst xmlns:a="http://schemas.openxmlformats.org/drawingml/2006/main">
               <a:ext uri="{FF2B5EF4-FFF2-40B4-BE49-F238E27FC236}">
-                <a16:creationId xmlns:a16="http://schemas.microsoft.com/office/drawing/2014/main" id="{E53B46E4-6993-4EBB-A4B6-16A122E6F8E3}"/>
+                <a16:creationId xmlns:a16="http://schemas.microsoft.com/office/drawing/2014/main" id="{FEE42803-03E0-4BCC-ADCE-FF1017F1CC03}"/>
               </a:ext>
             </a:extLst>
           </p:cNvPr>
@@ -7099,7 +7099,7 @@
           <p:cNvPr id="9" name="">
             <a:extLst xmlns:a="http://schemas.openxmlformats.org/drawingml/2006/main">
               <a:ext uri="{FF2B5EF4-FFF2-40B4-BE49-F238E27FC236}">
-                <a16:creationId xmlns:a16="http://schemas.microsoft.com/office/drawing/2014/main" id="{38704802-A340-43F5-8EA8-73580561D9FA}"/>
+                <a16:creationId xmlns:a16="http://schemas.microsoft.com/office/drawing/2014/main" id="{336BC64A-1C71-4C58-8D2D-85017963B37A}"/>
               </a:ext>
             </a:extLst>
           </p:cNvPr>
@@ -7130,7 +7130,7 @@
           <p:cNvPr id="10" name="">
             <a:extLst xmlns:a="http://schemas.openxmlformats.org/drawingml/2006/main">
               <a:ext uri="{FF2B5EF4-FFF2-40B4-BE49-F238E27FC236}">
-                <a16:creationId xmlns:a16="http://schemas.microsoft.com/office/drawing/2014/main" id="{074C8D6F-9882-405E-BDE4-DB25C4AAFDC9}"/>
+                <a16:creationId xmlns:a16="http://schemas.microsoft.com/office/drawing/2014/main" id="{8B19132A-E51B-4216-924B-AA4E848AF1DB}"/>
               </a:ext>
             </a:extLst>
           </p:cNvPr>
@@ -7180,7 +7180,7 @@
           <p:cNvPr id="11" name="">
             <a:extLst xmlns:a="http://schemas.openxmlformats.org/drawingml/2006/main">
               <a:ext uri="{FF2B5EF4-FFF2-40B4-BE49-F238E27FC236}">
-                <a16:creationId xmlns:a16="http://schemas.microsoft.com/office/drawing/2014/main" id="{22276D9C-FAAE-4B6D-8E66-F4B2108AFA2A}"/>
+                <a16:creationId xmlns:a16="http://schemas.microsoft.com/office/drawing/2014/main" id="{F6B5F00F-A5C3-4EBA-981D-C380BEE00606}"/>
               </a:ext>
             </a:extLst>
           </p:cNvPr>
@@ -7230,7 +7230,7 @@
           <p:cNvPr id="12" name="">
             <a:extLst xmlns:a="http://schemas.openxmlformats.org/drawingml/2006/main">
               <a:ext uri="{FF2B5EF4-FFF2-40B4-BE49-F238E27FC236}">
-                <a16:creationId xmlns:a16="http://schemas.microsoft.com/office/drawing/2014/main" id="{1442CD0D-1A86-4B49-847C-C8B077001613}"/>
+                <a16:creationId xmlns:a16="http://schemas.microsoft.com/office/drawing/2014/main" id="{E9DB118E-D31B-4CB6-8362-9E157763C958}"/>
               </a:ext>
             </a:extLst>
           </p:cNvPr>
@@ -7261,7 +7261,7 @@
           <p:cNvPr id="13" name="">
             <a:extLst xmlns:a="http://schemas.openxmlformats.org/drawingml/2006/main">
               <a:ext uri="{FF2B5EF4-FFF2-40B4-BE49-F238E27FC236}">
-                <a16:creationId xmlns:a16="http://schemas.microsoft.com/office/drawing/2014/main" id="{843BA8AA-158B-4DF7-969E-697848710818}"/>
+                <a16:creationId xmlns:a16="http://schemas.microsoft.com/office/drawing/2014/main" id="{80B244C8-2687-4C94-A6A8-863503DFABE8}"/>
               </a:ext>
             </a:extLst>
           </p:cNvPr>
@@ -7311,7 +7311,7 @@
           <p:cNvPr id="14" name="">
             <a:extLst xmlns:a="http://schemas.openxmlformats.org/drawingml/2006/main">
               <a:ext uri="{FF2B5EF4-FFF2-40B4-BE49-F238E27FC236}">
-                <a16:creationId xmlns:a16="http://schemas.microsoft.com/office/drawing/2014/main" id="{D71EBB0F-636E-48CA-AB1A-D9FA4512A12A}"/>
+                <a16:creationId xmlns:a16="http://schemas.microsoft.com/office/drawing/2014/main" id="{5F33B34D-C6FD-4991-B063-EA18E286B028}"/>
               </a:ext>
             </a:extLst>
           </p:cNvPr>
@@ -7361,7 +7361,7 @@
           <p:cNvPr id="15" name="">
             <a:extLst xmlns:a="http://schemas.openxmlformats.org/drawingml/2006/main">
               <a:ext uri="{FF2B5EF4-FFF2-40B4-BE49-F238E27FC236}">
-                <a16:creationId xmlns:a16="http://schemas.microsoft.com/office/drawing/2014/main" id="{EDDF6520-0E96-45F2-AE0F-01449259FB41}"/>
+                <a16:creationId xmlns:a16="http://schemas.microsoft.com/office/drawing/2014/main" id="{CF14B4AE-6239-4FC9-9946-047187D0A8DE}"/>
               </a:ext>
             </a:extLst>
           </p:cNvPr>
@@ -7392,7 +7392,7 @@
           <p:cNvPr id="16" name="">
             <a:extLst xmlns:a="http://schemas.openxmlformats.org/drawingml/2006/main">
               <a:ext uri="{FF2B5EF4-FFF2-40B4-BE49-F238E27FC236}">
-                <a16:creationId xmlns:a16="http://schemas.microsoft.com/office/drawing/2014/main" id="{3A7FD3CA-3A40-4306-8E66-7BFACFB0245E}"/>
+                <a16:creationId xmlns:a16="http://schemas.microsoft.com/office/drawing/2014/main" id="{C9BD5F2E-D55D-467E-8C2B-ABC468C55585}"/>
               </a:ext>
             </a:extLst>
           </p:cNvPr>
@@ -7442,7 +7442,7 @@
           <p:cNvPr id="17" name="">
             <a:extLst xmlns:a="http://schemas.openxmlformats.org/drawingml/2006/main">
               <a:ext uri="{FF2B5EF4-FFF2-40B4-BE49-F238E27FC236}">
-                <a16:creationId xmlns:a16="http://schemas.microsoft.com/office/drawing/2014/main" id="{1E2B7096-5722-44CC-B4C3-8A0A14EBC835}"/>
+                <a16:creationId xmlns:a16="http://schemas.microsoft.com/office/drawing/2014/main" id="{87256D26-09B8-40D7-8DC1-18311392F4FF}"/>
               </a:ext>
             </a:extLst>
           </p:cNvPr>
@@ -7492,7 +7492,7 @@
           <p:cNvPr id="18" name="">
             <a:extLst xmlns:a="http://schemas.openxmlformats.org/drawingml/2006/main">
               <a:ext uri="{FF2B5EF4-FFF2-40B4-BE49-F238E27FC236}">
-                <a16:creationId xmlns:a16="http://schemas.microsoft.com/office/drawing/2014/main" id="{BB0138D9-6A65-400E-8C00-CCAFADF3038E}"/>
+                <a16:creationId xmlns:a16="http://schemas.microsoft.com/office/drawing/2014/main" id="{9C9D9D36-6819-461D-86E6-C720C2BBEB59}"/>
               </a:ext>
             </a:extLst>
           </p:cNvPr>
@@ -7523,7 +7523,7 @@
           <p:cNvPr id="19" name="">
             <a:extLst xmlns:a="http://schemas.openxmlformats.org/drawingml/2006/main">
               <a:ext uri="{FF2B5EF4-FFF2-40B4-BE49-F238E27FC236}">
-                <a16:creationId xmlns:a16="http://schemas.microsoft.com/office/drawing/2014/main" id="{9E71E6A2-1261-4E44-9780-3AACF7930D12}"/>
+                <a16:creationId xmlns:a16="http://schemas.microsoft.com/office/drawing/2014/main" id="{2F83B515-6AEA-4BA2-B4E4-1576F80EAD89}"/>
               </a:ext>
             </a:extLst>
           </p:cNvPr>
@@ -7573,7 +7573,7 @@
           <p:cNvPr id="20" name="">
             <a:extLst xmlns:a="http://schemas.openxmlformats.org/drawingml/2006/main">
               <a:ext uri="{FF2B5EF4-FFF2-40B4-BE49-F238E27FC236}">
-                <a16:creationId xmlns:a16="http://schemas.microsoft.com/office/drawing/2014/main" id="{A7AE3DE3-EB44-49C8-B77A-3CC4DF9DEB78}"/>
+                <a16:creationId xmlns:a16="http://schemas.microsoft.com/office/drawing/2014/main" id="{C71E3A50-0C12-4CE6-9E57-629F012F7B26}"/>
               </a:ext>
             </a:extLst>
           </p:cNvPr>
@@ -7623,7 +7623,7 @@
           <p:cNvPr id="21" name="">
             <a:extLst xmlns:a="http://schemas.openxmlformats.org/drawingml/2006/main">
               <a:ext uri="{FF2B5EF4-FFF2-40B4-BE49-F238E27FC236}">
-                <a16:creationId xmlns:a16="http://schemas.microsoft.com/office/drawing/2014/main" id="{F854951C-9BD9-4DCB-A0BC-05697E852261}"/>
+                <a16:creationId xmlns:a16="http://schemas.microsoft.com/office/drawing/2014/main" id="{3B55F34A-EBA0-41FC-9C18-43B60710B887}"/>
               </a:ext>
             </a:extLst>
           </p:cNvPr>
@@ -7654,7 +7654,7 @@
           <p:cNvPr id="22" name="">
             <a:extLst xmlns:a="http://schemas.openxmlformats.org/drawingml/2006/main">
               <a:ext uri="{FF2B5EF4-FFF2-40B4-BE49-F238E27FC236}">
-                <a16:creationId xmlns:a16="http://schemas.microsoft.com/office/drawing/2014/main" id="{4D905CAE-D1A6-4E3A-B84F-3C2C078FE487}"/>
+                <a16:creationId xmlns:a16="http://schemas.microsoft.com/office/drawing/2014/main" id="{6077184A-16C8-4B10-B8D0-C1E66152761F}"/>
               </a:ext>
             </a:extLst>
           </p:cNvPr>
@@ -7704,7 +7704,7 @@
           <p:cNvPr id="23" name="">
             <a:extLst xmlns:a="http://schemas.openxmlformats.org/drawingml/2006/main">
               <a:ext uri="{FF2B5EF4-FFF2-40B4-BE49-F238E27FC236}">
-                <a16:creationId xmlns:a16="http://schemas.microsoft.com/office/drawing/2014/main" id="{51B24B5E-7E05-4951-BF51-C0A3672D5E6A}"/>
+                <a16:creationId xmlns:a16="http://schemas.microsoft.com/office/drawing/2014/main" id="{DF129580-A779-4B87-B4D9-066659070185}"/>
               </a:ext>
             </a:extLst>
           </p:cNvPr>
@@ -7754,7 +7754,7 @@
           <p:cNvPr id="24" name="">
             <a:extLst xmlns:a="http://schemas.openxmlformats.org/drawingml/2006/main">
               <a:ext uri="{FF2B5EF4-FFF2-40B4-BE49-F238E27FC236}">
-                <a16:creationId xmlns:a16="http://schemas.microsoft.com/office/drawing/2014/main" id="{9CD9AA4B-B103-4DF8-AC90-7CE04BE4396E}"/>
+                <a16:creationId xmlns:a16="http://schemas.microsoft.com/office/drawing/2014/main" id="{4930ADCA-52CF-4BFF-94B4-ACB5CC8669D3}"/>
               </a:ext>
             </a:extLst>
           </p:cNvPr>
@@ -7785,7 +7785,7 @@
           <p:cNvPr id="25" name="">
             <a:extLst xmlns:a="http://schemas.openxmlformats.org/drawingml/2006/main">
               <a:ext uri="{FF2B5EF4-FFF2-40B4-BE49-F238E27FC236}">
-                <a16:creationId xmlns:a16="http://schemas.microsoft.com/office/drawing/2014/main" id="{17575216-72A0-4785-89D4-DFC3EBBC55F9}"/>
+                <a16:creationId xmlns:a16="http://schemas.microsoft.com/office/drawing/2014/main" id="{34784E98-A2FC-4096-9C2A-F4C6237930F8}"/>
               </a:ext>
             </a:extLst>
           </p:cNvPr>
@@ -7835,7 +7835,7 @@
           <p:cNvPr id="26" name="">
             <a:extLst xmlns:a="http://schemas.openxmlformats.org/drawingml/2006/main">
               <a:ext uri="{FF2B5EF4-FFF2-40B4-BE49-F238E27FC236}">
-                <a16:creationId xmlns:a16="http://schemas.microsoft.com/office/drawing/2014/main" id="{16899CDC-EE83-4BEA-B95A-52D2B1AEE81E}"/>
+                <a16:creationId xmlns:a16="http://schemas.microsoft.com/office/drawing/2014/main" id="{826294A4-DA39-481B-9DE9-ADBE13A19C62}"/>
               </a:ext>
             </a:extLst>
           </p:cNvPr>
@@ -7885,7 +7885,7 @@
           <p:cNvPr id="27" name="">
             <a:extLst xmlns:a="http://schemas.openxmlformats.org/drawingml/2006/main">
               <a:ext uri="{FF2B5EF4-FFF2-40B4-BE49-F238E27FC236}">
-                <a16:creationId xmlns:a16="http://schemas.microsoft.com/office/drawing/2014/main" id="{179EE702-C9B7-4235-9CE9-6B5E8EB48F88}"/>
+                <a16:creationId xmlns:a16="http://schemas.microsoft.com/office/drawing/2014/main" id="{09971C39-B538-4A0A-84EB-A15DD0A6AECA}"/>
               </a:ext>
             </a:extLst>
           </p:cNvPr>
@@ -7935,7 +7935,7 @@
           <p:cNvPr id="28" name="">
             <a:extLst xmlns:a="http://schemas.openxmlformats.org/drawingml/2006/main">
               <a:ext uri="{FF2B5EF4-FFF2-40B4-BE49-F238E27FC236}">
-                <a16:creationId xmlns:a16="http://schemas.microsoft.com/office/drawing/2014/main" id="{183F0DEF-4FB2-4C2D-B810-97BDC8FE21B9}"/>
+                <a16:creationId xmlns:a16="http://schemas.microsoft.com/office/drawing/2014/main" id="{2B4946DF-3C1C-4997-8D73-45BD5AE486C8}"/>
               </a:ext>
             </a:extLst>
           </p:cNvPr>
@@ -7985,7 +7985,7 @@
           <p:cNvPr id="29" name="">
             <a:extLst xmlns:a="http://schemas.openxmlformats.org/drawingml/2006/main">
               <a:ext uri="{FF2B5EF4-FFF2-40B4-BE49-F238E27FC236}">
-                <a16:creationId xmlns:a16="http://schemas.microsoft.com/office/drawing/2014/main" id="{5542CE22-BAAA-49D5-91F6-8EC574C0241F}"/>
+                <a16:creationId xmlns:a16="http://schemas.microsoft.com/office/drawing/2014/main" id="{78CA1B0B-4309-4AAB-9247-BA2F9B671E6D}"/>
               </a:ext>
             </a:extLst>
           </p:cNvPr>
@@ -8033,7 +8033,7 @@
     </p:spTree>
     <p:extLst>
       <p:ext uri="{BB962C8B-B14F-4D97-AF65-F5344CB8AC3E}">
-        <p14:creationId xmlns:p14="http://schemas.microsoft.com/office/powerpoint/2010/main" val="1689275045"/>
+        <p14:creationId xmlns:p14="http://schemas.microsoft.com/office/powerpoint/2010/main" val="1578688875"/>
       </p:ext>
     </p:extLst>
   </p:cSld>
@@ -8064,7 +8064,7 @@
           <p:cNvPr id="28" name="">
             <a:extLst xmlns:a="http://schemas.openxmlformats.org/drawingml/2006/main">
               <a:ext uri="{FF2B5EF4-FFF2-40B4-BE49-F238E27FC236}">
-                <a16:creationId xmlns:a16="http://schemas.microsoft.com/office/drawing/2014/main" id="{65F11E4B-1CF5-4D0D-9517-EEB82E00625B}"/>
+                <a16:creationId xmlns:a16="http://schemas.microsoft.com/office/drawing/2014/main" id="{039DDD96-8673-4204-BBA1-37AA8B55D6E6}"/>
               </a:ext>
             </a:extLst>
           </p:cNvPr>
@@ -8114,7 +8114,7 @@
           <p:cNvPr id="2" name="">
             <a:extLst xmlns:a="http://schemas.openxmlformats.org/drawingml/2006/main">
               <a:ext uri="{FF2B5EF4-FFF2-40B4-BE49-F238E27FC236}">
-                <a16:creationId xmlns:a16="http://schemas.microsoft.com/office/drawing/2014/main" id="{4FCB4A17-189B-4FB7-BEF2-6C78337FFD4D}"/>
+                <a16:creationId xmlns:a16="http://schemas.microsoft.com/office/drawing/2014/main" id="{51134A0D-8DF3-4000-91A5-D86E13D6BFD2}"/>
               </a:ext>
             </a:extLst>
           </p:cNvPr>
@@ -8164,7 +8164,7 @@
           <p:cNvPr id="3" name="">
             <a:extLst xmlns:a="http://schemas.openxmlformats.org/drawingml/2006/main">
               <a:ext uri="{FF2B5EF4-FFF2-40B4-BE49-F238E27FC236}">
-                <a16:creationId xmlns:a16="http://schemas.microsoft.com/office/drawing/2014/main" id="{77D1F961-B025-4936-B491-2B703F46862B}"/>
+                <a16:creationId xmlns:a16="http://schemas.microsoft.com/office/drawing/2014/main" id="{A61A9503-7A09-487B-B58E-7D45F8215C5C}"/>
               </a:ext>
             </a:extLst>
           </p:cNvPr>
@@ -8195,7 +8195,7 @@
           <p:cNvPr id="4" name="">
             <a:extLst xmlns:a="http://schemas.openxmlformats.org/drawingml/2006/main">
               <a:ext uri="{FF2B5EF4-FFF2-40B4-BE49-F238E27FC236}">
-                <a16:creationId xmlns:a16="http://schemas.microsoft.com/office/drawing/2014/main" id="{CA7D2E18-5EBF-48C7-8044-6AE400CE80CD}"/>
+                <a16:creationId xmlns:a16="http://schemas.microsoft.com/office/drawing/2014/main" id="{9300F520-1260-4387-81BC-F618E66E9A2D}"/>
               </a:ext>
             </a:extLst>
           </p:cNvPr>
@@ -8245,7 +8245,7 @@
           <p:cNvPr id="5" name="">
             <a:extLst xmlns:a="http://schemas.openxmlformats.org/drawingml/2006/main">
               <a:ext uri="{FF2B5EF4-FFF2-40B4-BE49-F238E27FC236}">
-                <a16:creationId xmlns:a16="http://schemas.microsoft.com/office/drawing/2014/main" id="{3851B690-27FE-43AA-BEF7-CFE828412A55}"/>
+                <a16:creationId xmlns:a16="http://schemas.microsoft.com/office/drawing/2014/main" id="{7E2DD34D-AAAB-483C-AA8A-5B44EDE76C38}"/>
               </a:ext>
             </a:extLst>
           </p:cNvPr>
@@ -8295,7 +8295,7 @@
           <p:cNvPr id="6" name="">
             <a:extLst xmlns:a="http://schemas.openxmlformats.org/drawingml/2006/main">
               <a:ext uri="{FF2B5EF4-FFF2-40B4-BE49-F238E27FC236}">
-                <a16:creationId xmlns:a16="http://schemas.microsoft.com/office/drawing/2014/main" id="{B88F0D1F-AD0D-4DD6-8C67-3CECA8256AC4}"/>
+                <a16:creationId xmlns:a16="http://schemas.microsoft.com/office/drawing/2014/main" id="{BE2C2C0D-379F-41B7-B94F-D03E69B2969F}"/>
               </a:ext>
             </a:extLst>
           </p:cNvPr>
@@ -8330,7 +8330,7 @@
           <p:cNvPr id="7" name="">
             <a:extLst xmlns:a="http://schemas.openxmlformats.org/drawingml/2006/main">
               <a:ext uri="{FF2B5EF4-FFF2-40B4-BE49-F238E27FC236}">
-                <a16:creationId xmlns:a16="http://schemas.microsoft.com/office/drawing/2014/main" id="{3A8CCC44-57D7-4D63-BF4B-A1B64561FD63}"/>
+                <a16:creationId xmlns:a16="http://schemas.microsoft.com/office/drawing/2014/main" id="{E0FACF08-4437-4E07-9C35-5C8DF2A36A60}"/>
               </a:ext>
             </a:extLst>
           </p:cNvPr>
@@ -8365,7 +8365,7 @@
           <p:cNvPr id="8" name="">
             <a:extLst xmlns:a="http://schemas.openxmlformats.org/drawingml/2006/main">
               <a:ext uri="{FF2B5EF4-FFF2-40B4-BE49-F238E27FC236}">
-                <a16:creationId xmlns:a16="http://schemas.microsoft.com/office/drawing/2014/main" id="{14EA6C3B-8081-4DB3-8D5A-8AB99DC191D2}"/>
+                <a16:creationId xmlns:a16="http://schemas.microsoft.com/office/drawing/2014/main" id="{85EB6C34-8C33-4381-A0FA-E3365E1EA19A}"/>
               </a:ext>
             </a:extLst>
           </p:cNvPr>
@@ -8415,7 +8415,7 @@
           <p:cNvPr id="9" name="">
             <a:extLst xmlns:a="http://schemas.openxmlformats.org/drawingml/2006/main">
               <a:ext uri="{FF2B5EF4-FFF2-40B4-BE49-F238E27FC236}">
-                <a16:creationId xmlns:a16="http://schemas.microsoft.com/office/drawing/2014/main" id="{1871020C-33B8-4DFD-BAA7-D29C1E60BA3F}"/>
+                <a16:creationId xmlns:a16="http://schemas.microsoft.com/office/drawing/2014/main" id="{768A4F9E-7B38-4EE9-AA22-8D33143C58EA}"/>
               </a:ext>
             </a:extLst>
           </p:cNvPr>
@@ -8450,7 +8450,7 @@
           <p:cNvPr id="10" name="">
             <a:extLst xmlns:a="http://schemas.openxmlformats.org/drawingml/2006/main">
               <a:ext uri="{FF2B5EF4-FFF2-40B4-BE49-F238E27FC236}">
-                <a16:creationId xmlns:a16="http://schemas.microsoft.com/office/drawing/2014/main" id="{368DBF84-E606-4C91-901E-4FED79C29DB0}"/>
+                <a16:creationId xmlns:a16="http://schemas.microsoft.com/office/drawing/2014/main" id="{D2574053-8366-4710-BDC4-4EB5CB420033}"/>
               </a:ext>
             </a:extLst>
           </p:cNvPr>
@@ -8500,7 +8500,7 @@
           <p:cNvPr id="11" name="">
             <a:extLst xmlns:a="http://schemas.openxmlformats.org/drawingml/2006/main">
               <a:ext uri="{FF2B5EF4-FFF2-40B4-BE49-F238E27FC236}">
-                <a16:creationId xmlns:a16="http://schemas.microsoft.com/office/drawing/2014/main" id="{BD823B6F-5DE1-4267-8CC4-587D5246BCD4}"/>
+                <a16:creationId xmlns:a16="http://schemas.microsoft.com/office/drawing/2014/main" id="{52452956-BAEB-434C-A38A-70E99B1316A4}"/>
               </a:ext>
             </a:extLst>
           </p:cNvPr>
@@ -8535,7 +8535,7 @@
           <p:cNvPr id="12" name="">
             <a:extLst xmlns:a="http://schemas.openxmlformats.org/drawingml/2006/main">
               <a:ext uri="{FF2B5EF4-FFF2-40B4-BE49-F238E27FC236}">
-                <a16:creationId xmlns:a16="http://schemas.microsoft.com/office/drawing/2014/main" id="{1A6CFFF5-8661-4062-BF5F-D0D49A4B2887}"/>
+                <a16:creationId xmlns:a16="http://schemas.microsoft.com/office/drawing/2014/main" id="{77B5B3BA-1CE8-4BEB-AA02-C34D0A0CB3BB}"/>
               </a:ext>
             </a:extLst>
           </p:cNvPr>
@@ -8585,7 +8585,7 @@
           <p:cNvPr id="13" name="">
             <a:extLst xmlns:a="http://schemas.openxmlformats.org/drawingml/2006/main">
               <a:ext uri="{FF2B5EF4-FFF2-40B4-BE49-F238E27FC236}">
-                <a16:creationId xmlns:a16="http://schemas.microsoft.com/office/drawing/2014/main" id="{A4C95059-DE7B-457B-9D85-06228F1C0CB8}"/>
+                <a16:creationId xmlns:a16="http://schemas.microsoft.com/office/drawing/2014/main" id="{F35263D4-0661-44DE-B298-87312094259C}"/>
               </a:ext>
             </a:extLst>
           </p:cNvPr>
@@ -8620,7 +8620,7 @@
           <p:cNvPr id="14" name="">
             <a:extLst xmlns:a="http://schemas.openxmlformats.org/drawingml/2006/main">
               <a:ext uri="{FF2B5EF4-FFF2-40B4-BE49-F238E27FC236}">
-                <a16:creationId xmlns:a16="http://schemas.microsoft.com/office/drawing/2014/main" id="{586709EA-46E6-4A6D-9C40-82FC49E1A0C1}"/>
+                <a16:creationId xmlns:a16="http://schemas.microsoft.com/office/drawing/2014/main" id="{B407BB3B-E59D-418A-98BF-4E87046AD6A2}"/>
               </a:ext>
             </a:extLst>
           </p:cNvPr>
@@ -8670,7 +8670,7 @@
           <p:cNvPr id="15" name="">
             <a:extLst xmlns:a="http://schemas.openxmlformats.org/drawingml/2006/main">
               <a:ext uri="{FF2B5EF4-FFF2-40B4-BE49-F238E27FC236}">
-                <a16:creationId xmlns:a16="http://schemas.microsoft.com/office/drawing/2014/main" id="{D45E5B02-1B0B-479D-B660-F693E0E348A7}"/>
+                <a16:creationId xmlns:a16="http://schemas.microsoft.com/office/drawing/2014/main" id="{F01DDA9F-2B36-4899-B713-0C0AB480CB22}"/>
               </a:ext>
             </a:extLst>
           </p:cNvPr>
@@ -8705,7 +8705,7 @@
           <p:cNvPr id="16" name="">
             <a:extLst xmlns:a="http://schemas.openxmlformats.org/drawingml/2006/main">
               <a:ext uri="{FF2B5EF4-FFF2-40B4-BE49-F238E27FC236}">
-                <a16:creationId xmlns:a16="http://schemas.microsoft.com/office/drawing/2014/main" id="{7C922AD7-C738-453C-B658-BECBB879146D}"/>
+                <a16:creationId xmlns:a16="http://schemas.microsoft.com/office/drawing/2014/main" id="{1775EA16-D934-4BC2-B640-7E308B6C4BF1}"/>
               </a:ext>
             </a:extLst>
           </p:cNvPr>
@@ -8755,7 +8755,7 @@
           <p:cNvPr id="17" name="">
             <a:extLst xmlns:a="http://schemas.openxmlformats.org/drawingml/2006/main">
               <a:ext uri="{FF2B5EF4-FFF2-40B4-BE49-F238E27FC236}">
-                <a16:creationId xmlns:a16="http://schemas.microsoft.com/office/drawing/2014/main" id="{3278C742-778E-4861-B7BD-EC8AE057FD2B}"/>
+                <a16:creationId xmlns:a16="http://schemas.microsoft.com/office/drawing/2014/main" id="{AB16A048-44E1-4C96-BC66-5425B4FF8B30}"/>
               </a:ext>
             </a:extLst>
           </p:cNvPr>
@@ -8790,7 +8790,7 @@
           <p:cNvPr id="18" name="">
             <a:extLst xmlns:a="http://schemas.openxmlformats.org/drawingml/2006/main">
               <a:ext uri="{FF2B5EF4-FFF2-40B4-BE49-F238E27FC236}">
-                <a16:creationId xmlns:a16="http://schemas.microsoft.com/office/drawing/2014/main" id="{B1FB6E31-64D3-4E77-8D83-A7AD302739CB}"/>
+                <a16:creationId xmlns:a16="http://schemas.microsoft.com/office/drawing/2014/main" id="{E5A8FDFC-A0E1-45F3-B08C-19044A5C6BAC}"/>
               </a:ext>
             </a:extLst>
           </p:cNvPr>
@@ -8840,7 +8840,7 @@
           <p:cNvPr id="19" name="">
             <a:extLst xmlns:a="http://schemas.openxmlformats.org/drawingml/2006/main">
               <a:ext uri="{FF2B5EF4-FFF2-40B4-BE49-F238E27FC236}">
-                <a16:creationId xmlns:a16="http://schemas.microsoft.com/office/drawing/2014/main" id="{18E60167-613F-4EDC-9F54-86066F1FB0AA}"/>
+                <a16:creationId xmlns:a16="http://schemas.microsoft.com/office/drawing/2014/main" id="{CA3B04CC-CD10-40B9-A412-C4540810DECD}"/>
               </a:ext>
             </a:extLst>
           </p:cNvPr>
@@ -8871,7 +8871,7 @@
           <p:cNvPr id="20" name="">
             <a:extLst xmlns:a="http://schemas.openxmlformats.org/drawingml/2006/main">
               <a:ext uri="{FF2B5EF4-FFF2-40B4-BE49-F238E27FC236}">
-                <a16:creationId xmlns:a16="http://schemas.microsoft.com/office/drawing/2014/main" id="{6194DD33-F59A-4FF9-AEED-CD74C6C0A86C}"/>
+                <a16:creationId xmlns:a16="http://schemas.microsoft.com/office/drawing/2014/main" id="{3746D9BC-C544-4111-9C5C-7DCC68497B06}"/>
               </a:ext>
             </a:extLst>
           </p:cNvPr>
@@ -8902,7 +8902,7 @@
           <p:cNvPr id="21" name="">
             <a:extLst xmlns:a="http://schemas.openxmlformats.org/drawingml/2006/main">
               <a:ext uri="{FF2B5EF4-FFF2-40B4-BE49-F238E27FC236}">
-                <a16:creationId xmlns:a16="http://schemas.microsoft.com/office/drawing/2014/main" id="{612E89E2-289A-4834-90D4-454F12BD5F4F}"/>
+                <a16:creationId xmlns:a16="http://schemas.microsoft.com/office/drawing/2014/main" id="{2BC80DD6-24DD-4D5E-B731-B025E94A2AA3}"/>
               </a:ext>
             </a:extLst>
           </p:cNvPr>
@@ -8933,7 +8933,7 @@
           <p:cNvPr id="22" name="">
             <a:extLst xmlns:a="http://schemas.openxmlformats.org/drawingml/2006/main">
               <a:ext uri="{FF2B5EF4-FFF2-40B4-BE49-F238E27FC236}">
-                <a16:creationId xmlns:a16="http://schemas.microsoft.com/office/drawing/2014/main" id="{E8F7F8D6-72DF-4D19-A643-0F2841E2A96C}"/>
+                <a16:creationId xmlns:a16="http://schemas.microsoft.com/office/drawing/2014/main" id="{95EA8FB5-0994-44AA-9A18-8D5411283599}"/>
               </a:ext>
             </a:extLst>
           </p:cNvPr>
@@ -8964,7 +8964,7 @@
           <p:cNvPr id="23" name="">
             <a:extLst xmlns:a="http://schemas.openxmlformats.org/drawingml/2006/main">
               <a:ext uri="{FF2B5EF4-FFF2-40B4-BE49-F238E27FC236}">
-                <a16:creationId xmlns:a16="http://schemas.microsoft.com/office/drawing/2014/main" id="{83A5F2D6-33D9-4241-83A1-E4F010017EE5}"/>
+                <a16:creationId xmlns:a16="http://schemas.microsoft.com/office/drawing/2014/main" id="{C5C85300-5C48-4820-82BB-B6C361C1C22D}"/>
               </a:ext>
             </a:extLst>
           </p:cNvPr>
@@ -8995,7 +8995,7 @@
           <p:cNvPr id="24" name="">
             <a:extLst xmlns:a="http://schemas.openxmlformats.org/drawingml/2006/main">
               <a:ext uri="{FF2B5EF4-FFF2-40B4-BE49-F238E27FC236}">
-                <a16:creationId xmlns:a16="http://schemas.microsoft.com/office/drawing/2014/main" id="{130EB463-2BC6-4819-B981-87D55B6C521D}"/>
+                <a16:creationId xmlns:a16="http://schemas.microsoft.com/office/drawing/2014/main" id="{4A2984B6-98FE-4F79-87D1-A18465B9C0EC}"/>
               </a:ext>
             </a:extLst>
           </p:cNvPr>
@@ -9026,7 +9026,7 @@
           <p:cNvPr id="25" name="">
             <a:extLst xmlns:a="http://schemas.openxmlformats.org/drawingml/2006/main">
               <a:ext uri="{FF2B5EF4-FFF2-40B4-BE49-F238E27FC236}">
-                <a16:creationId xmlns:a16="http://schemas.microsoft.com/office/drawing/2014/main" id="{2062073B-B204-45B2-A92D-26260A0AEA9C}"/>
+                <a16:creationId xmlns:a16="http://schemas.microsoft.com/office/drawing/2014/main" id="{3C20FCF0-0767-4B4B-AC1E-C0E9292B3A70}"/>
               </a:ext>
             </a:extLst>
           </p:cNvPr>
@@ -9076,7 +9076,7 @@
           <p:cNvPr id="26" name="">
             <a:extLst xmlns:a="http://schemas.openxmlformats.org/drawingml/2006/main">
               <a:ext uri="{FF2B5EF4-FFF2-40B4-BE49-F238E27FC236}">
-                <a16:creationId xmlns:a16="http://schemas.microsoft.com/office/drawing/2014/main" id="{B4B0CA49-B79F-4930-90AB-8D9C77796E14}"/>
+                <a16:creationId xmlns:a16="http://schemas.microsoft.com/office/drawing/2014/main" id="{E46F7FC2-EAB7-4E65-9581-F6FEDF872C48}"/>
               </a:ext>
             </a:extLst>
           </p:cNvPr>
@@ -9126,7 +9126,7 @@
           <p:cNvPr id="27" name="">
             <a:extLst xmlns:a="http://schemas.openxmlformats.org/drawingml/2006/main">
               <a:ext uri="{FF2B5EF4-FFF2-40B4-BE49-F238E27FC236}">
-                <a16:creationId xmlns:a16="http://schemas.microsoft.com/office/drawing/2014/main" id="{7B34CDCA-8453-4351-A479-AD0D50FD7303}"/>
+                <a16:creationId xmlns:a16="http://schemas.microsoft.com/office/drawing/2014/main" id="{86B3FF1B-A3B7-48D7-9E61-E4CCD5FB0922}"/>
               </a:ext>
             </a:extLst>
           </p:cNvPr>
@@ -9174,7 +9174,7 @@
     </p:spTree>
     <p:extLst>
       <p:ext uri="{BB962C8B-B14F-4D97-AF65-F5344CB8AC3E}">
-        <p14:creationId xmlns:p14="http://schemas.microsoft.com/office/powerpoint/2010/main" val="144136767"/>
+        <p14:creationId xmlns:p14="http://schemas.microsoft.com/office/powerpoint/2010/main" val="1006118061"/>
       </p:ext>
     </p:extLst>
   </p:cSld>
@@ -9205,7 +9205,7 @@
           <p:cNvPr id="25" name="">
             <a:extLst xmlns:a="http://schemas.openxmlformats.org/drawingml/2006/main">
               <a:ext uri="{FF2B5EF4-FFF2-40B4-BE49-F238E27FC236}">
-                <a16:creationId xmlns:a16="http://schemas.microsoft.com/office/drawing/2014/main" id="{0ACAC595-0217-4E01-ADA7-0E47361E46B7}"/>
+                <a16:creationId xmlns:a16="http://schemas.microsoft.com/office/drawing/2014/main" id="{2C34F126-57EA-4508-990B-6E6E8DB005F6}"/>
               </a:ext>
             </a:extLst>
           </p:cNvPr>
@@ -9255,7 +9255,7 @@
           <p:cNvPr id="2" name="">
             <a:extLst xmlns:a="http://schemas.openxmlformats.org/drawingml/2006/main">
               <a:ext uri="{FF2B5EF4-FFF2-40B4-BE49-F238E27FC236}">
-                <a16:creationId xmlns:a16="http://schemas.microsoft.com/office/drawing/2014/main" id="{CF8217F7-2950-41E9-821A-EF1D0DD08F59}"/>
+                <a16:creationId xmlns:a16="http://schemas.microsoft.com/office/drawing/2014/main" id="{3D5DB2FA-0DF2-41ED-AD49-A2D8F85C5F2C}"/>
               </a:ext>
             </a:extLst>
           </p:cNvPr>
@@ -9305,7 +9305,7 @@
           <p:cNvPr id="3" name="">
             <a:extLst xmlns:a="http://schemas.openxmlformats.org/drawingml/2006/main">
               <a:ext uri="{FF2B5EF4-FFF2-40B4-BE49-F238E27FC236}">
-                <a16:creationId xmlns:a16="http://schemas.microsoft.com/office/drawing/2014/main" id="{CEDEB749-2703-451C-BDC1-118095560E1A}"/>
+                <a16:creationId xmlns:a16="http://schemas.microsoft.com/office/drawing/2014/main" id="{F77EDA04-46D3-4E55-BC98-A16096DBA6B0}"/>
               </a:ext>
             </a:extLst>
           </p:cNvPr>
@@ -9336,7 +9336,7 @@
           <p:cNvPr id="4" name="">
             <a:extLst xmlns:a="http://schemas.openxmlformats.org/drawingml/2006/main">
               <a:ext uri="{FF2B5EF4-FFF2-40B4-BE49-F238E27FC236}">
-                <a16:creationId xmlns:a16="http://schemas.microsoft.com/office/drawing/2014/main" id="{BD1639F4-B368-4A15-9190-6C77C17FF63F}"/>
+                <a16:creationId xmlns:a16="http://schemas.microsoft.com/office/drawing/2014/main" id="{66488327-ECBB-4E01-9ACC-46E25DE7CA48}"/>
               </a:ext>
             </a:extLst>
           </p:cNvPr>
@@ -9386,7 +9386,7 @@
           <p:cNvPr id="5" name="">
             <a:extLst xmlns:a="http://schemas.openxmlformats.org/drawingml/2006/main">
               <a:ext uri="{FF2B5EF4-FFF2-40B4-BE49-F238E27FC236}">
-                <a16:creationId xmlns:a16="http://schemas.microsoft.com/office/drawing/2014/main" id="{F62223BD-514E-49A1-9BB4-8A7500C377AD}"/>
+                <a16:creationId xmlns:a16="http://schemas.microsoft.com/office/drawing/2014/main" id="{A81514FE-081A-4017-A3D3-6B3347744220}"/>
               </a:ext>
             </a:extLst>
           </p:cNvPr>
@@ -9421,7 +9421,7 @@
           <p:cNvPr id="6" name="">
             <a:extLst xmlns:a="http://schemas.openxmlformats.org/drawingml/2006/main">
               <a:ext uri="{FF2B5EF4-FFF2-40B4-BE49-F238E27FC236}">
-                <a16:creationId xmlns:a16="http://schemas.microsoft.com/office/drawing/2014/main" id="{8B021A30-FD01-47B4-9C62-365496D2519B}"/>
+                <a16:creationId xmlns:a16="http://schemas.microsoft.com/office/drawing/2014/main" id="{804CAD4E-071A-4E21-B5BB-A54A48FA0E96}"/>
               </a:ext>
             </a:extLst>
           </p:cNvPr>
@@ -9471,7 +9471,7 @@
           <p:cNvPr id="7" name="">
             <a:extLst xmlns:a="http://schemas.openxmlformats.org/drawingml/2006/main">
               <a:ext uri="{FF2B5EF4-FFF2-40B4-BE49-F238E27FC236}">
-                <a16:creationId xmlns:a16="http://schemas.microsoft.com/office/drawing/2014/main" id="{AFAA5DE7-39E3-4965-BEFD-685C1D91E9FC}"/>
+                <a16:creationId xmlns:a16="http://schemas.microsoft.com/office/drawing/2014/main" id="{A0943CFF-E96C-4719-AEBE-56D7C9678062}"/>
               </a:ext>
             </a:extLst>
           </p:cNvPr>
@@ -9521,7 +9521,7 @@
           <p:cNvPr id="8" name="">
             <a:extLst xmlns:a="http://schemas.openxmlformats.org/drawingml/2006/main">
               <a:ext uri="{FF2B5EF4-FFF2-40B4-BE49-F238E27FC236}">
-                <a16:creationId xmlns:a16="http://schemas.microsoft.com/office/drawing/2014/main" id="{59D79967-562B-4FB3-A126-DE4D2AA7E027}"/>
+                <a16:creationId xmlns:a16="http://schemas.microsoft.com/office/drawing/2014/main" id="{B505F501-36D3-496F-89E9-36C135FB2B37}"/>
               </a:ext>
             </a:extLst>
           </p:cNvPr>
@@ -9552,7 +9552,7 @@
           <p:cNvPr id="9" name="">
             <a:extLst xmlns:a="http://schemas.openxmlformats.org/drawingml/2006/main">
               <a:ext uri="{FF2B5EF4-FFF2-40B4-BE49-F238E27FC236}">
-                <a16:creationId xmlns:a16="http://schemas.microsoft.com/office/drawing/2014/main" id="{826BCBE4-DCFF-48B6-84F5-6B94B37C1406}"/>
+                <a16:creationId xmlns:a16="http://schemas.microsoft.com/office/drawing/2014/main" id="{6E31721A-81A6-4675-AA31-62FBF203D3F8}"/>
               </a:ext>
             </a:extLst>
           </p:cNvPr>
@@ -9602,7 +9602,7 @@
           <p:cNvPr id="10" name="">
             <a:extLst xmlns:a="http://schemas.openxmlformats.org/drawingml/2006/main">
               <a:ext uri="{FF2B5EF4-FFF2-40B4-BE49-F238E27FC236}">
-                <a16:creationId xmlns:a16="http://schemas.microsoft.com/office/drawing/2014/main" id="{C4A6791C-0FC4-40F4-8F83-AEFFD60D47EA}"/>
+                <a16:creationId xmlns:a16="http://schemas.microsoft.com/office/drawing/2014/main" id="{58DA3571-6E6B-4955-9FA1-79840D88FFB0}"/>
               </a:ext>
             </a:extLst>
           </p:cNvPr>
@@ -9652,7 +9652,7 @@
           <p:cNvPr id="11" name="">
             <a:extLst xmlns:a="http://schemas.openxmlformats.org/drawingml/2006/main">
               <a:ext uri="{FF2B5EF4-FFF2-40B4-BE49-F238E27FC236}">
-                <a16:creationId xmlns:a16="http://schemas.microsoft.com/office/drawing/2014/main" id="{571DC11C-4FF1-4F4B-A20F-7832600F6910}"/>
+                <a16:creationId xmlns:a16="http://schemas.microsoft.com/office/drawing/2014/main" id="{70773785-30B4-4F1B-A361-ACB33D52810C}"/>
               </a:ext>
             </a:extLst>
           </p:cNvPr>
@@ -9702,7 +9702,7 @@
           <p:cNvPr id="12" name="">
             <a:extLst xmlns:a="http://schemas.openxmlformats.org/drawingml/2006/main">
               <a:ext uri="{FF2B5EF4-FFF2-40B4-BE49-F238E27FC236}">
-                <a16:creationId xmlns:a16="http://schemas.microsoft.com/office/drawing/2014/main" id="{F429B58A-D807-4F6F-91C6-FE209C59E6FB}"/>
+                <a16:creationId xmlns:a16="http://schemas.microsoft.com/office/drawing/2014/main" id="{430E0354-C1A4-41BB-8EDB-2A4139ED157D}"/>
               </a:ext>
             </a:extLst>
           </p:cNvPr>
@@ -9733,7 +9733,7 @@
           <p:cNvPr id="13" name="">
             <a:extLst xmlns:a="http://schemas.openxmlformats.org/drawingml/2006/main">
               <a:ext uri="{FF2B5EF4-FFF2-40B4-BE49-F238E27FC236}">
-                <a16:creationId xmlns:a16="http://schemas.microsoft.com/office/drawing/2014/main" id="{64BE3A43-59A8-4164-8448-93212205B2EE}"/>
+                <a16:creationId xmlns:a16="http://schemas.microsoft.com/office/drawing/2014/main" id="{7BC3ECD9-FCF8-4B97-809F-F965B8550B1A}"/>
               </a:ext>
             </a:extLst>
           </p:cNvPr>
@@ -9783,7 +9783,7 @@
           <p:cNvPr id="14" name="">
             <a:extLst xmlns:a="http://schemas.openxmlformats.org/drawingml/2006/main">
               <a:ext uri="{FF2B5EF4-FFF2-40B4-BE49-F238E27FC236}">
-                <a16:creationId xmlns:a16="http://schemas.microsoft.com/office/drawing/2014/main" id="{9E59B65D-C63E-4DC3-991C-8B42A2E07AD5}"/>
+                <a16:creationId xmlns:a16="http://schemas.microsoft.com/office/drawing/2014/main" id="{0882F35B-D9F9-4D3D-9622-E9C701ADC1C9}"/>
               </a:ext>
             </a:extLst>
           </p:cNvPr>
@@ -9833,7 +9833,7 @@
           <p:cNvPr id="15" name="">
             <a:extLst xmlns:a="http://schemas.openxmlformats.org/drawingml/2006/main">
               <a:ext uri="{FF2B5EF4-FFF2-40B4-BE49-F238E27FC236}">
-                <a16:creationId xmlns:a16="http://schemas.microsoft.com/office/drawing/2014/main" id="{16DA2F1C-F9CA-4CAB-BEFD-BE540A204B3B}"/>
+                <a16:creationId xmlns:a16="http://schemas.microsoft.com/office/drawing/2014/main" id="{2A1EB3B0-072B-4A95-BA13-354304A64724}"/>
               </a:ext>
             </a:extLst>
           </p:cNvPr>
@@ -9864,7 +9864,7 @@
           <p:cNvPr id="16" name="">
             <a:extLst xmlns:a="http://schemas.openxmlformats.org/drawingml/2006/main">
               <a:ext uri="{FF2B5EF4-FFF2-40B4-BE49-F238E27FC236}">
-                <a16:creationId xmlns:a16="http://schemas.microsoft.com/office/drawing/2014/main" id="{C7FAC53A-5D58-4F06-AD6D-90525F6D6229}"/>
+                <a16:creationId xmlns:a16="http://schemas.microsoft.com/office/drawing/2014/main" id="{75FB8A3A-E31E-4B9D-8674-D8254469CE29}"/>
               </a:ext>
             </a:extLst>
           </p:cNvPr>
@@ -9914,7 +9914,7 @@
           <p:cNvPr id="17" name="">
             <a:extLst xmlns:a="http://schemas.openxmlformats.org/drawingml/2006/main">
               <a:ext uri="{FF2B5EF4-FFF2-40B4-BE49-F238E27FC236}">
-                <a16:creationId xmlns:a16="http://schemas.microsoft.com/office/drawing/2014/main" id="{F2BA8636-550A-4143-9524-52BA4E0E2E4B}"/>
+                <a16:creationId xmlns:a16="http://schemas.microsoft.com/office/drawing/2014/main" id="{6D7C7294-923F-4F83-B4B0-331DA5F6C78B}"/>
               </a:ext>
             </a:extLst>
           </p:cNvPr>
@@ -9964,7 +9964,7 @@
           <p:cNvPr id="18" name="">
             <a:extLst xmlns:a="http://schemas.openxmlformats.org/drawingml/2006/main">
               <a:ext uri="{FF2B5EF4-FFF2-40B4-BE49-F238E27FC236}">
-                <a16:creationId xmlns:a16="http://schemas.microsoft.com/office/drawing/2014/main" id="{A0EE85CB-3098-4E09-A2C8-9AA866597193}"/>
+                <a16:creationId xmlns:a16="http://schemas.microsoft.com/office/drawing/2014/main" id="{F5B2244D-DEAA-4098-A70A-F79B45B97914}"/>
               </a:ext>
             </a:extLst>
           </p:cNvPr>
@@ -9995,7 +9995,7 @@
           <p:cNvPr id="19" name="">
             <a:extLst xmlns:a="http://schemas.openxmlformats.org/drawingml/2006/main">
               <a:ext uri="{FF2B5EF4-FFF2-40B4-BE49-F238E27FC236}">
-                <a16:creationId xmlns:a16="http://schemas.microsoft.com/office/drawing/2014/main" id="{C12F4204-4368-499C-93BA-82F25609746B}"/>
+                <a16:creationId xmlns:a16="http://schemas.microsoft.com/office/drawing/2014/main" id="{A03D19F2-EB26-457E-90FF-E6845989F01D}"/>
               </a:ext>
             </a:extLst>
           </p:cNvPr>
@@ -10045,7 +10045,7 @@
           <p:cNvPr id="20" name="">
             <a:extLst xmlns:a="http://schemas.openxmlformats.org/drawingml/2006/main">
               <a:ext uri="{FF2B5EF4-FFF2-40B4-BE49-F238E27FC236}">
-                <a16:creationId xmlns:a16="http://schemas.microsoft.com/office/drawing/2014/main" id="{C43664EA-2BF2-4629-8C6F-A5FCF8A392AE}"/>
+                <a16:creationId xmlns:a16="http://schemas.microsoft.com/office/drawing/2014/main" id="{9E646B96-06B4-46A2-B202-A95EEFAA6BC6}"/>
               </a:ext>
             </a:extLst>
           </p:cNvPr>
@@ -10095,7 +10095,7 @@
           <p:cNvPr id="21" name="">
             <a:extLst xmlns:a="http://schemas.openxmlformats.org/drawingml/2006/main">
               <a:ext uri="{FF2B5EF4-FFF2-40B4-BE49-F238E27FC236}">
-                <a16:creationId xmlns:a16="http://schemas.microsoft.com/office/drawing/2014/main" id="{11A0AB00-BD38-4443-AF42-0E866641AAB9}"/>
+                <a16:creationId xmlns:a16="http://schemas.microsoft.com/office/drawing/2014/main" id="{759172E6-0552-43BA-9288-FB7B060740C2}"/>
               </a:ext>
             </a:extLst>
           </p:cNvPr>
@@ -10126,7 +10126,7 @@
           <p:cNvPr id="22" name="">
             <a:extLst xmlns:a="http://schemas.openxmlformats.org/drawingml/2006/main">
               <a:ext uri="{FF2B5EF4-FFF2-40B4-BE49-F238E27FC236}">
-                <a16:creationId xmlns:a16="http://schemas.microsoft.com/office/drawing/2014/main" id="{1A69227A-357D-4799-8E4F-9BA44D63A544}"/>
+                <a16:creationId xmlns:a16="http://schemas.microsoft.com/office/drawing/2014/main" id="{A65307EE-4F5B-4D55-9A9C-D678B6F7D24B}"/>
               </a:ext>
             </a:extLst>
           </p:cNvPr>
@@ -10176,7 +10176,7 @@
           <p:cNvPr id="23" name="">
             <a:extLst xmlns:a="http://schemas.openxmlformats.org/drawingml/2006/main">
               <a:ext uri="{FF2B5EF4-FFF2-40B4-BE49-F238E27FC236}">
-                <a16:creationId xmlns:a16="http://schemas.microsoft.com/office/drawing/2014/main" id="{234235C8-B95E-4A9C-BADF-1BA7D04C3B92}"/>
+                <a16:creationId xmlns:a16="http://schemas.microsoft.com/office/drawing/2014/main" id="{DFA68624-3374-493B-9971-9104F6405B7F}"/>
               </a:ext>
             </a:extLst>
           </p:cNvPr>
@@ -10226,7 +10226,7 @@
           <p:cNvPr id="24" name="">
             <a:extLst xmlns:a="http://schemas.openxmlformats.org/drawingml/2006/main">
               <a:ext uri="{FF2B5EF4-FFF2-40B4-BE49-F238E27FC236}">
-                <a16:creationId xmlns:a16="http://schemas.microsoft.com/office/drawing/2014/main" id="{D5AB5831-1FDB-4799-B631-A858E54A517E}"/>
+                <a16:creationId xmlns:a16="http://schemas.microsoft.com/office/drawing/2014/main" id="{F0C71DBC-B185-4B94-8A1F-744F09BD2268}"/>
               </a:ext>
             </a:extLst>
           </p:cNvPr>
@@ -10274,7 +10274,7 @@
     </p:spTree>
     <p:extLst>
       <p:ext uri="{BB962C8B-B14F-4D97-AF65-F5344CB8AC3E}">
-        <p14:creationId xmlns:p14="http://schemas.microsoft.com/office/powerpoint/2010/main" val="106424020"/>
+        <p14:creationId xmlns:p14="http://schemas.microsoft.com/office/powerpoint/2010/main" val="2126182453"/>
       </p:ext>
     </p:extLst>
   </p:cSld>
@@ -10305,7 +10305,7 @@
           <p:cNvPr id="31" name="">
             <a:extLst xmlns:a="http://schemas.openxmlformats.org/drawingml/2006/main">
               <a:ext uri="{FF2B5EF4-FFF2-40B4-BE49-F238E27FC236}">
-                <a16:creationId xmlns:a16="http://schemas.microsoft.com/office/drawing/2014/main" id="{536E6780-F68B-4F4D-ACD8-E790B978EF2B}"/>
+                <a16:creationId xmlns:a16="http://schemas.microsoft.com/office/drawing/2014/main" id="{F885C50A-31D7-4791-904C-B9F369DCDD8E}"/>
               </a:ext>
             </a:extLst>
           </p:cNvPr>
@@ -10355,7 +10355,7 @@
           <p:cNvPr id="2" name="">
             <a:extLst xmlns:a="http://schemas.openxmlformats.org/drawingml/2006/main">
               <a:ext uri="{FF2B5EF4-FFF2-40B4-BE49-F238E27FC236}">
-                <a16:creationId xmlns:a16="http://schemas.microsoft.com/office/drawing/2014/main" id="{7C337083-BF2E-4BDB-94E6-52BA18388F9C}"/>
+                <a16:creationId xmlns:a16="http://schemas.microsoft.com/office/drawing/2014/main" id="{49A7A76B-C686-4FB5-8DCC-BC69685683EA}"/>
               </a:ext>
             </a:extLst>
           </p:cNvPr>
@@ -10405,7 +10405,7 @@
           <p:cNvPr id="3" name="">
             <a:extLst xmlns:a="http://schemas.openxmlformats.org/drawingml/2006/main">
               <a:ext uri="{FF2B5EF4-FFF2-40B4-BE49-F238E27FC236}">
-                <a16:creationId xmlns:a16="http://schemas.microsoft.com/office/drawing/2014/main" id="{155CCF53-E20A-43C6-ADCC-60AB88B4A481}"/>
+                <a16:creationId xmlns:a16="http://schemas.microsoft.com/office/drawing/2014/main" id="{03692E16-E500-42A0-BE9E-107EC3DEB4FE}"/>
               </a:ext>
             </a:extLst>
           </p:cNvPr>
@@ -10436,7 +10436,7 @@
           <p:cNvPr id="4" name="">
             <a:extLst xmlns:a="http://schemas.openxmlformats.org/drawingml/2006/main">
               <a:ext uri="{FF2B5EF4-FFF2-40B4-BE49-F238E27FC236}">
-                <a16:creationId xmlns:a16="http://schemas.microsoft.com/office/drawing/2014/main" id="{024EF43B-10B5-4825-B707-5CC40893FD92}"/>
+                <a16:creationId xmlns:a16="http://schemas.microsoft.com/office/drawing/2014/main" id="{393BA2FB-3258-4CA3-A054-9BB391F086A2}"/>
               </a:ext>
             </a:extLst>
           </p:cNvPr>
@@ -10486,7 +10486,7 @@
           <p:cNvPr id="5" name="">
             <a:extLst xmlns:a="http://schemas.openxmlformats.org/drawingml/2006/main">
               <a:ext uri="{FF2B5EF4-FFF2-40B4-BE49-F238E27FC236}">
-                <a16:creationId xmlns:a16="http://schemas.microsoft.com/office/drawing/2014/main" id="{FC2B7915-95D7-4311-8070-DF6BE439D6E9}"/>
+                <a16:creationId xmlns:a16="http://schemas.microsoft.com/office/drawing/2014/main" id="{E8EF6BEF-182F-407F-88C7-2E80AFB0CAB3}"/>
               </a:ext>
             </a:extLst>
           </p:cNvPr>
@@ -10536,7 +10536,7 @@
           <p:cNvPr id="6" name="">
             <a:extLst xmlns:a="http://schemas.openxmlformats.org/drawingml/2006/main">
               <a:ext uri="{FF2B5EF4-FFF2-40B4-BE49-F238E27FC236}">
-                <a16:creationId xmlns:a16="http://schemas.microsoft.com/office/drawing/2014/main" id="{5FA0D529-9901-439C-AC9E-4E79F987D322}"/>
+                <a16:creationId xmlns:a16="http://schemas.microsoft.com/office/drawing/2014/main" id="{BAA01ACB-F71B-41D5-BCB3-517FC547C60F}"/>
               </a:ext>
             </a:extLst>
           </p:cNvPr>
@@ -10586,7 +10586,7 @@
           <p:cNvPr id="7" name="">
             <a:extLst xmlns:a="http://schemas.openxmlformats.org/drawingml/2006/main">
               <a:ext uri="{FF2B5EF4-FFF2-40B4-BE49-F238E27FC236}">
-                <a16:creationId xmlns:a16="http://schemas.microsoft.com/office/drawing/2014/main" id="{5BB6650D-AFE9-4861-996A-191097332E5B}"/>
+                <a16:creationId xmlns:a16="http://schemas.microsoft.com/office/drawing/2014/main" id="{96CF2E7D-A97F-4312-8D80-F08BB89E2744}"/>
               </a:ext>
             </a:extLst>
           </p:cNvPr>
@@ -10636,7 +10636,7 @@
           <p:cNvPr id="8" name="">
             <a:extLst xmlns:a="http://schemas.openxmlformats.org/drawingml/2006/main">
               <a:ext uri="{FF2B5EF4-FFF2-40B4-BE49-F238E27FC236}">
-                <a16:creationId xmlns:a16="http://schemas.microsoft.com/office/drawing/2014/main" id="{6C4B20BD-FAB8-47CC-8C2A-2FDD00C56E65}"/>
+                <a16:creationId xmlns:a16="http://schemas.microsoft.com/office/drawing/2014/main" id="{D3D3279F-1422-43BB-92FF-C928E2DCAB2D}"/>
               </a:ext>
             </a:extLst>
           </p:cNvPr>
@@ -10667,7 +10667,7 @@
           <p:cNvPr id="9" name="">
             <a:extLst xmlns:a="http://schemas.openxmlformats.org/drawingml/2006/main">
               <a:ext uri="{FF2B5EF4-FFF2-40B4-BE49-F238E27FC236}">
-                <a16:creationId xmlns:a16="http://schemas.microsoft.com/office/drawing/2014/main" id="{A6DE21DE-BFC8-4E95-A960-872A72D85F08}"/>
+                <a16:creationId xmlns:a16="http://schemas.microsoft.com/office/drawing/2014/main" id="{AE14291A-C2AC-4743-867E-175D55BAD42E}"/>
               </a:ext>
             </a:extLst>
           </p:cNvPr>
@@ -10702,7 +10702,7 @@
           <p:cNvPr id="10" name="">
             <a:extLst xmlns:a="http://schemas.openxmlformats.org/drawingml/2006/main">
               <a:ext uri="{FF2B5EF4-FFF2-40B4-BE49-F238E27FC236}">
-                <a16:creationId xmlns:a16="http://schemas.microsoft.com/office/drawing/2014/main" id="{39EC1042-4E50-47FC-97F8-2A7F2DE760C6}"/>
+                <a16:creationId xmlns:a16="http://schemas.microsoft.com/office/drawing/2014/main" id="{EFC0FFC7-14E2-40AD-988D-C4931CEA8D48}"/>
               </a:ext>
             </a:extLst>
           </p:cNvPr>
@@ -10752,7 +10752,7 @@
           <p:cNvPr id="11" name="">
             <a:extLst xmlns:a="http://schemas.openxmlformats.org/drawingml/2006/main">
               <a:ext uri="{FF2B5EF4-FFF2-40B4-BE49-F238E27FC236}">
-                <a16:creationId xmlns:a16="http://schemas.microsoft.com/office/drawing/2014/main" id="{BE12BC78-A36D-4B84-8A19-F67A8A5863EB}"/>
+                <a16:creationId xmlns:a16="http://schemas.microsoft.com/office/drawing/2014/main" id="{249F750B-EE41-4E5B-95D7-E49E680F0E43}"/>
               </a:ext>
             </a:extLst>
           </p:cNvPr>
@@ -10802,7 +10802,7 @@
           <p:cNvPr id="12" name="">
             <a:extLst xmlns:a="http://schemas.openxmlformats.org/drawingml/2006/main">
               <a:ext uri="{FF2B5EF4-FFF2-40B4-BE49-F238E27FC236}">
-                <a16:creationId xmlns:a16="http://schemas.microsoft.com/office/drawing/2014/main" id="{050AA09F-A0A7-459B-B0B7-39D69CE88DFE}"/>
+                <a16:creationId xmlns:a16="http://schemas.microsoft.com/office/drawing/2014/main" id="{7EB249FF-832D-46BA-815D-34B423773F5F}"/>
               </a:ext>
             </a:extLst>
           </p:cNvPr>
@@ -10852,7 +10852,7 @@
           <p:cNvPr id="13" name="">
             <a:extLst xmlns:a="http://schemas.openxmlformats.org/drawingml/2006/main">
               <a:ext uri="{FF2B5EF4-FFF2-40B4-BE49-F238E27FC236}">
-                <a16:creationId xmlns:a16="http://schemas.microsoft.com/office/drawing/2014/main" id="{19FC623F-17DB-4F88-8153-1885F5DFDCF7}"/>
+                <a16:creationId xmlns:a16="http://schemas.microsoft.com/office/drawing/2014/main" id="{DC23CA3E-2F12-4060-BE94-3B5CDF6F7EB0}"/>
               </a:ext>
             </a:extLst>
           </p:cNvPr>
@@ -10902,7 +10902,7 @@
           <p:cNvPr id="14" name="">
             <a:extLst xmlns:a="http://schemas.openxmlformats.org/drawingml/2006/main">
               <a:ext uri="{FF2B5EF4-FFF2-40B4-BE49-F238E27FC236}">
-                <a16:creationId xmlns:a16="http://schemas.microsoft.com/office/drawing/2014/main" id="{7D857966-4389-4CA5-B504-787C7CCEF592}"/>
+                <a16:creationId xmlns:a16="http://schemas.microsoft.com/office/drawing/2014/main" id="{EE607085-71BE-4E27-99AA-CE3BB794A5FC}"/>
               </a:ext>
             </a:extLst>
           </p:cNvPr>
@@ -10952,7 +10952,7 @@
           <p:cNvPr id="15" name="">
             <a:extLst xmlns:a="http://schemas.openxmlformats.org/drawingml/2006/main">
               <a:ext uri="{FF2B5EF4-FFF2-40B4-BE49-F238E27FC236}">
-                <a16:creationId xmlns:a16="http://schemas.microsoft.com/office/drawing/2014/main" id="{C67075DE-61E7-4B4D-8D34-D1D384B98242}"/>
+                <a16:creationId xmlns:a16="http://schemas.microsoft.com/office/drawing/2014/main" id="{403723EF-BFC6-42B4-95FF-77AD98BEFE7F}"/>
               </a:ext>
             </a:extLst>
           </p:cNvPr>
@@ -11002,7 +11002,7 @@
           <p:cNvPr id="16" name="">
             <a:extLst xmlns:a="http://schemas.openxmlformats.org/drawingml/2006/main">
               <a:ext uri="{FF2B5EF4-FFF2-40B4-BE49-F238E27FC236}">
-                <a16:creationId xmlns:a16="http://schemas.microsoft.com/office/drawing/2014/main" id="{BA167806-2A02-44F7-B63A-1BB77127CE10}"/>
+                <a16:creationId xmlns:a16="http://schemas.microsoft.com/office/drawing/2014/main" id="{73D80DE3-A4E6-4ED3-848C-99A4A79EF525}"/>
               </a:ext>
             </a:extLst>
           </p:cNvPr>
@@ -11037,7 +11037,7 @@
           <p:cNvPr id="17" name="">
             <a:extLst xmlns:a="http://schemas.openxmlformats.org/drawingml/2006/main">
               <a:ext uri="{FF2B5EF4-FFF2-40B4-BE49-F238E27FC236}">
-                <a16:creationId xmlns:a16="http://schemas.microsoft.com/office/drawing/2014/main" id="{EBB09E30-0515-4C9C-B875-17CCE41E0F37}"/>
+                <a16:creationId xmlns:a16="http://schemas.microsoft.com/office/drawing/2014/main" id="{7840D189-33B3-4832-9A54-465A275E281D}"/>
               </a:ext>
             </a:extLst>
           </p:cNvPr>
@@ -11087,7 +11087,7 @@
           <p:cNvPr id="18" name="">
             <a:extLst xmlns:a="http://schemas.openxmlformats.org/drawingml/2006/main">
               <a:ext uri="{FF2B5EF4-FFF2-40B4-BE49-F238E27FC236}">
-                <a16:creationId xmlns:a16="http://schemas.microsoft.com/office/drawing/2014/main" id="{AB01B47A-D891-4643-9869-7AEA85E3373A}"/>
+                <a16:creationId xmlns:a16="http://schemas.microsoft.com/office/drawing/2014/main" id="{98306ACB-99BF-49BA-B700-BA2592565355}"/>
               </a:ext>
             </a:extLst>
           </p:cNvPr>
@@ -11137,7 +11137,7 @@
           <p:cNvPr id="19" name="">
             <a:extLst xmlns:a="http://schemas.openxmlformats.org/drawingml/2006/main">
               <a:ext uri="{FF2B5EF4-FFF2-40B4-BE49-F238E27FC236}">
-                <a16:creationId xmlns:a16="http://schemas.microsoft.com/office/drawing/2014/main" id="{B9AD9428-9A5A-40AA-8CFA-68B7FBEB2DAB}"/>
+                <a16:creationId xmlns:a16="http://schemas.microsoft.com/office/drawing/2014/main" id="{4E3C2120-9DD1-47FA-B94D-3060DD8CB866}"/>
               </a:ext>
             </a:extLst>
           </p:cNvPr>
@@ -11187,7 +11187,7 @@
           <p:cNvPr id="20" name="">
             <a:extLst xmlns:a="http://schemas.openxmlformats.org/drawingml/2006/main">
               <a:ext uri="{FF2B5EF4-FFF2-40B4-BE49-F238E27FC236}">
-                <a16:creationId xmlns:a16="http://schemas.microsoft.com/office/drawing/2014/main" id="{F88F0057-3EDF-47CF-878E-2CE62F84DBC8}"/>
+                <a16:creationId xmlns:a16="http://schemas.microsoft.com/office/drawing/2014/main" id="{A471FB9D-E7F4-4303-A2DF-7ED054283F52}"/>
               </a:ext>
             </a:extLst>
           </p:cNvPr>
@@ -11237,7 +11237,7 @@
           <p:cNvPr id="21" name="">
             <a:extLst xmlns:a="http://schemas.openxmlformats.org/drawingml/2006/main">
               <a:ext uri="{FF2B5EF4-FFF2-40B4-BE49-F238E27FC236}">
-                <a16:creationId xmlns:a16="http://schemas.microsoft.com/office/drawing/2014/main" id="{BFA32E7B-84D1-44E4-A76F-9D5E7A065ABE}"/>
+                <a16:creationId xmlns:a16="http://schemas.microsoft.com/office/drawing/2014/main" id="{AD83435E-CA89-4365-AB97-E2193C0CC2CC}"/>
               </a:ext>
             </a:extLst>
           </p:cNvPr>
@@ -11287,7 +11287,7 @@
           <p:cNvPr id="22" name="">
             <a:extLst xmlns:a="http://schemas.openxmlformats.org/drawingml/2006/main">
               <a:ext uri="{FF2B5EF4-FFF2-40B4-BE49-F238E27FC236}">
-                <a16:creationId xmlns:a16="http://schemas.microsoft.com/office/drawing/2014/main" id="{336293AA-E805-413C-B8BB-D3B0CD1FD97C}"/>
+                <a16:creationId xmlns:a16="http://schemas.microsoft.com/office/drawing/2014/main" id="{04D937B4-283D-4407-9CB1-2CE462F38C41}"/>
               </a:ext>
             </a:extLst>
           </p:cNvPr>
@@ -11337,7 +11337,7 @@
           <p:cNvPr id="23" name="">
             <a:extLst xmlns:a="http://schemas.openxmlformats.org/drawingml/2006/main">
               <a:ext uri="{FF2B5EF4-FFF2-40B4-BE49-F238E27FC236}">
-                <a16:creationId xmlns:a16="http://schemas.microsoft.com/office/drawing/2014/main" id="{FF7DCC3F-B3EB-4338-A979-30E72C6D35C0}"/>
+                <a16:creationId xmlns:a16="http://schemas.microsoft.com/office/drawing/2014/main" id="{C0124606-75BA-420D-90B1-A713DFAC53DA}"/>
               </a:ext>
             </a:extLst>
           </p:cNvPr>
@@ -11372,7 +11372,7 @@
           <p:cNvPr id="24" name="">
             <a:extLst xmlns:a="http://schemas.openxmlformats.org/drawingml/2006/main">
               <a:ext uri="{FF2B5EF4-FFF2-40B4-BE49-F238E27FC236}">
-                <a16:creationId xmlns:a16="http://schemas.microsoft.com/office/drawing/2014/main" id="{559C5CC9-B31C-4E33-9D35-A54F27BE3CD9}"/>
+                <a16:creationId xmlns:a16="http://schemas.microsoft.com/office/drawing/2014/main" id="{662282E4-4797-4612-A589-841289D95003}"/>
               </a:ext>
             </a:extLst>
           </p:cNvPr>
@@ -11422,7 +11422,7 @@
           <p:cNvPr id="25" name="">
             <a:extLst xmlns:a="http://schemas.openxmlformats.org/drawingml/2006/main">
               <a:ext uri="{FF2B5EF4-FFF2-40B4-BE49-F238E27FC236}">
-                <a16:creationId xmlns:a16="http://schemas.microsoft.com/office/drawing/2014/main" id="{72F3CE9C-97AD-444C-AB22-C884016E8881}"/>
+                <a16:creationId xmlns:a16="http://schemas.microsoft.com/office/drawing/2014/main" id="{A313558A-CE7A-4EFF-977D-0D1AADEC92D3}"/>
               </a:ext>
             </a:extLst>
           </p:cNvPr>
@@ -11472,7 +11472,7 @@
           <p:cNvPr id="26" name="">
             <a:extLst xmlns:a="http://schemas.openxmlformats.org/drawingml/2006/main">
               <a:ext uri="{FF2B5EF4-FFF2-40B4-BE49-F238E27FC236}">
-                <a16:creationId xmlns:a16="http://schemas.microsoft.com/office/drawing/2014/main" id="{3689530E-E4D4-429D-BF35-9826C55C483B}"/>
+                <a16:creationId xmlns:a16="http://schemas.microsoft.com/office/drawing/2014/main" id="{5FFF0710-3A2F-4157-8DE0-40E2E34425C0}"/>
               </a:ext>
             </a:extLst>
           </p:cNvPr>
@@ -11522,7 +11522,7 @@
           <p:cNvPr id="27" name="">
             <a:extLst xmlns:a="http://schemas.openxmlformats.org/drawingml/2006/main">
               <a:ext uri="{FF2B5EF4-FFF2-40B4-BE49-F238E27FC236}">
-                <a16:creationId xmlns:a16="http://schemas.microsoft.com/office/drawing/2014/main" id="{2423FB9E-E1AF-41D8-8FB5-481EDBF53C81}"/>
+                <a16:creationId xmlns:a16="http://schemas.microsoft.com/office/drawing/2014/main" id="{A60023C4-D17E-44DC-88AB-9A0FA5487BD2}"/>
               </a:ext>
             </a:extLst>
           </p:cNvPr>
@@ -11572,7 +11572,7 @@
           <p:cNvPr id="28" name="">
             <a:extLst xmlns:a="http://schemas.openxmlformats.org/drawingml/2006/main">
               <a:ext uri="{FF2B5EF4-FFF2-40B4-BE49-F238E27FC236}">
-                <a16:creationId xmlns:a16="http://schemas.microsoft.com/office/drawing/2014/main" id="{0BBAC1D6-F544-4F57-9FED-405995B44F9D}"/>
+                <a16:creationId xmlns:a16="http://schemas.microsoft.com/office/drawing/2014/main" id="{F35EF61C-E7C0-4852-934F-BDF965B3A7B0}"/>
               </a:ext>
             </a:extLst>
           </p:cNvPr>
@@ -11622,7 +11622,7 @@
           <p:cNvPr id="29" name="">
             <a:extLst xmlns:a="http://schemas.openxmlformats.org/drawingml/2006/main">
               <a:ext uri="{FF2B5EF4-FFF2-40B4-BE49-F238E27FC236}">
-                <a16:creationId xmlns:a16="http://schemas.microsoft.com/office/drawing/2014/main" id="{D22A38D7-9A9F-480F-ACCF-72D81125A649}"/>
+                <a16:creationId xmlns:a16="http://schemas.microsoft.com/office/drawing/2014/main" id="{2E481935-7A9A-4191-8A54-7926AE3987BC}"/>
               </a:ext>
             </a:extLst>
           </p:cNvPr>
@@ -11672,7 +11672,7 @@
           <p:cNvPr id="30" name="">
             <a:extLst xmlns:a="http://schemas.openxmlformats.org/drawingml/2006/main">
               <a:ext uri="{FF2B5EF4-FFF2-40B4-BE49-F238E27FC236}">
-                <a16:creationId xmlns:a16="http://schemas.microsoft.com/office/drawing/2014/main" id="{9C15F796-2DD6-4F88-8AEF-4AE9C6877252}"/>
+                <a16:creationId xmlns:a16="http://schemas.microsoft.com/office/drawing/2014/main" id="{99ED033E-BEDE-48C4-A851-CFFADA0BAD1D}"/>
               </a:ext>
             </a:extLst>
           </p:cNvPr>
@@ -11720,7 +11720,7 @@
     </p:spTree>
     <p:extLst>
       <p:ext uri="{BB962C8B-B14F-4D97-AF65-F5344CB8AC3E}">
-        <p14:creationId xmlns:p14="http://schemas.microsoft.com/office/powerpoint/2010/main" val="33337630"/>
+        <p14:creationId xmlns:p14="http://schemas.microsoft.com/office/powerpoint/2010/main" val="269091498"/>
       </p:ext>
     </p:extLst>
   </p:cSld>
@@ -11751,7 +11751,7 @@
           <p:cNvPr id="39" name="">
             <a:extLst xmlns:a="http://schemas.openxmlformats.org/drawingml/2006/main">
               <a:ext uri="{FF2B5EF4-FFF2-40B4-BE49-F238E27FC236}">
-                <a16:creationId xmlns:a16="http://schemas.microsoft.com/office/drawing/2014/main" id="{95EC888D-FC88-4AAC-98A7-1196893AFE7A}"/>
+                <a16:creationId xmlns:a16="http://schemas.microsoft.com/office/drawing/2014/main" id="{D6F4A269-5B8E-4411-A6E4-D743D4B5B856}"/>
               </a:ext>
             </a:extLst>
           </p:cNvPr>
@@ -11801,7 +11801,7 @@
           <p:cNvPr id="2" name="">
             <a:extLst xmlns:a="http://schemas.openxmlformats.org/drawingml/2006/main">
               <a:ext uri="{FF2B5EF4-FFF2-40B4-BE49-F238E27FC236}">
-                <a16:creationId xmlns:a16="http://schemas.microsoft.com/office/drawing/2014/main" id="{B08DB3D5-14B2-4EA2-83A8-5855947B2D28}"/>
+                <a16:creationId xmlns:a16="http://schemas.microsoft.com/office/drawing/2014/main" id="{B7F00676-97B5-487A-A7B2-D9AFEADD6A9A}"/>
               </a:ext>
             </a:extLst>
           </p:cNvPr>
@@ -11851,7 +11851,7 @@
           <p:cNvPr id="3" name="">
             <a:extLst xmlns:a="http://schemas.openxmlformats.org/drawingml/2006/main">
               <a:ext uri="{FF2B5EF4-FFF2-40B4-BE49-F238E27FC236}">
-                <a16:creationId xmlns:a16="http://schemas.microsoft.com/office/drawing/2014/main" id="{682E9253-02B4-490F-AC0D-7FD98A9983B5}"/>
+                <a16:creationId xmlns:a16="http://schemas.microsoft.com/office/drawing/2014/main" id="{37994A2E-338F-4655-9A61-EC8C93A2C353}"/>
               </a:ext>
             </a:extLst>
           </p:cNvPr>
@@ -11882,7 +11882,7 @@
           <p:cNvPr id="4" name="">
             <a:extLst xmlns:a="http://schemas.openxmlformats.org/drawingml/2006/main">
               <a:ext uri="{FF2B5EF4-FFF2-40B4-BE49-F238E27FC236}">
-                <a16:creationId xmlns:a16="http://schemas.microsoft.com/office/drawing/2014/main" id="{A2A66754-47F7-49FB-91BA-96152D7B2449}"/>
+                <a16:creationId xmlns:a16="http://schemas.microsoft.com/office/drawing/2014/main" id="{A9EE586F-F4AA-42F1-9231-289CC4497A27}"/>
               </a:ext>
             </a:extLst>
           </p:cNvPr>
@@ -11932,7 +11932,7 @@
           <p:cNvPr id="5" name="">
             <a:extLst xmlns:a="http://schemas.openxmlformats.org/drawingml/2006/main">
               <a:ext uri="{FF2B5EF4-FFF2-40B4-BE49-F238E27FC236}">
-                <a16:creationId xmlns:a16="http://schemas.microsoft.com/office/drawing/2014/main" id="{F13AFAA5-2725-48C4-AA71-85E55AB185C6}"/>
+                <a16:creationId xmlns:a16="http://schemas.microsoft.com/office/drawing/2014/main" id="{C48A040A-FB03-4AC3-870D-3A16607C035C}"/>
               </a:ext>
             </a:extLst>
           </p:cNvPr>
@@ -11982,7 +11982,7 @@
           <p:cNvPr id="6" name="">
             <a:extLst xmlns:a="http://schemas.openxmlformats.org/drawingml/2006/main">
               <a:ext uri="{FF2B5EF4-FFF2-40B4-BE49-F238E27FC236}">
-                <a16:creationId xmlns:a16="http://schemas.microsoft.com/office/drawing/2014/main" id="{3BF041FA-7414-4F35-BD8F-57A0D292A804}"/>
+                <a16:creationId xmlns:a16="http://schemas.microsoft.com/office/drawing/2014/main" id="{D8ADC5E2-86A1-4F6D-A0A1-45E0F059BE92}"/>
               </a:ext>
             </a:extLst>
           </p:cNvPr>
@@ -12032,7 +12032,7 @@
           <p:cNvPr id="7" name="">
             <a:extLst xmlns:a="http://schemas.openxmlformats.org/drawingml/2006/main">
               <a:ext uri="{FF2B5EF4-FFF2-40B4-BE49-F238E27FC236}">
-                <a16:creationId xmlns:a16="http://schemas.microsoft.com/office/drawing/2014/main" id="{31BD51D7-AA74-4748-822B-B6D728A7AF40}"/>
+                <a16:creationId xmlns:a16="http://schemas.microsoft.com/office/drawing/2014/main" id="{3881A417-2D1E-40ED-B2DC-BB12A447B165}"/>
               </a:ext>
             </a:extLst>
           </p:cNvPr>
@@ -12067,7 +12067,7 @@
           <p:cNvPr id="8" name="">
             <a:extLst xmlns:a="http://schemas.openxmlformats.org/drawingml/2006/main">
               <a:ext uri="{FF2B5EF4-FFF2-40B4-BE49-F238E27FC236}">
-                <a16:creationId xmlns:a16="http://schemas.microsoft.com/office/drawing/2014/main" id="{A6DDEFA6-C06D-46B6-A851-0C800B3216A4}"/>
+                <a16:creationId xmlns:a16="http://schemas.microsoft.com/office/drawing/2014/main" id="{0ED7CEC2-8C2C-491D-93E2-26766D40BD02}"/>
               </a:ext>
             </a:extLst>
           </p:cNvPr>
@@ -12117,7 +12117,7 @@
           <p:cNvPr id="9" name="">
             <a:extLst xmlns:a="http://schemas.openxmlformats.org/drawingml/2006/main">
               <a:ext uri="{FF2B5EF4-FFF2-40B4-BE49-F238E27FC236}">
-                <a16:creationId xmlns:a16="http://schemas.microsoft.com/office/drawing/2014/main" id="{9E683389-056E-46F6-BD93-C116FA1454A0}"/>
+                <a16:creationId xmlns:a16="http://schemas.microsoft.com/office/drawing/2014/main" id="{B07E4325-2695-44ED-8D1A-3BE1B1606D8A}"/>
               </a:ext>
             </a:extLst>
           </p:cNvPr>
@@ -12167,7 +12167,7 @@
           <p:cNvPr id="10" name="">
             <a:extLst xmlns:a="http://schemas.openxmlformats.org/drawingml/2006/main">
               <a:ext uri="{FF2B5EF4-FFF2-40B4-BE49-F238E27FC236}">
-                <a16:creationId xmlns:a16="http://schemas.microsoft.com/office/drawing/2014/main" id="{9B5730D1-CDA4-430D-8451-08523A3ACBD9}"/>
+                <a16:creationId xmlns:a16="http://schemas.microsoft.com/office/drawing/2014/main" id="{C0BBDD96-E53A-4588-BC4A-30233DFC8312}"/>
               </a:ext>
             </a:extLst>
           </p:cNvPr>
@@ -12202,7 +12202,7 @@
           <p:cNvPr id="11" name="">
             <a:extLst xmlns:a="http://schemas.openxmlformats.org/drawingml/2006/main">
               <a:ext uri="{FF2B5EF4-FFF2-40B4-BE49-F238E27FC236}">
-                <a16:creationId xmlns:a16="http://schemas.microsoft.com/office/drawing/2014/main" id="{7283BD8D-80B4-4E7D-9109-82D6F34240EB}"/>
+                <a16:creationId xmlns:a16="http://schemas.microsoft.com/office/drawing/2014/main" id="{E937F2A9-86FA-492A-A530-FE8D98ED8CFF}"/>
               </a:ext>
             </a:extLst>
           </p:cNvPr>
@@ -12252,7 +12252,7 @@
           <p:cNvPr id="12" name="">
             <a:extLst xmlns:a="http://schemas.openxmlformats.org/drawingml/2006/main">
               <a:ext uri="{FF2B5EF4-FFF2-40B4-BE49-F238E27FC236}">
-                <a16:creationId xmlns:a16="http://schemas.microsoft.com/office/drawing/2014/main" id="{D17EFC42-5D39-40D7-A078-5F6F890E8359}"/>
+                <a16:creationId xmlns:a16="http://schemas.microsoft.com/office/drawing/2014/main" id="{9CEE125C-694C-44FA-BB8C-65C708DF9706}"/>
               </a:ext>
             </a:extLst>
           </p:cNvPr>
@@ -12302,7 +12302,7 @@
           <p:cNvPr id="13" name="">
             <a:extLst xmlns:a="http://schemas.openxmlformats.org/drawingml/2006/main">
               <a:ext uri="{FF2B5EF4-FFF2-40B4-BE49-F238E27FC236}">
-                <a16:creationId xmlns:a16="http://schemas.microsoft.com/office/drawing/2014/main" id="{0486AFB6-DCB5-405F-A5D9-1BE6C3D9F0A9}"/>
+                <a16:creationId xmlns:a16="http://schemas.microsoft.com/office/drawing/2014/main" id="{8DC6BC5F-D145-4283-BFCE-5B500801740C}"/>
               </a:ext>
             </a:extLst>
           </p:cNvPr>
@@ -12337,7 +12337,7 @@
           <p:cNvPr id="14" name="">
             <a:extLst xmlns:a="http://schemas.openxmlformats.org/drawingml/2006/main">
               <a:ext uri="{FF2B5EF4-FFF2-40B4-BE49-F238E27FC236}">
-                <a16:creationId xmlns:a16="http://schemas.microsoft.com/office/drawing/2014/main" id="{A14A0F84-E201-4015-85B4-0B378AAC6E28}"/>
+                <a16:creationId xmlns:a16="http://schemas.microsoft.com/office/drawing/2014/main" id="{F079099E-F226-4672-B837-A80228CDFD7A}"/>
               </a:ext>
             </a:extLst>
           </p:cNvPr>
@@ -12387,7 +12387,7 @@
           <p:cNvPr id="15" name="">
             <a:extLst xmlns:a="http://schemas.openxmlformats.org/drawingml/2006/main">
               <a:ext uri="{FF2B5EF4-FFF2-40B4-BE49-F238E27FC236}">
-                <a16:creationId xmlns:a16="http://schemas.microsoft.com/office/drawing/2014/main" id="{0FFC945F-E03B-4025-9440-010AE15341C5}"/>
+                <a16:creationId xmlns:a16="http://schemas.microsoft.com/office/drawing/2014/main" id="{1BA0FE7C-0EED-4582-A545-5B096482445C}"/>
               </a:ext>
             </a:extLst>
           </p:cNvPr>
@@ -12437,7 +12437,7 @@
           <p:cNvPr id="16" name="">
             <a:extLst xmlns:a="http://schemas.openxmlformats.org/drawingml/2006/main">
               <a:ext uri="{FF2B5EF4-FFF2-40B4-BE49-F238E27FC236}">
-                <a16:creationId xmlns:a16="http://schemas.microsoft.com/office/drawing/2014/main" id="{7437A5AC-8C73-40AF-BEB0-7BD02B34700F}"/>
+                <a16:creationId xmlns:a16="http://schemas.microsoft.com/office/drawing/2014/main" id="{9044517D-DA16-47D1-893A-7B7A599C30FF}"/>
               </a:ext>
             </a:extLst>
           </p:cNvPr>
@@ -12472,7 +12472,7 @@
           <p:cNvPr id="17" name="">
             <a:extLst xmlns:a="http://schemas.openxmlformats.org/drawingml/2006/main">
               <a:ext uri="{FF2B5EF4-FFF2-40B4-BE49-F238E27FC236}">
-                <a16:creationId xmlns:a16="http://schemas.microsoft.com/office/drawing/2014/main" id="{73C6F486-DD87-461E-8A31-331085131547}"/>
+                <a16:creationId xmlns:a16="http://schemas.microsoft.com/office/drawing/2014/main" id="{7D93A00A-7D77-49CD-8D36-8C9F39613F63}"/>
               </a:ext>
             </a:extLst>
           </p:cNvPr>
@@ -12522,7 +12522,7 @@
           <p:cNvPr id="18" name="">
             <a:extLst xmlns:a="http://schemas.openxmlformats.org/drawingml/2006/main">
               <a:ext uri="{FF2B5EF4-FFF2-40B4-BE49-F238E27FC236}">
-                <a16:creationId xmlns:a16="http://schemas.microsoft.com/office/drawing/2014/main" id="{83E0B4C2-1369-4E8C-BA3E-62B6BDDFC366}"/>
+                <a16:creationId xmlns:a16="http://schemas.microsoft.com/office/drawing/2014/main" id="{9F1E4125-A570-4CA9-B45D-AC48EA3654FF}"/>
               </a:ext>
             </a:extLst>
           </p:cNvPr>
@@ -12572,7 +12572,7 @@
           <p:cNvPr id="19" name="">
             <a:extLst xmlns:a="http://schemas.openxmlformats.org/drawingml/2006/main">
               <a:ext uri="{FF2B5EF4-FFF2-40B4-BE49-F238E27FC236}">
-                <a16:creationId xmlns:a16="http://schemas.microsoft.com/office/drawing/2014/main" id="{EF93B566-0EA7-499C-823D-E303882D81CA}"/>
+                <a16:creationId xmlns:a16="http://schemas.microsoft.com/office/drawing/2014/main" id="{CB27254C-53CD-4877-BDE0-BAD6F5958F47}"/>
               </a:ext>
             </a:extLst>
           </p:cNvPr>
@@ -12607,7 +12607,7 @@
           <p:cNvPr id="20" name="">
             <a:extLst xmlns:a="http://schemas.openxmlformats.org/drawingml/2006/main">
               <a:ext uri="{FF2B5EF4-FFF2-40B4-BE49-F238E27FC236}">
-                <a16:creationId xmlns:a16="http://schemas.microsoft.com/office/drawing/2014/main" id="{AF20D80E-9C10-4699-9243-10E509F7A939}"/>
+                <a16:creationId xmlns:a16="http://schemas.microsoft.com/office/drawing/2014/main" id="{BFD117EA-1F69-4655-9395-6C5ADCE3CFAB}"/>
               </a:ext>
             </a:extLst>
           </p:cNvPr>
@@ -12657,7 +12657,7 @@
           <p:cNvPr id="21" name="">
             <a:extLst xmlns:a="http://schemas.openxmlformats.org/drawingml/2006/main">
               <a:ext uri="{FF2B5EF4-FFF2-40B4-BE49-F238E27FC236}">
-                <a16:creationId xmlns:a16="http://schemas.microsoft.com/office/drawing/2014/main" id="{DB446665-0783-4265-8FE9-125D4CD5D034}"/>
+                <a16:creationId xmlns:a16="http://schemas.microsoft.com/office/drawing/2014/main" id="{BA0079EC-941B-42CB-8B45-EE0ED540D1DB}"/>
               </a:ext>
             </a:extLst>
           </p:cNvPr>
@@ -12707,7 +12707,7 @@
           <p:cNvPr id="22" name="">
             <a:extLst xmlns:a="http://schemas.openxmlformats.org/drawingml/2006/main">
               <a:ext uri="{FF2B5EF4-FFF2-40B4-BE49-F238E27FC236}">
-                <a16:creationId xmlns:a16="http://schemas.microsoft.com/office/drawing/2014/main" id="{30A1721E-5BEE-4C54-8477-361A68661415}"/>
+                <a16:creationId xmlns:a16="http://schemas.microsoft.com/office/drawing/2014/main" id="{A930FC86-9FD1-4D5E-88CF-6197AC7AC5EB}"/>
               </a:ext>
             </a:extLst>
           </p:cNvPr>
@@ -12742,7 +12742,7 @@
           <p:cNvPr id="23" name="">
             <a:extLst xmlns:a="http://schemas.openxmlformats.org/drawingml/2006/main">
               <a:ext uri="{FF2B5EF4-FFF2-40B4-BE49-F238E27FC236}">
-                <a16:creationId xmlns:a16="http://schemas.microsoft.com/office/drawing/2014/main" id="{D8D4C1B5-4380-4889-B2B3-67B23C2EFECB}"/>
+                <a16:creationId xmlns:a16="http://schemas.microsoft.com/office/drawing/2014/main" id="{09EECA64-0C16-4E44-8BC4-C648491CA098}"/>
               </a:ext>
             </a:extLst>
           </p:cNvPr>
@@ -12792,7 +12792,7 @@
           <p:cNvPr id="24" name="">
             <a:extLst xmlns:a="http://schemas.openxmlformats.org/drawingml/2006/main">
               <a:ext uri="{FF2B5EF4-FFF2-40B4-BE49-F238E27FC236}">
-                <a16:creationId xmlns:a16="http://schemas.microsoft.com/office/drawing/2014/main" id="{9A814049-9695-4FE8-9B53-8AABCB377BDB}"/>
+                <a16:creationId xmlns:a16="http://schemas.microsoft.com/office/drawing/2014/main" id="{8E67664A-56CC-478A-BD4C-898D17CD5600}"/>
               </a:ext>
             </a:extLst>
           </p:cNvPr>
@@ -12842,7 +12842,7 @@
           <p:cNvPr id="25" name="">
             <a:extLst xmlns:a="http://schemas.openxmlformats.org/drawingml/2006/main">
               <a:ext uri="{FF2B5EF4-FFF2-40B4-BE49-F238E27FC236}">
-                <a16:creationId xmlns:a16="http://schemas.microsoft.com/office/drawing/2014/main" id="{349AE337-1D2D-43D4-B15E-9C8E1785820C}"/>
+                <a16:creationId xmlns:a16="http://schemas.microsoft.com/office/drawing/2014/main" id="{C31E2B31-4693-4C2A-9479-9D28A908A66E}"/>
               </a:ext>
             </a:extLst>
           </p:cNvPr>
@@ -12877,7 +12877,7 @@
           <p:cNvPr id="26" name="">
             <a:extLst xmlns:a="http://schemas.openxmlformats.org/drawingml/2006/main">
               <a:ext uri="{FF2B5EF4-FFF2-40B4-BE49-F238E27FC236}">
-                <a16:creationId xmlns:a16="http://schemas.microsoft.com/office/drawing/2014/main" id="{A58E15D3-D384-4AF5-99F7-78345A9534B2}"/>
+                <a16:creationId xmlns:a16="http://schemas.microsoft.com/office/drawing/2014/main" id="{0B184F67-FD20-4F34-ADEB-15C2DB708DCD}"/>
               </a:ext>
             </a:extLst>
           </p:cNvPr>
@@ -12927,7 +12927,7 @@
           <p:cNvPr id="27" name="">
             <a:extLst xmlns:a="http://schemas.openxmlformats.org/drawingml/2006/main">
               <a:ext uri="{FF2B5EF4-FFF2-40B4-BE49-F238E27FC236}">
-                <a16:creationId xmlns:a16="http://schemas.microsoft.com/office/drawing/2014/main" id="{DB5A4D62-B04B-4316-B273-7AFD4063A47E}"/>
+                <a16:creationId xmlns:a16="http://schemas.microsoft.com/office/drawing/2014/main" id="{2DB17621-0160-4887-AA90-F1EC8C021E3A}"/>
               </a:ext>
             </a:extLst>
           </p:cNvPr>
@@ -12977,7 +12977,7 @@
           <p:cNvPr id="28" name="">
             <a:extLst xmlns:a="http://schemas.openxmlformats.org/drawingml/2006/main">
               <a:ext uri="{FF2B5EF4-FFF2-40B4-BE49-F238E27FC236}">
-                <a16:creationId xmlns:a16="http://schemas.microsoft.com/office/drawing/2014/main" id="{D9293CF5-3F02-428C-8A08-70CB1548B7DC}"/>
+                <a16:creationId xmlns:a16="http://schemas.microsoft.com/office/drawing/2014/main" id="{FE4924D6-B73D-4007-B0F9-708D53474F26}"/>
               </a:ext>
             </a:extLst>
           </p:cNvPr>
@@ -13012,7 +13012,7 @@
           <p:cNvPr id="29" name="">
             <a:extLst xmlns:a="http://schemas.openxmlformats.org/drawingml/2006/main">
               <a:ext uri="{FF2B5EF4-FFF2-40B4-BE49-F238E27FC236}">
-                <a16:creationId xmlns:a16="http://schemas.microsoft.com/office/drawing/2014/main" id="{E7AAD349-4730-41C8-B5EE-790B33F71CEB}"/>
+                <a16:creationId xmlns:a16="http://schemas.microsoft.com/office/drawing/2014/main" id="{6C19DB0C-789A-487B-B420-CE14306E0110}"/>
               </a:ext>
             </a:extLst>
           </p:cNvPr>
@@ -13062,7 +13062,7 @@
           <p:cNvPr id="30" name="">
             <a:extLst xmlns:a="http://schemas.openxmlformats.org/drawingml/2006/main">
               <a:ext uri="{FF2B5EF4-FFF2-40B4-BE49-F238E27FC236}">
-                <a16:creationId xmlns:a16="http://schemas.microsoft.com/office/drawing/2014/main" id="{7202F96B-F64B-406A-9DA3-7FB76F9058F0}"/>
+                <a16:creationId xmlns:a16="http://schemas.microsoft.com/office/drawing/2014/main" id="{A3FB5B70-90B8-4F4E-8617-AF2D1170F65B}"/>
               </a:ext>
             </a:extLst>
           </p:cNvPr>
@@ -13112,7 +13112,7 @@
           <p:cNvPr id="31" name="">
             <a:extLst xmlns:a="http://schemas.openxmlformats.org/drawingml/2006/main">
               <a:ext uri="{FF2B5EF4-FFF2-40B4-BE49-F238E27FC236}">
-                <a16:creationId xmlns:a16="http://schemas.microsoft.com/office/drawing/2014/main" id="{A5FF53FB-015F-4635-92F3-BEDC30DBEAC1}"/>
+                <a16:creationId xmlns:a16="http://schemas.microsoft.com/office/drawing/2014/main" id="{B521B3FE-E784-436E-9B36-4200C6B6A94F}"/>
               </a:ext>
             </a:extLst>
           </p:cNvPr>
@@ -13147,7 +13147,7 @@
           <p:cNvPr id="32" name="">
             <a:extLst xmlns:a="http://schemas.openxmlformats.org/drawingml/2006/main">
               <a:ext uri="{FF2B5EF4-FFF2-40B4-BE49-F238E27FC236}">
-                <a16:creationId xmlns:a16="http://schemas.microsoft.com/office/drawing/2014/main" id="{D5579279-3813-4753-9868-592DD5499E05}"/>
+                <a16:creationId xmlns:a16="http://schemas.microsoft.com/office/drawing/2014/main" id="{75C99F34-039F-4375-AA1D-2BB3ACBE2C37}"/>
               </a:ext>
             </a:extLst>
           </p:cNvPr>
@@ -13197,7 +13197,7 @@
           <p:cNvPr id="33" name="">
             <a:extLst xmlns:a="http://schemas.openxmlformats.org/drawingml/2006/main">
               <a:ext uri="{FF2B5EF4-FFF2-40B4-BE49-F238E27FC236}">
-                <a16:creationId xmlns:a16="http://schemas.microsoft.com/office/drawing/2014/main" id="{220B8829-814F-4C40-969C-FF07AB2FCCAD}"/>
+                <a16:creationId xmlns:a16="http://schemas.microsoft.com/office/drawing/2014/main" id="{FD7E13BA-0907-413F-AFC1-A5C7438492AD}"/>
               </a:ext>
             </a:extLst>
           </p:cNvPr>
@@ -13247,7 +13247,7 @@
           <p:cNvPr id="34" name="">
             <a:extLst xmlns:a="http://schemas.openxmlformats.org/drawingml/2006/main">
               <a:ext uri="{FF2B5EF4-FFF2-40B4-BE49-F238E27FC236}">
-                <a16:creationId xmlns:a16="http://schemas.microsoft.com/office/drawing/2014/main" id="{FCE3654D-2E19-4C74-9A0C-D6FE62A9E1C7}"/>
+                <a16:creationId xmlns:a16="http://schemas.microsoft.com/office/drawing/2014/main" id="{61422A45-58AF-4804-8795-8BB1CDBC3060}"/>
               </a:ext>
             </a:extLst>
           </p:cNvPr>
@@ -13282,7 +13282,7 @@
           <p:cNvPr id="35" name="">
             <a:extLst xmlns:a="http://schemas.openxmlformats.org/drawingml/2006/main">
               <a:ext uri="{FF2B5EF4-FFF2-40B4-BE49-F238E27FC236}">
-                <a16:creationId xmlns:a16="http://schemas.microsoft.com/office/drawing/2014/main" id="{5E8DA66A-FC64-4696-AFEF-90E4A8CEDE28}"/>
+                <a16:creationId xmlns:a16="http://schemas.microsoft.com/office/drawing/2014/main" id="{1F431565-F586-4506-9F49-2581EBE3A48E}"/>
               </a:ext>
             </a:extLst>
           </p:cNvPr>
@@ -13332,7 +13332,7 @@
           <p:cNvPr id="36" name="">
             <a:extLst xmlns:a="http://schemas.openxmlformats.org/drawingml/2006/main">
               <a:ext uri="{FF2B5EF4-FFF2-40B4-BE49-F238E27FC236}">
-                <a16:creationId xmlns:a16="http://schemas.microsoft.com/office/drawing/2014/main" id="{4D02104E-7387-46C2-AA45-05DB39AD1168}"/>
+                <a16:creationId xmlns:a16="http://schemas.microsoft.com/office/drawing/2014/main" id="{5AAF9587-278F-420F-A548-BA436B7665AA}"/>
               </a:ext>
             </a:extLst>
           </p:cNvPr>
@@ -13382,7 +13382,7 @@
           <p:cNvPr id="37" name="">
             <a:extLst xmlns:a="http://schemas.openxmlformats.org/drawingml/2006/main">
               <a:ext uri="{FF2B5EF4-FFF2-40B4-BE49-F238E27FC236}">
-                <a16:creationId xmlns:a16="http://schemas.microsoft.com/office/drawing/2014/main" id="{C1879BAC-D2D1-47BA-985F-072567BD7242}"/>
+                <a16:creationId xmlns:a16="http://schemas.microsoft.com/office/drawing/2014/main" id="{1972D9E4-7C2A-410E-8D73-F01B76E75DD1}"/>
               </a:ext>
             </a:extLst>
           </p:cNvPr>
@@ -13432,7 +13432,7 @@
           <p:cNvPr id="38" name="">
             <a:extLst xmlns:a="http://schemas.openxmlformats.org/drawingml/2006/main">
               <a:ext uri="{FF2B5EF4-FFF2-40B4-BE49-F238E27FC236}">
-                <a16:creationId xmlns:a16="http://schemas.microsoft.com/office/drawing/2014/main" id="{4346995E-47CE-4677-960B-D4B0B07F8049}"/>
+                <a16:creationId xmlns:a16="http://schemas.microsoft.com/office/drawing/2014/main" id="{B750B437-6749-41E9-80C8-C05CFAEB0AEE}"/>
               </a:ext>
             </a:extLst>
           </p:cNvPr>
@@ -13480,7 +13480,7 @@
     </p:spTree>
     <p:extLst>
       <p:ext uri="{BB962C8B-B14F-4D97-AF65-F5344CB8AC3E}">
-        <p14:creationId xmlns:p14="http://schemas.microsoft.com/office/powerpoint/2010/main" val="362532644"/>
+        <p14:creationId xmlns:p14="http://schemas.microsoft.com/office/powerpoint/2010/main" val="1866616323"/>
       </p:ext>
     </p:extLst>
   </p:cSld>
@@ -13511,7 +13511,7 @@
           <p:cNvPr id="39" name="">
             <a:extLst xmlns:a="http://schemas.openxmlformats.org/drawingml/2006/main">
               <a:ext uri="{FF2B5EF4-FFF2-40B4-BE49-F238E27FC236}">
-                <a16:creationId xmlns:a16="http://schemas.microsoft.com/office/drawing/2014/main" id="{03BFEA68-ECA6-45F9-AB28-C3C03234CD59}"/>
+                <a16:creationId xmlns:a16="http://schemas.microsoft.com/office/drawing/2014/main" id="{E767F028-FF15-4C19-86C8-9BDDDB030BAC}"/>
               </a:ext>
             </a:extLst>
           </p:cNvPr>
@@ -13561,7 +13561,7 @@
           <p:cNvPr id="2" name="">
             <a:extLst xmlns:a="http://schemas.openxmlformats.org/drawingml/2006/main">
               <a:ext uri="{FF2B5EF4-FFF2-40B4-BE49-F238E27FC236}">
-                <a16:creationId xmlns:a16="http://schemas.microsoft.com/office/drawing/2014/main" id="{B3F6BCDC-519B-49A9-B0FB-0C7181DF38BF}"/>
+                <a16:creationId xmlns:a16="http://schemas.microsoft.com/office/drawing/2014/main" id="{158DE088-6242-45D7-A4CA-1AA4797F09D8}"/>
               </a:ext>
             </a:extLst>
           </p:cNvPr>
@@ -13611,7 +13611,7 @@
           <p:cNvPr id="3" name="">
             <a:extLst xmlns:a="http://schemas.openxmlformats.org/drawingml/2006/main">
               <a:ext uri="{FF2B5EF4-FFF2-40B4-BE49-F238E27FC236}">
-                <a16:creationId xmlns:a16="http://schemas.microsoft.com/office/drawing/2014/main" id="{AAAFCAF4-1DDE-4592-BBC7-864F691006BC}"/>
+                <a16:creationId xmlns:a16="http://schemas.microsoft.com/office/drawing/2014/main" id="{8786671D-111C-4823-BA48-EA6E1A1C87DE}"/>
               </a:ext>
             </a:extLst>
           </p:cNvPr>
@@ -13642,7 +13642,7 @@
           <p:cNvPr id="4" name="">
             <a:extLst xmlns:a="http://schemas.openxmlformats.org/drawingml/2006/main">
               <a:ext uri="{FF2B5EF4-FFF2-40B4-BE49-F238E27FC236}">
-                <a16:creationId xmlns:a16="http://schemas.microsoft.com/office/drawing/2014/main" id="{22ACDB5D-6464-4069-86DF-40E5E450D39D}"/>
+                <a16:creationId xmlns:a16="http://schemas.microsoft.com/office/drawing/2014/main" id="{04C37509-9B82-4E6D-A3A5-10D051A1D06A}"/>
               </a:ext>
             </a:extLst>
           </p:cNvPr>
@@ -13692,7 +13692,7 @@
           <p:cNvPr id="5" name="">
             <a:extLst xmlns:a="http://schemas.openxmlformats.org/drawingml/2006/main">
               <a:ext uri="{FF2B5EF4-FFF2-40B4-BE49-F238E27FC236}">
-                <a16:creationId xmlns:a16="http://schemas.microsoft.com/office/drawing/2014/main" id="{25272A4F-E7B1-45A6-A8A3-4ABDD554D7AB}"/>
+                <a16:creationId xmlns:a16="http://schemas.microsoft.com/office/drawing/2014/main" id="{4A59BBB1-58BF-4145-AFD6-C9383D8C104D}"/>
               </a:ext>
             </a:extLst>
           </p:cNvPr>
@@ -13742,7 +13742,7 @@
           <p:cNvPr id="6" name="">
             <a:extLst xmlns:a="http://schemas.openxmlformats.org/drawingml/2006/main">
               <a:ext uri="{FF2B5EF4-FFF2-40B4-BE49-F238E27FC236}">
-                <a16:creationId xmlns:a16="http://schemas.microsoft.com/office/drawing/2014/main" id="{D93C947B-E119-4EF7-A572-59F841C65821}"/>
+                <a16:creationId xmlns:a16="http://schemas.microsoft.com/office/drawing/2014/main" id="{D1FBC9C4-0D4A-4A52-81AC-992D48E21624}"/>
               </a:ext>
             </a:extLst>
           </p:cNvPr>
@@ -13792,7 +13792,7 @@
           <p:cNvPr id="7" name="">
             <a:extLst xmlns:a="http://schemas.openxmlformats.org/drawingml/2006/main">
               <a:ext uri="{FF2B5EF4-FFF2-40B4-BE49-F238E27FC236}">
-                <a16:creationId xmlns:a16="http://schemas.microsoft.com/office/drawing/2014/main" id="{6AB36620-3A77-467B-AE3F-090258A943AF}"/>
+                <a16:creationId xmlns:a16="http://schemas.microsoft.com/office/drawing/2014/main" id="{DBA420BD-996A-4AAB-B28D-13F16A12F3E4}"/>
               </a:ext>
             </a:extLst>
           </p:cNvPr>
@@ -13827,7 +13827,7 @@
           <p:cNvPr id="8" name="">
             <a:extLst xmlns:a="http://schemas.openxmlformats.org/drawingml/2006/main">
               <a:ext uri="{FF2B5EF4-FFF2-40B4-BE49-F238E27FC236}">
-                <a16:creationId xmlns:a16="http://schemas.microsoft.com/office/drawing/2014/main" id="{F8E3ED5F-8777-42F2-B9E8-C494EA996DD1}"/>
+                <a16:creationId xmlns:a16="http://schemas.microsoft.com/office/drawing/2014/main" id="{4D528109-BB00-4D5E-BEFC-96C158309E33}"/>
               </a:ext>
             </a:extLst>
           </p:cNvPr>
@@ -13877,7 +13877,7 @@
           <p:cNvPr id="9" name="">
             <a:extLst xmlns:a="http://schemas.openxmlformats.org/drawingml/2006/main">
               <a:ext uri="{FF2B5EF4-FFF2-40B4-BE49-F238E27FC236}">
-                <a16:creationId xmlns:a16="http://schemas.microsoft.com/office/drawing/2014/main" id="{AAF0DF6A-9119-4C8D-BDE1-CCB53430D520}"/>
+                <a16:creationId xmlns:a16="http://schemas.microsoft.com/office/drawing/2014/main" id="{44D8524F-1DF0-488C-A034-206CE6D079EE}"/>
               </a:ext>
             </a:extLst>
           </p:cNvPr>
@@ -13927,7 +13927,7 @@
           <p:cNvPr id="10" name="">
             <a:extLst xmlns:a="http://schemas.openxmlformats.org/drawingml/2006/main">
               <a:ext uri="{FF2B5EF4-FFF2-40B4-BE49-F238E27FC236}">
-                <a16:creationId xmlns:a16="http://schemas.microsoft.com/office/drawing/2014/main" id="{932FF24F-254B-471C-98F1-BCFD510ED671}"/>
+                <a16:creationId xmlns:a16="http://schemas.microsoft.com/office/drawing/2014/main" id="{2E1D422B-BC3A-4FE5-8AB4-28AA2CDC624A}"/>
               </a:ext>
             </a:extLst>
           </p:cNvPr>
@@ -13962,7 +13962,7 @@
           <p:cNvPr id="11" name="">
             <a:extLst xmlns:a="http://schemas.openxmlformats.org/drawingml/2006/main">
               <a:ext uri="{FF2B5EF4-FFF2-40B4-BE49-F238E27FC236}">
-                <a16:creationId xmlns:a16="http://schemas.microsoft.com/office/drawing/2014/main" id="{3A9D70BD-BF3A-4D80-B8CC-3AC6E5A5A669}"/>
+                <a16:creationId xmlns:a16="http://schemas.microsoft.com/office/drawing/2014/main" id="{D7DB4FF6-AC16-43D4-BF87-5D70A37B2347}"/>
               </a:ext>
             </a:extLst>
           </p:cNvPr>
@@ -14012,7 +14012,7 @@
           <p:cNvPr id="12" name="">
             <a:extLst xmlns:a="http://schemas.openxmlformats.org/drawingml/2006/main">
               <a:ext uri="{FF2B5EF4-FFF2-40B4-BE49-F238E27FC236}">
-                <a16:creationId xmlns:a16="http://schemas.microsoft.com/office/drawing/2014/main" id="{0682A4B3-DBA8-47C8-8F07-02EC3B59C957}"/>
+                <a16:creationId xmlns:a16="http://schemas.microsoft.com/office/drawing/2014/main" id="{03C6448A-C640-44CE-9AE9-7DE00B669B72}"/>
               </a:ext>
             </a:extLst>
           </p:cNvPr>
@@ -14062,7 +14062,7 @@
           <p:cNvPr id="13" name="">
             <a:extLst xmlns:a="http://schemas.openxmlformats.org/drawingml/2006/main">
               <a:ext uri="{FF2B5EF4-FFF2-40B4-BE49-F238E27FC236}">
-                <a16:creationId xmlns:a16="http://schemas.microsoft.com/office/drawing/2014/main" id="{668809F4-B610-4D6C-8828-E33ECDD27304}"/>
+                <a16:creationId xmlns:a16="http://schemas.microsoft.com/office/drawing/2014/main" id="{20CAF458-2E04-401D-ABB1-F16A72D47AE5}"/>
               </a:ext>
             </a:extLst>
           </p:cNvPr>
@@ -14097,7 +14097,7 @@
           <p:cNvPr id="14" name="">
             <a:extLst xmlns:a="http://schemas.openxmlformats.org/drawingml/2006/main">
               <a:ext uri="{FF2B5EF4-FFF2-40B4-BE49-F238E27FC236}">
-                <a16:creationId xmlns:a16="http://schemas.microsoft.com/office/drawing/2014/main" id="{29ABB14B-35BB-4E58-9ED4-751B0F37999A}"/>
+                <a16:creationId xmlns:a16="http://schemas.microsoft.com/office/drawing/2014/main" id="{A952FC3B-6AD0-4358-A4DA-8E71F7F87619}"/>
               </a:ext>
             </a:extLst>
           </p:cNvPr>
@@ -14147,7 +14147,7 @@
           <p:cNvPr id="15" name="">
             <a:extLst xmlns:a="http://schemas.openxmlformats.org/drawingml/2006/main">
               <a:ext uri="{FF2B5EF4-FFF2-40B4-BE49-F238E27FC236}">
-                <a16:creationId xmlns:a16="http://schemas.microsoft.com/office/drawing/2014/main" id="{899A1050-2772-4E16-8CB9-17F573534C8F}"/>
+                <a16:creationId xmlns:a16="http://schemas.microsoft.com/office/drawing/2014/main" id="{887AD321-998F-4D69-ADB5-21AF7762ED89}"/>
               </a:ext>
             </a:extLst>
           </p:cNvPr>
@@ -14197,7 +14197,7 @@
           <p:cNvPr id="16" name="">
             <a:extLst xmlns:a="http://schemas.openxmlformats.org/drawingml/2006/main">
               <a:ext uri="{FF2B5EF4-FFF2-40B4-BE49-F238E27FC236}">
-                <a16:creationId xmlns:a16="http://schemas.microsoft.com/office/drawing/2014/main" id="{7AAAF558-3804-476B-969A-CB6CA2853008}"/>
+                <a16:creationId xmlns:a16="http://schemas.microsoft.com/office/drawing/2014/main" id="{75C07899-01F7-4346-B416-93B922D9378C}"/>
               </a:ext>
             </a:extLst>
           </p:cNvPr>
@@ -14232,7 +14232,7 @@
           <p:cNvPr id="17" name="">
             <a:extLst xmlns:a="http://schemas.openxmlformats.org/drawingml/2006/main">
               <a:ext uri="{FF2B5EF4-FFF2-40B4-BE49-F238E27FC236}">
-                <a16:creationId xmlns:a16="http://schemas.microsoft.com/office/drawing/2014/main" id="{374C5173-BFB4-4BE0-84B8-283DE1CDFA5B}"/>
+                <a16:creationId xmlns:a16="http://schemas.microsoft.com/office/drawing/2014/main" id="{08B14DEB-0FB1-4134-985D-44714015FDE4}"/>
               </a:ext>
             </a:extLst>
           </p:cNvPr>
@@ -14282,7 +14282,7 @@
           <p:cNvPr id="18" name="">
             <a:extLst xmlns:a="http://schemas.openxmlformats.org/drawingml/2006/main">
               <a:ext uri="{FF2B5EF4-FFF2-40B4-BE49-F238E27FC236}">
-                <a16:creationId xmlns:a16="http://schemas.microsoft.com/office/drawing/2014/main" id="{A5FBD80F-D8B3-46A5-9631-C9180445F23E}"/>
+                <a16:creationId xmlns:a16="http://schemas.microsoft.com/office/drawing/2014/main" id="{00B122E6-28DC-4546-84E2-20C06E59A275}"/>
               </a:ext>
             </a:extLst>
           </p:cNvPr>
@@ -14332,7 +14332,7 @@
           <p:cNvPr id="19" name="">
             <a:extLst xmlns:a="http://schemas.openxmlformats.org/drawingml/2006/main">
               <a:ext uri="{FF2B5EF4-FFF2-40B4-BE49-F238E27FC236}">
-                <a16:creationId xmlns:a16="http://schemas.microsoft.com/office/drawing/2014/main" id="{3E72F504-CAA5-4357-9876-6795B786438E}"/>
+                <a16:creationId xmlns:a16="http://schemas.microsoft.com/office/drawing/2014/main" id="{FF642E08-2F2A-430F-AB7D-CFF1242D4C98}"/>
               </a:ext>
             </a:extLst>
           </p:cNvPr>
@@ -14367,7 +14367,7 @@
           <p:cNvPr id="20" name="">
             <a:extLst xmlns:a="http://schemas.openxmlformats.org/drawingml/2006/main">
               <a:ext uri="{FF2B5EF4-FFF2-40B4-BE49-F238E27FC236}">
-                <a16:creationId xmlns:a16="http://schemas.microsoft.com/office/drawing/2014/main" id="{0A0958D3-5BC4-4663-B1F2-98DE8F70804B}"/>
+                <a16:creationId xmlns:a16="http://schemas.microsoft.com/office/drawing/2014/main" id="{B9C30365-20E0-444E-98E3-51E7DF4FD0D9}"/>
               </a:ext>
             </a:extLst>
           </p:cNvPr>
@@ -14417,7 +14417,7 @@
           <p:cNvPr id="21" name="">
             <a:extLst xmlns:a="http://schemas.openxmlformats.org/drawingml/2006/main">
               <a:ext uri="{FF2B5EF4-FFF2-40B4-BE49-F238E27FC236}">
-                <a16:creationId xmlns:a16="http://schemas.microsoft.com/office/drawing/2014/main" id="{EFFB93E7-1B61-4FB7-8548-0EDE99004E23}"/>
+                <a16:creationId xmlns:a16="http://schemas.microsoft.com/office/drawing/2014/main" id="{5C1657F7-2CE6-46F8-98DA-35236E90C0FA}"/>
               </a:ext>
             </a:extLst>
           </p:cNvPr>
@@ -14467,7 +14467,7 @@
           <p:cNvPr id="22" name="">
             <a:extLst xmlns:a="http://schemas.openxmlformats.org/drawingml/2006/main">
               <a:ext uri="{FF2B5EF4-FFF2-40B4-BE49-F238E27FC236}">
-                <a16:creationId xmlns:a16="http://schemas.microsoft.com/office/drawing/2014/main" id="{9A619A6F-E93A-4AFE-BE7E-B11A5A1E2897}"/>
+                <a16:creationId xmlns:a16="http://schemas.microsoft.com/office/drawing/2014/main" id="{1C9335B2-65F1-4135-819F-794E93D4179D}"/>
               </a:ext>
             </a:extLst>
           </p:cNvPr>
@@ -14502,7 +14502,7 @@
           <p:cNvPr id="23" name="">
             <a:extLst xmlns:a="http://schemas.openxmlformats.org/drawingml/2006/main">
               <a:ext uri="{FF2B5EF4-FFF2-40B4-BE49-F238E27FC236}">
-                <a16:creationId xmlns:a16="http://schemas.microsoft.com/office/drawing/2014/main" id="{E06B2D7F-91ED-40DB-B4B6-47C7773D71D6}"/>
+                <a16:creationId xmlns:a16="http://schemas.microsoft.com/office/drawing/2014/main" id="{0EF1B561-F99A-4350-9FE4-5D0EF88D6CD4}"/>
               </a:ext>
             </a:extLst>
           </p:cNvPr>
@@ -14552,7 +14552,7 @@
           <p:cNvPr id="24" name="">
             <a:extLst xmlns:a="http://schemas.openxmlformats.org/drawingml/2006/main">
               <a:ext uri="{FF2B5EF4-FFF2-40B4-BE49-F238E27FC236}">
-                <a16:creationId xmlns:a16="http://schemas.microsoft.com/office/drawing/2014/main" id="{5D28934E-1F71-446B-AD1C-195130566C22}"/>
+                <a16:creationId xmlns:a16="http://schemas.microsoft.com/office/drawing/2014/main" id="{8D8C5812-39F7-4A9D-9A40-E7682FBB4FCB}"/>
               </a:ext>
             </a:extLst>
           </p:cNvPr>
@@ -14602,7 +14602,7 @@
           <p:cNvPr id="25" name="">
             <a:extLst xmlns:a="http://schemas.openxmlformats.org/drawingml/2006/main">
               <a:ext uri="{FF2B5EF4-FFF2-40B4-BE49-F238E27FC236}">
-                <a16:creationId xmlns:a16="http://schemas.microsoft.com/office/drawing/2014/main" id="{92FE3BCC-003D-4CA3-8BB4-9B463B123792}"/>
+                <a16:creationId xmlns:a16="http://schemas.microsoft.com/office/drawing/2014/main" id="{508E65E5-E237-4E68-93D1-BAF4E2A77E7F}"/>
               </a:ext>
             </a:extLst>
           </p:cNvPr>
@@ -14637,7 +14637,7 @@
           <p:cNvPr id="26" name="">
             <a:extLst xmlns:a="http://schemas.openxmlformats.org/drawingml/2006/main">
               <a:ext uri="{FF2B5EF4-FFF2-40B4-BE49-F238E27FC236}">
-                <a16:creationId xmlns:a16="http://schemas.microsoft.com/office/drawing/2014/main" id="{D3835BFD-E5FE-4A5D-B9DE-19F1AFDF625E}"/>
+                <a16:creationId xmlns:a16="http://schemas.microsoft.com/office/drawing/2014/main" id="{AB5AEE40-FE4A-49F0-A170-C50BA323A53A}"/>
               </a:ext>
             </a:extLst>
           </p:cNvPr>
@@ -14687,7 +14687,7 @@
           <p:cNvPr id="27" name="">
             <a:extLst xmlns:a="http://schemas.openxmlformats.org/drawingml/2006/main">
               <a:ext uri="{FF2B5EF4-FFF2-40B4-BE49-F238E27FC236}">
-                <a16:creationId xmlns:a16="http://schemas.microsoft.com/office/drawing/2014/main" id="{7143EDB3-1CE3-4B6C-B056-257DA670BC9E}"/>
+                <a16:creationId xmlns:a16="http://schemas.microsoft.com/office/drawing/2014/main" id="{0DC86115-2BC1-49C5-A86C-CAD9F5F48A14}"/>
               </a:ext>
             </a:extLst>
           </p:cNvPr>
@@ -14737,7 +14737,7 @@
           <p:cNvPr id="28" name="">
             <a:extLst xmlns:a="http://schemas.openxmlformats.org/drawingml/2006/main">
               <a:ext uri="{FF2B5EF4-FFF2-40B4-BE49-F238E27FC236}">
-                <a16:creationId xmlns:a16="http://schemas.microsoft.com/office/drawing/2014/main" id="{9FA9D1B9-B958-41B5-BEBA-655CB6A94F33}"/>
+                <a16:creationId xmlns:a16="http://schemas.microsoft.com/office/drawing/2014/main" id="{678BD72C-AD7C-409C-82E9-727E52064F72}"/>
               </a:ext>
             </a:extLst>
           </p:cNvPr>
@@ -14772,7 +14772,7 @@
           <p:cNvPr id="29" name="">
             <a:extLst xmlns:a="http://schemas.openxmlformats.org/drawingml/2006/main">
               <a:ext uri="{FF2B5EF4-FFF2-40B4-BE49-F238E27FC236}">
-                <a16:creationId xmlns:a16="http://schemas.microsoft.com/office/drawing/2014/main" id="{08E58F22-79C8-4945-9073-E38075B3C64C}"/>
+                <a16:creationId xmlns:a16="http://schemas.microsoft.com/office/drawing/2014/main" id="{500D7B78-3BFF-4D3D-9984-CBB8BCC5058F}"/>
               </a:ext>
             </a:extLst>
           </p:cNvPr>
@@ -14822,7 +14822,7 @@
           <p:cNvPr id="30" name="">
             <a:extLst xmlns:a="http://schemas.openxmlformats.org/drawingml/2006/main">
               <a:ext uri="{FF2B5EF4-FFF2-40B4-BE49-F238E27FC236}">
-                <a16:creationId xmlns:a16="http://schemas.microsoft.com/office/drawing/2014/main" id="{8FC42783-1C53-420A-AB95-BC40B396FE5B}"/>
+                <a16:creationId xmlns:a16="http://schemas.microsoft.com/office/drawing/2014/main" id="{7F647791-EEDF-4503-94DE-FD7AA28174D5}"/>
               </a:ext>
             </a:extLst>
           </p:cNvPr>
@@ -14872,7 +14872,7 @@
           <p:cNvPr id="31" name="">
             <a:extLst xmlns:a="http://schemas.openxmlformats.org/drawingml/2006/main">
               <a:ext uri="{FF2B5EF4-FFF2-40B4-BE49-F238E27FC236}">
-                <a16:creationId xmlns:a16="http://schemas.microsoft.com/office/drawing/2014/main" id="{E32493B2-D513-43EC-A375-DEEF4CD24F59}"/>
+                <a16:creationId xmlns:a16="http://schemas.microsoft.com/office/drawing/2014/main" id="{A8D56051-3F44-42FB-A04C-97702C9F74D9}"/>
               </a:ext>
             </a:extLst>
           </p:cNvPr>
@@ -14907,7 +14907,7 @@
           <p:cNvPr id="32" name="">
             <a:extLst xmlns:a="http://schemas.openxmlformats.org/drawingml/2006/main">
               <a:ext uri="{FF2B5EF4-FFF2-40B4-BE49-F238E27FC236}">
-                <a16:creationId xmlns:a16="http://schemas.microsoft.com/office/drawing/2014/main" id="{770CB6F8-1535-41C6-8CC4-293AC3D3A21C}"/>
+                <a16:creationId xmlns:a16="http://schemas.microsoft.com/office/drawing/2014/main" id="{DF64B25B-EBA1-4911-85FB-B16E5E4771D7}"/>
               </a:ext>
             </a:extLst>
           </p:cNvPr>
@@ -14957,7 +14957,7 @@
           <p:cNvPr id="33" name="">
             <a:extLst xmlns:a="http://schemas.openxmlformats.org/drawingml/2006/main">
               <a:ext uri="{FF2B5EF4-FFF2-40B4-BE49-F238E27FC236}">
-                <a16:creationId xmlns:a16="http://schemas.microsoft.com/office/drawing/2014/main" id="{6496644B-97CD-4B7D-9B26-2CF9F9EF984D}"/>
+                <a16:creationId xmlns:a16="http://schemas.microsoft.com/office/drawing/2014/main" id="{24CB8F57-7764-4AD8-A835-E5B3451125A5}"/>
               </a:ext>
             </a:extLst>
           </p:cNvPr>
@@ -15007,7 +15007,7 @@
           <p:cNvPr id="34" name="">
             <a:extLst xmlns:a="http://schemas.openxmlformats.org/drawingml/2006/main">
               <a:ext uri="{FF2B5EF4-FFF2-40B4-BE49-F238E27FC236}">
-                <a16:creationId xmlns:a16="http://schemas.microsoft.com/office/drawing/2014/main" id="{DC479C88-09DE-4334-AD59-6F5713BB410F}"/>
+                <a16:creationId xmlns:a16="http://schemas.microsoft.com/office/drawing/2014/main" id="{80C63314-C7A9-42A6-B0EA-A8A68D731B07}"/>
               </a:ext>
             </a:extLst>
           </p:cNvPr>
@@ -15042,7 +15042,7 @@
           <p:cNvPr id="35" name="">
             <a:extLst xmlns:a="http://schemas.openxmlformats.org/drawingml/2006/main">
               <a:ext uri="{FF2B5EF4-FFF2-40B4-BE49-F238E27FC236}">
-                <a16:creationId xmlns:a16="http://schemas.microsoft.com/office/drawing/2014/main" id="{CFD7C83C-79E2-47CF-AF19-830573ED6E69}"/>
+                <a16:creationId xmlns:a16="http://schemas.microsoft.com/office/drawing/2014/main" id="{09C296CB-7645-4B95-89B9-D9054FCF5970}"/>
               </a:ext>
             </a:extLst>
           </p:cNvPr>
@@ -15092,7 +15092,7 @@
           <p:cNvPr id="36" name="">
             <a:extLst xmlns:a="http://schemas.openxmlformats.org/drawingml/2006/main">
               <a:ext uri="{FF2B5EF4-FFF2-40B4-BE49-F238E27FC236}">
-                <a16:creationId xmlns:a16="http://schemas.microsoft.com/office/drawing/2014/main" id="{7B1E3F2F-0AC9-4A34-AE3E-8081CF7F37D9}"/>
+                <a16:creationId xmlns:a16="http://schemas.microsoft.com/office/drawing/2014/main" id="{76940C01-D040-4317-87C5-3EAD7C066476}"/>
               </a:ext>
             </a:extLst>
           </p:cNvPr>
@@ -15142,7 +15142,7 @@
           <p:cNvPr id="37" name="">
             <a:extLst xmlns:a="http://schemas.openxmlformats.org/drawingml/2006/main">
               <a:ext uri="{FF2B5EF4-FFF2-40B4-BE49-F238E27FC236}">
-                <a16:creationId xmlns:a16="http://schemas.microsoft.com/office/drawing/2014/main" id="{753781B1-2E91-4726-AC29-E7A7CB7ED1D6}"/>
+                <a16:creationId xmlns:a16="http://schemas.microsoft.com/office/drawing/2014/main" id="{088638F9-7FD3-4B61-8A2A-1C72F9DEDDDC}"/>
               </a:ext>
             </a:extLst>
           </p:cNvPr>
@@ -15192,7 +15192,7 @@
           <p:cNvPr id="38" name="">
             <a:extLst xmlns:a="http://schemas.openxmlformats.org/drawingml/2006/main">
               <a:ext uri="{FF2B5EF4-FFF2-40B4-BE49-F238E27FC236}">
-                <a16:creationId xmlns:a16="http://schemas.microsoft.com/office/drawing/2014/main" id="{04F39308-EA90-4735-B49E-23F11CFC4A9C}"/>
+                <a16:creationId xmlns:a16="http://schemas.microsoft.com/office/drawing/2014/main" id="{57032A86-293C-4B5C-AA60-D0F19A3DCC02}"/>
               </a:ext>
             </a:extLst>
           </p:cNvPr>
@@ -15240,7 +15240,7 @@
     </p:spTree>
     <p:extLst>
       <p:ext uri="{BB962C8B-B14F-4D97-AF65-F5344CB8AC3E}">
-        <p14:creationId xmlns:p14="http://schemas.microsoft.com/office/powerpoint/2010/main" val="2041211503"/>
+        <p14:creationId xmlns:p14="http://schemas.microsoft.com/office/powerpoint/2010/main" val="1126863630"/>
       </p:ext>
     </p:extLst>
   </p:cSld>
@@ -15271,7 +15271,7 @@
           <p:cNvPr id="37" name="">
             <a:extLst xmlns:a="http://schemas.openxmlformats.org/drawingml/2006/main">
               <a:ext uri="{FF2B5EF4-FFF2-40B4-BE49-F238E27FC236}">
-                <a16:creationId xmlns:a16="http://schemas.microsoft.com/office/drawing/2014/main" id="{4E59F089-3F89-47AF-829A-75047FD9DB76}"/>
+                <a16:creationId xmlns:a16="http://schemas.microsoft.com/office/drawing/2014/main" id="{2E9013D5-A312-4E92-82AB-FE957B9CCC54}"/>
               </a:ext>
             </a:extLst>
           </p:cNvPr>
@@ -15321,7 +15321,7 @@
           <p:cNvPr id="2" name="">
             <a:extLst xmlns:a="http://schemas.openxmlformats.org/drawingml/2006/main">
               <a:ext uri="{FF2B5EF4-FFF2-40B4-BE49-F238E27FC236}">
-                <a16:creationId xmlns:a16="http://schemas.microsoft.com/office/drawing/2014/main" id="{FCD8AA81-FF81-46CB-AD87-9A5294CA071D}"/>
+                <a16:creationId xmlns:a16="http://schemas.microsoft.com/office/drawing/2014/main" id="{3F2F363D-4E64-4DCD-B10D-4A184070DFAE}"/>
               </a:ext>
             </a:extLst>
           </p:cNvPr>
@@ -15371,7 +15371,7 @@
           <p:cNvPr id="3" name="">
             <a:extLst xmlns:a="http://schemas.openxmlformats.org/drawingml/2006/main">
               <a:ext uri="{FF2B5EF4-FFF2-40B4-BE49-F238E27FC236}">
-                <a16:creationId xmlns:a16="http://schemas.microsoft.com/office/drawing/2014/main" id="{40905EFA-04D0-49CB-8DB4-9BD579622AF6}"/>
+                <a16:creationId xmlns:a16="http://schemas.microsoft.com/office/drawing/2014/main" id="{EF38C833-EB4C-4811-82F4-4525611EFD64}"/>
               </a:ext>
             </a:extLst>
           </p:cNvPr>
@@ -15402,7 +15402,7 @@
           <p:cNvPr id="4" name="">
             <a:extLst xmlns:a="http://schemas.openxmlformats.org/drawingml/2006/main">
               <a:ext uri="{FF2B5EF4-FFF2-40B4-BE49-F238E27FC236}">
-                <a16:creationId xmlns:a16="http://schemas.microsoft.com/office/drawing/2014/main" id="{1C990DBE-3FDB-4F51-A342-29C02BA86710}"/>
+                <a16:creationId xmlns:a16="http://schemas.microsoft.com/office/drawing/2014/main" id="{36E5A4ED-FFF7-4484-8DB0-E057C6E3F659}"/>
               </a:ext>
             </a:extLst>
           </p:cNvPr>
@@ -15452,7 +15452,7 @@
           <p:cNvPr id="5" name="">
             <a:extLst xmlns:a="http://schemas.openxmlformats.org/drawingml/2006/main">
               <a:ext uri="{FF2B5EF4-FFF2-40B4-BE49-F238E27FC236}">
-                <a16:creationId xmlns:a16="http://schemas.microsoft.com/office/drawing/2014/main" id="{640594A2-45CD-4863-897B-E9492798835B}"/>
+                <a16:creationId xmlns:a16="http://schemas.microsoft.com/office/drawing/2014/main" id="{725933D7-B042-43C2-AF3B-AD8105B4EA97}"/>
               </a:ext>
             </a:extLst>
           </p:cNvPr>
@@ -15487,7 +15487,7 @@
           <p:cNvPr id="6" name="">
             <a:extLst xmlns:a="http://schemas.openxmlformats.org/drawingml/2006/main">
               <a:ext uri="{FF2B5EF4-FFF2-40B4-BE49-F238E27FC236}">
-                <a16:creationId xmlns:a16="http://schemas.microsoft.com/office/drawing/2014/main" id="{7748E229-53E6-4412-9C22-6709C294A808}"/>
+                <a16:creationId xmlns:a16="http://schemas.microsoft.com/office/drawing/2014/main" id="{C04A92CE-AE42-41C2-8126-1BF67FF37385}"/>
               </a:ext>
             </a:extLst>
           </p:cNvPr>
@@ -15537,7 +15537,7 @@
           <p:cNvPr id="7" name="">
             <a:extLst xmlns:a="http://schemas.openxmlformats.org/drawingml/2006/main">
               <a:ext uri="{FF2B5EF4-FFF2-40B4-BE49-F238E27FC236}">
-                <a16:creationId xmlns:a16="http://schemas.microsoft.com/office/drawing/2014/main" id="{35AF31EE-A231-410C-BBFE-EC01A9EB170F}"/>
+                <a16:creationId xmlns:a16="http://schemas.microsoft.com/office/drawing/2014/main" id="{ADC085CB-C9E6-4129-8A56-7F4B828FED84}"/>
               </a:ext>
             </a:extLst>
           </p:cNvPr>
@@ -15587,7 +15587,7 @@
           <p:cNvPr id="8" name="">
             <a:extLst xmlns:a="http://schemas.openxmlformats.org/drawingml/2006/main">
               <a:ext uri="{FF2B5EF4-FFF2-40B4-BE49-F238E27FC236}">
-                <a16:creationId xmlns:a16="http://schemas.microsoft.com/office/drawing/2014/main" id="{2BD16653-38D3-47C6-B25B-CDA41741EDE7}"/>
+                <a16:creationId xmlns:a16="http://schemas.microsoft.com/office/drawing/2014/main" id="{3DA94503-BC54-4BC5-820C-B9957CCED287}"/>
               </a:ext>
             </a:extLst>
           </p:cNvPr>
@@ -15637,7 +15637,7 @@
           <p:cNvPr id="9" name="">
             <a:extLst xmlns:a="http://schemas.openxmlformats.org/drawingml/2006/main">
               <a:ext uri="{FF2B5EF4-FFF2-40B4-BE49-F238E27FC236}">
-                <a16:creationId xmlns:a16="http://schemas.microsoft.com/office/drawing/2014/main" id="{EA5C6A25-6D2E-4155-ACED-F05EC41614AC}"/>
+                <a16:creationId xmlns:a16="http://schemas.microsoft.com/office/drawing/2014/main" id="{5397F90F-E83A-45DB-BC05-B9A48422E4BD}"/>
               </a:ext>
             </a:extLst>
           </p:cNvPr>
@@ -15672,7 +15672,7 @@
           <p:cNvPr id="10" name="">
             <a:extLst xmlns:a="http://schemas.openxmlformats.org/drawingml/2006/main">
               <a:ext uri="{FF2B5EF4-FFF2-40B4-BE49-F238E27FC236}">
-                <a16:creationId xmlns:a16="http://schemas.microsoft.com/office/drawing/2014/main" id="{C3DC10B8-FFFA-4AD0-AE6B-8A069E467879}"/>
+                <a16:creationId xmlns:a16="http://schemas.microsoft.com/office/drawing/2014/main" id="{ABDD5DD9-B266-4B3E-A0E9-5A3499D4D4EC}"/>
               </a:ext>
             </a:extLst>
           </p:cNvPr>
@@ -15722,7 +15722,7 @@
           <p:cNvPr id="11" name="">
             <a:extLst xmlns:a="http://schemas.openxmlformats.org/drawingml/2006/main">
               <a:ext uri="{FF2B5EF4-FFF2-40B4-BE49-F238E27FC236}">
-                <a16:creationId xmlns:a16="http://schemas.microsoft.com/office/drawing/2014/main" id="{F9CF6FCF-06F7-4DDD-873F-1CC1CEADDD6C}"/>
+                <a16:creationId xmlns:a16="http://schemas.microsoft.com/office/drawing/2014/main" id="{9D6BA07D-4835-4875-92DF-76644121EACA}"/>
               </a:ext>
             </a:extLst>
           </p:cNvPr>
@@ -15772,7 +15772,7 @@
           <p:cNvPr id="12" name="">
             <a:extLst xmlns:a="http://schemas.openxmlformats.org/drawingml/2006/main">
               <a:ext uri="{FF2B5EF4-FFF2-40B4-BE49-F238E27FC236}">
-                <a16:creationId xmlns:a16="http://schemas.microsoft.com/office/drawing/2014/main" id="{6A45F409-AEAB-4458-A500-CD3E0DFB554B}"/>
+                <a16:creationId xmlns:a16="http://schemas.microsoft.com/office/drawing/2014/main" id="{D98227F2-7507-41DB-AAA2-98E1E10D4EB6}"/>
               </a:ext>
             </a:extLst>
           </p:cNvPr>
@@ -15822,7 +15822,7 @@
           <p:cNvPr id="13" name="">
             <a:extLst xmlns:a="http://schemas.openxmlformats.org/drawingml/2006/main">
               <a:ext uri="{FF2B5EF4-FFF2-40B4-BE49-F238E27FC236}">
-                <a16:creationId xmlns:a16="http://schemas.microsoft.com/office/drawing/2014/main" id="{9013C6C7-3192-433D-9051-F9CCE2D1BE81}"/>
+                <a16:creationId xmlns:a16="http://schemas.microsoft.com/office/drawing/2014/main" id="{E682DF7F-7FBC-492D-BFA6-409B210C6AEC}"/>
               </a:ext>
             </a:extLst>
           </p:cNvPr>
@@ -15857,7 +15857,7 @@
           <p:cNvPr id="14" name="">
             <a:extLst xmlns:a="http://schemas.openxmlformats.org/drawingml/2006/main">
               <a:ext uri="{FF2B5EF4-FFF2-40B4-BE49-F238E27FC236}">
-                <a16:creationId xmlns:a16="http://schemas.microsoft.com/office/drawing/2014/main" id="{BF6BCB02-7863-41F4-A9F8-4D8E494D88FF}"/>
+                <a16:creationId xmlns:a16="http://schemas.microsoft.com/office/drawing/2014/main" id="{19710D7F-F3DB-4908-AD23-3DAAF2B42CE7}"/>
               </a:ext>
             </a:extLst>
           </p:cNvPr>
@@ -15907,7 +15907,7 @@
           <p:cNvPr id="15" name="">
             <a:extLst xmlns:a="http://schemas.openxmlformats.org/drawingml/2006/main">
               <a:ext uri="{FF2B5EF4-FFF2-40B4-BE49-F238E27FC236}">
-                <a16:creationId xmlns:a16="http://schemas.microsoft.com/office/drawing/2014/main" id="{EC24C925-D891-4152-BE59-9EC7791D23B8}"/>
+                <a16:creationId xmlns:a16="http://schemas.microsoft.com/office/drawing/2014/main" id="{F7DFE4BA-727D-44FC-96B5-1501BE47D8BD}"/>
               </a:ext>
             </a:extLst>
           </p:cNvPr>
@@ -15957,7 +15957,7 @@
           <p:cNvPr id="16" name="">
             <a:extLst xmlns:a="http://schemas.openxmlformats.org/drawingml/2006/main">
               <a:ext uri="{FF2B5EF4-FFF2-40B4-BE49-F238E27FC236}">
-                <a16:creationId xmlns:a16="http://schemas.microsoft.com/office/drawing/2014/main" id="{6C11B26D-ECE7-4634-B0A2-C80DA8C3C185}"/>
+                <a16:creationId xmlns:a16="http://schemas.microsoft.com/office/drawing/2014/main" id="{D086133D-C9D8-4D83-97C8-3DF272B1928B}"/>
               </a:ext>
             </a:extLst>
           </p:cNvPr>
@@ -16007,7 +16007,7 @@
           <p:cNvPr id="17" name="">
             <a:extLst xmlns:a="http://schemas.openxmlformats.org/drawingml/2006/main">
               <a:ext uri="{FF2B5EF4-FFF2-40B4-BE49-F238E27FC236}">
-                <a16:creationId xmlns:a16="http://schemas.microsoft.com/office/drawing/2014/main" id="{2F18A984-EE45-409A-954F-6AFBBD1697A8}"/>
+                <a16:creationId xmlns:a16="http://schemas.microsoft.com/office/drawing/2014/main" id="{B4469A38-20D5-4554-92E5-DF56307FC77A}"/>
               </a:ext>
             </a:extLst>
           </p:cNvPr>
@@ -16042,7 +16042,7 @@
           <p:cNvPr id="18" name="">
             <a:extLst xmlns:a="http://schemas.openxmlformats.org/drawingml/2006/main">
               <a:ext uri="{FF2B5EF4-FFF2-40B4-BE49-F238E27FC236}">
-                <a16:creationId xmlns:a16="http://schemas.microsoft.com/office/drawing/2014/main" id="{53CBFCD8-FBF4-4DD2-97D2-EB11C6937A2D}"/>
+                <a16:creationId xmlns:a16="http://schemas.microsoft.com/office/drawing/2014/main" id="{C935ED35-869C-4366-94BB-B4F28728DA27}"/>
               </a:ext>
             </a:extLst>
           </p:cNvPr>
@@ -16092,7 +16092,7 @@
           <p:cNvPr id="19" name="">
             <a:extLst xmlns:a="http://schemas.openxmlformats.org/drawingml/2006/main">
               <a:ext uri="{FF2B5EF4-FFF2-40B4-BE49-F238E27FC236}">
-                <a16:creationId xmlns:a16="http://schemas.microsoft.com/office/drawing/2014/main" id="{D1194D60-766D-4853-A259-D550889F0FD2}"/>
+                <a16:creationId xmlns:a16="http://schemas.microsoft.com/office/drawing/2014/main" id="{A2F9F219-189C-4EB3-B0B4-946DD0915835}"/>
               </a:ext>
             </a:extLst>
           </p:cNvPr>
@@ -16142,7 +16142,7 @@
           <p:cNvPr id="20" name="">
             <a:extLst xmlns:a="http://schemas.openxmlformats.org/drawingml/2006/main">
               <a:ext uri="{FF2B5EF4-FFF2-40B4-BE49-F238E27FC236}">
-                <a16:creationId xmlns:a16="http://schemas.microsoft.com/office/drawing/2014/main" id="{8ED3E889-EC00-414C-BB6A-5EB97EFE1710}"/>
+                <a16:creationId xmlns:a16="http://schemas.microsoft.com/office/drawing/2014/main" id="{BC32468B-36E6-44BE-A092-E92236A23A6D}"/>
               </a:ext>
             </a:extLst>
           </p:cNvPr>
@@ -16192,7 +16192,7 @@
           <p:cNvPr id="21" name="">
             <a:extLst xmlns:a="http://schemas.openxmlformats.org/drawingml/2006/main">
               <a:ext uri="{FF2B5EF4-FFF2-40B4-BE49-F238E27FC236}">
-                <a16:creationId xmlns:a16="http://schemas.microsoft.com/office/drawing/2014/main" id="{0D4F11EC-ACE1-4D39-9FFE-C2F354D3EF48}"/>
+                <a16:creationId xmlns:a16="http://schemas.microsoft.com/office/drawing/2014/main" id="{07519F01-3F36-4CBD-9996-EE2386871D6B}"/>
               </a:ext>
             </a:extLst>
           </p:cNvPr>
@@ -16227,7 +16227,7 @@
           <p:cNvPr id="22" name="">
             <a:extLst xmlns:a="http://schemas.openxmlformats.org/drawingml/2006/main">
               <a:ext uri="{FF2B5EF4-FFF2-40B4-BE49-F238E27FC236}">
-                <a16:creationId xmlns:a16="http://schemas.microsoft.com/office/drawing/2014/main" id="{6C19FF47-43E1-4643-8880-6AAC9F5D55F2}"/>
+                <a16:creationId xmlns:a16="http://schemas.microsoft.com/office/drawing/2014/main" id="{9431CEC2-CB56-4BCB-BAA3-40A3ACF6B61A}"/>
               </a:ext>
             </a:extLst>
           </p:cNvPr>
@@ -16277,7 +16277,7 @@
           <p:cNvPr id="23" name="">
             <a:extLst xmlns:a="http://schemas.openxmlformats.org/drawingml/2006/main">
               <a:ext uri="{FF2B5EF4-FFF2-40B4-BE49-F238E27FC236}">
-                <a16:creationId xmlns:a16="http://schemas.microsoft.com/office/drawing/2014/main" id="{243B5AE0-7BE1-4FAC-ABAE-7AA757996D33}"/>
+                <a16:creationId xmlns:a16="http://schemas.microsoft.com/office/drawing/2014/main" id="{A9B3C257-FA1D-4757-9926-3D45315E63A5}"/>
               </a:ext>
             </a:extLst>
           </p:cNvPr>
@@ -16327,7 +16327,7 @@
           <p:cNvPr id="24" name="">
             <a:extLst xmlns:a="http://schemas.openxmlformats.org/drawingml/2006/main">
               <a:ext uri="{FF2B5EF4-FFF2-40B4-BE49-F238E27FC236}">
-                <a16:creationId xmlns:a16="http://schemas.microsoft.com/office/drawing/2014/main" id="{4575FAD4-FF78-438E-85D0-518BD78E7DCF}"/>
+                <a16:creationId xmlns:a16="http://schemas.microsoft.com/office/drawing/2014/main" id="{E57CFCA8-5B35-4B08-9676-A732C4852A50}"/>
               </a:ext>
             </a:extLst>
           </p:cNvPr>
@@ -16377,7 +16377,7 @@
           <p:cNvPr id="25" name="">
             <a:extLst xmlns:a="http://schemas.openxmlformats.org/drawingml/2006/main">
               <a:ext uri="{FF2B5EF4-FFF2-40B4-BE49-F238E27FC236}">
-                <a16:creationId xmlns:a16="http://schemas.microsoft.com/office/drawing/2014/main" id="{D3D0A61B-C4DC-4CE9-8A5A-8661F4B7F3CD}"/>
+                <a16:creationId xmlns:a16="http://schemas.microsoft.com/office/drawing/2014/main" id="{491F2199-E1CB-46C9-A101-F670529522DF}"/>
               </a:ext>
             </a:extLst>
           </p:cNvPr>
@@ -16412,7 +16412,7 @@
           <p:cNvPr id="26" name="">
             <a:extLst xmlns:a="http://schemas.openxmlformats.org/drawingml/2006/main">
               <a:ext uri="{FF2B5EF4-FFF2-40B4-BE49-F238E27FC236}">
-                <a16:creationId xmlns:a16="http://schemas.microsoft.com/office/drawing/2014/main" id="{15C1A39A-38F3-4E0B-8AE8-D97B8FFF44D8}"/>
+                <a16:creationId xmlns:a16="http://schemas.microsoft.com/office/drawing/2014/main" id="{C49896A4-83BF-4FC5-99D7-C9696940B2B9}"/>
               </a:ext>
             </a:extLst>
           </p:cNvPr>
@@ -16462,7 +16462,7 @@
           <p:cNvPr id="27" name="">
             <a:extLst xmlns:a="http://schemas.openxmlformats.org/drawingml/2006/main">
               <a:ext uri="{FF2B5EF4-FFF2-40B4-BE49-F238E27FC236}">
-                <a16:creationId xmlns:a16="http://schemas.microsoft.com/office/drawing/2014/main" id="{860138EB-7992-49FF-AED7-4673489EBBF8}"/>
+                <a16:creationId xmlns:a16="http://schemas.microsoft.com/office/drawing/2014/main" id="{B3D655D9-B8D0-4FB4-8A95-482BCF5E2C77}"/>
               </a:ext>
             </a:extLst>
           </p:cNvPr>
@@ -16512,7 +16512,7 @@
           <p:cNvPr id="28" name="">
             <a:extLst xmlns:a="http://schemas.openxmlformats.org/drawingml/2006/main">
               <a:ext uri="{FF2B5EF4-FFF2-40B4-BE49-F238E27FC236}">
-                <a16:creationId xmlns:a16="http://schemas.microsoft.com/office/drawing/2014/main" id="{226B653A-604D-4A8F-A581-958B264F94A2}"/>
+                <a16:creationId xmlns:a16="http://schemas.microsoft.com/office/drawing/2014/main" id="{C5C88C3C-35BD-40DD-A880-34098C753114}"/>
               </a:ext>
             </a:extLst>
           </p:cNvPr>
@@ -16545,7 +16545,7 @@
           <p:cNvPr id="29" name="">
             <a:extLst xmlns:a="http://schemas.openxmlformats.org/drawingml/2006/main">
               <a:ext uri="{FF2B5EF4-FFF2-40B4-BE49-F238E27FC236}">
-                <a16:creationId xmlns:a16="http://schemas.microsoft.com/office/drawing/2014/main" id="{6E67D3E7-9FCF-4E87-A027-8D0DCADD38AC}"/>
+                <a16:creationId xmlns:a16="http://schemas.microsoft.com/office/drawing/2014/main" id="{A7DC0BD9-32BC-4FCC-9D04-07CD5D3517CD}"/>
               </a:ext>
             </a:extLst>
           </p:cNvPr>
@@ -16595,7 +16595,7 @@
           <p:cNvPr id="30" name="">
             <a:extLst xmlns:a="http://schemas.openxmlformats.org/drawingml/2006/main">
               <a:ext uri="{FF2B5EF4-FFF2-40B4-BE49-F238E27FC236}">
-                <a16:creationId xmlns:a16="http://schemas.microsoft.com/office/drawing/2014/main" id="{3E6872C7-4447-4634-8CF5-542D3C011C2E}"/>
+                <a16:creationId xmlns:a16="http://schemas.microsoft.com/office/drawing/2014/main" id="{0F7DC9CA-9415-4D36-9752-BDCEE44ECBA1}"/>
               </a:ext>
             </a:extLst>
           </p:cNvPr>
@@ -16628,7 +16628,7 @@
           <p:cNvPr id="31" name="">
             <a:extLst xmlns:a="http://schemas.openxmlformats.org/drawingml/2006/main">
               <a:ext uri="{FF2B5EF4-FFF2-40B4-BE49-F238E27FC236}">
-                <a16:creationId xmlns:a16="http://schemas.microsoft.com/office/drawing/2014/main" id="{5EE38548-C8BF-4853-8000-C08BABAD5B0D}"/>
+                <a16:creationId xmlns:a16="http://schemas.microsoft.com/office/drawing/2014/main" id="{AA2A41E1-347D-4C28-A25B-43F35ECCE8D7}"/>
               </a:ext>
             </a:extLst>
           </p:cNvPr>
@@ -16678,7 +16678,7 @@
           <p:cNvPr id="32" name="">
             <a:extLst xmlns:a="http://schemas.openxmlformats.org/drawingml/2006/main">
               <a:ext uri="{FF2B5EF4-FFF2-40B4-BE49-F238E27FC236}">
-                <a16:creationId xmlns:a16="http://schemas.microsoft.com/office/drawing/2014/main" id="{5BE90E8F-1B03-4251-97FF-CA2C52A6A964}"/>
+                <a16:creationId xmlns:a16="http://schemas.microsoft.com/office/drawing/2014/main" id="{D6FB71B7-B239-45C5-BF88-08D9B82075E4}"/>
               </a:ext>
             </a:extLst>
           </p:cNvPr>
@@ -16711,7 +16711,7 @@
           <p:cNvPr id="33" name="">
             <a:extLst xmlns:a="http://schemas.openxmlformats.org/drawingml/2006/main">
               <a:ext uri="{FF2B5EF4-FFF2-40B4-BE49-F238E27FC236}">
-                <a16:creationId xmlns:a16="http://schemas.microsoft.com/office/drawing/2014/main" id="{BA2106D3-922C-4630-8F1C-14EB1FF280C3}"/>
+                <a16:creationId xmlns:a16="http://schemas.microsoft.com/office/drawing/2014/main" id="{02E00925-3946-4D58-877F-4BE5820D6886}"/>
               </a:ext>
             </a:extLst>
           </p:cNvPr>
@@ -16761,7 +16761,7 @@
           <p:cNvPr id="34" name="">
             <a:extLst xmlns:a="http://schemas.openxmlformats.org/drawingml/2006/main">
               <a:ext uri="{FF2B5EF4-FFF2-40B4-BE49-F238E27FC236}">
-                <a16:creationId xmlns:a16="http://schemas.microsoft.com/office/drawing/2014/main" id="{8B5F9429-A1B7-4B48-A6C9-9D18EAD43B8B}"/>
+                <a16:creationId xmlns:a16="http://schemas.microsoft.com/office/drawing/2014/main" id="{F6B5B125-6E72-4D46-B239-17F1AA2C8D21}"/>
               </a:ext>
             </a:extLst>
           </p:cNvPr>
@@ -16794,7 +16794,7 @@
           <p:cNvPr id="35" name="">
             <a:extLst xmlns:a="http://schemas.openxmlformats.org/drawingml/2006/main">
               <a:ext uri="{FF2B5EF4-FFF2-40B4-BE49-F238E27FC236}">
-                <a16:creationId xmlns:a16="http://schemas.microsoft.com/office/drawing/2014/main" id="{0A1D4344-BD45-4C44-9BF8-E736D6778258}"/>
+                <a16:creationId xmlns:a16="http://schemas.microsoft.com/office/drawing/2014/main" id="{34BDEC23-FF5D-44E8-B550-ACE712A3049E}"/>
               </a:ext>
             </a:extLst>
           </p:cNvPr>
@@ -16844,7 +16844,7 @@
           <p:cNvPr id="36" name="">
             <a:extLst xmlns:a="http://schemas.openxmlformats.org/drawingml/2006/main">
               <a:ext uri="{FF2B5EF4-FFF2-40B4-BE49-F238E27FC236}">
-                <a16:creationId xmlns:a16="http://schemas.microsoft.com/office/drawing/2014/main" id="{F152C571-4C1C-48DC-8D53-AE8CABE369DF}"/>
+                <a16:creationId xmlns:a16="http://schemas.microsoft.com/office/drawing/2014/main" id="{88F9236D-3838-4B4C-9763-9977A33D988C}"/>
               </a:ext>
             </a:extLst>
           </p:cNvPr>
@@ -16892,7 +16892,7 @@
     </p:spTree>
     <p:extLst>
       <p:ext uri="{BB962C8B-B14F-4D97-AF65-F5344CB8AC3E}">
-        <p14:creationId xmlns:p14="http://schemas.microsoft.com/office/powerpoint/2010/main" val="755565422"/>
+        <p14:creationId xmlns:p14="http://schemas.microsoft.com/office/powerpoint/2010/main" val="1329717289"/>
       </p:ext>
     </p:extLst>
   </p:cSld>
@@ -16923,7 +16923,7 @@
           <p:cNvPr id="33" name="">
             <a:extLst xmlns:a="http://schemas.openxmlformats.org/drawingml/2006/main">
               <a:ext uri="{FF2B5EF4-FFF2-40B4-BE49-F238E27FC236}">
-                <a16:creationId xmlns:a16="http://schemas.microsoft.com/office/drawing/2014/main" id="{370FA31E-EB40-42B5-86CE-61A045AE4FAF}"/>
+                <a16:creationId xmlns:a16="http://schemas.microsoft.com/office/drawing/2014/main" id="{B443B6B0-DBE0-43D4-928E-6D14C7D58773}"/>
               </a:ext>
             </a:extLst>
           </p:cNvPr>
@@ -16973,7 +16973,7 @@
           <p:cNvPr id="2" name="">
             <a:extLst xmlns:a="http://schemas.openxmlformats.org/drawingml/2006/main">
               <a:ext uri="{FF2B5EF4-FFF2-40B4-BE49-F238E27FC236}">
-                <a16:creationId xmlns:a16="http://schemas.microsoft.com/office/drawing/2014/main" id="{A47260B6-703B-4F83-8CF1-5645D99B6317}"/>
+                <a16:creationId xmlns:a16="http://schemas.microsoft.com/office/drawing/2014/main" id="{E3DF53CC-63D5-4E0A-AA22-FC249E710297}"/>
               </a:ext>
             </a:extLst>
           </p:cNvPr>
@@ -17023,7 +17023,7 @@
           <p:cNvPr id="3" name="">
             <a:extLst xmlns:a="http://schemas.openxmlformats.org/drawingml/2006/main">
               <a:ext uri="{FF2B5EF4-FFF2-40B4-BE49-F238E27FC236}">
-                <a16:creationId xmlns:a16="http://schemas.microsoft.com/office/drawing/2014/main" id="{CA075A9E-CE9D-4341-8B08-6130725ACDD9}"/>
+                <a16:creationId xmlns:a16="http://schemas.microsoft.com/office/drawing/2014/main" id="{CA06A362-D231-478D-9C0A-EBA2664F4538}"/>
               </a:ext>
             </a:extLst>
           </p:cNvPr>
@@ -17054,7 +17054,7 @@
           <p:cNvPr id="4" name="">
             <a:extLst xmlns:a="http://schemas.openxmlformats.org/drawingml/2006/main">
               <a:ext uri="{FF2B5EF4-FFF2-40B4-BE49-F238E27FC236}">
-                <a16:creationId xmlns:a16="http://schemas.microsoft.com/office/drawing/2014/main" id="{B3B50BFF-230F-4466-B27D-8A4E9F0B731F}"/>
+                <a16:creationId xmlns:a16="http://schemas.microsoft.com/office/drawing/2014/main" id="{CE38F5F3-E97C-44A7-8B42-94024191AA10}"/>
               </a:ext>
             </a:extLst>
           </p:cNvPr>
@@ -17104,7 +17104,7 @@
           <p:cNvPr id="5" name="">
             <a:extLst xmlns:a="http://schemas.openxmlformats.org/drawingml/2006/main">
               <a:ext uri="{FF2B5EF4-FFF2-40B4-BE49-F238E27FC236}">
-                <a16:creationId xmlns:a16="http://schemas.microsoft.com/office/drawing/2014/main" id="{366BA6EF-563E-431E-B33F-82DD5E5AA663}"/>
+                <a16:creationId xmlns:a16="http://schemas.microsoft.com/office/drawing/2014/main" id="{F7CCEBF1-599F-4896-9908-58120CDC0FD9}"/>
               </a:ext>
             </a:extLst>
           </p:cNvPr>
@@ -17139,7 +17139,7 @@
           <p:cNvPr id="6" name="">
             <a:extLst xmlns:a="http://schemas.openxmlformats.org/drawingml/2006/main">
               <a:ext uri="{FF2B5EF4-FFF2-40B4-BE49-F238E27FC236}">
-                <a16:creationId xmlns:a16="http://schemas.microsoft.com/office/drawing/2014/main" id="{4E4D6DE9-9F7E-4C85-BDDC-37D0861A28D7}"/>
+                <a16:creationId xmlns:a16="http://schemas.microsoft.com/office/drawing/2014/main" id="{6B9BB5F6-56DB-4F0C-927F-D5D0F27D87FF}"/>
               </a:ext>
             </a:extLst>
           </p:cNvPr>
@@ -17189,7 +17189,7 @@
           <p:cNvPr id="7" name="">
             <a:extLst xmlns:a="http://schemas.openxmlformats.org/drawingml/2006/main">
               <a:ext uri="{FF2B5EF4-FFF2-40B4-BE49-F238E27FC236}">
-                <a16:creationId xmlns:a16="http://schemas.microsoft.com/office/drawing/2014/main" id="{71DF856D-B00C-453E-AC9B-69C7D36E9BB7}"/>
+                <a16:creationId xmlns:a16="http://schemas.microsoft.com/office/drawing/2014/main" id="{638E71BB-B5F7-4DDC-9998-CF9F18745813}"/>
               </a:ext>
             </a:extLst>
           </p:cNvPr>
@@ -17239,7 +17239,7 @@
           <p:cNvPr id="8" name="">
             <a:extLst xmlns:a="http://schemas.openxmlformats.org/drawingml/2006/main">
               <a:ext uri="{FF2B5EF4-FFF2-40B4-BE49-F238E27FC236}">
-                <a16:creationId xmlns:a16="http://schemas.microsoft.com/office/drawing/2014/main" id="{304456A8-A985-4349-8F86-6A49DF7BD418}"/>
+                <a16:creationId xmlns:a16="http://schemas.microsoft.com/office/drawing/2014/main" id="{7B7DD745-0974-45D1-BE19-DF235BE1D3CF}"/>
               </a:ext>
             </a:extLst>
           </p:cNvPr>
@@ -17289,7 +17289,7 @@
           <p:cNvPr id="9" name="">
             <a:extLst xmlns:a="http://schemas.openxmlformats.org/drawingml/2006/main">
               <a:ext uri="{FF2B5EF4-FFF2-40B4-BE49-F238E27FC236}">
-                <a16:creationId xmlns:a16="http://schemas.microsoft.com/office/drawing/2014/main" id="{FF3DB071-6AC1-416A-872E-106DDA528F0D}"/>
+                <a16:creationId xmlns:a16="http://schemas.microsoft.com/office/drawing/2014/main" id="{2CD1150C-3503-4743-AAC3-1727FD4A01EF}"/>
               </a:ext>
             </a:extLst>
           </p:cNvPr>
@@ -17324,7 +17324,7 @@
           <p:cNvPr id="10" name="">
             <a:extLst xmlns:a="http://schemas.openxmlformats.org/drawingml/2006/main">
               <a:ext uri="{FF2B5EF4-FFF2-40B4-BE49-F238E27FC236}">
-                <a16:creationId xmlns:a16="http://schemas.microsoft.com/office/drawing/2014/main" id="{28DAAE00-E9F3-4569-9416-F18DA29DE77C}"/>
+                <a16:creationId xmlns:a16="http://schemas.microsoft.com/office/drawing/2014/main" id="{88F0194A-B4EC-4725-B9D9-51F799A8AC5B}"/>
               </a:ext>
             </a:extLst>
           </p:cNvPr>
@@ -17374,7 +17374,7 @@
           <p:cNvPr id="11" name="">
             <a:extLst xmlns:a="http://schemas.openxmlformats.org/drawingml/2006/main">
               <a:ext uri="{FF2B5EF4-FFF2-40B4-BE49-F238E27FC236}">
-                <a16:creationId xmlns:a16="http://schemas.microsoft.com/office/drawing/2014/main" id="{BA9168D8-1914-42F8-AEF9-F6D036FB9D65}"/>
+                <a16:creationId xmlns:a16="http://schemas.microsoft.com/office/drawing/2014/main" id="{70EA50C2-719C-4D6E-AAE0-3CC89FBF4779}"/>
               </a:ext>
             </a:extLst>
           </p:cNvPr>
@@ -17424,7 +17424,7 @@
           <p:cNvPr id="12" name="">
             <a:extLst xmlns:a="http://schemas.openxmlformats.org/drawingml/2006/main">
               <a:ext uri="{FF2B5EF4-FFF2-40B4-BE49-F238E27FC236}">
-                <a16:creationId xmlns:a16="http://schemas.microsoft.com/office/drawing/2014/main" id="{73DF0FE6-6DDA-4DCE-8C39-3C0A5A665B7F}"/>
+                <a16:creationId xmlns:a16="http://schemas.microsoft.com/office/drawing/2014/main" id="{2D80288D-A4BF-4F5F-8AF0-8E37642F258E}"/>
               </a:ext>
             </a:extLst>
           </p:cNvPr>
@@ -17474,7 +17474,7 @@
           <p:cNvPr id="13" name="">
             <a:extLst xmlns:a="http://schemas.openxmlformats.org/drawingml/2006/main">
               <a:ext uri="{FF2B5EF4-FFF2-40B4-BE49-F238E27FC236}">
-                <a16:creationId xmlns:a16="http://schemas.microsoft.com/office/drawing/2014/main" id="{24B78AFA-05C6-47BB-82AE-34729D928EE8}"/>
+                <a16:creationId xmlns:a16="http://schemas.microsoft.com/office/drawing/2014/main" id="{53185958-DBB3-45C8-A97A-F02F2B39EC54}"/>
               </a:ext>
             </a:extLst>
           </p:cNvPr>
@@ -17509,7 +17509,7 @@
           <p:cNvPr id="14" name="">
             <a:extLst xmlns:a="http://schemas.openxmlformats.org/drawingml/2006/main">
               <a:ext uri="{FF2B5EF4-FFF2-40B4-BE49-F238E27FC236}">
-                <a16:creationId xmlns:a16="http://schemas.microsoft.com/office/drawing/2014/main" id="{22E3BD0B-1E9D-449C-BA24-27C4CF41791A}"/>
+                <a16:creationId xmlns:a16="http://schemas.microsoft.com/office/drawing/2014/main" id="{3A4C1D1C-E4A4-424A-A2AE-4FA02C46F500}"/>
               </a:ext>
             </a:extLst>
           </p:cNvPr>
@@ -17559,7 +17559,7 @@
           <p:cNvPr id="15" name="">
             <a:extLst xmlns:a="http://schemas.openxmlformats.org/drawingml/2006/main">
               <a:ext uri="{FF2B5EF4-FFF2-40B4-BE49-F238E27FC236}">
-                <a16:creationId xmlns:a16="http://schemas.microsoft.com/office/drawing/2014/main" id="{215B66B6-D839-4382-B80D-B50D701C6FDB}"/>
+                <a16:creationId xmlns:a16="http://schemas.microsoft.com/office/drawing/2014/main" id="{3D8EA5EE-52F5-4C01-AD2A-A58BA25A6A48}"/>
               </a:ext>
             </a:extLst>
           </p:cNvPr>
@@ -17609,7 +17609,7 @@
           <p:cNvPr id="16" name="">
             <a:extLst xmlns:a="http://schemas.openxmlformats.org/drawingml/2006/main">
               <a:ext uri="{FF2B5EF4-FFF2-40B4-BE49-F238E27FC236}">
-                <a16:creationId xmlns:a16="http://schemas.microsoft.com/office/drawing/2014/main" id="{1A8C5F70-5DDB-449C-974E-E5EE30B99373}"/>
+                <a16:creationId xmlns:a16="http://schemas.microsoft.com/office/drawing/2014/main" id="{3F73D531-B846-4306-9A56-05CABB36F900}"/>
               </a:ext>
             </a:extLst>
           </p:cNvPr>
@@ -17659,7 +17659,7 @@
           <p:cNvPr id="17" name="">
             <a:extLst xmlns:a="http://schemas.openxmlformats.org/drawingml/2006/main">
               <a:ext uri="{FF2B5EF4-FFF2-40B4-BE49-F238E27FC236}">
-                <a16:creationId xmlns:a16="http://schemas.microsoft.com/office/drawing/2014/main" id="{41661828-CC57-4D1D-BE9F-9F36429818E4}"/>
+                <a16:creationId xmlns:a16="http://schemas.microsoft.com/office/drawing/2014/main" id="{0DE4228D-082A-481C-A017-46F9B8E89F9B}"/>
               </a:ext>
             </a:extLst>
           </p:cNvPr>
@@ -17694,7 +17694,7 @@
           <p:cNvPr id="18" name="">
             <a:extLst xmlns:a="http://schemas.openxmlformats.org/drawingml/2006/main">
               <a:ext uri="{FF2B5EF4-FFF2-40B4-BE49-F238E27FC236}">
-                <a16:creationId xmlns:a16="http://schemas.microsoft.com/office/drawing/2014/main" id="{5D5FB78E-A69F-48F6-814C-4E0F46A9920E}"/>
+                <a16:creationId xmlns:a16="http://schemas.microsoft.com/office/drawing/2014/main" id="{630FAFC4-F628-405C-8F46-C308AD9504EB}"/>
               </a:ext>
             </a:extLst>
           </p:cNvPr>
@@ -17744,7 +17744,7 @@
           <p:cNvPr id="19" name="">
             <a:extLst xmlns:a="http://schemas.openxmlformats.org/drawingml/2006/main">
               <a:ext uri="{FF2B5EF4-FFF2-40B4-BE49-F238E27FC236}">
-                <a16:creationId xmlns:a16="http://schemas.microsoft.com/office/drawing/2014/main" id="{FA68FE4D-F317-408C-A4B6-D5D243B6E2D0}"/>
+                <a16:creationId xmlns:a16="http://schemas.microsoft.com/office/drawing/2014/main" id="{1552CB6C-9DA5-42A8-A627-796FF167DB32}"/>
               </a:ext>
             </a:extLst>
           </p:cNvPr>
@@ -17794,7 +17794,7 @@
           <p:cNvPr id="20" name="">
             <a:extLst xmlns:a="http://schemas.openxmlformats.org/drawingml/2006/main">
               <a:ext uri="{FF2B5EF4-FFF2-40B4-BE49-F238E27FC236}">
-                <a16:creationId xmlns:a16="http://schemas.microsoft.com/office/drawing/2014/main" id="{03627130-C041-4263-B364-A177D6A4EC6F}"/>
+                <a16:creationId xmlns:a16="http://schemas.microsoft.com/office/drawing/2014/main" id="{87B9DCF0-D000-4773-BD92-68ED4DC5012F}"/>
               </a:ext>
             </a:extLst>
           </p:cNvPr>
@@ -17844,7 +17844,7 @@
           <p:cNvPr id="21" name="">
             <a:extLst xmlns:a="http://schemas.openxmlformats.org/drawingml/2006/main">
               <a:ext uri="{FF2B5EF4-FFF2-40B4-BE49-F238E27FC236}">
-                <a16:creationId xmlns:a16="http://schemas.microsoft.com/office/drawing/2014/main" id="{2F57B78F-7465-4E32-9CBB-F3B3081F57BB}"/>
+                <a16:creationId xmlns:a16="http://schemas.microsoft.com/office/drawing/2014/main" id="{3BCC33EA-2F98-411C-9898-4AD193579D1F}"/>
               </a:ext>
             </a:extLst>
           </p:cNvPr>
@@ -17879,7 +17879,7 @@
           <p:cNvPr id="22" name="">
             <a:extLst xmlns:a="http://schemas.openxmlformats.org/drawingml/2006/main">
               <a:ext uri="{FF2B5EF4-FFF2-40B4-BE49-F238E27FC236}">
-                <a16:creationId xmlns:a16="http://schemas.microsoft.com/office/drawing/2014/main" id="{7F5C2C80-4427-4736-ADD6-65AABC8E31ED}"/>
+                <a16:creationId xmlns:a16="http://schemas.microsoft.com/office/drawing/2014/main" id="{B0768D94-8CFF-4E17-B876-2E079C9B8726}"/>
               </a:ext>
             </a:extLst>
           </p:cNvPr>
@@ -17929,7 +17929,7 @@
           <p:cNvPr id="23" name="">
             <a:extLst xmlns:a="http://schemas.openxmlformats.org/drawingml/2006/main">
               <a:ext uri="{FF2B5EF4-FFF2-40B4-BE49-F238E27FC236}">
-                <a16:creationId xmlns:a16="http://schemas.microsoft.com/office/drawing/2014/main" id="{55A32241-1183-44FC-B351-B4ECEACB9DD9}"/>
+                <a16:creationId xmlns:a16="http://schemas.microsoft.com/office/drawing/2014/main" id="{FEC47AE8-8FC8-4C69-8F00-714D0BB71323}"/>
               </a:ext>
             </a:extLst>
           </p:cNvPr>
@@ -17964,7 +17964,7 @@
           <p:cNvPr id="24" name="">
             <a:extLst xmlns:a="http://schemas.openxmlformats.org/drawingml/2006/main">
               <a:ext uri="{FF2B5EF4-FFF2-40B4-BE49-F238E27FC236}">
-                <a16:creationId xmlns:a16="http://schemas.microsoft.com/office/drawing/2014/main" id="{801E389A-553A-41AA-AB9A-F978BB2257D4}"/>
+                <a16:creationId xmlns:a16="http://schemas.microsoft.com/office/drawing/2014/main" id="{2EBC2610-1DF2-44E3-8BF4-242E3C4941C8}"/>
               </a:ext>
             </a:extLst>
           </p:cNvPr>
@@ -18014,7 +18014,7 @@
           <p:cNvPr id="25" name="">
             <a:extLst xmlns:a="http://schemas.openxmlformats.org/drawingml/2006/main">
               <a:ext uri="{FF2B5EF4-FFF2-40B4-BE49-F238E27FC236}">
-                <a16:creationId xmlns:a16="http://schemas.microsoft.com/office/drawing/2014/main" id="{59183FBB-A17B-4CB7-8662-5F52BE2C27A5}"/>
+                <a16:creationId xmlns:a16="http://schemas.microsoft.com/office/drawing/2014/main" id="{26E7A924-C793-4F58-A586-B7B5C8449670}"/>
               </a:ext>
             </a:extLst>
           </p:cNvPr>
@@ -18049,7 +18049,7 @@
           <p:cNvPr id="26" name="">
             <a:extLst xmlns:a="http://schemas.openxmlformats.org/drawingml/2006/main">
               <a:ext uri="{FF2B5EF4-FFF2-40B4-BE49-F238E27FC236}">
-                <a16:creationId xmlns:a16="http://schemas.microsoft.com/office/drawing/2014/main" id="{1622788B-7A4C-49FC-A1D8-55BDC45B5CE7}"/>
+                <a16:creationId xmlns:a16="http://schemas.microsoft.com/office/drawing/2014/main" id="{417485B6-D0C0-429F-8844-65CEC13872C5}"/>
               </a:ext>
             </a:extLst>
           </p:cNvPr>
@@ -18099,7 +18099,7 @@
           <p:cNvPr id="27" name="">
             <a:extLst xmlns:a="http://schemas.openxmlformats.org/drawingml/2006/main">
               <a:ext uri="{FF2B5EF4-FFF2-40B4-BE49-F238E27FC236}">
-                <a16:creationId xmlns:a16="http://schemas.microsoft.com/office/drawing/2014/main" id="{AA1790A9-5CFF-4B2A-877F-D4AE16815AAE}"/>
+                <a16:creationId xmlns:a16="http://schemas.microsoft.com/office/drawing/2014/main" id="{479A956C-3F9F-4F5F-9061-F797B60036CB}"/>
               </a:ext>
             </a:extLst>
           </p:cNvPr>
@@ -18134,7 +18134,7 @@
           <p:cNvPr id="28" name="">
             <a:extLst xmlns:a="http://schemas.openxmlformats.org/drawingml/2006/main">
               <a:ext uri="{FF2B5EF4-FFF2-40B4-BE49-F238E27FC236}">
-                <a16:creationId xmlns:a16="http://schemas.microsoft.com/office/drawing/2014/main" id="{469171F7-9006-46DC-B63C-644E450D5867}"/>
+                <a16:creationId xmlns:a16="http://schemas.microsoft.com/office/drawing/2014/main" id="{18014516-888F-4564-A995-4546624B0E33}"/>
               </a:ext>
             </a:extLst>
           </p:cNvPr>
@@ -18184,7 +18184,7 @@
           <p:cNvPr id="29" name="">
             <a:extLst xmlns:a="http://schemas.openxmlformats.org/drawingml/2006/main">
               <a:ext uri="{FF2B5EF4-FFF2-40B4-BE49-F238E27FC236}">
-                <a16:creationId xmlns:a16="http://schemas.microsoft.com/office/drawing/2014/main" id="{BC3D6C21-83A9-4D3D-83D7-55813D10AEDC}"/>
+                <a16:creationId xmlns:a16="http://schemas.microsoft.com/office/drawing/2014/main" id="{ED713BFC-2E75-43F5-B69C-2EA94E0C721C}"/>
               </a:ext>
             </a:extLst>
           </p:cNvPr>
@@ -18234,7 +18234,7 @@
           <p:cNvPr id="30" name="">
             <a:extLst xmlns:a="http://schemas.openxmlformats.org/drawingml/2006/main">
               <a:ext uri="{FF2B5EF4-FFF2-40B4-BE49-F238E27FC236}">
-                <a16:creationId xmlns:a16="http://schemas.microsoft.com/office/drawing/2014/main" id="{0DEE54F9-5DFA-406D-B332-DC6DC7D2E4AE}"/>
+                <a16:creationId xmlns:a16="http://schemas.microsoft.com/office/drawing/2014/main" id="{E5E883FE-A47A-4B56-8310-F53AB2066AFB}"/>
               </a:ext>
             </a:extLst>
           </p:cNvPr>
@@ -18284,7 +18284,7 @@
           <p:cNvPr id="31" name="">
             <a:extLst xmlns:a="http://schemas.openxmlformats.org/drawingml/2006/main">
               <a:ext uri="{FF2B5EF4-FFF2-40B4-BE49-F238E27FC236}">
-                <a16:creationId xmlns:a16="http://schemas.microsoft.com/office/drawing/2014/main" id="{63F0F3F9-FA46-467B-9AEC-D8FBA644CD73}"/>
+                <a16:creationId xmlns:a16="http://schemas.microsoft.com/office/drawing/2014/main" id="{2B1EC800-8E76-48DC-8571-63894AF51021}"/>
               </a:ext>
             </a:extLst>
           </p:cNvPr>
@@ -18334,7 +18334,7 @@
           <p:cNvPr id="32" name="">
             <a:extLst xmlns:a="http://schemas.openxmlformats.org/drawingml/2006/main">
               <a:ext uri="{FF2B5EF4-FFF2-40B4-BE49-F238E27FC236}">
-                <a16:creationId xmlns:a16="http://schemas.microsoft.com/office/drawing/2014/main" id="{CCE63083-37A7-46A0-9E85-1E6B16E13F4D}"/>
+                <a16:creationId xmlns:a16="http://schemas.microsoft.com/office/drawing/2014/main" id="{096A2AE6-A177-47CF-A50F-A3370C1DF302}"/>
               </a:ext>
             </a:extLst>
           </p:cNvPr>
@@ -18382,7 +18382,7 @@
     </p:spTree>
     <p:extLst>
       <p:ext uri="{BB962C8B-B14F-4D97-AF65-F5344CB8AC3E}">
-        <p14:creationId xmlns:p14="http://schemas.microsoft.com/office/powerpoint/2010/main" val="360987010"/>
+        <p14:creationId xmlns:p14="http://schemas.microsoft.com/office/powerpoint/2010/main" val="1032254051"/>
       </p:ext>
     </p:extLst>
   </p:cSld>
@@ -18413,7 +18413,7 @@
           <p:cNvPr id="17" name="">
             <a:extLst xmlns:a="http://schemas.openxmlformats.org/drawingml/2006/main">
               <a:ext uri="{FF2B5EF4-FFF2-40B4-BE49-F238E27FC236}">
-                <a16:creationId xmlns:a16="http://schemas.microsoft.com/office/drawing/2014/main" id="{CD06CECF-5762-4A7D-811D-B9458335BC13}"/>
+                <a16:creationId xmlns:a16="http://schemas.microsoft.com/office/drawing/2014/main" id="{582BEEB5-E4DC-4CC9-AEBA-C7100B63BFCB}"/>
               </a:ext>
             </a:extLst>
           </p:cNvPr>
@@ -18463,7 +18463,7 @@
           <p:cNvPr id="2" name="">
             <a:extLst xmlns:a="http://schemas.openxmlformats.org/drawingml/2006/main">
               <a:ext uri="{FF2B5EF4-FFF2-40B4-BE49-F238E27FC236}">
-                <a16:creationId xmlns:a16="http://schemas.microsoft.com/office/drawing/2014/main" id="{5A11C92C-CD39-4F1D-B7BA-DBD0D3CBF2CE}"/>
+                <a16:creationId xmlns:a16="http://schemas.microsoft.com/office/drawing/2014/main" id="{803ADEFC-2059-4F8D-8512-768BE73A2D48}"/>
               </a:ext>
             </a:extLst>
           </p:cNvPr>
@@ -18513,7 +18513,7 @@
           <p:cNvPr id="3" name="">
             <a:extLst xmlns:a="http://schemas.openxmlformats.org/drawingml/2006/main">
               <a:ext uri="{FF2B5EF4-FFF2-40B4-BE49-F238E27FC236}">
-                <a16:creationId xmlns:a16="http://schemas.microsoft.com/office/drawing/2014/main" id="{A4BB3138-0884-471C-88F5-A377A411C3C5}"/>
+                <a16:creationId xmlns:a16="http://schemas.microsoft.com/office/drawing/2014/main" id="{8C4D8075-8AD5-4AC6-B57D-A20140864FC9}"/>
               </a:ext>
             </a:extLst>
           </p:cNvPr>
@@ -18544,7 +18544,7 @@
           <p:cNvPr id="4" name="">
             <a:extLst xmlns:a="http://schemas.openxmlformats.org/drawingml/2006/main">
               <a:ext uri="{FF2B5EF4-FFF2-40B4-BE49-F238E27FC236}">
-                <a16:creationId xmlns:a16="http://schemas.microsoft.com/office/drawing/2014/main" id="{7497A87D-904B-452A-9622-BDDD8E8D22E2}"/>
+                <a16:creationId xmlns:a16="http://schemas.microsoft.com/office/drawing/2014/main" id="{CBA46507-7062-4ED9-A8DA-C985A8312C73}"/>
               </a:ext>
             </a:extLst>
           </p:cNvPr>
@@ -18594,7 +18594,7 @@
           <p:cNvPr id="5" name="">
             <a:extLst xmlns:a="http://schemas.openxmlformats.org/drawingml/2006/main">
               <a:ext uri="{FF2B5EF4-FFF2-40B4-BE49-F238E27FC236}">
-                <a16:creationId xmlns:a16="http://schemas.microsoft.com/office/drawing/2014/main" id="{5B63FC20-C8DC-46C9-A4E7-2B0708D54BAA}"/>
+                <a16:creationId xmlns:a16="http://schemas.microsoft.com/office/drawing/2014/main" id="{EDC93593-1708-44F5-A379-3AC068CE1E55}"/>
               </a:ext>
             </a:extLst>
           </p:cNvPr>
@@ -18644,7 +18644,7 @@
           <p:cNvPr id="6" name="">
             <a:extLst xmlns:a="http://schemas.openxmlformats.org/drawingml/2006/main">
               <a:ext uri="{FF2B5EF4-FFF2-40B4-BE49-F238E27FC236}">
-                <a16:creationId xmlns:a16="http://schemas.microsoft.com/office/drawing/2014/main" id="{3149F121-370B-4EC3-86E4-C9C657066FFE}"/>
+                <a16:creationId xmlns:a16="http://schemas.microsoft.com/office/drawing/2014/main" id="{3531DA99-B9D1-4B73-9B41-9E23DB062239}"/>
               </a:ext>
             </a:extLst>
           </p:cNvPr>
@@ -18675,7 +18675,7 @@
           <p:cNvPr id="7" name="">
             <a:extLst xmlns:a="http://schemas.openxmlformats.org/drawingml/2006/main">
               <a:ext uri="{FF2B5EF4-FFF2-40B4-BE49-F238E27FC236}">
-                <a16:creationId xmlns:a16="http://schemas.microsoft.com/office/drawing/2014/main" id="{75C1D402-F507-4131-B819-B67C6534C489}"/>
+                <a16:creationId xmlns:a16="http://schemas.microsoft.com/office/drawing/2014/main" id="{D5293AB9-BDA1-476F-B674-350156807F85}"/>
               </a:ext>
             </a:extLst>
           </p:cNvPr>
@@ -18725,7 +18725,7 @@
           <p:cNvPr id="8" name="">
             <a:extLst xmlns:a="http://schemas.openxmlformats.org/drawingml/2006/main">
               <a:ext uri="{FF2B5EF4-FFF2-40B4-BE49-F238E27FC236}">
-                <a16:creationId xmlns:a16="http://schemas.microsoft.com/office/drawing/2014/main" id="{1CB40153-E333-4CB8-BAB4-1DBD20A7759D}"/>
+                <a16:creationId xmlns:a16="http://schemas.microsoft.com/office/drawing/2014/main" id="{C0863F33-2F56-466A-9C2F-ED75A2E3D3AA}"/>
               </a:ext>
             </a:extLst>
           </p:cNvPr>
@@ -18775,7 +18775,7 @@
           <p:cNvPr id="9" name="">
             <a:extLst xmlns:a="http://schemas.openxmlformats.org/drawingml/2006/main">
               <a:ext uri="{FF2B5EF4-FFF2-40B4-BE49-F238E27FC236}">
-                <a16:creationId xmlns:a16="http://schemas.microsoft.com/office/drawing/2014/main" id="{61022F00-781A-464A-ABB6-497300AF9D6A}"/>
+                <a16:creationId xmlns:a16="http://schemas.microsoft.com/office/drawing/2014/main" id="{5F0D08A8-0676-43EB-9104-68542E47E772}"/>
               </a:ext>
             </a:extLst>
           </p:cNvPr>
@@ -18806,7 +18806,7 @@
           <p:cNvPr id="10" name="">
             <a:extLst xmlns:a="http://schemas.openxmlformats.org/drawingml/2006/main">
               <a:ext uri="{FF2B5EF4-FFF2-40B4-BE49-F238E27FC236}">
-                <a16:creationId xmlns:a16="http://schemas.microsoft.com/office/drawing/2014/main" id="{9250B331-B314-4121-B28E-CAAB9D58842A}"/>
+                <a16:creationId xmlns:a16="http://schemas.microsoft.com/office/drawing/2014/main" id="{A95E8E6F-36BE-4D27-8C58-546535233A75}"/>
               </a:ext>
             </a:extLst>
           </p:cNvPr>
@@ -18856,7 +18856,7 @@
           <p:cNvPr id="11" name="">
             <a:extLst xmlns:a="http://schemas.openxmlformats.org/drawingml/2006/main">
               <a:ext uri="{FF2B5EF4-FFF2-40B4-BE49-F238E27FC236}">
-                <a16:creationId xmlns:a16="http://schemas.microsoft.com/office/drawing/2014/main" id="{9A8D03F6-E588-4B13-8575-4384532FF8F2}"/>
+                <a16:creationId xmlns:a16="http://schemas.microsoft.com/office/drawing/2014/main" id="{96A58F17-FB76-4A23-BDD8-26087F7A1692}"/>
               </a:ext>
             </a:extLst>
           </p:cNvPr>
@@ -18906,7 +18906,7 @@
           <p:cNvPr id="12" name="">
             <a:extLst xmlns:a="http://schemas.openxmlformats.org/drawingml/2006/main">
               <a:ext uri="{FF2B5EF4-FFF2-40B4-BE49-F238E27FC236}">
-                <a16:creationId xmlns:a16="http://schemas.microsoft.com/office/drawing/2014/main" id="{23B49110-D74C-4DAA-9011-8F5FAEFC026C}"/>
+                <a16:creationId xmlns:a16="http://schemas.microsoft.com/office/drawing/2014/main" id="{9CE10007-6E72-4FFA-8833-45E7348AD7FC}"/>
               </a:ext>
             </a:extLst>
           </p:cNvPr>
@@ -18937,7 +18937,7 @@
           <p:cNvPr id="13" name="">
             <a:extLst xmlns:a="http://schemas.openxmlformats.org/drawingml/2006/main">
               <a:ext uri="{FF2B5EF4-FFF2-40B4-BE49-F238E27FC236}">
-                <a16:creationId xmlns:a16="http://schemas.microsoft.com/office/drawing/2014/main" id="{8967DC1D-D96B-4504-B215-7ADBBF074608}"/>
+                <a16:creationId xmlns:a16="http://schemas.microsoft.com/office/drawing/2014/main" id="{EB5B9134-05E3-4DDF-8A53-981FECA2884F}"/>
               </a:ext>
             </a:extLst>
           </p:cNvPr>
@@ -18987,7 +18987,7 @@
           <p:cNvPr id="14" name="">
             <a:extLst xmlns:a="http://schemas.openxmlformats.org/drawingml/2006/main">
               <a:ext uri="{FF2B5EF4-FFF2-40B4-BE49-F238E27FC236}">
-                <a16:creationId xmlns:a16="http://schemas.microsoft.com/office/drawing/2014/main" id="{E666D74F-632C-4F20-A91B-7742ABABB33F}"/>
+                <a16:creationId xmlns:a16="http://schemas.microsoft.com/office/drawing/2014/main" id="{8816D94C-3CC6-4D1E-BAC2-CC5C90D90360}"/>
               </a:ext>
             </a:extLst>
           </p:cNvPr>
@@ -19022,7 +19022,7 @@
           <p:cNvPr id="15" name="">
             <a:extLst xmlns:a="http://schemas.openxmlformats.org/drawingml/2006/main">
               <a:ext uri="{FF2B5EF4-FFF2-40B4-BE49-F238E27FC236}">
-                <a16:creationId xmlns:a16="http://schemas.microsoft.com/office/drawing/2014/main" id="{16790F92-401E-43C3-B111-1B0B1578A892}"/>
+                <a16:creationId xmlns:a16="http://schemas.microsoft.com/office/drawing/2014/main" id="{EC12820B-127C-479C-85EA-45CDF23FB7F4}"/>
               </a:ext>
             </a:extLst>
           </p:cNvPr>
@@ -19072,7 +19072,7 @@
           <p:cNvPr id="16" name="">
             <a:extLst xmlns:a="http://schemas.openxmlformats.org/drawingml/2006/main">
               <a:ext uri="{FF2B5EF4-FFF2-40B4-BE49-F238E27FC236}">
-                <a16:creationId xmlns:a16="http://schemas.microsoft.com/office/drawing/2014/main" id="{CF03EE41-1E09-4AAE-9116-03CC98EE1E3D}"/>
+                <a16:creationId xmlns:a16="http://schemas.microsoft.com/office/drawing/2014/main" id="{9ED47B8F-749B-4D99-AE25-276630E9B02B}"/>
               </a:ext>
             </a:extLst>
           </p:cNvPr>
@@ -19120,7 +19120,7 @@
     </p:spTree>
     <p:extLst>
       <p:ext uri="{BB962C8B-B14F-4D97-AF65-F5344CB8AC3E}">
-        <p14:creationId xmlns:p14="http://schemas.microsoft.com/office/powerpoint/2010/main" val="1192909566"/>
+        <p14:creationId xmlns:p14="http://schemas.microsoft.com/office/powerpoint/2010/main" val="931045259"/>
       </p:ext>
     </p:extLst>
   </p:cSld>
@@ -19151,7 +19151,7 @@
           <p:cNvPr id="28" name="">
             <a:extLst xmlns:a="http://schemas.openxmlformats.org/drawingml/2006/main">
               <a:ext uri="{FF2B5EF4-FFF2-40B4-BE49-F238E27FC236}">
-                <a16:creationId xmlns:a16="http://schemas.microsoft.com/office/drawing/2014/main" id="{BD98E87B-CFFB-45DE-9B0D-BAB6222F68CF}"/>
+                <a16:creationId xmlns:a16="http://schemas.microsoft.com/office/drawing/2014/main" id="{10DAA72A-FA1E-4021-8C21-837156863718}"/>
               </a:ext>
             </a:extLst>
           </p:cNvPr>
@@ -19201,7 +19201,7 @@
           <p:cNvPr id="2" name="">
             <a:extLst xmlns:a="http://schemas.openxmlformats.org/drawingml/2006/main">
               <a:ext uri="{FF2B5EF4-FFF2-40B4-BE49-F238E27FC236}">
-                <a16:creationId xmlns:a16="http://schemas.microsoft.com/office/drawing/2014/main" id="{9DB147F6-6EDF-4307-BC15-A470ABC45A73}"/>
+                <a16:creationId xmlns:a16="http://schemas.microsoft.com/office/drawing/2014/main" id="{24D490FB-063E-428B-9D3A-EB54BA97787C}"/>
               </a:ext>
             </a:extLst>
           </p:cNvPr>
@@ -19251,7 +19251,7 @@
           <p:cNvPr id="3" name="">
             <a:extLst xmlns:a="http://schemas.openxmlformats.org/drawingml/2006/main">
               <a:ext uri="{FF2B5EF4-FFF2-40B4-BE49-F238E27FC236}">
-                <a16:creationId xmlns:a16="http://schemas.microsoft.com/office/drawing/2014/main" id="{A870D1E7-80D9-4182-855F-4FF5ACF198D1}"/>
+                <a16:creationId xmlns:a16="http://schemas.microsoft.com/office/drawing/2014/main" id="{9A7B8489-7B10-477B-92CD-2EC6A5586C76}"/>
               </a:ext>
             </a:extLst>
           </p:cNvPr>
@@ -19282,7 +19282,7 @@
           <p:cNvPr id="4" name="">
             <a:extLst xmlns:a="http://schemas.openxmlformats.org/drawingml/2006/main">
               <a:ext uri="{FF2B5EF4-FFF2-40B4-BE49-F238E27FC236}">
-                <a16:creationId xmlns:a16="http://schemas.microsoft.com/office/drawing/2014/main" id="{44C1E1EE-CCD3-4011-9FE4-EBB26E4CF885}"/>
+                <a16:creationId xmlns:a16="http://schemas.microsoft.com/office/drawing/2014/main" id="{4B9B3F50-939C-43C1-93F0-39CA46372615}"/>
               </a:ext>
             </a:extLst>
           </p:cNvPr>
@@ -19332,7 +19332,7 @@
           <p:cNvPr id="5" name="">
             <a:extLst xmlns:a="http://schemas.openxmlformats.org/drawingml/2006/main">
               <a:ext uri="{FF2B5EF4-FFF2-40B4-BE49-F238E27FC236}">
-                <a16:creationId xmlns:a16="http://schemas.microsoft.com/office/drawing/2014/main" id="{C298D13B-2CEC-4834-AFDB-0B90B8DC8010}"/>
+                <a16:creationId xmlns:a16="http://schemas.microsoft.com/office/drawing/2014/main" id="{29DB3B7D-1988-4B6C-B742-0465F3A72E1C}"/>
               </a:ext>
             </a:extLst>
           </p:cNvPr>
@@ -19382,7 +19382,7 @@
           <p:cNvPr id="6" name="">
             <a:extLst xmlns:a="http://schemas.openxmlformats.org/drawingml/2006/main">
               <a:ext uri="{FF2B5EF4-FFF2-40B4-BE49-F238E27FC236}">
-                <a16:creationId xmlns:a16="http://schemas.microsoft.com/office/drawing/2014/main" id="{01033117-B135-413D-BEA2-2B0B8A83784B}"/>
+                <a16:creationId xmlns:a16="http://schemas.microsoft.com/office/drawing/2014/main" id="{69E6E5F0-A10C-46D4-9265-81CA347F3037}"/>
               </a:ext>
             </a:extLst>
           </p:cNvPr>
@@ -19413,7 +19413,7 @@
           <p:cNvPr id="7" name="">
             <a:extLst xmlns:a="http://schemas.openxmlformats.org/drawingml/2006/main">
               <a:ext uri="{FF2B5EF4-FFF2-40B4-BE49-F238E27FC236}">
-                <a16:creationId xmlns:a16="http://schemas.microsoft.com/office/drawing/2014/main" id="{9080507B-32B9-4B5B-855A-388FC5ED5A0C}"/>
+                <a16:creationId xmlns:a16="http://schemas.microsoft.com/office/drawing/2014/main" id="{00850AE6-0D1D-422B-8D0C-FA104C67AFC8}"/>
               </a:ext>
             </a:extLst>
           </p:cNvPr>
@@ -19463,7 +19463,7 @@
           <p:cNvPr id="8" name="">
             <a:extLst xmlns:a="http://schemas.openxmlformats.org/drawingml/2006/main">
               <a:ext uri="{FF2B5EF4-FFF2-40B4-BE49-F238E27FC236}">
-                <a16:creationId xmlns:a16="http://schemas.microsoft.com/office/drawing/2014/main" id="{4C9A1E5D-687C-4863-8AF2-71A7D2EAA799}"/>
+                <a16:creationId xmlns:a16="http://schemas.microsoft.com/office/drawing/2014/main" id="{B22C92B7-EAF4-4532-826D-80D6BEC20703}"/>
               </a:ext>
             </a:extLst>
           </p:cNvPr>
@@ -19513,7 +19513,7 @@
           <p:cNvPr id="9" name="">
             <a:extLst xmlns:a="http://schemas.openxmlformats.org/drawingml/2006/main">
               <a:ext uri="{FF2B5EF4-FFF2-40B4-BE49-F238E27FC236}">
-                <a16:creationId xmlns:a16="http://schemas.microsoft.com/office/drawing/2014/main" id="{1F9F84BD-9482-4550-8293-70AF2ACA0FD7}"/>
+                <a16:creationId xmlns:a16="http://schemas.microsoft.com/office/drawing/2014/main" id="{D94F7553-168A-4DEB-AAAA-A1383AB8A4F6}"/>
               </a:ext>
             </a:extLst>
           </p:cNvPr>
@@ -19563,7 +19563,7 @@
           <p:cNvPr id="10" name="">
             <a:extLst xmlns:a="http://schemas.openxmlformats.org/drawingml/2006/main">
               <a:ext uri="{FF2B5EF4-FFF2-40B4-BE49-F238E27FC236}">
-                <a16:creationId xmlns:a16="http://schemas.microsoft.com/office/drawing/2014/main" id="{2FA1A728-CE37-4C4F-B98C-827F34C66C56}"/>
+                <a16:creationId xmlns:a16="http://schemas.microsoft.com/office/drawing/2014/main" id="{483AA142-1DF7-4952-BE7E-A0F1B81041DD}"/>
               </a:ext>
             </a:extLst>
           </p:cNvPr>
@@ -19594,7 +19594,7 @@
           <p:cNvPr id="11" name="">
             <a:extLst xmlns:a="http://schemas.openxmlformats.org/drawingml/2006/main">
               <a:ext uri="{FF2B5EF4-FFF2-40B4-BE49-F238E27FC236}">
-                <a16:creationId xmlns:a16="http://schemas.microsoft.com/office/drawing/2014/main" id="{5CDB3271-D472-4068-B900-31EB9AB1D3FB}"/>
+                <a16:creationId xmlns:a16="http://schemas.microsoft.com/office/drawing/2014/main" id="{D702546F-5691-4910-A038-E8BDD65C61EF}"/>
               </a:ext>
             </a:extLst>
           </p:cNvPr>
@@ -19644,7 +19644,7 @@
           <p:cNvPr id="12" name="">
             <a:extLst xmlns:a="http://schemas.openxmlformats.org/drawingml/2006/main">
               <a:ext uri="{FF2B5EF4-FFF2-40B4-BE49-F238E27FC236}">
-                <a16:creationId xmlns:a16="http://schemas.microsoft.com/office/drawing/2014/main" id="{F02526C5-86A2-4E34-A389-11A2F66D555D}"/>
+                <a16:creationId xmlns:a16="http://schemas.microsoft.com/office/drawing/2014/main" id="{688E5530-648F-485B-8169-7672D4E94C51}"/>
               </a:ext>
             </a:extLst>
           </p:cNvPr>
@@ -19694,7 +19694,7 @@
           <p:cNvPr id="13" name="">
             <a:extLst xmlns:a="http://schemas.openxmlformats.org/drawingml/2006/main">
               <a:ext uri="{FF2B5EF4-FFF2-40B4-BE49-F238E27FC236}">
-                <a16:creationId xmlns:a16="http://schemas.microsoft.com/office/drawing/2014/main" id="{5070F46F-1CCF-4497-B3D2-9B3B0256BA9D}"/>
+                <a16:creationId xmlns:a16="http://schemas.microsoft.com/office/drawing/2014/main" id="{938C8156-026D-4369-B59A-A6E17C8E4F2D}"/>
               </a:ext>
             </a:extLst>
           </p:cNvPr>
@@ -19744,7 +19744,7 @@
           <p:cNvPr id="14" name="">
             <a:extLst xmlns:a="http://schemas.openxmlformats.org/drawingml/2006/main">
               <a:ext uri="{FF2B5EF4-FFF2-40B4-BE49-F238E27FC236}">
-                <a16:creationId xmlns:a16="http://schemas.microsoft.com/office/drawing/2014/main" id="{CD67ECFF-8130-449F-81DE-124FA49F6C79}"/>
+                <a16:creationId xmlns:a16="http://schemas.microsoft.com/office/drawing/2014/main" id="{25F53E2A-2B77-4466-956B-29898C91781D}"/>
               </a:ext>
             </a:extLst>
           </p:cNvPr>
@@ -19775,7 +19775,7 @@
           <p:cNvPr id="15" name="">
             <a:extLst xmlns:a="http://schemas.openxmlformats.org/drawingml/2006/main">
               <a:ext uri="{FF2B5EF4-FFF2-40B4-BE49-F238E27FC236}">
-                <a16:creationId xmlns:a16="http://schemas.microsoft.com/office/drawing/2014/main" id="{86CD613F-1CFD-4C45-B200-2905B7C488EE}"/>
+                <a16:creationId xmlns:a16="http://schemas.microsoft.com/office/drawing/2014/main" id="{2188CF8A-0AD1-4FB0-BC06-A2C7191DF06D}"/>
               </a:ext>
             </a:extLst>
           </p:cNvPr>
@@ -19825,7 +19825,7 @@
           <p:cNvPr id="16" name="">
             <a:extLst xmlns:a="http://schemas.openxmlformats.org/drawingml/2006/main">
               <a:ext uri="{FF2B5EF4-FFF2-40B4-BE49-F238E27FC236}">
-                <a16:creationId xmlns:a16="http://schemas.microsoft.com/office/drawing/2014/main" id="{A2F4B267-5714-4016-86D7-00DCBCEA2D3E}"/>
+                <a16:creationId xmlns:a16="http://schemas.microsoft.com/office/drawing/2014/main" id="{072D905A-8B96-4F20-A4C7-BBAE6E40EBA2}"/>
               </a:ext>
             </a:extLst>
           </p:cNvPr>
@@ -19875,7 +19875,7 @@
           <p:cNvPr id="17" name="">
             <a:extLst xmlns:a="http://schemas.openxmlformats.org/drawingml/2006/main">
               <a:ext uri="{FF2B5EF4-FFF2-40B4-BE49-F238E27FC236}">
-                <a16:creationId xmlns:a16="http://schemas.microsoft.com/office/drawing/2014/main" id="{B52C93CF-05B4-4D06-AC89-27B1730292BD}"/>
+                <a16:creationId xmlns:a16="http://schemas.microsoft.com/office/drawing/2014/main" id="{8E17DE4E-A743-45E0-AD64-2C9D268AD91D}"/>
               </a:ext>
             </a:extLst>
           </p:cNvPr>
@@ -19925,7 +19925,7 @@
           <p:cNvPr id="18" name="">
             <a:extLst xmlns:a="http://schemas.openxmlformats.org/drawingml/2006/main">
               <a:ext uri="{FF2B5EF4-FFF2-40B4-BE49-F238E27FC236}">
-                <a16:creationId xmlns:a16="http://schemas.microsoft.com/office/drawing/2014/main" id="{352D75B1-338D-401A-B50A-0F37B9C946A6}"/>
+                <a16:creationId xmlns:a16="http://schemas.microsoft.com/office/drawing/2014/main" id="{3B882A5F-7E7D-4E9E-AFBB-580FC5C58CC4}"/>
               </a:ext>
             </a:extLst>
           </p:cNvPr>
@@ -19956,7 +19956,7 @@
           <p:cNvPr id="19" name="">
             <a:extLst xmlns:a="http://schemas.openxmlformats.org/drawingml/2006/main">
               <a:ext uri="{FF2B5EF4-FFF2-40B4-BE49-F238E27FC236}">
-                <a16:creationId xmlns:a16="http://schemas.microsoft.com/office/drawing/2014/main" id="{63A8620E-42DF-4BC4-BBB1-34D88A4787CF}"/>
+                <a16:creationId xmlns:a16="http://schemas.microsoft.com/office/drawing/2014/main" id="{7D20FE3A-F72C-4D02-AA83-EC1EF50708BC}"/>
               </a:ext>
             </a:extLst>
           </p:cNvPr>
@@ -20006,7 +20006,7 @@
           <p:cNvPr id="20" name="">
             <a:extLst xmlns:a="http://schemas.openxmlformats.org/drawingml/2006/main">
               <a:ext uri="{FF2B5EF4-FFF2-40B4-BE49-F238E27FC236}">
-                <a16:creationId xmlns:a16="http://schemas.microsoft.com/office/drawing/2014/main" id="{84442D60-E846-4A4B-B0E8-928C4E95AFB4}"/>
+                <a16:creationId xmlns:a16="http://schemas.microsoft.com/office/drawing/2014/main" id="{83BB17D5-BFF1-4548-B3F4-7B91C547BFBD}"/>
               </a:ext>
             </a:extLst>
           </p:cNvPr>
@@ -20056,7 +20056,7 @@
           <p:cNvPr id="21" name="">
             <a:extLst xmlns:a="http://schemas.openxmlformats.org/drawingml/2006/main">
               <a:ext uri="{FF2B5EF4-FFF2-40B4-BE49-F238E27FC236}">
-                <a16:creationId xmlns:a16="http://schemas.microsoft.com/office/drawing/2014/main" id="{604E123F-BE7F-4E38-9C98-B4FB86A41615}"/>
+                <a16:creationId xmlns:a16="http://schemas.microsoft.com/office/drawing/2014/main" id="{CE3BD4BC-1DD5-414A-88BF-8BFBF1FCE760}"/>
               </a:ext>
             </a:extLst>
           </p:cNvPr>
@@ -20106,7 +20106,7 @@
           <p:cNvPr id="22" name="">
             <a:extLst xmlns:a="http://schemas.openxmlformats.org/drawingml/2006/main">
               <a:ext uri="{FF2B5EF4-FFF2-40B4-BE49-F238E27FC236}">
-                <a16:creationId xmlns:a16="http://schemas.microsoft.com/office/drawing/2014/main" id="{70DF9FBB-8D51-4447-929A-3641A6345014}"/>
+                <a16:creationId xmlns:a16="http://schemas.microsoft.com/office/drawing/2014/main" id="{A394A02E-76F4-480A-8B69-88FC2188C66C}"/>
               </a:ext>
             </a:extLst>
           </p:cNvPr>
@@ -20137,7 +20137,7 @@
           <p:cNvPr id="23" name="">
             <a:extLst xmlns:a="http://schemas.openxmlformats.org/drawingml/2006/main">
               <a:ext uri="{FF2B5EF4-FFF2-40B4-BE49-F238E27FC236}">
-                <a16:creationId xmlns:a16="http://schemas.microsoft.com/office/drawing/2014/main" id="{70D61722-5871-4B3D-BA07-8606807800AB}"/>
+                <a16:creationId xmlns:a16="http://schemas.microsoft.com/office/drawing/2014/main" id="{1F5F8493-C832-498E-906E-B4BA23D39CCE}"/>
               </a:ext>
             </a:extLst>
           </p:cNvPr>
@@ -20187,7 +20187,7 @@
           <p:cNvPr id="24" name="">
             <a:extLst xmlns:a="http://schemas.openxmlformats.org/drawingml/2006/main">
               <a:ext uri="{FF2B5EF4-FFF2-40B4-BE49-F238E27FC236}">
-                <a16:creationId xmlns:a16="http://schemas.microsoft.com/office/drawing/2014/main" id="{A018AEAB-BC69-490E-B806-33C80BC3299C}"/>
+                <a16:creationId xmlns:a16="http://schemas.microsoft.com/office/drawing/2014/main" id="{70265BAE-BEDC-403D-AB05-81EA31839D32}"/>
               </a:ext>
             </a:extLst>
           </p:cNvPr>
@@ -20237,7 +20237,7 @@
           <p:cNvPr id="25" name="">
             <a:extLst xmlns:a="http://schemas.openxmlformats.org/drawingml/2006/main">
               <a:ext uri="{FF2B5EF4-FFF2-40B4-BE49-F238E27FC236}">
-                <a16:creationId xmlns:a16="http://schemas.microsoft.com/office/drawing/2014/main" id="{488D05B5-53F7-49DA-8B88-F5893CC991B6}"/>
+                <a16:creationId xmlns:a16="http://schemas.microsoft.com/office/drawing/2014/main" id="{192AAE8C-C374-4222-BDC2-7CC2AFD81BDE}"/>
               </a:ext>
             </a:extLst>
           </p:cNvPr>
@@ -20287,7 +20287,7 @@
           <p:cNvPr id="26" name="">
             <a:extLst xmlns:a="http://schemas.openxmlformats.org/drawingml/2006/main">
               <a:ext uri="{FF2B5EF4-FFF2-40B4-BE49-F238E27FC236}">
-                <a16:creationId xmlns:a16="http://schemas.microsoft.com/office/drawing/2014/main" id="{BEB3FCA9-5575-4347-9484-DBAC3C36D60E}"/>
+                <a16:creationId xmlns:a16="http://schemas.microsoft.com/office/drawing/2014/main" id="{24578D0A-7902-4C9C-A80D-78DB5AC936BD}"/>
               </a:ext>
             </a:extLst>
           </p:cNvPr>
@@ -20337,7 +20337,7 @@
           <p:cNvPr id="27" name="">
             <a:extLst xmlns:a="http://schemas.openxmlformats.org/drawingml/2006/main">
               <a:ext uri="{FF2B5EF4-FFF2-40B4-BE49-F238E27FC236}">
-                <a16:creationId xmlns:a16="http://schemas.microsoft.com/office/drawing/2014/main" id="{604E7D85-8AD0-43BB-A6B9-0C1BA997E0D9}"/>
+                <a16:creationId xmlns:a16="http://schemas.microsoft.com/office/drawing/2014/main" id="{F7D4F131-1EAF-4123-9654-02A9FF61C084}"/>
               </a:ext>
             </a:extLst>
           </p:cNvPr>
@@ -20385,7 +20385,7 @@
     </p:spTree>
     <p:extLst>
       <p:ext uri="{BB962C8B-B14F-4D97-AF65-F5344CB8AC3E}">
-        <p14:creationId xmlns:p14="http://schemas.microsoft.com/office/powerpoint/2010/main" val="1958887135"/>
+        <p14:creationId xmlns:p14="http://schemas.microsoft.com/office/powerpoint/2010/main" val="941777093"/>
       </p:ext>
     </p:extLst>
   </p:cSld>
@@ -20416,7 +20416,7 @@
           <p:cNvPr id="31" name="">
             <a:extLst xmlns:a="http://schemas.openxmlformats.org/drawingml/2006/main">
               <a:ext uri="{FF2B5EF4-FFF2-40B4-BE49-F238E27FC236}">
-                <a16:creationId xmlns:a16="http://schemas.microsoft.com/office/drawing/2014/main" id="{A5EA4AFB-132E-4D1F-8C32-C263F6C9AB6D}"/>
+                <a16:creationId xmlns:a16="http://schemas.microsoft.com/office/drawing/2014/main" id="{DD6EEF13-4B65-4299-9CFF-93852CB3F6CA}"/>
               </a:ext>
             </a:extLst>
           </p:cNvPr>
@@ -20466,7 +20466,7 @@
           <p:cNvPr id="2" name="">
             <a:extLst xmlns:a="http://schemas.openxmlformats.org/drawingml/2006/main">
               <a:ext uri="{FF2B5EF4-FFF2-40B4-BE49-F238E27FC236}">
-                <a16:creationId xmlns:a16="http://schemas.microsoft.com/office/drawing/2014/main" id="{48E8F689-0823-4707-A0A5-6A6164B2EC90}"/>
+                <a16:creationId xmlns:a16="http://schemas.microsoft.com/office/drawing/2014/main" id="{807FAF75-123A-42F7-849D-B3A7050F250C}"/>
               </a:ext>
             </a:extLst>
           </p:cNvPr>
@@ -20516,7 +20516,7 @@
           <p:cNvPr id="3" name="">
             <a:extLst xmlns:a="http://schemas.openxmlformats.org/drawingml/2006/main">
               <a:ext uri="{FF2B5EF4-FFF2-40B4-BE49-F238E27FC236}">
-                <a16:creationId xmlns:a16="http://schemas.microsoft.com/office/drawing/2014/main" id="{8F08935C-89A8-481C-B533-46495178FD8A}"/>
+                <a16:creationId xmlns:a16="http://schemas.microsoft.com/office/drawing/2014/main" id="{5F8DB113-923C-4E9E-86EE-D1AAC68CB7FD}"/>
               </a:ext>
             </a:extLst>
           </p:cNvPr>
@@ -20547,7 +20547,7 @@
           <p:cNvPr id="4" name="">
             <a:extLst xmlns:a="http://schemas.openxmlformats.org/drawingml/2006/main">
               <a:ext uri="{FF2B5EF4-FFF2-40B4-BE49-F238E27FC236}">
-                <a16:creationId xmlns:a16="http://schemas.microsoft.com/office/drawing/2014/main" id="{8B6E96A1-B11A-4A6D-A9DD-E58721ADCFAA}"/>
+                <a16:creationId xmlns:a16="http://schemas.microsoft.com/office/drawing/2014/main" id="{5711BE67-6918-44F9-A508-E08E15FEF296}"/>
               </a:ext>
             </a:extLst>
           </p:cNvPr>
@@ -20597,7 +20597,7 @@
           <p:cNvPr id="5" name="">
             <a:extLst xmlns:a="http://schemas.openxmlformats.org/drawingml/2006/main">
               <a:ext uri="{FF2B5EF4-FFF2-40B4-BE49-F238E27FC236}">
-                <a16:creationId xmlns:a16="http://schemas.microsoft.com/office/drawing/2014/main" id="{BCBE41FD-11BC-4CBA-93E0-F4C6C5F71868}"/>
+                <a16:creationId xmlns:a16="http://schemas.microsoft.com/office/drawing/2014/main" id="{E561DAAF-4167-4879-AAF1-53F93C665900}"/>
               </a:ext>
             </a:extLst>
           </p:cNvPr>
@@ -20647,7 +20647,7 @@
           <p:cNvPr id="6" name="">
             <a:extLst xmlns:a="http://schemas.openxmlformats.org/drawingml/2006/main">
               <a:ext uri="{FF2B5EF4-FFF2-40B4-BE49-F238E27FC236}">
-                <a16:creationId xmlns:a16="http://schemas.microsoft.com/office/drawing/2014/main" id="{D11A818C-4EE4-4D17-AC3C-9B5921937EA1}"/>
+                <a16:creationId xmlns:a16="http://schemas.microsoft.com/office/drawing/2014/main" id="{55F3EAA4-5D14-489C-9AAC-DE3B0998A3C0}"/>
               </a:ext>
             </a:extLst>
           </p:cNvPr>
@@ -20678,7 +20678,7 @@
           <p:cNvPr id="7" name="">
             <a:extLst xmlns:a="http://schemas.openxmlformats.org/drawingml/2006/main">
               <a:ext uri="{FF2B5EF4-FFF2-40B4-BE49-F238E27FC236}">
-                <a16:creationId xmlns:a16="http://schemas.microsoft.com/office/drawing/2014/main" id="{C29056D9-9885-475D-8D4B-170894AFC036}"/>
+                <a16:creationId xmlns:a16="http://schemas.microsoft.com/office/drawing/2014/main" id="{6943EFB7-D314-4D0B-AC0E-21997ECED659}"/>
               </a:ext>
             </a:extLst>
           </p:cNvPr>
@@ -20728,7 +20728,7 @@
           <p:cNvPr id="8" name="">
             <a:extLst xmlns:a="http://schemas.openxmlformats.org/drawingml/2006/main">
               <a:ext uri="{FF2B5EF4-FFF2-40B4-BE49-F238E27FC236}">
-                <a16:creationId xmlns:a16="http://schemas.microsoft.com/office/drawing/2014/main" id="{F7F5309E-D1F6-48A0-B1F6-11DE4D76DAB1}"/>
+                <a16:creationId xmlns:a16="http://schemas.microsoft.com/office/drawing/2014/main" id="{A9C9917C-F04E-44B9-82CE-C0947347B32F}"/>
               </a:ext>
             </a:extLst>
           </p:cNvPr>
@@ -20778,7 +20778,7 @@
           <p:cNvPr id="9" name="">
             <a:extLst xmlns:a="http://schemas.openxmlformats.org/drawingml/2006/main">
               <a:ext uri="{FF2B5EF4-FFF2-40B4-BE49-F238E27FC236}">
-                <a16:creationId xmlns:a16="http://schemas.microsoft.com/office/drawing/2014/main" id="{CD5392B4-6814-43B6-A94C-84FF0FAF3FAC}"/>
+                <a16:creationId xmlns:a16="http://schemas.microsoft.com/office/drawing/2014/main" id="{CD1229BE-F343-4DDD-ABE7-F1B033444A03}"/>
               </a:ext>
             </a:extLst>
           </p:cNvPr>
@@ -20828,7 +20828,7 @@
           <p:cNvPr id="10" name="">
             <a:extLst xmlns:a="http://schemas.openxmlformats.org/drawingml/2006/main">
               <a:ext uri="{FF2B5EF4-FFF2-40B4-BE49-F238E27FC236}">
-                <a16:creationId xmlns:a16="http://schemas.microsoft.com/office/drawing/2014/main" id="{DEF2BECC-7B7D-4D88-AEA0-5E6C8D017E15}"/>
+                <a16:creationId xmlns:a16="http://schemas.microsoft.com/office/drawing/2014/main" id="{F77864CD-5DB2-48D6-B7C8-1BB352681B18}"/>
               </a:ext>
             </a:extLst>
           </p:cNvPr>
@@ -20859,7 +20859,7 @@
           <p:cNvPr id="11" name="">
             <a:extLst xmlns:a="http://schemas.openxmlformats.org/drawingml/2006/main">
               <a:ext uri="{FF2B5EF4-FFF2-40B4-BE49-F238E27FC236}">
-                <a16:creationId xmlns:a16="http://schemas.microsoft.com/office/drawing/2014/main" id="{24B240D3-0489-4930-B0CA-2348729E9B1D}"/>
+                <a16:creationId xmlns:a16="http://schemas.microsoft.com/office/drawing/2014/main" id="{01688DCA-818D-4F0A-8E19-6C19AEE7D573}"/>
               </a:ext>
             </a:extLst>
           </p:cNvPr>
@@ -20909,7 +20909,7 @@
           <p:cNvPr id="12" name="">
             <a:extLst xmlns:a="http://schemas.openxmlformats.org/drawingml/2006/main">
               <a:ext uri="{FF2B5EF4-FFF2-40B4-BE49-F238E27FC236}">
-                <a16:creationId xmlns:a16="http://schemas.microsoft.com/office/drawing/2014/main" id="{E79EF8F4-56B7-4D0D-B530-739CA55635FA}"/>
+                <a16:creationId xmlns:a16="http://schemas.microsoft.com/office/drawing/2014/main" id="{40B31BF4-D7F7-464C-85F1-112EB51E3FC1}"/>
               </a:ext>
             </a:extLst>
           </p:cNvPr>
@@ -20959,7 +20959,7 @@
           <p:cNvPr id="13" name="">
             <a:extLst xmlns:a="http://schemas.openxmlformats.org/drawingml/2006/main">
               <a:ext uri="{FF2B5EF4-FFF2-40B4-BE49-F238E27FC236}">
-                <a16:creationId xmlns:a16="http://schemas.microsoft.com/office/drawing/2014/main" id="{6D0286F1-9F8F-41F5-BC99-B6AF254B0767}"/>
+                <a16:creationId xmlns:a16="http://schemas.microsoft.com/office/drawing/2014/main" id="{76B27AA1-3FB1-4046-9EBE-3C4F075FBD7B}"/>
               </a:ext>
             </a:extLst>
           </p:cNvPr>
@@ -21009,7 +21009,7 @@
           <p:cNvPr id="14" name="">
             <a:extLst xmlns:a="http://schemas.openxmlformats.org/drawingml/2006/main">
               <a:ext uri="{FF2B5EF4-FFF2-40B4-BE49-F238E27FC236}">
-                <a16:creationId xmlns:a16="http://schemas.microsoft.com/office/drawing/2014/main" id="{8990FAD2-E096-45A3-B819-1BA70545D773}"/>
+                <a16:creationId xmlns:a16="http://schemas.microsoft.com/office/drawing/2014/main" id="{731D0CB0-3F82-4568-8B08-6555741D5E85}"/>
               </a:ext>
             </a:extLst>
           </p:cNvPr>
@@ -21040,7 +21040,7 @@
           <p:cNvPr id="15" name="">
             <a:extLst xmlns:a="http://schemas.openxmlformats.org/drawingml/2006/main">
               <a:ext uri="{FF2B5EF4-FFF2-40B4-BE49-F238E27FC236}">
-                <a16:creationId xmlns:a16="http://schemas.microsoft.com/office/drawing/2014/main" id="{FB7EB971-E84C-4577-BC82-ED6F797FD141}"/>
+                <a16:creationId xmlns:a16="http://schemas.microsoft.com/office/drawing/2014/main" id="{E832049B-5D38-4D3C-A6CD-F5BAFCA1FDE9}"/>
               </a:ext>
             </a:extLst>
           </p:cNvPr>
@@ -21090,7 +21090,7 @@
           <p:cNvPr id="16" name="">
             <a:extLst xmlns:a="http://schemas.openxmlformats.org/drawingml/2006/main">
               <a:ext uri="{FF2B5EF4-FFF2-40B4-BE49-F238E27FC236}">
-                <a16:creationId xmlns:a16="http://schemas.microsoft.com/office/drawing/2014/main" id="{F57B02D9-B234-4B6D-B9D6-16EB841CE342}"/>
+                <a16:creationId xmlns:a16="http://schemas.microsoft.com/office/drawing/2014/main" id="{24A9C25A-5EED-414C-A9B7-A187A7378DD3}"/>
               </a:ext>
             </a:extLst>
           </p:cNvPr>
@@ -21140,7 +21140,7 @@
           <p:cNvPr id="17" name="">
             <a:extLst xmlns:a="http://schemas.openxmlformats.org/drawingml/2006/main">
               <a:ext uri="{FF2B5EF4-FFF2-40B4-BE49-F238E27FC236}">
-                <a16:creationId xmlns:a16="http://schemas.microsoft.com/office/drawing/2014/main" id="{A753FEDC-DF04-4707-8E38-3D0C57EBF912}"/>
+                <a16:creationId xmlns:a16="http://schemas.microsoft.com/office/drawing/2014/main" id="{2C5B6AF6-457A-4C30-883D-B14BD70CFC44}"/>
               </a:ext>
             </a:extLst>
           </p:cNvPr>
@@ -21190,7 +21190,7 @@
           <p:cNvPr id="18" name="">
             <a:extLst xmlns:a="http://schemas.openxmlformats.org/drawingml/2006/main">
               <a:ext uri="{FF2B5EF4-FFF2-40B4-BE49-F238E27FC236}">
-                <a16:creationId xmlns:a16="http://schemas.microsoft.com/office/drawing/2014/main" id="{126E674B-F08E-47DB-8F0C-F2ACF56D7F98}"/>
+                <a16:creationId xmlns:a16="http://schemas.microsoft.com/office/drawing/2014/main" id="{43173130-560C-4DC8-90EC-77AA64A6699E}"/>
               </a:ext>
             </a:extLst>
           </p:cNvPr>
@@ -21221,7 +21221,7 @@
           <p:cNvPr id="19" name="">
             <a:extLst xmlns:a="http://schemas.openxmlformats.org/drawingml/2006/main">
               <a:ext uri="{FF2B5EF4-FFF2-40B4-BE49-F238E27FC236}">
-                <a16:creationId xmlns:a16="http://schemas.microsoft.com/office/drawing/2014/main" id="{430ACE3E-6A9E-4A2B-9505-98A35C644CA4}"/>
+                <a16:creationId xmlns:a16="http://schemas.microsoft.com/office/drawing/2014/main" id="{A5F812E2-268A-47DA-89FC-DB0AAA17B404}"/>
               </a:ext>
             </a:extLst>
           </p:cNvPr>
@@ -21271,7 +21271,7 @@
           <p:cNvPr id="20" name="">
             <a:extLst xmlns:a="http://schemas.openxmlformats.org/drawingml/2006/main">
               <a:ext uri="{FF2B5EF4-FFF2-40B4-BE49-F238E27FC236}">
-                <a16:creationId xmlns:a16="http://schemas.microsoft.com/office/drawing/2014/main" id="{45CC2579-60F6-4F43-8827-5E4C6F506443}"/>
+                <a16:creationId xmlns:a16="http://schemas.microsoft.com/office/drawing/2014/main" id="{1E2E588E-3954-45B4-AF80-3D88725F90F5}"/>
               </a:ext>
             </a:extLst>
           </p:cNvPr>
@@ -21321,7 +21321,7 @@
           <p:cNvPr id="21" name="">
             <a:extLst xmlns:a="http://schemas.openxmlformats.org/drawingml/2006/main">
               <a:ext uri="{FF2B5EF4-FFF2-40B4-BE49-F238E27FC236}">
-                <a16:creationId xmlns:a16="http://schemas.microsoft.com/office/drawing/2014/main" id="{9A5BFBBE-1BCC-4873-878F-7CF584B102F2}"/>
+                <a16:creationId xmlns:a16="http://schemas.microsoft.com/office/drawing/2014/main" id="{A10B25CD-14C3-429A-BD57-A0123D088B4C}"/>
               </a:ext>
             </a:extLst>
           </p:cNvPr>
@@ -21371,7 +21371,7 @@
           <p:cNvPr id="22" name="">
             <a:extLst xmlns:a="http://schemas.openxmlformats.org/drawingml/2006/main">
               <a:ext uri="{FF2B5EF4-FFF2-40B4-BE49-F238E27FC236}">
-                <a16:creationId xmlns:a16="http://schemas.microsoft.com/office/drawing/2014/main" id="{2DD560A2-BA9F-4E45-AD5D-5FB59DADB8AB}"/>
+                <a16:creationId xmlns:a16="http://schemas.microsoft.com/office/drawing/2014/main" id="{1364792A-6F3D-49EC-BDEB-7FC54C0B1AAE}"/>
               </a:ext>
             </a:extLst>
           </p:cNvPr>
@@ -21402,7 +21402,7 @@
           <p:cNvPr id="23" name="">
             <a:extLst xmlns:a="http://schemas.openxmlformats.org/drawingml/2006/main">
               <a:ext uri="{FF2B5EF4-FFF2-40B4-BE49-F238E27FC236}">
-                <a16:creationId xmlns:a16="http://schemas.microsoft.com/office/drawing/2014/main" id="{3297DCDF-22EB-40C0-B00E-8D0F6C2D5FEC}"/>
+                <a16:creationId xmlns:a16="http://schemas.microsoft.com/office/drawing/2014/main" id="{FDF7340D-76DF-4349-9B45-D1381362BCF5}"/>
               </a:ext>
             </a:extLst>
           </p:cNvPr>
@@ -21452,7 +21452,7 @@
           <p:cNvPr id="24" name="">
             <a:extLst xmlns:a="http://schemas.openxmlformats.org/drawingml/2006/main">
               <a:ext uri="{FF2B5EF4-FFF2-40B4-BE49-F238E27FC236}">
-                <a16:creationId xmlns:a16="http://schemas.microsoft.com/office/drawing/2014/main" id="{B7AD6C60-4BF9-4F6F-BF5B-1EEC3D9F05AA}"/>
+                <a16:creationId xmlns:a16="http://schemas.microsoft.com/office/drawing/2014/main" id="{6740BA5A-1742-4BD9-9129-5B9219DD643D}"/>
               </a:ext>
             </a:extLst>
           </p:cNvPr>
@@ -21502,7 +21502,7 @@
           <p:cNvPr id="25" name="">
             <a:extLst xmlns:a="http://schemas.openxmlformats.org/drawingml/2006/main">
               <a:ext uri="{FF2B5EF4-FFF2-40B4-BE49-F238E27FC236}">
-                <a16:creationId xmlns:a16="http://schemas.microsoft.com/office/drawing/2014/main" id="{19CB804D-B421-4D41-9C15-B83171485E1F}"/>
+                <a16:creationId xmlns:a16="http://schemas.microsoft.com/office/drawing/2014/main" id="{753D9BA9-4294-4709-ABB6-E6B70434E48F}"/>
               </a:ext>
             </a:extLst>
           </p:cNvPr>
@@ -21552,7 +21552,7 @@
           <p:cNvPr id="26" name="">
             <a:extLst xmlns:a="http://schemas.openxmlformats.org/drawingml/2006/main">
               <a:ext uri="{FF2B5EF4-FFF2-40B4-BE49-F238E27FC236}">
-                <a16:creationId xmlns:a16="http://schemas.microsoft.com/office/drawing/2014/main" id="{FE610AB7-8552-4212-AED9-B94B08A61DFE}"/>
+                <a16:creationId xmlns:a16="http://schemas.microsoft.com/office/drawing/2014/main" id="{1A4D89CE-79CF-4CF3-9688-8CD2454A7441}"/>
               </a:ext>
             </a:extLst>
           </p:cNvPr>
@@ -21602,7 +21602,7 @@
           <p:cNvPr id="27" name="">
             <a:extLst xmlns:a="http://schemas.openxmlformats.org/drawingml/2006/main">
               <a:ext uri="{FF2B5EF4-FFF2-40B4-BE49-F238E27FC236}">
-                <a16:creationId xmlns:a16="http://schemas.microsoft.com/office/drawing/2014/main" id="{55965CB7-A866-4008-8B43-08741B07DDD2}"/>
+                <a16:creationId xmlns:a16="http://schemas.microsoft.com/office/drawing/2014/main" id="{86152073-045C-453E-8FAB-CD226768EF0A}"/>
               </a:ext>
             </a:extLst>
           </p:cNvPr>
@@ -21652,7 +21652,7 @@
           <p:cNvPr id="28" name="">
             <a:extLst xmlns:a="http://schemas.openxmlformats.org/drawingml/2006/main">
               <a:ext uri="{FF2B5EF4-FFF2-40B4-BE49-F238E27FC236}">
-                <a16:creationId xmlns:a16="http://schemas.microsoft.com/office/drawing/2014/main" id="{ABB3CF8F-F455-4E3A-9CD2-08316AF6C2D8}"/>
+                <a16:creationId xmlns:a16="http://schemas.microsoft.com/office/drawing/2014/main" id="{117F5FD6-1CD0-4A11-ADC1-0891F8D1B551}"/>
               </a:ext>
             </a:extLst>
           </p:cNvPr>
@@ -21702,7 +21702,7 @@
           <p:cNvPr id="29" name="">
             <a:extLst xmlns:a="http://schemas.openxmlformats.org/drawingml/2006/main">
               <a:ext uri="{FF2B5EF4-FFF2-40B4-BE49-F238E27FC236}">
-                <a16:creationId xmlns:a16="http://schemas.microsoft.com/office/drawing/2014/main" id="{151C6CB4-71B1-45EE-B67F-193237CC413B}"/>
+                <a16:creationId xmlns:a16="http://schemas.microsoft.com/office/drawing/2014/main" id="{374559DC-2B4D-4EE6-ADF8-E6AD31468C43}"/>
               </a:ext>
             </a:extLst>
           </p:cNvPr>
@@ -21752,7 +21752,7 @@
           <p:cNvPr id="30" name="">
             <a:extLst xmlns:a="http://schemas.openxmlformats.org/drawingml/2006/main">
               <a:ext uri="{FF2B5EF4-FFF2-40B4-BE49-F238E27FC236}">
-                <a16:creationId xmlns:a16="http://schemas.microsoft.com/office/drawing/2014/main" id="{4E6C38C5-653E-441D-BED3-1ED7E5F87F23}"/>
+                <a16:creationId xmlns:a16="http://schemas.microsoft.com/office/drawing/2014/main" id="{A7A32A49-F726-45FE-928D-3FE7CD68E2B9}"/>
               </a:ext>
             </a:extLst>
           </p:cNvPr>
@@ -21800,7 +21800,7 @@
     </p:spTree>
     <p:extLst>
       <p:ext uri="{BB962C8B-B14F-4D97-AF65-F5344CB8AC3E}">
-        <p14:creationId xmlns:p14="http://schemas.microsoft.com/office/powerpoint/2010/main" val="1474604810"/>
+        <p14:creationId xmlns:p14="http://schemas.microsoft.com/office/powerpoint/2010/main" val="1899433718"/>
       </p:ext>
     </p:extLst>
   </p:cSld>
@@ -21831,7 +21831,7 @@
           <p:cNvPr id="25" name="">
             <a:extLst xmlns:a="http://schemas.openxmlformats.org/drawingml/2006/main">
               <a:ext uri="{FF2B5EF4-FFF2-40B4-BE49-F238E27FC236}">
-                <a16:creationId xmlns:a16="http://schemas.microsoft.com/office/drawing/2014/main" id="{4A459424-FCC7-4625-BFB5-B8101C6AD6A0}"/>
+                <a16:creationId xmlns:a16="http://schemas.microsoft.com/office/drawing/2014/main" id="{BEB23129-9741-4FBD-906B-71AF1DE72F84}"/>
               </a:ext>
             </a:extLst>
           </p:cNvPr>
@@ -21881,7 +21881,7 @@
           <p:cNvPr id="2" name="">
             <a:extLst xmlns:a="http://schemas.openxmlformats.org/drawingml/2006/main">
               <a:ext uri="{FF2B5EF4-FFF2-40B4-BE49-F238E27FC236}">
-                <a16:creationId xmlns:a16="http://schemas.microsoft.com/office/drawing/2014/main" id="{376E8838-B571-454E-9463-7E6BCA60D18D}"/>
+                <a16:creationId xmlns:a16="http://schemas.microsoft.com/office/drawing/2014/main" id="{A0949C51-09E4-420D-A26C-0326F4C7C9D6}"/>
               </a:ext>
             </a:extLst>
           </p:cNvPr>
@@ -21931,7 +21931,7 @@
           <p:cNvPr id="3" name="">
             <a:extLst xmlns:a="http://schemas.openxmlformats.org/drawingml/2006/main">
               <a:ext uri="{FF2B5EF4-FFF2-40B4-BE49-F238E27FC236}">
-                <a16:creationId xmlns:a16="http://schemas.microsoft.com/office/drawing/2014/main" id="{FDA0D2CA-6954-4E26-8AFA-097200B2F36D}"/>
+                <a16:creationId xmlns:a16="http://schemas.microsoft.com/office/drawing/2014/main" id="{2D145B1B-2583-46E5-89DB-4389667D4AE5}"/>
               </a:ext>
             </a:extLst>
           </p:cNvPr>
@@ -21962,7 +21962,7 @@
           <p:cNvPr id="4" name="">
             <a:extLst xmlns:a="http://schemas.openxmlformats.org/drawingml/2006/main">
               <a:ext uri="{FF2B5EF4-FFF2-40B4-BE49-F238E27FC236}">
-                <a16:creationId xmlns:a16="http://schemas.microsoft.com/office/drawing/2014/main" id="{72E71780-697D-483C-B976-938C08FB5C6B}"/>
+                <a16:creationId xmlns:a16="http://schemas.microsoft.com/office/drawing/2014/main" id="{CAF47245-0AA5-4658-A6C0-0156E54B17BC}"/>
               </a:ext>
             </a:extLst>
           </p:cNvPr>
@@ -22012,7 +22012,7 @@
           <p:cNvPr id="5" name="">
             <a:extLst xmlns:a="http://schemas.openxmlformats.org/drawingml/2006/main">
               <a:ext uri="{FF2B5EF4-FFF2-40B4-BE49-F238E27FC236}">
-                <a16:creationId xmlns:a16="http://schemas.microsoft.com/office/drawing/2014/main" id="{18AB8B8E-DFC6-4294-9558-E1B9A8551696}"/>
+                <a16:creationId xmlns:a16="http://schemas.microsoft.com/office/drawing/2014/main" id="{369FBA78-796E-4B7D-AFB3-CF029A90CE40}"/>
               </a:ext>
             </a:extLst>
           </p:cNvPr>
@@ -22062,7 +22062,7 @@
           <p:cNvPr id="6" name="">
             <a:extLst xmlns:a="http://schemas.openxmlformats.org/drawingml/2006/main">
               <a:ext uri="{FF2B5EF4-FFF2-40B4-BE49-F238E27FC236}">
-                <a16:creationId xmlns:a16="http://schemas.microsoft.com/office/drawing/2014/main" id="{795871DB-B5B2-40DE-B844-B8B3EADF5497}"/>
+                <a16:creationId xmlns:a16="http://schemas.microsoft.com/office/drawing/2014/main" id="{2BC5DD70-3530-47CD-AD9C-0A749F4D131B}"/>
               </a:ext>
             </a:extLst>
           </p:cNvPr>
@@ -22095,7 +22095,7 @@
           <p:cNvPr id="7" name="">
             <a:extLst xmlns:a="http://schemas.openxmlformats.org/drawingml/2006/main">
               <a:ext uri="{FF2B5EF4-FFF2-40B4-BE49-F238E27FC236}">
-                <a16:creationId xmlns:a16="http://schemas.microsoft.com/office/drawing/2014/main" id="{7EA76E53-4402-4527-8F96-8D45D376933E}"/>
+                <a16:creationId xmlns:a16="http://schemas.microsoft.com/office/drawing/2014/main" id="{45817671-B57A-4D94-ADA3-5DE33BDBB33C}"/>
               </a:ext>
             </a:extLst>
           </p:cNvPr>
@@ -22145,7 +22145,7 @@
           <p:cNvPr id="8" name="">
             <a:extLst xmlns:a="http://schemas.openxmlformats.org/drawingml/2006/main">
               <a:ext uri="{FF2B5EF4-FFF2-40B4-BE49-F238E27FC236}">
-                <a16:creationId xmlns:a16="http://schemas.microsoft.com/office/drawing/2014/main" id="{43383D21-E3F0-4D5D-9388-7C4C6BB33471}"/>
+                <a16:creationId xmlns:a16="http://schemas.microsoft.com/office/drawing/2014/main" id="{DD3BB9D2-A1E8-4DA3-859F-30B39195B8DC}"/>
               </a:ext>
             </a:extLst>
           </p:cNvPr>
@@ -22178,7 +22178,7 @@
           <p:cNvPr id="9" name="">
             <a:extLst xmlns:a="http://schemas.openxmlformats.org/drawingml/2006/main">
               <a:ext uri="{FF2B5EF4-FFF2-40B4-BE49-F238E27FC236}">
-                <a16:creationId xmlns:a16="http://schemas.microsoft.com/office/drawing/2014/main" id="{20C27AA7-CAE3-4B7E-840E-B3A7BD5EDE57}"/>
+                <a16:creationId xmlns:a16="http://schemas.microsoft.com/office/drawing/2014/main" id="{987787E8-1C3D-4A85-B86F-BA83DEAC3D32}"/>
               </a:ext>
             </a:extLst>
           </p:cNvPr>
@@ -22228,7 +22228,7 @@
           <p:cNvPr id="10" name="">
             <a:extLst xmlns:a="http://schemas.openxmlformats.org/drawingml/2006/main">
               <a:ext uri="{FF2B5EF4-FFF2-40B4-BE49-F238E27FC236}">
-                <a16:creationId xmlns:a16="http://schemas.microsoft.com/office/drawing/2014/main" id="{5DF88518-D921-4F5A-A396-9A8A427A4906}"/>
+                <a16:creationId xmlns:a16="http://schemas.microsoft.com/office/drawing/2014/main" id="{FB653427-7E14-40F5-A954-DF8CA2D3D483}"/>
               </a:ext>
             </a:extLst>
           </p:cNvPr>
@@ -22261,7 +22261,7 @@
           <p:cNvPr id="11" name="">
             <a:extLst xmlns:a="http://schemas.openxmlformats.org/drawingml/2006/main">
               <a:ext uri="{FF2B5EF4-FFF2-40B4-BE49-F238E27FC236}">
-                <a16:creationId xmlns:a16="http://schemas.microsoft.com/office/drawing/2014/main" id="{330BBC11-4EB2-48EB-AE60-F74212F3D8F0}"/>
+                <a16:creationId xmlns:a16="http://schemas.microsoft.com/office/drawing/2014/main" id="{10348F7C-5E8D-4123-964F-D5E9CB229E66}"/>
               </a:ext>
             </a:extLst>
           </p:cNvPr>
@@ -22311,7 +22311,7 @@
           <p:cNvPr id="12" name="">
             <a:extLst xmlns:a="http://schemas.openxmlformats.org/drawingml/2006/main">
               <a:ext uri="{FF2B5EF4-FFF2-40B4-BE49-F238E27FC236}">
-                <a16:creationId xmlns:a16="http://schemas.microsoft.com/office/drawing/2014/main" id="{032D089D-9084-4E83-B245-0566171923C3}"/>
+                <a16:creationId xmlns:a16="http://schemas.microsoft.com/office/drawing/2014/main" id="{6D534900-8150-478C-8C71-8E482FD4018A}"/>
               </a:ext>
             </a:extLst>
           </p:cNvPr>
@@ -22344,7 +22344,7 @@
           <p:cNvPr id="13" name="">
             <a:extLst xmlns:a="http://schemas.openxmlformats.org/drawingml/2006/main">
               <a:ext uri="{FF2B5EF4-FFF2-40B4-BE49-F238E27FC236}">
-                <a16:creationId xmlns:a16="http://schemas.microsoft.com/office/drawing/2014/main" id="{29D5FB53-1A93-4E65-8EBD-5ACFA5B44192}"/>
+                <a16:creationId xmlns:a16="http://schemas.microsoft.com/office/drawing/2014/main" id="{FAB7E30D-EE6E-4505-A8CE-298AD808CDEB}"/>
               </a:ext>
             </a:extLst>
           </p:cNvPr>
@@ -22394,7 +22394,7 @@
           <p:cNvPr id="14" name="">
             <a:extLst xmlns:a="http://schemas.openxmlformats.org/drawingml/2006/main">
               <a:ext uri="{FF2B5EF4-FFF2-40B4-BE49-F238E27FC236}">
-                <a16:creationId xmlns:a16="http://schemas.microsoft.com/office/drawing/2014/main" id="{68360DCF-6FA4-451D-BA34-05853B3D127C}"/>
+                <a16:creationId xmlns:a16="http://schemas.microsoft.com/office/drawing/2014/main" id="{120EA8BC-3CF3-4395-83F6-D28A071FE321}"/>
               </a:ext>
             </a:extLst>
           </p:cNvPr>
@@ -22425,7 +22425,7 @@
           <p:cNvPr id="15" name="">
             <a:extLst xmlns:a="http://schemas.openxmlformats.org/drawingml/2006/main">
               <a:ext uri="{FF2B5EF4-FFF2-40B4-BE49-F238E27FC236}">
-                <a16:creationId xmlns:a16="http://schemas.microsoft.com/office/drawing/2014/main" id="{D54FBC8E-185A-43A4-82FB-D58825854DB4}"/>
+                <a16:creationId xmlns:a16="http://schemas.microsoft.com/office/drawing/2014/main" id="{C25C3142-148B-4606-8AFD-C2C54F7736E7}"/>
               </a:ext>
             </a:extLst>
           </p:cNvPr>
@@ -22475,7 +22475,7 @@
           <p:cNvPr id="16" name="">
             <a:extLst xmlns:a="http://schemas.openxmlformats.org/drawingml/2006/main">
               <a:ext uri="{FF2B5EF4-FFF2-40B4-BE49-F238E27FC236}">
-                <a16:creationId xmlns:a16="http://schemas.microsoft.com/office/drawing/2014/main" id="{E82C81F2-FF6F-4D48-B62F-A1AFD92C6711}"/>
+                <a16:creationId xmlns:a16="http://schemas.microsoft.com/office/drawing/2014/main" id="{BFE80F97-D5CA-4A06-A7F8-5C32DA19CCC9}"/>
               </a:ext>
             </a:extLst>
           </p:cNvPr>
@@ -22508,7 +22508,7 @@
           <p:cNvPr id="17" name="">
             <a:extLst xmlns:a="http://schemas.openxmlformats.org/drawingml/2006/main">
               <a:ext uri="{FF2B5EF4-FFF2-40B4-BE49-F238E27FC236}">
-                <a16:creationId xmlns:a16="http://schemas.microsoft.com/office/drawing/2014/main" id="{4B1FB42B-061E-4D84-9FDA-0D1069A50FB2}"/>
+                <a16:creationId xmlns:a16="http://schemas.microsoft.com/office/drawing/2014/main" id="{F6E03206-5E02-4CA4-97F1-C17E9005EA82}"/>
               </a:ext>
             </a:extLst>
           </p:cNvPr>
@@ -22558,7 +22558,7 @@
           <p:cNvPr id="18" name="">
             <a:extLst xmlns:a="http://schemas.openxmlformats.org/drawingml/2006/main">
               <a:ext uri="{FF2B5EF4-FFF2-40B4-BE49-F238E27FC236}">
-                <a16:creationId xmlns:a16="http://schemas.microsoft.com/office/drawing/2014/main" id="{D64215EE-D97F-408D-AEB4-EEC3E7281118}"/>
+                <a16:creationId xmlns:a16="http://schemas.microsoft.com/office/drawing/2014/main" id="{DD9E0013-72F2-4360-ABB3-CD85D539B34A}"/>
               </a:ext>
             </a:extLst>
           </p:cNvPr>
@@ -22591,7 +22591,7 @@
           <p:cNvPr id="19" name="">
             <a:extLst xmlns:a="http://schemas.openxmlformats.org/drawingml/2006/main">
               <a:ext uri="{FF2B5EF4-FFF2-40B4-BE49-F238E27FC236}">
-                <a16:creationId xmlns:a16="http://schemas.microsoft.com/office/drawing/2014/main" id="{005FD8DB-53CD-43B0-874A-803EF5D8AAFE}"/>
+                <a16:creationId xmlns:a16="http://schemas.microsoft.com/office/drawing/2014/main" id="{213D3DC5-597A-42B4-96A2-864534847A1B}"/>
               </a:ext>
             </a:extLst>
           </p:cNvPr>
@@ -22641,7 +22641,7 @@
           <p:cNvPr id="20" name="">
             <a:extLst xmlns:a="http://schemas.openxmlformats.org/drawingml/2006/main">
               <a:ext uri="{FF2B5EF4-FFF2-40B4-BE49-F238E27FC236}">
-                <a16:creationId xmlns:a16="http://schemas.microsoft.com/office/drawing/2014/main" id="{2D3E2671-3E6C-43FF-AE90-3324D8598E11}"/>
+                <a16:creationId xmlns:a16="http://schemas.microsoft.com/office/drawing/2014/main" id="{7DA210F4-C5E5-46B8-BFAF-15098D9B33FA}"/>
               </a:ext>
             </a:extLst>
           </p:cNvPr>
@@ -22674,7 +22674,7 @@
           <p:cNvPr id="21" name="">
             <a:extLst xmlns:a="http://schemas.openxmlformats.org/drawingml/2006/main">
               <a:ext uri="{FF2B5EF4-FFF2-40B4-BE49-F238E27FC236}">
-                <a16:creationId xmlns:a16="http://schemas.microsoft.com/office/drawing/2014/main" id="{38927F52-FF5D-4877-A39E-C30D53CB11E7}"/>
+                <a16:creationId xmlns:a16="http://schemas.microsoft.com/office/drawing/2014/main" id="{491B1714-CF63-407D-9DBE-E20C32E3A22F}"/>
               </a:ext>
             </a:extLst>
           </p:cNvPr>
@@ -22724,7 +22724,7 @@
           <p:cNvPr id="22" name="">
             <a:extLst xmlns:a="http://schemas.openxmlformats.org/drawingml/2006/main">
               <a:ext uri="{FF2B5EF4-FFF2-40B4-BE49-F238E27FC236}">
-                <a16:creationId xmlns:a16="http://schemas.microsoft.com/office/drawing/2014/main" id="{F3ABC469-E7CF-4EBC-9289-6C925C5F97B3}"/>
+                <a16:creationId xmlns:a16="http://schemas.microsoft.com/office/drawing/2014/main" id="{233F8712-4D33-4CC1-8A71-D80BF8052CAB}"/>
               </a:ext>
             </a:extLst>
           </p:cNvPr>
@@ -22757,7 +22757,7 @@
           <p:cNvPr id="23" name="">
             <a:extLst xmlns:a="http://schemas.openxmlformats.org/drawingml/2006/main">
               <a:ext uri="{FF2B5EF4-FFF2-40B4-BE49-F238E27FC236}">
-                <a16:creationId xmlns:a16="http://schemas.microsoft.com/office/drawing/2014/main" id="{CA60F1FD-9551-4409-80A1-9D84F525BDD5}"/>
+                <a16:creationId xmlns:a16="http://schemas.microsoft.com/office/drawing/2014/main" id="{B8D8E01E-724F-46F8-9D6E-32B10378DAEF}"/>
               </a:ext>
             </a:extLst>
           </p:cNvPr>
@@ -22807,7 +22807,7 @@
           <p:cNvPr id="24" name="">
             <a:extLst xmlns:a="http://schemas.openxmlformats.org/drawingml/2006/main">
               <a:ext uri="{FF2B5EF4-FFF2-40B4-BE49-F238E27FC236}">
-                <a16:creationId xmlns:a16="http://schemas.microsoft.com/office/drawing/2014/main" id="{62B617F2-13B4-46ED-8866-E358E6E71BA6}"/>
+                <a16:creationId xmlns:a16="http://schemas.microsoft.com/office/drawing/2014/main" id="{22F252A0-1D06-4D95-88B5-F6ADAD2F8D69}"/>
               </a:ext>
             </a:extLst>
           </p:cNvPr>
@@ -22855,7 +22855,7 @@
     </p:spTree>
     <p:extLst>
       <p:ext uri="{BB962C8B-B14F-4D97-AF65-F5344CB8AC3E}">
-        <p14:creationId xmlns:p14="http://schemas.microsoft.com/office/powerpoint/2010/main" val="2027763407"/>
+        <p14:creationId xmlns:p14="http://schemas.microsoft.com/office/powerpoint/2010/main" val="1704964166"/>
       </p:ext>
     </p:extLst>
   </p:cSld>
@@ -22886,7 +22886,7 @@
           <p:cNvPr id="36" name="">
             <a:extLst xmlns:a="http://schemas.openxmlformats.org/drawingml/2006/main">
               <a:ext uri="{FF2B5EF4-FFF2-40B4-BE49-F238E27FC236}">
-                <a16:creationId xmlns:a16="http://schemas.microsoft.com/office/drawing/2014/main" id="{FC69B7EC-CED5-411B-B82C-4AAFCED62E85}"/>
+                <a16:creationId xmlns:a16="http://schemas.microsoft.com/office/drawing/2014/main" id="{40E7DC90-80E0-4D93-9D1A-DAFA4D16CE9D}"/>
               </a:ext>
             </a:extLst>
           </p:cNvPr>
@@ -22936,7 +22936,7 @@
           <p:cNvPr id="2" name="">
             <a:extLst xmlns:a="http://schemas.openxmlformats.org/drawingml/2006/main">
               <a:ext uri="{FF2B5EF4-FFF2-40B4-BE49-F238E27FC236}">
-                <a16:creationId xmlns:a16="http://schemas.microsoft.com/office/drawing/2014/main" id="{FA0A78DA-2E70-4F1D-99B7-299E4996B4E7}"/>
+                <a16:creationId xmlns:a16="http://schemas.microsoft.com/office/drawing/2014/main" id="{0AA0C439-815C-4CC7-91D1-CE23655872B6}"/>
               </a:ext>
             </a:extLst>
           </p:cNvPr>
@@ -22986,7 +22986,7 @@
           <p:cNvPr id="3" name="">
             <a:extLst xmlns:a="http://schemas.openxmlformats.org/drawingml/2006/main">
               <a:ext uri="{FF2B5EF4-FFF2-40B4-BE49-F238E27FC236}">
-                <a16:creationId xmlns:a16="http://schemas.microsoft.com/office/drawing/2014/main" id="{89788E5A-5AFF-4E1D-BE1D-37921DCD4BC3}"/>
+                <a16:creationId xmlns:a16="http://schemas.microsoft.com/office/drawing/2014/main" id="{6A4A3A93-8E69-42CD-B37D-5722B3FF17F0}"/>
               </a:ext>
             </a:extLst>
           </p:cNvPr>
@@ -23017,7 +23017,7 @@
           <p:cNvPr id="4" name="">
             <a:extLst xmlns:a="http://schemas.openxmlformats.org/drawingml/2006/main">
               <a:ext uri="{FF2B5EF4-FFF2-40B4-BE49-F238E27FC236}">
-                <a16:creationId xmlns:a16="http://schemas.microsoft.com/office/drawing/2014/main" id="{4B487967-46AF-433D-B81B-2179C0838052}"/>
+                <a16:creationId xmlns:a16="http://schemas.microsoft.com/office/drawing/2014/main" id="{F51E047D-CD8B-4AFA-8ACA-D47454F20BB7}"/>
               </a:ext>
             </a:extLst>
           </p:cNvPr>
@@ -23067,7 +23067,7 @@
           <p:cNvPr id="5" name="">
             <a:extLst xmlns:a="http://schemas.openxmlformats.org/drawingml/2006/main">
               <a:ext uri="{FF2B5EF4-FFF2-40B4-BE49-F238E27FC236}">
-                <a16:creationId xmlns:a16="http://schemas.microsoft.com/office/drawing/2014/main" id="{7188682F-267D-469E-A745-BF3DC1FE8BA8}"/>
+                <a16:creationId xmlns:a16="http://schemas.microsoft.com/office/drawing/2014/main" id="{C12D4F36-35A3-4ED7-98A0-2DA8D5DBDE60}"/>
               </a:ext>
             </a:extLst>
           </p:cNvPr>
@@ -23102,7 +23102,7 @@
           <p:cNvPr id="6" name="">
             <a:extLst xmlns:a="http://schemas.openxmlformats.org/drawingml/2006/main">
               <a:ext uri="{FF2B5EF4-FFF2-40B4-BE49-F238E27FC236}">
-                <a16:creationId xmlns:a16="http://schemas.microsoft.com/office/drawing/2014/main" id="{C6008306-2BC3-4B6A-9485-0F62A7126E85}"/>
+                <a16:creationId xmlns:a16="http://schemas.microsoft.com/office/drawing/2014/main" id="{923CC9CB-5367-48F8-8FDF-AF660E75DCFA}"/>
               </a:ext>
             </a:extLst>
           </p:cNvPr>
@@ -23152,7 +23152,7 @@
           <p:cNvPr id="7" name="">
             <a:extLst xmlns:a="http://schemas.openxmlformats.org/drawingml/2006/main">
               <a:ext uri="{FF2B5EF4-FFF2-40B4-BE49-F238E27FC236}">
-                <a16:creationId xmlns:a16="http://schemas.microsoft.com/office/drawing/2014/main" id="{666A6B29-0C23-49E5-90CA-60B77532A0B4}"/>
+                <a16:creationId xmlns:a16="http://schemas.microsoft.com/office/drawing/2014/main" id="{E11FF170-A3C7-4479-B4F2-922F14C75077}"/>
               </a:ext>
             </a:extLst>
           </p:cNvPr>
@@ -23202,7 +23202,7 @@
           <p:cNvPr id="8" name="">
             <a:extLst xmlns:a="http://schemas.openxmlformats.org/drawingml/2006/main">
               <a:ext uri="{FF2B5EF4-FFF2-40B4-BE49-F238E27FC236}">
-                <a16:creationId xmlns:a16="http://schemas.microsoft.com/office/drawing/2014/main" id="{E1512A80-0FE8-42F4-83E9-82558FF35FCB}"/>
+                <a16:creationId xmlns:a16="http://schemas.microsoft.com/office/drawing/2014/main" id="{539E9295-3B04-4150-B62E-0AF2A3DF94A5}"/>
               </a:ext>
             </a:extLst>
           </p:cNvPr>
@@ -23252,7 +23252,7 @@
           <p:cNvPr id="9" name="">
             <a:extLst xmlns:a="http://schemas.openxmlformats.org/drawingml/2006/main">
               <a:ext uri="{FF2B5EF4-FFF2-40B4-BE49-F238E27FC236}">
-                <a16:creationId xmlns:a16="http://schemas.microsoft.com/office/drawing/2014/main" id="{ECC1B9C5-C6F8-4ED4-973D-E6D236A1C46A}"/>
+                <a16:creationId xmlns:a16="http://schemas.microsoft.com/office/drawing/2014/main" id="{C5B26184-30D8-4BBA-AAD8-DD6004A69D0E}"/>
               </a:ext>
             </a:extLst>
           </p:cNvPr>
@@ -23287,7 +23287,7 @@
           <p:cNvPr id="10" name="">
             <a:extLst xmlns:a="http://schemas.openxmlformats.org/drawingml/2006/main">
               <a:ext uri="{FF2B5EF4-FFF2-40B4-BE49-F238E27FC236}">
-                <a16:creationId xmlns:a16="http://schemas.microsoft.com/office/drawing/2014/main" id="{89B44D93-D857-453A-AC07-7A3046B709C8}"/>
+                <a16:creationId xmlns:a16="http://schemas.microsoft.com/office/drawing/2014/main" id="{9C92AB36-FC5C-495E-9378-F52A4913706A}"/>
               </a:ext>
             </a:extLst>
           </p:cNvPr>
@@ -23337,7 +23337,7 @@
           <p:cNvPr id="11" name="">
             <a:extLst xmlns:a="http://schemas.openxmlformats.org/drawingml/2006/main">
               <a:ext uri="{FF2B5EF4-FFF2-40B4-BE49-F238E27FC236}">
-                <a16:creationId xmlns:a16="http://schemas.microsoft.com/office/drawing/2014/main" id="{7E5B38C8-7D55-4B9E-B6EC-64A9E985E78C}"/>
+                <a16:creationId xmlns:a16="http://schemas.microsoft.com/office/drawing/2014/main" id="{2CF31D3B-19C9-4267-B80D-77546B153B45}"/>
               </a:ext>
             </a:extLst>
           </p:cNvPr>
@@ -23387,7 +23387,7 @@
           <p:cNvPr id="12" name="">
             <a:extLst xmlns:a="http://schemas.openxmlformats.org/drawingml/2006/main">
               <a:ext uri="{FF2B5EF4-FFF2-40B4-BE49-F238E27FC236}">
-                <a16:creationId xmlns:a16="http://schemas.microsoft.com/office/drawing/2014/main" id="{28AEDA97-6B6E-47E5-AEE9-ECA1FD1A06F4}"/>
+                <a16:creationId xmlns:a16="http://schemas.microsoft.com/office/drawing/2014/main" id="{97DBDF74-4651-407F-8D31-1885E26C7C6D}"/>
               </a:ext>
             </a:extLst>
           </p:cNvPr>
@@ -23437,7 +23437,7 @@
           <p:cNvPr id="13" name="">
             <a:extLst xmlns:a="http://schemas.openxmlformats.org/drawingml/2006/main">
               <a:ext uri="{FF2B5EF4-FFF2-40B4-BE49-F238E27FC236}">
-                <a16:creationId xmlns:a16="http://schemas.microsoft.com/office/drawing/2014/main" id="{43909A48-F517-4A0B-B5F0-EA3C34E8959C}"/>
+                <a16:creationId xmlns:a16="http://schemas.microsoft.com/office/drawing/2014/main" id="{E7767763-67A0-460E-8ED9-84497BC0762C}"/>
               </a:ext>
             </a:extLst>
           </p:cNvPr>
@@ -23472,7 +23472,7 @@
           <p:cNvPr id="14" name="">
             <a:extLst xmlns:a="http://schemas.openxmlformats.org/drawingml/2006/main">
               <a:ext uri="{FF2B5EF4-FFF2-40B4-BE49-F238E27FC236}">
-                <a16:creationId xmlns:a16="http://schemas.microsoft.com/office/drawing/2014/main" id="{92CDD2B8-4E5A-4849-8B4C-20E3AF387B0C}"/>
+                <a16:creationId xmlns:a16="http://schemas.microsoft.com/office/drawing/2014/main" id="{C245C6BA-3306-4A07-A72E-DDB1D0EB4884}"/>
               </a:ext>
             </a:extLst>
           </p:cNvPr>
@@ -23522,7 +23522,7 @@
           <p:cNvPr id="15" name="">
             <a:extLst xmlns:a="http://schemas.openxmlformats.org/drawingml/2006/main">
               <a:ext uri="{FF2B5EF4-FFF2-40B4-BE49-F238E27FC236}">
-                <a16:creationId xmlns:a16="http://schemas.microsoft.com/office/drawing/2014/main" id="{FFADA5C7-BE75-42A1-AB35-A786C45949C0}"/>
+                <a16:creationId xmlns:a16="http://schemas.microsoft.com/office/drawing/2014/main" id="{72C4903B-34A3-4DC3-88A5-50340C78F473}"/>
               </a:ext>
             </a:extLst>
           </p:cNvPr>
@@ -23572,7 +23572,7 @@
           <p:cNvPr id="16" name="">
             <a:extLst xmlns:a="http://schemas.openxmlformats.org/drawingml/2006/main">
               <a:ext uri="{FF2B5EF4-FFF2-40B4-BE49-F238E27FC236}">
-                <a16:creationId xmlns:a16="http://schemas.microsoft.com/office/drawing/2014/main" id="{85C52DF2-0D2E-471A-91FF-0C5419B7C94E}"/>
+                <a16:creationId xmlns:a16="http://schemas.microsoft.com/office/drawing/2014/main" id="{1FCCEA0C-DD13-4673-B163-6AE8E0DEDA09}"/>
               </a:ext>
             </a:extLst>
           </p:cNvPr>
@@ -23622,7 +23622,7 @@
           <p:cNvPr id="17" name="">
             <a:extLst xmlns:a="http://schemas.openxmlformats.org/drawingml/2006/main">
               <a:ext uri="{FF2B5EF4-FFF2-40B4-BE49-F238E27FC236}">
-                <a16:creationId xmlns:a16="http://schemas.microsoft.com/office/drawing/2014/main" id="{CA94549E-9592-43F3-B33A-FC931AA0A55E}"/>
+                <a16:creationId xmlns:a16="http://schemas.microsoft.com/office/drawing/2014/main" id="{82193A7B-D49D-48D1-8184-8DA0393C0E09}"/>
               </a:ext>
             </a:extLst>
           </p:cNvPr>
@@ -23657,7 +23657,7 @@
           <p:cNvPr id="18" name="">
             <a:extLst xmlns:a="http://schemas.openxmlformats.org/drawingml/2006/main">
               <a:ext uri="{FF2B5EF4-FFF2-40B4-BE49-F238E27FC236}">
-                <a16:creationId xmlns:a16="http://schemas.microsoft.com/office/drawing/2014/main" id="{F12C4472-8752-43ED-BD94-7B9AD1569B26}"/>
+                <a16:creationId xmlns:a16="http://schemas.microsoft.com/office/drawing/2014/main" id="{342B1139-FB4A-40AC-B253-5D8FB0A4C156}"/>
               </a:ext>
             </a:extLst>
           </p:cNvPr>
@@ -23707,7 +23707,7 @@
           <p:cNvPr id="19" name="">
             <a:extLst xmlns:a="http://schemas.openxmlformats.org/drawingml/2006/main">
               <a:ext uri="{FF2B5EF4-FFF2-40B4-BE49-F238E27FC236}">
-                <a16:creationId xmlns:a16="http://schemas.microsoft.com/office/drawing/2014/main" id="{2F100A9B-030D-4453-AD3D-7D2C3619676F}"/>
+                <a16:creationId xmlns:a16="http://schemas.microsoft.com/office/drawing/2014/main" id="{01252E5D-A2E6-4E4C-80EE-BFA050CB291B}"/>
               </a:ext>
             </a:extLst>
           </p:cNvPr>
@@ -23757,7 +23757,7 @@
           <p:cNvPr id="20" name="">
             <a:extLst xmlns:a="http://schemas.openxmlformats.org/drawingml/2006/main">
               <a:ext uri="{FF2B5EF4-FFF2-40B4-BE49-F238E27FC236}">
-                <a16:creationId xmlns:a16="http://schemas.microsoft.com/office/drawing/2014/main" id="{FF7A9013-DE0A-44FD-A81C-8F6FF7762E12}"/>
+                <a16:creationId xmlns:a16="http://schemas.microsoft.com/office/drawing/2014/main" id="{0D6006DE-EE35-4C87-8D2C-F2E0C9EA836D}"/>
               </a:ext>
             </a:extLst>
           </p:cNvPr>
@@ -23807,7 +23807,7 @@
           <p:cNvPr id="21" name="">
             <a:extLst xmlns:a="http://schemas.openxmlformats.org/drawingml/2006/main">
               <a:ext uri="{FF2B5EF4-FFF2-40B4-BE49-F238E27FC236}">
-                <a16:creationId xmlns:a16="http://schemas.microsoft.com/office/drawing/2014/main" id="{3853ADD2-76AE-430E-B7D4-FAAFD99DE097}"/>
+                <a16:creationId xmlns:a16="http://schemas.microsoft.com/office/drawing/2014/main" id="{2C8451BB-DA2A-4AA6-8A50-D504699C7F29}"/>
               </a:ext>
             </a:extLst>
           </p:cNvPr>
@@ -23842,7 +23842,7 @@
           <p:cNvPr id="22" name="">
             <a:extLst xmlns:a="http://schemas.openxmlformats.org/drawingml/2006/main">
               <a:ext uri="{FF2B5EF4-FFF2-40B4-BE49-F238E27FC236}">
-                <a16:creationId xmlns:a16="http://schemas.microsoft.com/office/drawing/2014/main" id="{C7D7C48F-618E-458F-86F6-329A4388097B}"/>
+                <a16:creationId xmlns:a16="http://schemas.microsoft.com/office/drawing/2014/main" id="{AFCACE04-6619-4426-9835-CF6FCB3D9588}"/>
               </a:ext>
             </a:extLst>
           </p:cNvPr>
@@ -23892,7 +23892,7 @@
           <p:cNvPr id="23" name="">
             <a:extLst xmlns:a="http://schemas.openxmlformats.org/drawingml/2006/main">
               <a:ext uri="{FF2B5EF4-FFF2-40B4-BE49-F238E27FC236}">
-                <a16:creationId xmlns:a16="http://schemas.microsoft.com/office/drawing/2014/main" id="{8BC27FBA-9383-4925-A39D-B339BC01EBA3}"/>
+                <a16:creationId xmlns:a16="http://schemas.microsoft.com/office/drawing/2014/main" id="{ECA7E748-2B90-4FD7-87C9-2727B3CDC8C4}"/>
               </a:ext>
             </a:extLst>
           </p:cNvPr>
@@ -23942,7 +23942,7 @@
           <p:cNvPr id="24" name="">
             <a:extLst xmlns:a="http://schemas.openxmlformats.org/drawingml/2006/main">
               <a:ext uri="{FF2B5EF4-FFF2-40B4-BE49-F238E27FC236}">
-                <a16:creationId xmlns:a16="http://schemas.microsoft.com/office/drawing/2014/main" id="{AD0315F0-9A51-43E0-A5C4-43936FC47914}"/>
+                <a16:creationId xmlns:a16="http://schemas.microsoft.com/office/drawing/2014/main" id="{C6D5757F-7445-44EF-9CE9-87BA605CBE59}"/>
               </a:ext>
             </a:extLst>
           </p:cNvPr>
@@ -23977,7 +23977,7 @@
           <p:cNvPr id="25" name="">
             <a:extLst xmlns:a="http://schemas.openxmlformats.org/drawingml/2006/main">
               <a:ext uri="{FF2B5EF4-FFF2-40B4-BE49-F238E27FC236}">
-                <a16:creationId xmlns:a16="http://schemas.microsoft.com/office/drawing/2014/main" id="{CCF24153-3783-4F87-B31F-26597954575A}"/>
+                <a16:creationId xmlns:a16="http://schemas.microsoft.com/office/drawing/2014/main" id="{3BDFE304-DAEF-437F-96CE-DE8C188C1B7E}"/>
               </a:ext>
             </a:extLst>
           </p:cNvPr>
@@ -24027,7 +24027,7 @@
           <p:cNvPr id="26" name="">
             <a:extLst xmlns:a="http://schemas.openxmlformats.org/drawingml/2006/main">
               <a:ext uri="{FF2B5EF4-FFF2-40B4-BE49-F238E27FC236}">
-                <a16:creationId xmlns:a16="http://schemas.microsoft.com/office/drawing/2014/main" id="{F322E034-6309-4542-8AF2-A2E6A952D590}"/>
+                <a16:creationId xmlns:a16="http://schemas.microsoft.com/office/drawing/2014/main" id="{0C81C530-A03D-4B15-9BB8-DF3C6E20B358}"/>
               </a:ext>
             </a:extLst>
           </p:cNvPr>
@@ -24077,7 +24077,7 @@
           <p:cNvPr id="27" name="">
             <a:extLst xmlns:a="http://schemas.openxmlformats.org/drawingml/2006/main">
               <a:ext uri="{FF2B5EF4-FFF2-40B4-BE49-F238E27FC236}">
-                <a16:creationId xmlns:a16="http://schemas.microsoft.com/office/drawing/2014/main" id="{B027895B-B190-495B-86B4-C6371D5D6C65}"/>
+                <a16:creationId xmlns:a16="http://schemas.microsoft.com/office/drawing/2014/main" id="{C909E299-672F-4E08-BD95-5443E0C2537F}"/>
               </a:ext>
             </a:extLst>
           </p:cNvPr>
@@ -24112,7 +24112,7 @@
           <p:cNvPr id="28" name="">
             <a:extLst xmlns:a="http://schemas.openxmlformats.org/drawingml/2006/main">
               <a:ext uri="{FF2B5EF4-FFF2-40B4-BE49-F238E27FC236}">
-                <a16:creationId xmlns:a16="http://schemas.microsoft.com/office/drawing/2014/main" id="{3D995950-8C60-4125-BF55-A83B623B8073}"/>
+                <a16:creationId xmlns:a16="http://schemas.microsoft.com/office/drawing/2014/main" id="{14BEBA35-7B20-4CEA-ABE3-5A2F3C79DA8F}"/>
               </a:ext>
             </a:extLst>
           </p:cNvPr>
@@ -24145,7 +24145,7 @@
           <p:cNvPr id="29" name="">
             <a:extLst xmlns:a="http://schemas.openxmlformats.org/drawingml/2006/main">
               <a:ext uri="{FF2B5EF4-FFF2-40B4-BE49-F238E27FC236}">
-                <a16:creationId xmlns:a16="http://schemas.microsoft.com/office/drawing/2014/main" id="{FC6A6E19-945E-4675-B9F4-639999289067}"/>
+                <a16:creationId xmlns:a16="http://schemas.microsoft.com/office/drawing/2014/main" id="{08499148-02AC-428E-8D4F-706C13ADC1F2}"/>
               </a:ext>
             </a:extLst>
           </p:cNvPr>
@@ -24195,7 +24195,7 @@
           <p:cNvPr id="30" name="">
             <a:extLst xmlns:a="http://schemas.openxmlformats.org/drawingml/2006/main">
               <a:ext uri="{FF2B5EF4-FFF2-40B4-BE49-F238E27FC236}">
-                <a16:creationId xmlns:a16="http://schemas.microsoft.com/office/drawing/2014/main" id="{58107A59-69C9-4188-9454-5F4493CD38E0}"/>
+                <a16:creationId xmlns:a16="http://schemas.microsoft.com/office/drawing/2014/main" id="{595F1397-E10E-44EB-97A7-EE164549E447}"/>
               </a:ext>
             </a:extLst>
           </p:cNvPr>
@@ -24228,7 +24228,7 @@
           <p:cNvPr id="31" name="">
             <a:extLst xmlns:a="http://schemas.openxmlformats.org/drawingml/2006/main">
               <a:ext uri="{FF2B5EF4-FFF2-40B4-BE49-F238E27FC236}">
-                <a16:creationId xmlns:a16="http://schemas.microsoft.com/office/drawing/2014/main" id="{EF25D26B-66FF-4D72-9E09-F69CF58EED3A}"/>
+                <a16:creationId xmlns:a16="http://schemas.microsoft.com/office/drawing/2014/main" id="{5288D25D-605E-4D8E-95EA-861A3EBE8FD9}"/>
               </a:ext>
             </a:extLst>
           </p:cNvPr>
@@ -24278,7 +24278,7 @@
           <p:cNvPr id="32" name="">
             <a:extLst xmlns:a="http://schemas.openxmlformats.org/drawingml/2006/main">
               <a:ext uri="{FF2B5EF4-FFF2-40B4-BE49-F238E27FC236}">
-                <a16:creationId xmlns:a16="http://schemas.microsoft.com/office/drawing/2014/main" id="{1C77DA47-1418-42F0-B856-E3282CD2D76D}"/>
+                <a16:creationId xmlns:a16="http://schemas.microsoft.com/office/drawing/2014/main" id="{806B8B92-8DD3-4B09-A071-A005B7E6534A}"/>
               </a:ext>
             </a:extLst>
           </p:cNvPr>
@@ -24311,7 +24311,7 @@
           <p:cNvPr id="33" name="">
             <a:extLst xmlns:a="http://schemas.openxmlformats.org/drawingml/2006/main">
               <a:ext uri="{FF2B5EF4-FFF2-40B4-BE49-F238E27FC236}">
-                <a16:creationId xmlns:a16="http://schemas.microsoft.com/office/drawing/2014/main" id="{9A13A3D3-A8B2-4E20-8EC9-9D4FA0A590A4}"/>
+                <a16:creationId xmlns:a16="http://schemas.microsoft.com/office/drawing/2014/main" id="{6224D6B1-4F1C-4277-8876-E918E72D42AB}"/>
               </a:ext>
             </a:extLst>
           </p:cNvPr>
@@ -24361,7 +24361,7 @@
           <p:cNvPr id="34" name="">
             <a:extLst xmlns:a="http://schemas.openxmlformats.org/drawingml/2006/main">
               <a:ext uri="{FF2B5EF4-FFF2-40B4-BE49-F238E27FC236}">
-                <a16:creationId xmlns:a16="http://schemas.microsoft.com/office/drawing/2014/main" id="{AA449CCC-82AA-4F72-A47B-81C73CF4A6FD}"/>
+                <a16:creationId xmlns:a16="http://schemas.microsoft.com/office/drawing/2014/main" id="{A20966A9-FC4D-4EE1-8E1E-C8A93F7C404E}"/>
               </a:ext>
             </a:extLst>
           </p:cNvPr>
@@ -24411,7 +24411,7 @@
           <p:cNvPr id="35" name="">
             <a:extLst xmlns:a="http://schemas.openxmlformats.org/drawingml/2006/main">
               <a:ext uri="{FF2B5EF4-FFF2-40B4-BE49-F238E27FC236}">
-                <a16:creationId xmlns:a16="http://schemas.microsoft.com/office/drawing/2014/main" id="{64D99C3D-AA72-48B0-8037-74E49DD8A09F}"/>
+                <a16:creationId xmlns:a16="http://schemas.microsoft.com/office/drawing/2014/main" id="{C9AA1120-0F1F-4590-AF75-4FBABAC47C96}"/>
               </a:ext>
             </a:extLst>
           </p:cNvPr>
@@ -24459,7 +24459,7 @@
     </p:spTree>
     <p:extLst>
       <p:ext uri="{BB962C8B-B14F-4D97-AF65-F5344CB8AC3E}">
-        <p14:creationId xmlns:p14="http://schemas.microsoft.com/office/powerpoint/2010/main" val="1433260275"/>
+        <p14:creationId xmlns:p14="http://schemas.microsoft.com/office/powerpoint/2010/main" val="2033883610"/>
       </p:ext>
     </p:extLst>
   </p:cSld>
@@ -24490,7 +24490,7 @@
           <p:cNvPr id="22" name="">
             <a:extLst xmlns:a="http://schemas.openxmlformats.org/drawingml/2006/main">
               <a:ext uri="{FF2B5EF4-FFF2-40B4-BE49-F238E27FC236}">
-                <a16:creationId xmlns:a16="http://schemas.microsoft.com/office/drawing/2014/main" id="{A305E525-F3EA-4828-969B-F19D657D4113}"/>
+                <a16:creationId xmlns:a16="http://schemas.microsoft.com/office/drawing/2014/main" id="{F393209D-7240-4E7D-AC01-372CAA3959AE}"/>
               </a:ext>
             </a:extLst>
           </p:cNvPr>
@@ -24540,7 +24540,7 @@
           <p:cNvPr id="2" name="">
             <a:extLst xmlns:a="http://schemas.openxmlformats.org/drawingml/2006/main">
               <a:ext uri="{FF2B5EF4-FFF2-40B4-BE49-F238E27FC236}">
-                <a16:creationId xmlns:a16="http://schemas.microsoft.com/office/drawing/2014/main" id="{6C141694-7447-412F-A681-8AE549AE158C}"/>
+                <a16:creationId xmlns:a16="http://schemas.microsoft.com/office/drawing/2014/main" id="{C260F8AD-3BC7-4B29-84E5-26309CFC1877}"/>
               </a:ext>
             </a:extLst>
           </p:cNvPr>
@@ -24590,7 +24590,7 @@
           <p:cNvPr id="3" name="">
             <a:extLst xmlns:a="http://schemas.openxmlformats.org/drawingml/2006/main">
               <a:ext uri="{FF2B5EF4-FFF2-40B4-BE49-F238E27FC236}">
-                <a16:creationId xmlns:a16="http://schemas.microsoft.com/office/drawing/2014/main" id="{A70590A2-3962-4C33-A614-03D5CF5F7C8F}"/>
+                <a16:creationId xmlns:a16="http://schemas.microsoft.com/office/drawing/2014/main" id="{FC96BB49-F794-4AA0-910F-E33156C75E90}"/>
               </a:ext>
             </a:extLst>
           </p:cNvPr>
@@ -24621,7 +24621,7 @@
           <p:cNvPr id="4" name="">
             <a:extLst xmlns:a="http://schemas.openxmlformats.org/drawingml/2006/main">
               <a:ext uri="{FF2B5EF4-FFF2-40B4-BE49-F238E27FC236}">
-                <a16:creationId xmlns:a16="http://schemas.microsoft.com/office/drawing/2014/main" id="{DB2EEDD7-1C05-4B9E-8817-8C24EAFDDC2E}"/>
+                <a16:creationId xmlns:a16="http://schemas.microsoft.com/office/drawing/2014/main" id="{9DA53441-2489-438F-8460-82850D437F3F}"/>
               </a:ext>
             </a:extLst>
           </p:cNvPr>
@@ -24671,7 +24671,7 @@
           <p:cNvPr id="5" name="">
             <a:extLst xmlns:a="http://schemas.openxmlformats.org/drawingml/2006/main">
               <a:ext uri="{FF2B5EF4-FFF2-40B4-BE49-F238E27FC236}">
-                <a16:creationId xmlns:a16="http://schemas.microsoft.com/office/drawing/2014/main" id="{5F1D18E1-5EDF-43CE-A590-C4239F43E6BF}"/>
+                <a16:creationId xmlns:a16="http://schemas.microsoft.com/office/drawing/2014/main" id="{57409B19-86DC-4CD4-95E5-B64995E5E1CF}"/>
               </a:ext>
             </a:extLst>
           </p:cNvPr>
@@ -24706,7 +24706,7 @@
           <p:cNvPr id="6" name="">
             <a:extLst xmlns:a="http://schemas.openxmlformats.org/drawingml/2006/main">
               <a:ext uri="{FF2B5EF4-FFF2-40B4-BE49-F238E27FC236}">
-                <a16:creationId xmlns:a16="http://schemas.microsoft.com/office/drawing/2014/main" id="{FAE8C976-AA4B-4C5E-9F71-DC2F9253AD89}"/>
+                <a16:creationId xmlns:a16="http://schemas.microsoft.com/office/drawing/2014/main" id="{061177D2-8016-46F1-9815-0958FA44AC1C}"/>
               </a:ext>
             </a:extLst>
           </p:cNvPr>
@@ -24756,7 +24756,7 @@
           <p:cNvPr id="7" name="">
             <a:extLst xmlns:a="http://schemas.openxmlformats.org/drawingml/2006/main">
               <a:ext uri="{FF2B5EF4-FFF2-40B4-BE49-F238E27FC236}">
-                <a16:creationId xmlns:a16="http://schemas.microsoft.com/office/drawing/2014/main" id="{B894EBD3-FAE1-4D2C-A635-DF017517F632}"/>
+                <a16:creationId xmlns:a16="http://schemas.microsoft.com/office/drawing/2014/main" id="{C36F6C7A-46B0-4459-AC7E-CC3196A6B844}"/>
               </a:ext>
             </a:extLst>
           </p:cNvPr>
@@ -24806,7 +24806,7 @@
           <p:cNvPr id="8" name="">
             <a:extLst xmlns:a="http://schemas.openxmlformats.org/drawingml/2006/main">
               <a:ext uri="{FF2B5EF4-FFF2-40B4-BE49-F238E27FC236}">
-                <a16:creationId xmlns:a16="http://schemas.microsoft.com/office/drawing/2014/main" id="{1CD6C2F0-1DF9-48ED-A96E-DD02DA377FC6}"/>
+                <a16:creationId xmlns:a16="http://schemas.microsoft.com/office/drawing/2014/main" id="{F6DCD3FC-6BB2-487A-9514-B976B8292034}"/>
               </a:ext>
             </a:extLst>
           </p:cNvPr>
@@ -24837,7 +24837,7 @@
           <p:cNvPr id="9" name="">
             <a:extLst xmlns:a="http://schemas.openxmlformats.org/drawingml/2006/main">
               <a:ext uri="{FF2B5EF4-FFF2-40B4-BE49-F238E27FC236}">
-                <a16:creationId xmlns:a16="http://schemas.microsoft.com/office/drawing/2014/main" id="{FAA0E8C9-1EE1-4CD7-8200-0335B50457FC}"/>
+                <a16:creationId xmlns:a16="http://schemas.microsoft.com/office/drawing/2014/main" id="{0D5EDD26-5D6C-4AC3-8D86-1C2A0C55BC0F}"/>
               </a:ext>
             </a:extLst>
           </p:cNvPr>
@@ -24887,7 +24887,7 @@
           <p:cNvPr id="10" name="">
             <a:extLst xmlns:a="http://schemas.openxmlformats.org/drawingml/2006/main">
               <a:ext uri="{FF2B5EF4-FFF2-40B4-BE49-F238E27FC236}">
-                <a16:creationId xmlns:a16="http://schemas.microsoft.com/office/drawing/2014/main" id="{5F8508C9-278E-414B-B0E5-34B55CB608E3}"/>
+                <a16:creationId xmlns:a16="http://schemas.microsoft.com/office/drawing/2014/main" id="{38E389F0-0217-4712-B99B-E373433A6588}"/>
               </a:ext>
             </a:extLst>
           </p:cNvPr>
@@ -24922,7 +24922,7 @@
           <p:cNvPr id="11" name="">
             <a:extLst xmlns:a="http://schemas.openxmlformats.org/drawingml/2006/main">
               <a:ext uri="{FF2B5EF4-FFF2-40B4-BE49-F238E27FC236}">
-                <a16:creationId xmlns:a16="http://schemas.microsoft.com/office/drawing/2014/main" id="{1E90E7F2-C4CD-492D-8CC4-715780A40A8B}"/>
+                <a16:creationId xmlns:a16="http://schemas.microsoft.com/office/drawing/2014/main" id="{2183CF6B-3C4D-4838-8045-1CF1C4C1F776}"/>
               </a:ext>
             </a:extLst>
           </p:cNvPr>
@@ -24972,7 +24972,7 @@
           <p:cNvPr id="12" name="">
             <a:extLst xmlns:a="http://schemas.openxmlformats.org/drawingml/2006/main">
               <a:ext uri="{FF2B5EF4-FFF2-40B4-BE49-F238E27FC236}">
-                <a16:creationId xmlns:a16="http://schemas.microsoft.com/office/drawing/2014/main" id="{04407CB3-5249-4B99-8605-4E72B5BBE279}"/>
+                <a16:creationId xmlns:a16="http://schemas.microsoft.com/office/drawing/2014/main" id="{38BC1FAB-E154-45AC-BDA4-7917D9EE0B93}"/>
               </a:ext>
             </a:extLst>
           </p:cNvPr>
@@ -25022,7 +25022,7 @@
           <p:cNvPr id="13" name="">
             <a:extLst xmlns:a="http://schemas.openxmlformats.org/drawingml/2006/main">
               <a:ext uri="{FF2B5EF4-FFF2-40B4-BE49-F238E27FC236}">
-                <a16:creationId xmlns:a16="http://schemas.microsoft.com/office/drawing/2014/main" id="{78794364-5FC3-4D7F-9119-4A20EF2C0E5F}"/>
+                <a16:creationId xmlns:a16="http://schemas.microsoft.com/office/drawing/2014/main" id="{BCEB2D49-FAEE-4F41-B795-60A3DEAFDC4B}"/>
               </a:ext>
             </a:extLst>
           </p:cNvPr>
@@ -25053,7 +25053,7 @@
           <p:cNvPr id="14" name="">
             <a:extLst xmlns:a="http://schemas.openxmlformats.org/drawingml/2006/main">
               <a:ext uri="{FF2B5EF4-FFF2-40B4-BE49-F238E27FC236}">
-                <a16:creationId xmlns:a16="http://schemas.microsoft.com/office/drawing/2014/main" id="{1ED3E62F-28B2-41BD-BF70-C0627C7D1466}"/>
+                <a16:creationId xmlns:a16="http://schemas.microsoft.com/office/drawing/2014/main" id="{9F890EDB-C64D-42BA-978D-BA972FF333DF}"/>
               </a:ext>
             </a:extLst>
           </p:cNvPr>
@@ -25103,7 +25103,7 @@
           <p:cNvPr id="15" name="">
             <a:extLst xmlns:a="http://schemas.openxmlformats.org/drawingml/2006/main">
               <a:ext uri="{FF2B5EF4-FFF2-40B4-BE49-F238E27FC236}">
-                <a16:creationId xmlns:a16="http://schemas.microsoft.com/office/drawing/2014/main" id="{3B3F8385-BC23-4069-B885-3362DB1DBE41}"/>
+                <a16:creationId xmlns:a16="http://schemas.microsoft.com/office/drawing/2014/main" id="{1D754E98-4C09-4678-A59A-D3AA90CB230B}"/>
               </a:ext>
             </a:extLst>
           </p:cNvPr>
@@ -25138,7 +25138,7 @@
           <p:cNvPr id="16" name="">
             <a:extLst xmlns:a="http://schemas.openxmlformats.org/drawingml/2006/main">
               <a:ext uri="{FF2B5EF4-FFF2-40B4-BE49-F238E27FC236}">
-                <a16:creationId xmlns:a16="http://schemas.microsoft.com/office/drawing/2014/main" id="{2D85A98F-4B40-4365-99FD-7B53E88B90FE}"/>
+                <a16:creationId xmlns:a16="http://schemas.microsoft.com/office/drawing/2014/main" id="{B6F54978-3AEE-4728-9259-4D43ED0FC9E3}"/>
               </a:ext>
             </a:extLst>
           </p:cNvPr>
@@ -25188,7 +25188,7 @@
           <p:cNvPr id="17" name="">
             <a:extLst xmlns:a="http://schemas.openxmlformats.org/drawingml/2006/main">
               <a:ext uri="{FF2B5EF4-FFF2-40B4-BE49-F238E27FC236}">
-                <a16:creationId xmlns:a16="http://schemas.microsoft.com/office/drawing/2014/main" id="{AAE07205-616B-43DF-9AAD-EB4E2040E7B1}"/>
+                <a16:creationId xmlns:a16="http://schemas.microsoft.com/office/drawing/2014/main" id="{1FFB483C-194D-4FBB-B3AE-FA0C267FAC5C}"/>
               </a:ext>
             </a:extLst>
           </p:cNvPr>
@@ -25238,7 +25238,7 @@
           <p:cNvPr id="18" name="">
             <a:extLst xmlns:a="http://schemas.openxmlformats.org/drawingml/2006/main">
               <a:ext uri="{FF2B5EF4-FFF2-40B4-BE49-F238E27FC236}">
-                <a16:creationId xmlns:a16="http://schemas.microsoft.com/office/drawing/2014/main" id="{88CB8425-FD24-4E9C-B007-43FEC4A2A479}"/>
+                <a16:creationId xmlns:a16="http://schemas.microsoft.com/office/drawing/2014/main" id="{04075B12-09BA-4563-B2D8-85ABDD93F64B}"/>
               </a:ext>
             </a:extLst>
           </p:cNvPr>
@@ -25269,7 +25269,7 @@
           <p:cNvPr id="19" name="">
             <a:extLst xmlns:a="http://schemas.openxmlformats.org/drawingml/2006/main">
               <a:ext uri="{FF2B5EF4-FFF2-40B4-BE49-F238E27FC236}">
-                <a16:creationId xmlns:a16="http://schemas.microsoft.com/office/drawing/2014/main" id="{C56F7C2B-2DB1-4D9A-B8D7-15C9A06EB650}"/>
+                <a16:creationId xmlns:a16="http://schemas.microsoft.com/office/drawing/2014/main" id="{52E9BF52-B06F-449B-9FF1-758694B4ED83}"/>
               </a:ext>
             </a:extLst>
           </p:cNvPr>
@@ -25319,7 +25319,7 @@
           <p:cNvPr id="20" name="">
             <a:extLst xmlns:a="http://schemas.openxmlformats.org/drawingml/2006/main">
               <a:ext uri="{FF2B5EF4-FFF2-40B4-BE49-F238E27FC236}">
-                <a16:creationId xmlns:a16="http://schemas.microsoft.com/office/drawing/2014/main" id="{36B1DF08-1970-459D-AB5C-75645C87A9B0}"/>
+                <a16:creationId xmlns:a16="http://schemas.microsoft.com/office/drawing/2014/main" id="{BFE1D805-DDCD-4A7E-BB37-1BCFE5848450}"/>
               </a:ext>
             </a:extLst>
           </p:cNvPr>
@@ -25369,7 +25369,7 @@
           <p:cNvPr id="21" name="">
             <a:extLst xmlns:a="http://schemas.openxmlformats.org/drawingml/2006/main">
               <a:ext uri="{FF2B5EF4-FFF2-40B4-BE49-F238E27FC236}">
-                <a16:creationId xmlns:a16="http://schemas.microsoft.com/office/drawing/2014/main" id="{10329BEC-2DFE-42A9-A7A7-E82C06542316}"/>
+                <a16:creationId xmlns:a16="http://schemas.microsoft.com/office/drawing/2014/main" id="{6AABDC0D-5E3E-413B-B092-F8B14A3ECBCA}"/>
               </a:ext>
             </a:extLst>
           </p:cNvPr>
@@ -25417,7 +25417,7 @@
     </p:spTree>
     <p:extLst>
       <p:ext uri="{BB962C8B-B14F-4D97-AF65-F5344CB8AC3E}">
-        <p14:creationId xmlns:p14="http://schemas.microsoft.com/office/powerpoint/2010/main" val="509732199"/>
+        <p14:creationId xmlns:p14="http://schemas.microsoft.com/office/powerpoint/2010/main" val="1902170074"/>
       </p:ext>
     </p:extLst>
   </p:cSld>
@@ -25448,7 +25448,7 @@
           <p:cNvPr id="31" name="">
             <a:extLst xmlns:a="http://schemas.openxmlformats.org/drawingml/2006/main">
               <a:ext uri="{FF2B5EF4-FFF2-40B4-BE49-F238E27FC236}">
-                <a16:creationId xmlns:a16="http://schemas.microsoft.com/office/drawing/2014/main" id="{460C0A4A-EA4D-458D-ACB0-336339221D13}"/>
+                <a16:creationId xmlns:a16="http://schemas.microsoft.com/office/drawing/2014/main" id="{6E565231-2F5A-4E28-979D-2E395DD05E12}"/>
               </a:ext>
             </a:extLst>
           </p:cNvPr>
@@ -25498,7 +25498,7 @@
           <p:cNvPr id="2" name="">
             <a:extLst xmlns:a="http://schemas.openxmlformats.org/drawingml/2006/main">
               <a:ext uri="{FF2B5EF4-FFF2-40B4-BE49-F238E27FC236}">
-                <a16:creationId xmlns:a16="http://schemas.microsoft.com/office/drawing/2014/main" id="{97F23E06-E94A-453A-996D-1607D2BE883F}"/>
+                <a16:creationId xmlns:a16="http://schemas.microsoft.com/office/drawing/2014/main" id="{2AC03461-2D69-42F5-A271-C0AF5D98428E}"/>
               </a:ext>
             </a:extLst>
           </p:cNvPr>
@@ -25548,7 +25548,7 @@
           <p:cNvPr id="3" name="">
             <a:extLst xmlns:a="http://schemas.openxmlformats.org/drawingml/2006/main">
               <a:ext uri="{FF2B5EF4-FFF2-40B4-BE49-F238E27FC236}">
-                <a16:creationId xmlns:a16="http://schemas.microsoft.com/office/drawing/2014/main" id="{3D689088-9EB9-462D-A22E-2302AB8FA2C6}"/>
+                <a16:creationId xmlns:a16="http://schemas.microsoft.com/office/drawing/2014/main" id="{F3FEC361-39C2-44DD-80B4-D55FA31EEA36}"/>
               </a:ext>
             </a:extLst>
           </p:cNvPr>
@@ -25579,7 +25579,7 @@
           <p:cNvPr id="4" name="">
             <a:extLst xmlns:a="http://schemas.openxmlformats.org/drawingml/2006/main">
               <a:ext uri="{FF2B5EF4-FFF2-40B4-BE49-F238E27FC236}">
-                <a16:creationId xmlns:a16="http://schemas.microsoft.com/office/drawing/2014/main" id="{C0426D41-C2D8-4A22-AD71-FCE2B388B9F2}"/>
+                <a16:creationId xmlns:a16="http://schemas.microsoft.com/office/drawing/2014/main" id="{A9FBAB19-786A-420A-96C1-EA521CE7840F}"/>
               </a:ext>
             </a:extLst>
           </p:cNvPr>
@@ -25629,7 +25629,7 @@
           <p:cNvPr id="5" name="">
             <a:extLst xmlns:a="http://schemas.openxmlformats.org/drawingml/2006/main">
               <a:ext uri="{FF2B5EF4-FFF2-40B4-BE49-F238E27FC236}">
-                <a16:creationId xmlns:a16="http://schemas.microsoft.com/office/drawing/2014/main" id="{9D5FCDBC-F90B-4000-9EEE-3F93628BA3AB}"/>
+                <a16:creationId xmlns:a16="http://schemas.microsoft.com/office/drawing/2014/main" id="{121A65EF-C1E2-471C-9177-01C1327BC344}"/>
               </a:ext>
             </a:extLst>
           </p:cNvPr>
@@ -25679,7 +25679,7 @@
           <p:cNvPr id="6" name="">
             <a:extLst xmlns:a="http://schemas.openxmlformats.org/drawingml/2006/main">
               <a:ext uri="{FF2B5EF4-FFF2-40B4-BE49-F238E27FC236}">
-                <a16:creationId xmlns:a16="http://schemas.microsoft.com/office/drawing/2014/main" id="{22A3EF81-6F35-4BAE-B144-458DAC64297C}"/>
+                <a16:creationId xmlns:a16="http://schemas.microsoft.com/office/drawing/2014/main" id="{695661A5-DAD0-43F8-BE10-7B740281D44C}"/>
               </a:ext>
             </a:extLst>
           </p:cNvPr>
@@ -25729,7 +25729,7 @@
           <p:cNvPr id="7" name="">
             <a:extLst xmlns:a="http://schemas.openxmlformats.org/drawingml/2006/main">
               <a:ext uri="{FF2B5EF4-FFF2-40B4-BE49-F238E27FC236}">
-                <a16:creationId xmlns:a16="http://schemas.microsoft.com/office/drawing/2014/main" id="{7ADE1FAC-30AC-409E-A575-7786D448882B}"/>
+                <a16:creationId xmlns:a16="http://schemas.microsoft.com/office/drawing/2014/main" id="{71EE33F7-9D22-4F7D-9EB1-4F96041176FF}"/>
               </a:ext>
             </a:extLst>
           </p:cNvPr>
@@ -25760,7 +25760,7 @@
           <p:cNvPr id="8" name="">
             <a:extLst xmlns:a="http://schemas.openxmlformats.org/drawingml/2006/main">
               <a:ext uri="{FF2B5EF4-FFF2-40B4-BE49-F238E27FC236}">
-                <a16:creationId xmlns:a16="http://schemas.microsoft.com/office/drawing/2014/main" id="{626A0870-A81B-4E34-85A6-AC6B5DD6C6DA}"/>
+                <a16:creationId xmlns:a16="http://schemas.microsoft.com/office/drawing/2014/main" id="{309B9F65-6BF7-4F04-A828-68FAE8717456}"/>
               </a:ext>
             </a:extLst>
           </p:cNvPr>
@@ -25810,7 +25810,7 @@
           <p:cNvPr id="9" name="">
             <a:extLst xmlns:a="http://schemas.openxmlformats.org/drawingml/2006/main">
               <a:ext uri="{FF2B5EF4-FFF2-40B4-BE49-F238E27FC236}">
-                <a16:creationId xmlns:a16="http://schemas.microsoft.com/office/drawing/2014/main" id="{4B0EC357-733B-4BCE-8CCF-B78E416D04E4}"/>
+                <a16:creationId xmlns:a16="http://schemas.microsoft.com/office/drawing/2014/main" id="{4C709F06-CD5C-4393-BC69-FCD70FE7A373}"/>
               </a:ext>
             </a:extLst>
           </p:cNvPr>
@@ -25860,7 +25860,7 @@
           <p:cNvPr id="10" name="">
             <a:extLst xmlns:a="http://schemas.openxmlformats.org/drawingml/2006/main">
               <a:ext uri="{FF2B5EF4-FFF2-40B4-BE49-F238E27FC236}">
-                <a16:creationId xmlns:a16="http://schemas.microsoft.com/office/drawing/2014/main" id="{B42C0F69-9F99-47F6-9A24-EB73817AA18C}"/>
+                <a16:creationId xmlns:a16="http://schemas.microsoft.com/office/drawing/2014/main" id="{5CF378F7-D820-4006-8736-D99753A9D3D6}"/>
               </a:ext>
             </a:extLst>
           </p:cNvPr>
@@ -25910,7 +25910,7 @@
           <p:cNvPr id="11" name="">
             <a:extLst xmlns:a="http://schemas.openxmlformats.org/drawingml/2006/main">
               <a:ext uri="{FF2B5EF4-FFF2-40B4-BE49-F238E27FC236}">
-                <a16:creationId xmlns:a16="http://schemas.microsoft.com/office/drawing/2014/main" id="{293B9E59-D922-41F5-98BB-56E949BB9D4E}"/>
+                <a16:creationId xmlns:a16="http://schemas.microsoft.com/office/drawing/2014/main" id="{4BA10580-942D-40FE-A7CF-6107115C92B9}"/>
               </a:ext>
             </a:extLst>
           </p:cNvPr>
@@ -25941,7 +25941,7 @@
           <p:cNvPr id="12" name="">
             <a:extLst xmlns:a="http://schemas.openxmlformats.org/drawingml/2006/main">
               <a:ext uri="{FF2B5EF4-FFF2-40B4-BE49-F238E27FC236}">
-                <a16:creationId xmlns:a16="http://schemas.microsoft.com/office/drawing/2014/main" id="{4D5208DC-EB78-42B3-B246-880243928CD5}"/>
+                <a16:creationId xmlns:a16="http://schemas.microsoft.com/office/drawing/2014/main" id="{0BDCC21A-15F2-4FC6-834E-2C523B94B4D9}"/>
               </a:ext>
             </a:extLst>
           </p:cNvPr>
@@ -25991,7 +25991,7 @@
           <p:cNvPr id="13" name="">
             <a:extLst xmlns:a="http://schemas.openxmlformats.org/drawingml/2006/main">
               <a:ext uri="{FF2B5EF4-FFF2-40B4-BE49-F238E27FC236}">
-                <a16:creationId xmlns:a16="http://schemas.microsoft.com/office/drawing/2014/main" id="{52E7FD31-E2E2-408C-8FF5-3BCA97203341}"/>
+                <a16:creationId xmlns:a16="http://schemas.microsoft.com/office/drawing/2014/main" id="{524FB09A-4C62-47F1-9761-43E52C30831B}"/>
               </a:ext>
             </a:extLst>
           </p:cNvPr>
@@ -26041,7 +26041,7 @@
           <p:cNvPr id="14" name="">
             <a:extLst xmlns:a="http://schemas.openxmlformats.org/drawingml/2006/main">
               <a:ext uri="{FF2B5EF4-FFF2-40B4-BE49-F238E27FC236}">
-                <a16:creationId xmlns:a16="http://schemas.microsoft.com/office/drawing/2014/main" id="{C1595A6B-3ADF-45A4-AAD9-27E7DCFE7863}"/>
+                <a16:creationId xmlns:a16="http://schemas.microsoft.com/office/drawing/2014/main" id="{F3D909BD-0775-413F-941A-B5C10AB4AC65}"/>
               </a:ext>
             </a:extLst>
           </p:cNvPr>
@@ -26091,7 +26091,7 @@
           <p:cNvPr id="15" name="">
             <a:extLst xmlns:a="http://schemas.openxmlformats.org/drawingml/2006/main">
               <a:ext uri="{FF2B5EF4-FFF2-40B4-BE49-F238E27FC236}">
-                <a16:creationId xmlns:a16="http://schemas.microsoft.com/office/drawing/2014/main" id="{D91AC2B5-C94F-4F4E-936A-56396BEC2DEB}"/>
+                <a16:creationId xmlns:a16="http://schemas.microsoft.com/office/drawing/2014/main" id="{B5FFFF85-99B1-465A-92BB-9A0353A4EE09}"/>
               </a:ext>
             </a:extLst>
           </p:cNvPr>
@@ -26122,7 +26122,7 @@
           <p:cNvPr id="16" name="">
             <a:extLst xmlns:a="http://schemas.openxmlformats.org/drawingml/2006/main">
               <a:ext uri="{FF2B5EF4-FFF2-40B4-BE49-F238E27FC236}">
-                <a16:creationId xmlns:a16="http://schemas.microsoft.com/office/drawing/2014/main" id="{9BBF7BB7-0377-4788-90E9-F09CEF45A931}"/>
+                <a16:creationId xmlns:a16="http://schemas.microsoft.com/office/drawing/2014/main" id="{FD238CDF-D7D2-4F51-BF68-4E4323F893F9}"/>
               </a:ext>
             </a:extLst>
           </p:cNvPr>
@@ -26172,7 +26172,7 @@
           <p:cNvPr id="17" name="">
             <a:extLst xmlns:a="http://schemas.openxmlformats.org/drawingml/2006/main">
               <a:ext uri="{FF2B5EF4-FFF2-40B4-BE49-F238E27FC236}">
-                <a16:creationId xmlns:a16="http://schemas.microsoft.com/office/drawing/2014/main" id="{80D09195-0FFF-4540-8EBD-866F9ACBED7E}"/>
+                <a16:creationId xmlns:a16="http://schemas.microsoft.com/office/drawing/2014/main" id="{2F55AF9B-0FF4-47AC-8164-8EA33E458A68}"/>
               </a:ext>
             </a:extLst>
           </p:cNvPr>
@@ -26222,7 +26222,7 @@
           <p:cNvPr id="18" name="">
             <a:extLst xmlns:a="http://schemas.openxmlformats.org/drawingml/2006/main">
               <a:ext uri="{FF2B5EF4-FFF2-40B4-BE49-F238E27FC236}">
-                <a16:creationId xmlns:a16="http://schemas.microsoft.com/office/drawing/2014/main" id="{94437D00-9FE9-4255-BDB1-F53D89C11B62}"/>
+                <a16:creationId xmlns:a16="http://schemas.microsoft.com/office/drawing/2014/main" id="{A5A6B1C1-19EE-4B08-8BD9-60495ECB3AEF}"/>
               </a:ext>
             </a:extLst>
           </p:cNvPr>
@@ -26272,7 +26272,7 @@
           <p:cNvPr id="19" name="">
             <a:extLst xmlns:a="http://schemas.openxmlformats.org/drawingml/2006/main">
               <a:ext uri="{FF2B5EF4-FFF2-40B4-BE49-F238E27FC236}">
-                <a16:creationId xmlns:a16="http://schemas.microsoft.com/office/drawing/2014/main" id="{EDD3E657-FB48-4B78-BDE7-29563376EF22}"/>
+                <a16:creationId xmlns:a16="http://schemas.microsoft.com/office/drawing/2014/main" id="{99D23170-F94A-4481-B566-17F5ACF63409}"/>
               </a:ext>
             </a:extLst>
           </p:cNvPr>
@@ -26303,7 +26303,7 @@
           <p:cNvPr id="20" name="">
             <a:extLst xmlns:a="http://schemas.openxmlformats.org/drawingml/2006/main">
               <a:ext uri="{FF2B5EF4-FFF2-40B4-BE49-F238E27FC236}">
-                <a16:creationId xmlns:a16="http://schemas.microsoft.com/office/drawing/2014/main" id="{8FBBEACC-94FE-46EE-8B37-47C77A508750}"/>
+                <a16:creationId xmlns:a16="http://schemas.microsoft.com/office/drawing/2014/main" id="{6CE5C6F2-A413-4A82-8CF0-383A59C32A66}"/>
               </a:ext>
             </a:extLst>
           </p:cNvPr>
@@ -26353,7 +26353,7 @@
           <p:cNvPr id="21" name="">
             <a:extLst xmlns:a="http://schemas.openxmlformats.org/drawingml/2006/main">
               <a:ext uri="{FF2B5EF4-FFF2-40B4-BE49-F238E27FC236}">
-                <a16:creationId xmlns:a16="http://schemas.microsoft.com/office/drawing/2014/main" id="{D677337E-F8ED-472E-9C43-1F1A797C9645}"/>
+                <a16:creationId xmlns:a16="http://schemas.microsoft.com/office/drawing/2014/main" id="{A2BDB4EE-742E-43C6-A665-D494F98CC907}"/>
               </a:ext>
             </a:extLst>
           </p:cNvPr>
@@ -26403,7 +26403,7 @@
           <p:cNvPr id="22" name="">
             <a:extLst xmlns:a="http://schemas.openxmlformats.org/drawingml/2006/main">
               <a:ext uri="{FF2B5EF4-FFF2-40B4-BE49-F238E27FC236}">
-                <a16:creationId xmlns:a16="http://schemas.microsoft.com/office/drawing/2014/main" id="{F9F62C91-F538-48DA-B0AE-C2B9FD305000}"/>
+                <a16:creationId xmlns:a16="http://schemas.microsoft.com/office/drawing/2014/main" id="{E2B952FE-B86B-493B-9642-94F790334A65}"/>
               </a:ext>
             </a:extLst>
           </p:cNvPr>
@@ -26453,7 +26453,7 @@
           <p:cNvPr id="23" name="">
             <a:extLst xmlns:a="http://schemas.openxmlformats.org/drawingml/2006/main">
               <a:ext uri="{FF2B5EF4-FFF2-40B4-BE49-F238E27FC236}">
-                <a16:creationId xmlns:a16="http://schemas.microsoft.com/office/drawing/2014/main" id="{60501660-B329-4F05-96A5-BCFF63B9DF47}"/>
+                <a16:creationId xmlns:a16="http://schemas.microsoft.com/office/drawing/2014/main" id="{F4F0FF7C-441F-4CEE-A11A-FE7E73D08EAC}"/>
               </a:ext>
             </a:extLst>
           </p:cNvPr>
@@ -26484,7 +26484,7 @@
           <p:cNvPr id="24" name="">
             <a:extLst xmlns:a="http://schemas.openxmlformats.org/drawingml/2006/main">
               <a:ext uri="{FF2B5EF4-FFF2-40B4-BE49-F238E27FC236}">
-                <a16:creationId xmlns:a16="http://schemas.microsoft.com/office/drawing/2014/main" id="{64450458-A71A-40E1-B379-920570845EAF}"/>
+                <a16:creationId xmlns:a16="http://schemas.microsoft.com/office/drawing/2014/main" id="{802BD1B8-F9D9-47B0-B2B3-2082BF6438D8}"/>
               </a:ext>
             </a:extLst>
           </p:cNvPr>
@@ -26534,7 +26534,7 @@
           <p:cNvPr id="25" name="">
             <a:extLst xmlns:a="http://schemas.openxmlformats.org/drawingml/2006/main">
               <a:ext uri="{FF2B5EF4-FFF2-40B4-BE49-F238E27FC236}">
-                <a16:creationId xmlns:a16="http://schemas.microsoft.com/office/drawing/2014/main" id="{23294F1F-FA8C-42B2-AF57-9A1C195921A2}"/>
+                <a16:creationId xmlns:a16="http://schemas.microsoft.com/office/drawing/2014/main" id="{01C6AD44-0F27-424E-AB2B-986D3AF990A6}"/>
               </a:ext>
             </a:extLst>
           </p:cNvPr>
@@ -26584,7 +26584,7 @@
           <p:cNvPr id="26" name="">
             <a:extLst xmlns:a="http://schemas.openxmlformats.org/drawingml/2006/main">
               <a:ext uri="{FF2B5EF4-FFF2-40B4-BE49-F238E27FC236}">
-                <a16:creationId xmlns:a16="http://schemas.microsoft.com/office/drawing/2014/main" id="{1454DAF7-FCBD-4555-B19D-0A47A7ACDFF0}"/>
+                <a16:creationId xmlns:a16="http://schemas.microsoft.com/office/drawing/2014/main" id="{E4974CC0-B7FD-45A9-A673-FBA75559BDB7}"/>
               </a:ext>
             </a:extLst>
           </p:cNvPr>
@@ -26634,7 +26634,7 @@
           <p:cNvPr id="27" name="">
             <a:extLst xmlns:a="http://schemas.openxmlformats.org/drawingml/2006/main">
               <a:ext uri="{FF2B5EF4-FFF2-40B4-BE49-F238E27FC236}">
-                <a16:creationId xmlns:a16="http://schemas.microsoft.com/office/drawing/2014/main" id="{6B72571B-0649-4C15-B9C9-0F42E77A03DB}"/>
+                <a16:creationId xmlns:a16="http://schemas.microsoft.com/office/drawing/2014/main" id="{514F6120-D727-4382-B5FB-0853A22D6009}"/>
               </a:ext>
             </a:extLst>
           </p:cNvPr>
@@ -26665,7 +26665,7 @@
           <p:cNvPr id="28" name="">
             <a:extLst xmlns:a="http://schemas.openxmlformats.org/drawingml/2006/main">
               <a:ext uri="{FF2B5EF4-FFF2-40B4-BE49-F238E27FC236}">
-                <a16:creationId xmlns:a16="http://schemas.microsoft.com/office/drawing/2014/main" id="{DBC47184-0120-4716-9ABF-ED860F3D2675}"/>
+                <a16:creationId xmlns:a16="http://schemas.microsoft.com/office/drawing/2014/main" id="{B2230211-FE38-4C08-B210-C08F0792682F}"/>
               </a:ext>
             </a:extLst>
           </p:cNvPr>
@@ -26715,7 +26715,7 @@
           <p:cNvPr id="29" name="">
             <a:extLst xmlns:a="http://schemas.openxmlformats.org/drawingml/2006/main">
               <a:ext uri="{FF2B5EF4-FFF2-40B4-BE49-F238E27FC236}">
-                <a16:creationId xmlns:a16="http://schemas.microsoft.com/office/drawing/2014/main" id="{2C3694D8-57EB-4CAE-BCB7-2414C5CED6F2}"/>
+                <a16:creationId xmlns:a16="http://schemas.microsoft.com/office/drawing/2014/main" id="{77961785-A8AB-4063-BCBF-E4D55FACEA0A}"/>
               </a:ext>
             </a:extLst>
           </p:cNvPr>
@@ -26765,7 +26765,7 @@
           <p:cNvPr id="30" name="">
             <a:extLst xmlns:a="http://schemas.openxmlformats.org/drawingml/2006/main">
               <a:ext uri="{FF2B5EF4-FFF2-40B4-BE49-F238E27FC236}">
-                <a16:creationId xmlns:a16="http://schemas.microsoft.com/office/drawing/2014/main" id="{7284BF57-DD9B-41BE-818D-7F01B926982A}"/>
+                <a16:creationId xmlns:a16="http://schemas.microsoft.com/office/drawing/2014/main" id="{BA1635D5-8EC0-4EE9-85EB-53AA1939FBF6}"/>
               </a:ext>
             </a:extLst>
           </p:cNvPr>
@@ -26813,7 +26813,7 @@
     </p:spTree>
     <p:extLst>
       <p:ext uri="{BB962C8B-B14F-4D97-AF65-F5344CB8AC3E}">
-        <p14:creationId xmlns:p14="http://schemas.microsoft.com/office/powerpoint/2010/main" val="1445315385"/>
+        <p14:creationId xmlns:p14="http://schemas.microsoft.com/office/powerpoint/2010/main" val="1076060816"/>
       </p:ext>
     </p:extLst>
   </p:cSld>
@@ -26844,7 +26844,7 @@
           <p:cNvPr id="19" name="">
             <a:extLst xmlns:a="http://schemas.openxmlformats.org/drawingml/2006/main">
               <a:ext uri="{FF2B5EF4-FFF2-40B4-BE49-F238E27FC236}">
-                <a16:creationId xmlns:a16="http://schemas.microsoft.com/office/drawing/2014/main" id="{3D389E9B-6B23-4CBE-BB06-65A609E2C277}"/>
+                <a16:creationId xmlns:a16="http://schemas.microsoft.com/office/drawing/2014/main" id="{E59FE381-7A71-4939-9398-B960A07A7B93}"/>
               </a:ext>
             </a:extLst>
           </p:cNvPr>
@@ -26894,7 +26894,7 @@
           <p:cNvPr id="2" name="">
             <a:extLst xmlns:a="http://schemas.openxmlformats.org/drawingml/2006/main">
               <a:ext uri="{FF2B5EF4-FFF2-40B4-BE49-F238E27FC236}">
-                <a16:creationId xmlns:a16="http://schemas.microsoft.com/office/drawing/2014/main" id="{DE435831-433C-4021-B4CC-0DD158CBA71B}"/>
+                <a16:creationId xmlns:a16="http://schemas.microsoft.com/office/drawing/2014/main" id="{79FD7924-05DD-4335-8E8E-91D80D29C0AF}"/>
               </a:ext>
             </a:extLst>
           </p:cNvPr>
@@ -26944,7 +26944,7 @@
           <p:cNvPr id="3" name="">
             <a:extLst xmlns:a="http://schemas.openxmlformats.org/drawingml/2006/main">
               <a:ext uri="{FF2B5EF4-FFF2-40B4-BE49-F238E27FC236}">
-                <a16:creationId xmlns:a16="http://schemas.microsoft.com/office/drawing/2014/main" id="{B0F625F7-7700-499E-862D-7EA7CF3D1598}"/>
+                <a16:creationId xmlns:a16="http://schemas.microsoft.com/office/drawing/2014/main" id="{D29B77D9-8FA5-4886-AD9D-7FA11BEBB98A}"/>
               </a:ext>
             </a:extLst>
           </p:cNvPr>
@@ -26975,7 +26975,7 @@
           <p:cNvPr id="4" name="">
             <a:extLst xmlns:a="http://schemas.openxmlformats.org/drawingml/2006/main">
               <a:ext uri="{FF2B5EF4-FFF2-40B4-BE49-F238E27FC236}">
-                <a16:creationId xmlns:a16="http://schemas.microsoft.com/office/drawing/2014/main" id="{73E4EBFD-0191-4D6F-A3AE-F5E508696D19}"/>
+                <a16:creationId xmlns:a16="http://schemas.microsoft.com/office/drawing/2014/main" id="{9A050087-0AC3-40FD-A61F-D1E9A42E9292}"/>
               </a:ext>
             </a:extLst>
           </p:cNvPr>
@@ -27025,7 +27025,7 @@
           <p:cNvPr id="5" name="">
             <a:extLst xmlns:a="http://schemas.openxmlformats.org/drawingml/2006/main">
               <a:ext uri="{FF2B5EF4-FFF2-40B4-BE49-F238E27FC236}">
-                <a16:creationId xmlns:a16="http://schemas.microsoft.com/office/drawing/2014/main" id="{2038AC5E-1F55-4328-8B3D-E10FBCEB6641}"/>
+                <a16:creationId xmlns:a16="http://schemas.microsoft.com/office/drawing/2014/main" id="{65261CBF-912F-48DD-B4CA-1E020192DDEA}"/>
               </a:ext>
             </a:extLst>
           </p:cNvPr>
@@ -27075,7 +27075,7 @@
           <p:cNvPr id="6" name="">
             <a:extLst xmlns:a="http://schemas.openxmlformats.org/drawingml/2006/main">
               <a:ext uri="{FF2B5EF4-FFF2-40B4-BE49-F238E27FC236}">
-                <a16:creationId xmlns:a16="http://schemas.microsoft.com/office/drawing/2014/main" id="{58649938-DBB8-4FE3-B2F4-3B0A7EB66A6B}"/>
+                <a16:creationId xmlns:a16="http://schemas.microsoft.com/office/drawing/2014/main" id="{4AECFB8C-F652-4E6E-BBD7-6DA4B94716A3}"/>
               </a:ext>
             </a:extLst>
           </p:cNvPr>
@@ -27125,7 +27125,7 @@
           <p:cNvPr id="7" name="">
             <a:extLst xmlns:a="http://schemas.openxmlformats.org/drawingml/2006/main">
               <a:ext uri="{FF2B5EF4-FFF2-40B4-BE49-F238E27FC236}">
-                <a16:creationId xmlns:a16="http://schemas.microsoft.com/office/drawing/2014/main" id="{E2E42729-D05B-466E-8AB8-D7BD688A6232}"/>
+                <a16:creationId xmlns:a16="http://schemas.microsoft.com/office/drawing/2014/main" id="{C5B76574-3490-4482-9640-5E7598207AB6}"/>
               </a:ext>
             </a:extLst>
           </p:cNvPr>
@@ -27156,7 +27156,7 @@
           <p:cNvPr id="8" name="">
             <a:extLst xmlns:a="http://schemas.openxmlformats.org/drawingml/2006/main">
               <a:ext uri="{FF2B5EF4-FFF2-40B4-BE49-F238E27FC236}">
-                <a16:creationId xmlns:a16="http://schemas.microsoft.com/office/drawing/2014/main" id="{158A72EC-A64F-4931-A57C-56F069564202}"/>
+                <a16:creationId xmlns:a16="http://schemas.microsoft.com/office/drawing/2014/main" id="{C42C84FC-8B22-40DE-A143-07765B247030}"/>
               </a:ext>
             </a:extLst>
           </p:cNvPr>
@@ -27206,7 +27206,7 @@
           <p:cNvPr id="9" name="">
             <a:extLst xmlns:a="http://schemas.openxmlformats.org/drawingml/2006/main">
               <a:ext uri="{FF2B5EF4-FFF2-40B4-BE49-F238E27FC236}">
-                <a16:creationId xmlns:a16="http://schemas.microsoft.com/office/drawing/2014/main" id="{20BAA76E-3790-4D6C-A34A-94950A55234C}"/>
+                <a16:creationId xmlns:a16="http://schemas.microsoft.com/office/drawing/2014/main" id="{725E4BB6-B07A-4D55-A5EF-43DAEF991035}"/>
               </a:ext>
             </a:extLst>
           </p:cNvPr>
@@ -27256,7 +27256,7 @@
           <p:cNvPr id="10" name="">
             <a:extLst xmlns:a="http://schemas.openxmlformats.org/drawingml/2006/main">
               <a:ext uri="{FF2B5EF4-FFF2-40B4-BE49-F238E27FC236}">
-                <a16:creationId xmlns:a16="http://schemas.microsoft.com/office/drawing/2014/main" id="{5F3B2A65-6B8F-4D03-83D4-F5472CDC0363}"/>
+                <a16:creationId xmlns:a16="http://schemas.microsoft.com/office/drawing/2014/main" id="{87BF7C41-27CF-47FD-BD68-0D7CD7628E42}"/>
               </a:ext>
             </a:extLst>
           </p:cNvPr>
@@ -27287,7 +27287,7 @@
           <p:cNvPr id="11" name="">
             <a:extLst xmlns:a="http://schemas.openxmlformats.org/drawingml/2006/main">
               <a:ext uri="{FF2B5EF4-FFF2-40B4-BE49-F238E27FC236}">
-                <a16:creationId xmlns:a16="http://schemas.microsoft.com/office/drawing/2014/main" id="{142CE3D4-08EF-4E1C-A5F6-58A69FA457AE}"/>
+                <a16:creationId xmlns:a16="http://schemas.microsoft.com/office/drawing/2014/main" id="{EA2991D8-7904-440F-A676-489A2EF0BB23}"/>
               </a:ext>
             </a:extLst>
           </p:cNvPr>
@@ -27337,7 +27337,7 @@
           <p:cNvPr id="12" name="">
             <a:extLst xmlns:a="http://schemas.openxmlformats.org/drawingml/2006/main">
               <a:ext uri="{FF2B5EF4-FFF2-40B4-BE49-F238E27FC236}">
-                <a16:creationId xmlns:a16="http://schemas.microsoft.com/office/drawing/2014/main" id="{016D2939-A91C-4474-947C-310DF3F5772B}"/>
+                <a16:creationId xmlns:a16="http://schemas.microsoft.com/office/drawing/2014/main" id="{F0D7E2E0-25DF-4FA5-B2E1-3E07AF785F3A}"/>
               </a:ext>
             </a:extLst>
           </p:cNvPr>
@@ -27387,7 +27387,7 @@
           <p:cNvPr id="13" name="">
             <a:extLst xmlns:a="http://schemas.openxmlformats.org/drawingml/2006/main">
               <a:ext uri="{FF2B5EF4-FFF2-40B4-BE49-F238E27FC236}">
-                <a16:creationId xmlns:a16="http://schemas.microsoft.com/office/drawing/2014/main" id="{DC4D887E-20B5-4ED5-B0AC-BB1D461BF670}"/>
+                <a16:creationId xmlns:a16="http://schemas.microsoft.com/office/drawing/2014/main" id="{6E9CE5E7-4E6A-4474-97EC-394EA9A28187}"/>
               </a:ext>
             </a:extLst>
           </p:cNvPr>
@@ -27418,7 +27418,7 @@
           <p:cNvPr id="14" name="">
             <a:extLst xmlns:a="http://schemas.openxmlformats.org/drawingml/2006/main">
               <a:ext uri="{FF2B5EF4-FFF2-40B4-BE49-F238E27FC236}">
-                <a16:creationId xmlns:a16="http://schemas.microsoft.com/office/drawing/2014/main" id="{C384CEF4-8268-463D-8B5C-E3130E22887F}"/>
+                <a16:creationId xmlns:a16="http://schemas.microsoft.com/office/drawing/2014/main" id="{9E3DF124-4A28-40BA-ACBA-49A4DC46F434}"/>
               </a:ext>
             </a:extLst>
           </p:cNvPr>
@@ -27468,7 +27468,7 @@
           <p:cNvPr id="15" name="">
             <a:extLst xmlns:a="http://schemas.openxmlformats.org/drawingml/2006/main">
               <a:ext uri="{FF2B5EF4-FFF2-40B4-BE49-F238E27FC236}">
-                <a16:creationId xmlns:a16="http://schemas.microsoft.com/office/drawing/2014/main" id="{ACC2275A-14BA-45E3-9F6A-F0D20DA75F58}"/>
+                <a16:creationId xmlns:a16="http://schemas.microsoft.com/office/drawing/2014/main" id="{6A7F05BF-A93F-499F-9D57-98C5EDBD207C}"/>
               </a:ext>
             </a:extLst>
           </p:cNvPr>
@@ -27518,7 +27518,7 @@
           <p:cNvPr id="16" name="">
             <a:extLst xmlns:a="http://schemas.openxmlformats.org/drawingml/2006/main">
               <a:ext uri="{FF2B5EF4-FFF2-40B4-BE49-F238E27FC236}">
-                <a16:creationId xmlns:a16="http://schemas.microsoft.com/office/drawing/2014/main" id="{BA579789-7501-4A63-AD4B-283003FAB054}"/>
+                <a16:creationId xmlns:a16="http://schemas.microsoft.com/office/drawing/2014/main" id="{444CF43E-AE61-410A-9D5F-BEA843C0C303}"/>
               </a:ext>
             </a:extLst>
           </p:cNvPr>
@@ -27549,7 +27549,7 @@
           <p:cNvPr id="17" name="">
             <a:extLst xmlns:a="http://schemas.openxmlformats.org/drawingml/2006/main">
               <a:ext uri="{FF2B5EF4-FFF2-40B4-BE49-F238E27FC236}">
-                <a16:creationId xmlns:a16="http://schemas.microsoft.com/office/drawing/2014/main" id="{AA9E11E8-32D4-4E03-9D01-E8E3597F3B83}"/>
+                <a16:creationId xmlns:a16="http://schemas.microsoft.com/office/drawing/2014/main" id="{7870A7B9-A801-4D13-8038-5A0075808806}"/>
               </a:ext>
             </a:extLst>
           </p:cNvPr>
@@ -27599,7 +27599,7 @@
           <p:cNvPr id="18" name="">
             <a:extLst xmlns:a="http://schemas.openxmlformats.org/drawingml/2006/main">
               <a:ext uri="{FF2B5EF4-FFF2-40B4-BE49-F238E27FC236}">
-                <a16:creationId xmlns:a16="http://schemas.microsoft.com/office/drawing/2014/main" id="{2646251A-6EB0-4445-B55E-2F83ADDC5CE0}"/>
+                <a16:creationId xmlns:a16="http://schemas.microsoft.com/office/drawing/2014/main" id="{A98ED25F-A213-4BC0-AD4F-94E97737B710}"/>
               </a:ext>
             </a:extLst>
           </p:cNvPr>
@@ -27647,7 +27647,7 @@
     </p:spTree>
     <p:extLst>
       <p:ext uri="{BB962C8B-B14F-4D97-AF65-F5344CB8AC3E}">
-        <p14:creationId xmlns:p14="http://schemas.microsoft.com/office/powerpoint/2010/main" val="1387750965"/>
+        <p14:creationId xmlns:p14="http://schemas.microsoft.com/office/powerpoint/2010/main" val="1695735719"/>
       </p:ext>
     </p:extLst>
   </p:cSld>
@@ -27678,7 +27678,7 @@
           <p:cNvPr id="47" name="">
             <a:extLst xmlns:a="http://schemas.openxmlformats.org/drawingml/2006/main">
               <a:ext uri="{FF2B5EF4-FFF2-40B4-BE49-F238E27FC236}">
-                <a16:creationId xmlns:a16="http://schemas.microsoft.com/office/drawing/2014/main" id="{724931C4-BCCD-4807-B32D-562D30D0957C}"/>
+                <a16:creationId xmlns:a16="http://schemas.microsoft.com/office/drawing/2014/main" id="{40779006-9440-44FB-9848-894F13000BCA}"/>
               </a:ext>
             </a:extLst>
           </p:cNvPr>
@@ -27728,7 +27728,7 @@
           <p:cNvPr id="2" name="">
             <a:extLst xmlns:a="http://schemas.openxmlformats.org/drawingml/2006/main">
               <a:ext uri="{FF2B5EF4-FFF2-40B4-BE49-F238E27FC236}">
-                <a16:creationId xmlns:a16="http://schemas.microsoft.com/office/drawing/2014/main" id="{8BB59FA6-17BC-4F7B-B5E3-FCEC2B689AB9}"/>
+                <a16:creationId xmlns:a16="http://schemas.microsoft.com/office/drawing/2014/main" id="{41A1B629-809F-4F09-A8C3-A839B098BB3C}"/>
               </a:ext>
             </a:extLst>
           </p:cNvPr>
@@ -27778,7 +27778,7 @@
           <p:cNvPr id="3" name="">
             <a:extLst xmlns:a="http://schemas.openxmlformats.org/drawingml/2006/main">
               <a:ext uri="{FF2B5EF4-FFF2-40B4-BE49-F238E27FC236}">
-                <a16:creationId xmlns:a16="http://schemas.microsoft.com/office/drawing/2014/main" id="{DC50DDAF-DAAA-4228-A9B4-5AE2CA7E8F5E}"/>
+                <a16:creationId xmlns:a16="http://schemas.microsoft.com/office/drawing/2014/main" id="{74D5F5D6-D5D2-4B34-9729-EDFEDE138852}"/>
               </a:ext>
             </a:extLst>
           </p:cNvPr>
@@ -27809,7 +27809,7 @@
           <p:cNvPr id="4" name="">
             <a:extLst xmlns:a="http://schemas.openxmlformats.org/drawingml/2006/main">
               <a:ext uri="{FF2B5EF4-FFF2-40B4-BE49-F238E27FC236}">
-                <a16:creationId xmlns:a16="http://schemas.microsoft.com/office/drawing/2014/main" id="{7B6B0D32-58CE-4E85-94F2-3515016B7B4B}"/>
+                <a16:creationId xmlns:a16="http://schemas.microsoft.com/office/drawing/2014/main" id="{CA1AD18A-B13C-415F-B058-5A6F2B759671}"/>
               </a:ext>
             </a:extLst>
           </p:cNvPr>
@@ -27859,7 +27859,7 @@
           <p:cNvPr id="5" name="">
             <a:extLst xmlns:a="http://schemas.openxmlformats.org/drawingml/2006/main">
               <a:ext uri="{FF2B5EF4-FFF2-40B4-BE49-F238E27FC236}">
-                <a16:creationId xmlns:a16="http://schemas.microsoft.com/office/drawing/2014/main" id="{2FD69683-3166-4515-ABFC-EC960E58E7B4}"/>
+                <a16:creationId xmlns:a16="http://schemas.microsoft.com/office/drawing/2014/main" id="{E00364AD-96A1-4E8F-8281-90B6292EEC49}"/>
               </a:ext>
             </a:extLst>
           </p:cNvPr>
@@ -27894,7 +27894,7 @@
           <p:cNvPr id="6" name="">
             <a:extLst xmlns:a="http://schemas.openxmlformats.org/drawingml/2006/main">
               <a:ext uri="{FF2B5EF4-FFF2-40B4-BE49-F238E27FC236}">
-                <a16:creationId xmlns:a16="http://schemas.microsoft.com/office/drawing/2014/main" id="{1D552C6A-A421-4DF8-9D56-D22639F1CF4F}"/>
+                <a16:creationId xmlns:a16="http://schemas.microsoft.com/office/drawing/2014/main" id="{D8EFE204-1CC0-4BF6-9ADC-0D10F1F249AC}"/>
               </a:ext>
             </a:extLst>
           </p:cNvPr>
@@ -27929,7 +27929,7 @@
           <p:cNvPr id="7" name="">
             <a:extLst xmlns:a="http://schemas.openxmlformats.org/drawingml/2006/main">
               <a:ext uri="{FF2B5EF4-FFF2-40B4-BE49-F238E27FC236}">
-                <a16:creationId xmlns:a16="http://schemas.microsoft.com/office/drawing/2014/main" id="{30AA7F2E-C9A6-40B1-BE3E-01520F9C97E8}"/>
+                <a16:creationId xmlns:a16="http://schemas.microsoft.com/office/drawing/2014/main" id="{425D902F-93A9-4194-93C5-1342DCBA035B}"/>
               </a:ext>
             </a:extLst>
           </p:cNvPr>
@@ -27979,7 +27979,7 @@
           <p:cNvPr id="8" name="">
             <a:extLst xmlns:a="http://schemas.openxmlformats.org/drawingml/2006/main">
               <a:ext uri="{FF2B5EF4-FFF2-40B4-BE49-F238E27FC236}">
-                <a16:creationId xmlns:a16="http://schemas.microsoft.com/office/drawing/2014/main" id="{4AB86DAF-291A-4344-AE6F-FA5BF4CFAD2C}"/>
+                <a16:creationId xmlns:a16="http://schemas.microsoft.com/office/drawing/2014/main" id="{66F9FABF-1348-4DF9-9137-E79DAA05E2EC}"/>
               </a:ext>
             </a:extLst>
           </p:cNvPr>
@@ -28029,7 +28029,7 @@
           <p:cNvPr id="9" name="">
             <a:extLst xmlns:a="http://schemas.openxmlformats.org/drawingml/2006/main">
               <a:ext uri="{FF2B5EF4-FFF2-40B4-BE49-F238E27FC236}">
-                <a16:creationId xmlns:a16="http://schemas.microsoft.com/office/drawing/2014/main" id="{9B6832E2-2057-45C3-847C-9A0700AA7386}"/>
+                <a16:creationId xmlns:a16="http://schemas.microsoft.com/office/drawing/2014/main" id="{33E86B2E-47CC-4438-B001-9B124F839032}"/>
               </a:ext>
             </a:extLst>
           </p:cNvPr>
@@ -28079,7 +28079,7 @@
           <p:cNvPr id="10" name="">
             <a:extLst xmlns:a="http://schemas.openxmlformats.org/drawingml/2006/main">
               <a:ext uri="{FF2B5EF4-FFF2-40B4-BE49-F238E27FC236}">
-                <a16:creationId xmlns:a16="http://schemas.microsoft.com/office/drawing/2014/main" id="{DFAEE832-43E4-4EA7-BB3A-8FCD0322FDDF}"/>
+                <a16:creationId xmlns:a16="http://schemas.microsoft.com/office/drawing/2014/main" id="{3AE26CDF-E39F-4906-9AB8-72583C57BD1A}"/>
               </a:ext>
             </a:extLst>
           </p:cNvPr>
@@ -28114,7 +28114,7 @@
           <p:cNvPr id="11" name="">
             <a:extLst xmlns:a="http://schemas.openxmlformats.org/drawingml/2006/main">
               <a:ext uri="{FF2B5EF4-FFF2-40B4-BE49-F238E27FC236}">
-                <a16:creationId xmlns:a16="http://schemas.microsoft.com/office/drawing/2014/main" id="{0A2BA4CF-CA7A-48C6-BDFD-9BDF611BFC66}"/>
+                <a16:creationId xmlns:a16="http://schemas.microsoft.com/office/drawing/2014/main" id="{F1F04C1F-AA86-4206-B8D2-36AB5A5668EF}"/>
               </a:ext>
             </a:extLst>
           </p:cNvPr>
@@ -28149,7 +28149,7 @@
           <p:cNvPr id="12" name="">
             <a:extLst xmlns:a="http://schemas.openxmlformats.org/drawingml/2006/main">
               <a:ext uri="{FF2B5EF4-FFF2-40B4-BE49-F238E27FC236}">
-                <a16:creationId xmlns:a16="http://schemas.microsoft.com/office/drawing/2014/main" id="{DF90431E-51BD-4033-9CFA-904D98656C84}"/>
+                <a16:creationId xmlns:a16="http://schemas.microsoft.com/office/drawing/2014/main" id="{49D29F90-5825-43DE-B549-7DAD15062B65}"/>
               </a:ext>
             </a:extLst>
           </p:cNvPr>
@@ -28199,7 +28199,7 @@
           <p:cNvPr id="13" name="">
             <a:extLst xmlns:a="http://schemas.openxmlformats.org/drawingml/2006/main">
               <a:ext uri="{FF2B5EF4-FFF2-40B4-BE49-F238E27FC236}">
-                <a16:creationId xmlns:a16="http://schemas.microsoft.com/office/drawing/2014/main" id="{03741438-71FA-49FD-BE60-16183DBA7976}"/>
+                <a16:creationId xmlns:a16="http://schemas.microsoft.com/office/drawing/2014/main" id="{C19CFF83-0E4C-414B-9F7C-1C0514C2CC4E}"/>
               </a:ext>
             </a:extLst>
           </p:cNvPr>
@@ -28249,7 +28249,7 @@
           <p:cNvPr id="14" name="">
             <a:extLst xmlns:a="http://schemas.openxmlformats.org/drawingml/2006/main">
               <a:ext uri="{FF2B5EF4-FFF2-40B4-BE49-F238E27FC236}">
-                <a16:creationId xmlns:a16="http://schemas.microsoft.com/office/drawing/2014/main" id="{D3394D53-524B-436D-9F1A-5C26B3920B25}"/>
+                <a16:creationId xmlns:a16="http://schemas.microsoft.com/office/drawing/2014/main" id="{C797DC84-552D-48BD-A40C-D54F0A0E0CCF}"/>
               </a:ext>
             </a:extLst>
           </p:cNvPr>
@@ -28299,7 +28299,7 @@
           <p:cNvPr id="15" name="">
             <a:extLst xmlns:a="http://schemas.openxmlformats.org/drawingml/2006/main">
               <a:ext uri="{FF2B5EF4-FFF2-40B4-BE49-F238E27FC236}">
-                <a16:creationId xmlns:a16="http://schemas.microsoft.com/office/drawing/2014/main" id="{0076B0BD-584E-4E80-8776-645DC541654D}"/>
+                <a16:creationId xmlns:a16="http://schemas.microsoft.com/office/drawing/2014/main" id="{4C00A8BD-5D78-4E6E-8745-4127F2F5BBE2}"/>
               </a:ext>
             </a:extLst>
           </p:cNvPr>
@@ -28334,7 +28334,7 @@
           <p:cNvPr id="16" name="">
             <a:extLst xmlns:a="http://schemas.openxmlformats.org/drawingml/2006/main">
               <a:ext uri="{FF2B5EF4-FFF2-40B4-BE49-F238E27FC236}">
-                <a16:creationId xmlns:a16="http://schemas.microsoft.com/office/drawing/2014/main" id="{F874A96D-6631-4296-8EFE-861B22305521}"/>
+                <a16:creationId xmlns:a16="http://schemas.microsoft.com/office/drawing/2014/main" id="{EFF9FE44-83D4-4E19-8905-0A8F52525406}"/>
               </a:ext>
             </a:extLst>
           </p:cNvPr>
@@ -28369,7 +28369,7 @@
           <p:cNvPr id="17" name="">
             <a:extLst xmlns:a="http://schemas.openxmlformats.org/drawingml/2006/main">
               <a:ext uri="{FF2B5EF4-FFF2-40B4-BE49-F238E27FC236}">
-                <a16:creationId xmlns:a16="http://schemas.microsoft.com/office/drawing/2014/main" id="{FFFE6638-6A0F-4FBD-89E1-0AC25728FE4C}"/>
+                <a16:creationId xmlns:a16="http://schemas.microsoft.com/office/drawing/2014/main" id="{1C876C02-4308-4705-B440-85960EFC9DE8}"/>
               </a:ext>
             </a:extLst>
           </p:cNvPr>
@@ -28419,7 +28419,7 @@
           <p:cNvPr id="18" name="">
             <a:extLst xmlns:a="http://schemas.openxmlformats.org/drawingml/2006/main">
               <a:ext uri="{FF2B5EF4-FFF2-40B4-BE49-F238E27FC236}">
-                <a16:creationId xmlns:a16="http://schemas.microsoft.com/office/drawing/2014/main" id="{876933D5-427D-486A-ACE7-650C87AF560D}"/>
+                <a16:creationId xmlns:a16="http://schemas.microsoft.com/office/drawing/2014/main" id="{BD7309CE-8434-4553-82F1-F963444BBCB7}"/>
               </a:ext>
             </a:extLst>
           </p:cNvPr>
@@ -28469,7 +28469,7 @@
           <p:cNvPr id="19" name="">
             <a:extLst xmlns:a="http://schemas.openxmlformats.org/drawingml/2006/main">
               <a:ext uri="{FF2B5EF4-FFF2-40B4-BE49-F238E27FC236}">
-                <a16:creationId xmlns:a16="http://schemas.microsoft.com/office/drawing/2014/main" id="{25668111-C0CA-4195-858C-1E626F99B99B}"/>
+                <a16:creationId xmlns:a16="http://schemas.microsoft.com/office/drawing/2014/main" id="{F7F9DC7D-228F-4C8E-BD1F-C42DB30D3A22}"/>
               </a:ext>
             </a:extLst>
           </p:cNvPr>
@@ -28519,7 +28519,7 @@
           <p:cNvPr id="20" name="">
             <a:extLst xmlns:a="http://schemas.openxmlformats.org/drawingml/2006/main">
               <a:ext uri="{FF2B5EF4-FFF2-40B4-BE49-F238E27FC236}">
-                <a16:creationId xmlns:a16="http://schemas.microsoft.com/office/drawing/2014/main" id="{B0FA6EC3-89CA-4636-8359-5B786ABEBC6A}"/>
+                <a16:creationId xmlns:a16="http://schemas.microsoft.com/office/drawing/2014/main" id="{7734EFE8-8804-4950-BFD8-15552D5F2567}"/>
               </a:ext>
             </a:extLst>
           </p:cNvPr>
@@ -28554,7 +28554,7 @@
           <p:cNvPr id="21" name="">
             <a:extLst xmlns:a="http://schemas.openxmlformats.org/drawingml/2006/main">
               <a:ext uri="{FF2B5EF4-FFF2-40B4-BE49-F238E27FC236}">
-                <a16:creationId xmlns:a16="http://schemas.microsoft.com/office/drawing/2014/main" id="{FB56F772-2189-4293-8FDE-A2F16D73E544}"/>
+                <a16:creationId xmlns:a16="http://schemas.microsoft.com/office/drawing/2014/main" id="{E09A5EF4-EB3A-44E5-B8D0-5488A7C9AAB5}"/>
               </a:ext>
             </a:extLst>
           </p:cNvPr>
@@ -28589,7 +28589,7 @@
           <p:cNvPr id="22" name="">
             <a:extLst xmlns:a="http://schemas.openxmlformats.org/drawingml/2006/main">
               <a:ext uri="{FF2B5EF4-FFF2-40B4-BE49-F238E27FC236}">
-                <a16:creationId xmlns:a16="http://schemas.microsoft.com/office/drawing/2014/main" id="{36F22B98-991D-40BA-8F21-DB96C3A26996}"/>
+                <a16:creationId xmlns:a16="http://schemas.microsoft.com/office/drawing/2014/main" id="{260484DD-B031-494A-A5CF-7CE44BC42AFB}"/>
               </a:ext>
             </a:extLst>
           </p:cNvPr>
@@ -28639,7 +28639,7 @@
           <p:cNvPr id="23" name="">
             <a:extLst xmlns:a="http://schemas.openxmlformats.org/drawingml/2006/main">
               <a:ext uri="{FF2B5EF4-FFF2-40B4-BE49-F238E27FC236}">
-                <a16:creationId xmlns:a16="http://schemas.microsoft.com/office/drawing/2014/main" id="{7349EB5E-CFA0-4854-A9CB-2B3AB0C729E4}"/>
+                <a16:creationId xmlns:a16="http://schemas.microsoft.com/office/drawing/2014/main" id="{D92A408C-497E-4BBD-8C85-646E74E9BF40}"/>
               </a:ext>
             </a:extLst>
           </p:cNvPr>
@@ -28689,7 +28689,7 @@
           <p:cNvPr id="24" name="">
             <a:extLst xmlns:a="http://schemas.openxmlformats.org/drawingml/2006/main">
               <a:ext uri="{FF2B5EF4-FFF2-40B4-BE49-F238E27FC236}">
-                <a16:creationId xmlns:a16="http://schemas.microsoft.com/office/drawing/2014/main" id="{7239B17A-62A2-46FA-85C4-1C8F00706D39}"/>
+                <a16:creationId xmlns:a16="http://schemas.microsoft.com/office/drawing/2014/main" id="{83FA26DD-F1D1-4A99-9F9C-E5347A2CDC98}"/>
               </a:ext>
             </a:extLst>
           </p:cNvPr>
@@ -28739,7 +28739,7 @@
           <p:cNvPr id="25" name="">
             <a:extLst xmlns:a="http://schemas.openxmlformats.org/drawingml/2006/main">
               <a:ext uri="{FF2B5EF4-FFF2-40B4-BE49-F238E27FC236}">
-                <a16:creationId xmlns:a16="http://schemas.microsoft.com/office/drawing/2014/main" id="{D6B25093-E056-41D6-8097-269AD50D23CC}"/>
+                <a16:creationId xmlns:a16="http://schemas.microsoft.com/office/drawing/2014/main" id="{07B2E889-27F9-4B07-B949-0BBD24D243CD}"/>
               </a:ext>
             </a:extLst>
           </p:cNvPr>
@@ -28774,7 +28774,7 @@
           <p:cNvPr id="26" name="">
             <a:extLst xmlns:a="http://schemas.openxmlformats.org/drawingml/2006/main">
               <a:ext uri="{FF2B5EF4-FFF2-40B4-BE49-F238E27FC236}">
-                <a16:creationId xmlns:a16="http://schemas.microsoft.com/office/drawing/2014/main" id="{064DD24F-07E5-4055-9555-F017AF40021B}"/>
+                <a16:creationId xmlns:a16="http://schemas.microsoft.com/office/drawing/2014/main" id="{18BA7949-DDCA-47B3-B30C-3B6113ABBA17}"/>
               </a:ext>
             </a:extLst>
           </p:cNvPr>
@@ -28809,7 +28809,7 @@
           <p:cNvPr id="27" name="">
             <a:extLst xmlns:a="http://schemas.openxmlformats.org/drawingml/2006/main">
               <a:ext uri="{FF2B5EF4-FFF2-40B4-BE49-F238E27FC236}">
-                <a16:creationId xmlns:a16="http://schemas.microsoft.com/office/drawing/2014/main" id="{CECB4FFF-550F-42E4-9ECB-E01D86B9D69F}"/>
+                <a16:creationId xmlns:a16="http://schemas.microsoft.com/office/drawing/2014/main" id="{CF8914C0-100F-4AA0-AADF-78728352AC7B}"/>
               </a:ext>
             </a:extLst>
           </p:cNvPr>
@@ -28859,7 +28859,7 @@
           <p:cNvPr id="28" name="">
             <a:extLst xmlns:a="http://schemas.openxmlformats.org/drawingml/2006/main">
               <a:ext uri="{FF2B5EF4-FFF2-40B4-BE49-F238E27FC236}">
-                <a16:creationId xmlns:a16="http://schemas.microsoft.com/office/drawing/2014/main" id="{4ADA3E79-68AC-49C4-872B-2441FD2B8524}"/>
+                <a16:creationId xmlns:a16="http://schemas.microsoft.com/office/drawing/2014/main" id="{0862EB85-39A6-4464-9012-DE0AF7A5EA37}"/>
               </a:ext>
             </a:extLst>
           </p:cNvPr>
@@ -28909,7 +28909,7 @@
           <p:cNvPr id="29" name="">
             <a:extLst xmlns:a="http://schemas.openxmlformats.org/drawingml/2006/main">
               <a:ext uri="{FF2B5EF4-FFF2-40B4-BE49-F238E27FC236}">
-                <a16:creationId xmlns:a16="http://schemas.microsoft.com/office/drawing/2014/main" id="{E29DE4EB-3A5B-462B-9189-B32EDBE02C91}"/>
+                <a16:creationId xmlns:a16="http://schemas.microsoft.com/office/drawing/2014/main" id="{7FC36AAF-2CE7-4C7F-ACF8-6AF7D6F6A9EC}"/>
               </a:ext>
             </a:extLst>
           </p:cNvPr>
@@ -28959,7 +28959,7 @@
           <p:cNvPr id="30" name="">
             <a:extLst xmlns:a="http://schemas.openxmlformats.org/drawingml/2006/main">
               <a:ext uri="{FF2B5EF4-FFF2-40B4-BE49-F238E27FC236}">
-                <a16:creationId xmlns:a16="http://schemas.microsoft.com/office/drawing/2014/main" id="{AB46C589-8687-476C-A0BF-565BD742E188}"/>
+                <a16:creationId xmlns:a16="http://schemas.microsoft.com/office/drawing/2014/main" id="{E67B3C90-BDBB-4B15-B1DB-64D7590B0F8A}"/>
               </a:ext>
             </a:extLst>
           </p:cNvPr>
@@ -28994,7 +28994,7 @@
           <p:cNvPr id="31" name="">
             <a:extLst xmlns:a="http://schemas.openxmlformats.org/drawingml/2006/main">
               <a:ext uri="{FF2B5EF4-FFF2-40B4-BE49-F238E27FC236}">
-                <a16:creationId xmlns:a16="http://schemas.microsoft.com/office/drawing/2014/main" id="{63785B2E-24AB-4663-B935-DE7075771E28}"/>
+                <a16:creationId xmlns:a16="http://schemas.microsoft.com/office/drawing/2014/main" id="{A91F1781-69D6-4EEB-B107-A9F261C94EAF}"/>
               </a:ext>
             </a:extLst>
           </p:cNvPr>
@@ -29029,7 +29029,7 @@
           <p:cNvPr id="32" name="">
             <a:extLst xmlns:a="http://schemas.openxmlformats.org/drawingml/2006/main">
               <a:ext uri="{FF2B5EF4-FFF2-40B4-BE49-F238E27FC236}">
-                <a16:creationId xmlns:a16="http://schemas.microsoft.com/office/drawing/2014/main" id="{E8448CD1-DD99-4A7B-B392-1FECC674BBEE}"/>
+                <a16:creationId xmlns:a16="http://schemas.microsoft.com/office/drawing/2014/main" id="{7605FEC3-6E4A-4860-90B7-FEC7C67E4173}"/>
               </a:ext>
             </a:extLst>
           </p:cNvPr>
@@ -29079,7 +29079,7 @@
           <p:cNvPr id="33" name="">
             <a:extLst xmlns:a="http://schemas.openxmlformats.org/drawingml/2006/main">
               <a:ext uri="{FF2B5EF4-FFF2-40B4-BE49-F238E27FC236}">
-                <a16:creationId xmlns:a16="http://schemas.microsoft.com/office/drawing/2014/main" id="{82DC102B-D917-49CF-9B81-E90800C9D984}"/>
+                <a16:creationId xmlns:a16="http://schemas.microsoft.com/office/drawing/2014/main" id="{CACA5249-B74E-459D-883E-1D45BCA18859}"/>
               </a:ext>
             </a:extLst>
           </p:cNvPr>
@@ -29129,7 +29129,7 @@
           <p:cNvPr id="34" name="">
             <a:extLst xmlns:a="http://schemas.openxmlformats.org/drawingml/2006/main">
               <a:ext uri="{FF2B5EF4-FFF2-40B4-BE49-F238E27FC236}">
-                <a16:creationId xmlns:a16="http://schemas.microsoft.com/office/drawing/2014/main" id="{9A3A8BE0-042A-4F48-822F-4F449B3B141C}"/>
+                <a16:creationId xmlns:a16="http://schemas.microsoft.com/office/drawing/2014/main" id="{4EF1835F-09A0-4084-B230-A05E85B18BED}"/>
               </a:ext>
             </a:extLst>
           </p:cNvPr>
@@ -29179,7 +29179,7 @@
           <p:cNvPr id="35" name="">
             <a:extLst xmlns:a="http://schemas.openxmlformats.org/drawingml/2006/main">
               <a:ext uri="{FF2B5EF4-FFF2-40B4-BE49-F238E27FC236}">
-                <a16:creationId xmlns:a16="http://schemas.microsoft.com/office/drawing/2014/main" id="{13FCD314-F537-4128-B863-F947E2C2A194}"/>
+                <a16:creationId xmlns:a16="http://schemas.microsoft.com/office/drawing/2014/main" id="{27C15889-200D-48EA-8812-79F623D080F6}"/>
               </a:ext>
             </a:extLst>
           </p:cNvPr>
@@ -29214,7 +29214,7 @@
           <p:cNvPr id="36" name="">
             <a:extLst xmlns:a="http://schemas.openxmlformats.org/drawingml/2006/main">
               <a:ext uri="{FF2B5EF4-FFF2-40B4-BE49-F238E27FC236}">
-                <a16:creationId xmlns:a16="http://schemas.microsoft.com/office/drawing/2014/main" id="{7A9E041E-6664-41A9-968F-6A95637F71B1}"/>
+                <a16:creationId xmlns:a16="http://schemas.microsoft.com/office/drawing/2014/main" id="{B6D54C1D-4149-4FF2-BB6D-2035DCFFC2DA}"/>
               </a:ext>
             </a:extLst>
           </p:cNvPr>
@@ -29249,7 +29249,7 @@
           <p:cNvPr id="37" name="">
             <a:extLst xmlns:a="http://schemas.openxmlformats.org/drawingml/2006/main">
               <a:ext uri="{FF2B5EF4-FFF2-40B4-BE49-F238E27FC236}">
-                <a16:creationId xmlns:a16="http://schemas.microsoft.com/office/drawing/2014/main" id="{334A77E5-E082-4D79-8ACB-BFA803FEA419}"/>
+                <a16:creationId xmlns:a16="http://schemas.microsoft.com/office/drawing/2014/main" id="{0401B09B-0546-4998-BE88-90250B0F0D78}"/>
               </a:ext>
             </a:extLst>
           </p:cNvPr>
@@ -29299,7 +29299,7 @@
           <p:cNvPr id="38" name="">
             <a:extLst xmlns:a="http://schemas.openxmlformats.org/drawingml/2006/main">
               <a:ext uri="{FF2B5EF4-FFF2-40B4-BE49-F238E27FC236}">
-                <a16:creationId xmlns:a16="http://schemas.microsoft.com/office/drawing/2014/main" id="{61FECBA8-D081-427F-B46D-E492F2A36F6B}"/>
+                <a16:creationId xmlns:a16="http://schemas.microsoft.com/office/drawing/2014/main" id="{B757172F-F8A6-452E-BDA6-44A9C2B006FA}"/>
               </a:ext>
             </a:extLst>
           </p:cNvPr>
@@ -29349,7 +29349,7 @@
           <p:cNvPr id="39" name="">
             <a:extLst xmlns:a="http://schemas.openxmlformats.org/drawingml/2006/main">
               <a:ext uri="{FF2B5EF4-FFF2-40B4-BE49-F238E27FC236}">
-                <a16:creationId xmlns:a16="http://schemas.microsoft.com/office/drawing/2014/main" id="{63E7C42B-50DB-4BC6-ABA7-D7A25D77910B}"/>
+                <a16:creationId xmlns:a16="http://schemas.microsoft.com/office/drawing/2014/main" id="{15D8E2A9-2BC9-4E1C-8CDC-651F7E98D63C}"/>
               </a:ext>
             </a:extLst>
           </p:cNvPr>
@@ -29399,7 +29399,7 @@
           <p:cNvPr id="40" name="">
             <a:extLst xmlns:a="http://schemas.openxmlformats.org/drawingml/2006/main">
               <a:ext uri="{FF2B5EF4-FFF2-40B4-BE49-F238E27FC236}">
-                <a16:creationId xmlns:a16="http://schemas.microsoft.com/office/drawing/2014/main" id="{965C8554-2F89-41CF-A3CE-6AEE353A7933}"/>
+                <a16:creationId xmlns:a16="http://schemas.microsoft.com/office/drawing/2014/main" id="{D39DD7A3-2F0D-4293-B8AF-A949E0209444}"/>
               </a:ext>
             </a:extLst>
           </p:cNvPr>
@@ -29434,7 +29434,7 @@
           <p:cNvPr id="41" name="">
             <a:extLst xmlns:a="http://schemas.openxmlformats.org/drawingml/2006/main">
               <a:ext uri="{FF2B5EF4-FFF2-40B4-BE49-F238E27FC236}">
-                <a16:creationId xmlns:a16="http://schemas.microsoft.com/office/drawing/2014/main" id="{19A884A2-D9FA-4A54-A2F3-91555B91B8AA}"/>
+                <a16:creationId xmlns:a16="http://schemas.microsoft.com/office/drawing/2014/main" id="{6A144283-B3E0-40ED-B441-036542B20991}"/>
               </a:ext>
             </a:extLst>
           </p:cNvPr>
@@ -29469,7 +29469,7 @@
           <p:cNvPr id="42" name="">
             <a:extLst xmlns:a="http://schemas.openxmlformats.org/drawingml/2006/main">
               <a:ext uri="{FF2B5EF4-FFF2-40B4-BE49-F238E27FC236}">
-                <a16:creationId xmlns:a16="http://schemas.microsoft.com/office/drawing/2014/main" id="{1CCF0E91-C785-46C7-B890-5CB02A07B77D}"/>
+                <a16:creationId xmlns:a16="http://schemas.microsoft.com/office/drawing/2014/main" id="{F39187F8-5651-4BF5-8333-82EED9EF3F68}"/>
               </a:ext>
             </a:extLst>
           </p:cNvPr>
@@ -29519,7 +29519,7 @@
           <p:cNvPr id="43" name="">
             <a:extLst xmlns:a="http://schemas.openxmlformats.org/drawingml/2006/main">
               <a:ext uri="{FF2B5EF4-FFF2-40B4-BE49-F238E27FC236}">
-                <a16:creationId xmlns:a16="http://schemas.microsoft.com/office/drawing/2014/main" id="{83D09F7D-364D-473D-9821-9840EC08A7A6}"/>
+                <a16:creationId xmlns:a16="http://schemas.microsoft.com/office/drawing/2014/main" id="{1D26D795-6449-48E1-922A-F1AF3A8B316E}"/>
               </a:ext>
             </a:extLst>
           </p:cNvPr>
@@ -29569,7 +29569,7 @@
           <p:cNvPr id="44" name="">
             <a:extLst xmlns:a="http://schemas.openxmlformats.org/drawingml/2006/main">
               <a:ext uri="{FF2B5EF4-FFF2-40B4-BE49-F238E27FC236}">
-                <a16:creationId xmlns:a16="http://schemas.microsoft.com/office/drawing/2014/main" id="{DEF3912E-2F20-416D-B13F-12D723076258}"/>
+                <a16:creationId xmlns:a16="http://schemas.microsoft.com/office/drawing/2014/main" id="{09409C2F-3900-4FCC-832A-C8E2DD34E2C0}"/>
               </a:ext>
             </a:extLst>
           </p:cNvPr>
@@ -29619,7 +29619,7 @@
           <p:cNvPr id="45" name="">
             <a:extLst xmlns:a="http://schemas.openxmlformats.org/drawingml/2006/main">
               <a:ext uri="{FF2B5EF4-FFF2-40B4-BE49-F238E27FC236}">
-                <a16:creationId xmlns:a16="http://schemas.microsoft.com/office/drawing/2014/main" id="{61350285-A6A2-420C-A8A8-636B59F4A3FC}"/>
+                <a16:creationId xmlns:a16="http://schemas.microsoft.com/office/drawing/2014/main" id="{EE3DD02C-EF60-4449-BB14-FAA87637AA1A}"/>
               </a:ext>
             </a:extLst>
           </p:cNvPr>
@@ -29669,7 +29669,7 @@
           <p:cNvPr id="46" name="">
             <a:extLst xmlns:a="http://schemas.openxmlformats.org/drawingml/2006/main">
               <a:ext uri="{FF2B5EF4-FFF2-40B4-BE49-F238E27FC236}">
-                <a16:creationId xmlns:a16="http://schemas.microsoft.com/office/drawing/2014/main" id="{85E0E710-171F-4A9C-8087-A34C49919239}"/>
+                <a16:creationId xmlns:a16="http://schemas.microsoft.com/office/drawing/2014/main" id="{7BE050F5-9C59-4B25-A38F-56A63B49C9D4}"/>
               </a:ext>
             </a:extLst>
           </p:cNvPr>
@@ -29717,7 +29717,7 @@
     </p:spTree>
     <p:extLst>
       <p:ext uri="{BB962C8B-B14F-4D97-AF65-F5344CB8AC3E}">
-        <p14:creationId xmlns:p14="http://schemas.microsoft.com/office/powerpoint/2010/main" val="1008838768"/>
+        <p14:creationId xmlns:p14="http://schemas.microsoft.com/office/powerpoint/2010/main" val="1119051982"/>
       </p:ext>
     </p:extLst>
   </p:cSld>
@@ -29752,7 +29752,7 @@
           <p:nvPr/>
         </p:nvPicPr>
         <p:blipFill>
-          <a:blip xmlns:r="http://schemas.openxmlformats.org/officeDocument/2006/relationships" xmlns:a="http://schemas.openxmlformats.org/drawingml/2006/main" r:embed="R406b3a2981b74fd1"/>
+          <a:blip xmlns:r="http://schemas.openxmlformats.org/officeDocument/2006/relationships" xmlns:a="http://schemas.openxmlformats.org/drawingml/2006/main" r:embed="R4456140635df4ecb"/>
           <a:stretch xmlns:a="http://schemas.openxmlformats.org/drawingml/2006/main"/>
         </p:blipFill>
         <p:spPr>
@@ -29770,7 +29770,7 @@
           <p:cNvPr id="2" name="">
             <a:extLst xmlns:a="http://schemas.openxmlformats.org/drawingml/2006/main">
               <a:ext uri="{FF2B5EF4-FFF2-40B4-BE49-F238E27FC236}">
-                <a16:creationId xmlns:a16="http://schemas.microsoft.com/office/drawing/2014/main" id="{23D90EC0-5562-47CA-9DF9-0AB3D1EE70C5}"/>
+                <a16:creationId xmlns:a16="http://schemas.microsoft.com/office/drawing/2014/main" id="{8534EF17-FBD7-4C43-BC04-87AEAE81ED05}"/>
               </a:ext>
             </a:extLst>
           </p:cNvPr>
@@ -29820,7 +29820,7 @@
           <p:cNvPr id="3" name="">
             <a:extLst xmlns:a="http://schemas.openxmlformats.org/drawingml/2006/main">
               <a:ext uri="{FF2B5EF4-FFF2-40B4-BE49-F238E27FC236}">
-                <a16:creationId xmlns:a16="http://schemas.microsoft.com/office/drawing/2014/main" id="{739B19FE-2DC8-4EE8-BADD-F766C0FE4E61}"/>
+                <a16:creationId xmlns:a16="http://schemas.microsoft.com/office/drawing/2014/main" id="{BAA7F307-379A-43DB-B264-29620142A2DE}"/>
               </a:ext>
             </a:extLst>
           </p:cNvPr>
@@ -29870,7 +29870,7 @@
           <p:cNvPr id="4" name="">
             <a:extLst xmlns:a="http://schemas.openxmlformats.org/drawingml/2006/main">
               <a:ext uri="{FF2B5EF4-FFF2-40B4-BE49-F238E27FC236}">
-                <a16:creationId xmlns:a16="http://schemas.microsoft.com/office/drawing/2014/main" id="{CD7EDE7D-AF42-4335-8A94-F89E5CCF7371}"/>
+                <a16:creationId xmlns:a16="http://schemas.microsoft.com/office/drawing/2014/main" id="{23EE9714-8B78-4C34-8327-59DF656945D3}"/>
               </a:ext>
             </a:extLst>
           </p:cNvPr>
@@ -29901,7 +29901,7 @@
           <p:cNvPr id="5" name="">
             <a:extLst xmlns:a="http://schemas.openxmlformats.org/drawingml/2006/main">
               <a:ext uri="{FF2B5EF4-FFF2-40B4-BE49-F238E27FC236}">
-                <a16:creationId xmlns:a16="http://schemas.microsoft.com/office/drawing/2014/main" id="{FFF2EC46-61B2-441F-BA35-E5682512D883}"/>
+                <a16:creationId xmlns:a16="http://schemas.microsoft.com/office/drawing/2014/main" id="{14B899D5-74B6-4248-ABC2-3972B9C23F16}"/>
               </a:ext>
             </a:extLst>
           </p:cNvPr>
@@ -29951,7 +29951,7 @@
           <p:cNvPr id="6" name="">
             <a:extLst xmlns:a="http://schemas.openxmlformats.org/drawingml/2006/main">
               <a:ext uri="{FF2B5EF4-FFF2-40B4-BE49-F238E27FC236}">
-                <a16:creationId xmlns:a16="http://schemas.microsoft.com/office/drawing/2014/main" id="{3043BF6F-BFFC-4EB6-8073-9F92301DC7AC}"/>
+                <a16:creationId xmlns:a16="http://schemas.microsoft.com/office/drawing/2014/main" id="{3B1787DD-212A-4C64-9607-3D40E894C4AE}"/>
               </a:ext>
             </a:extLst>
           </p:cNvPr>
@@ -30001,7 +30001,7 @@
           <p:cNvPr id="7" name="">
             <a:extLst xmlns:a="http://schemas.openxmlformats.org/drawingml/2006/main">
               <a:ext uri="{FF2B5EF4-FFF2-40B4-BE49-F238E27FC236}">
-                <a16:creationId xmlns:a16="http://schemas.microsoft.com/office/drawing/2014/main" id="{873742FA-2C6F-4AED-B6F1-3C0120722AC5}"/>
+                <a16:creationId xmlns:a16="http://schemas.microsoft.com/office/drawing/2014/main" id="{4EF64860-3192-485C-9F2C-88726CE92AED}"/>
               </a:ext>
             </a:extLst>
           </p:cNvPr>
@@ -30051,7 +30051,7 @@
           <p:cNvPr id="8" name="">
             <a:extLst xmlns:a="http://schemas.openxmlformats.org/drawingml/2006/main">
               <a:ext uri="{FF2B5EF4-FFF2-40B4-BE49-F238E27FC236}">
-                <a16:creationId xmlns:a16="http://schemas.microsoft.com/office/drawing/2014/main" id="{A02F4050-1345-4C28-BA18-B711AB5A14E6}"/>
+                <a16:creationId xmlns:a16="http://schemas.microsoft.com/office/drawing/2014/main" id="{03577F22-6566-4F5D-A5C2-CB6E20629FBD}"/>
               </a:ext>
             </a:extLst>
           </p:cNvPr>
@@ -30091,7 +30091,7 @@
                   <a:srgbClr val="FFFFFF"/>
                 </a:solidFill>
               </a:rPr>
-              <a:t>ftsline.vercel.app</a:t>
+              <a:t>ftsline.net</a:t>
             </a:r>
           </a:p>
         </p:txBody>
@@ -30099,7 +30099,7 @@
     </p:spTree>
     <p:extLst>
       <p:ext uri="{BB962C8B-B14F-4D97-AF65-F5344CB8AC3E}">
-        <p14:creationId xmlns:p14="http://schemas.microsoft.com/office/powerpoint/2010/main" val="1227097934"/>
+        <p14:creationId xmlns:p14="http://schemas.microsoft.com/office/powerpoint/2010/main" val="291548269"/>
       </p:ext>
     </p:extLst>
   </p:cSld>
@@ -30130,7 +30130,7 @@
           <p:cNvPr id="40" name="">
             <a:extLst xmlns:a="http://schemas.openxmlformats.org/drawingml/2006/main">
               <a:ext uri="{FF2B5EF4-FFF2-40B4-BE49-F238E27FC236}">
-                <a16:creationId xmlns:a16="http://schemas.microsoft.com/office/drawing/2014/main" id="{D866239B-CC75-4221-ABA4-BA1796AED5E5}"/>
+                <a16:creationId xmlns:a16="http://schemas.microsoft.com/office/drawing/2014/main" id="{1266AB67-950D-4F50-B061-A52B9FC0E5A3}"/>
               </a:ext>
             </a:extLst>
           </p:cNvPr>
@@ -30180,7 +30180,7 @@
           <p:cNvPr id="2" name="">
             <a:extLst xmlns:a="http://schemas.openxmlformats.org/drawingml/2006/main">
               <a:ext uri="{FF2B5EF4-FFF2-40B4-BE49-F238E27FC236}">
-                <a16:creationId xmlns:a16="http://schemas.microsoft.com/office/drawing/2014/main" id="{CEC1B3FF-4AAA-4BB2-9BAC-A88782675F1C}"/>
+                <a16:creationId xmlns:a16="http://schemas.microsoft.com/office/drawing/2014/main" id="{740C7FFA-AE8D-4D97-B0BE-4DFDA6B2601A}"/>
               </a:ext>
             </a:extLst>
           </p:cNvPr>
@@ -30230,7 +30230,7 @@
           <p:cNvPr id="3" name="">
             <a:extLst xmlns:a="http://schemas.openxmlformats.org/drawingml/2006/main">
               <a:ext uri="{FF2B5EF4-FFF2-40B4-BE49-F238E27FC236}">
-                <a16:creationId xmlns:a16="http://schemas.microsoft.com/office/drawing/2014/main" id="{98140B51-79AE-416E-A826-0E3BA2DDCD93}"/>
+                <a16:creationId xmlns:a16="http://schemas.microsoft.com/office/drawing/2014/main" id="{E8D6C933-4976-4854-9CB6-DF9D9276B82C}"/>
               </a:ext>
             </a:extLst>
           </p:cNvPr>
@@ -30261,7 +30261,7 @@
           <p:cNvPr id="4" name="">
             <a:extLst xmlns:a="http://schemas.openxmlformats.org/drawingml/2006/main">
               <a:ext uri="{FF2B5EF4-FFF2-40B4-BE49-F238E27FC236}">
-                <a16:creationId xmlns:a16="http://schemas.microsoft.com/office/drawing/2014/main" id="{CEE50FE2-8B4C-44A6-A2AB-44CCBEA304C4}"/>
+                <a16:creationId xmlns:a16="http://schemas.microsoft.com/office/drawing/2014/main" id="{3AEA96C3-845E-4ADB-86E6-5D280595AA4B}"/>
               </a:ext>
             </a:extLst>
           </p:cNvPr>
@@ -30311,7 +30311,7 @@
           <p:cNvPr id="5" name="">
             <a:extLst xmlns:a="http://schemas.openxmlformats.org/drawingml/2006/main">
               <a:ext uri="{FF2B5EF4-FFF2-40B4-BE49-F238E27FC236}">
-                <a16:creationId xmlns:a16="http://schemas.microsoft.com/office/drawing/2014/main" id="{32538B22-E832-45B8-A188-96FDB31054F7}"/>
+                <a16:creationId xmlns:a16="http://schemas.microsoft.com/office/drawing/2014/main" id="{22ABF5FF-25D8-449F-9EC7-E7BC69E14AE2}"/>
               </a:ext>
             </a:extLst>
           </p:cNvPr>
@@ -30346,7 +30346,7 @@
           <p:cNvPr id="6" name="">
             <a:extLst xmlns:a="http://schemas.openxmlformats.org/drawingml/2006/main">
               <a:ext uri="{FF2B5EF4-FFF2-40B4-BE49-F238E27FC236}">
-                <a16:creationId xmlns:a16="http://schemas.microsoft.com/office/drawing/2014/main" id="{29B84F50-78BC-4A2F-81CB-B14B222835C4}"/>
+                <a16:creationId xmlns:a16="http://schemas.microsoft.com/office/drawing/2014/main" id="{2987221F-57EA-4EDD-AA39-4E517BC6AAAF}"/>
               </a:ext>
             </a:extLst>
           </p:cNvPr>
@@ -30396,7 +30396,7 @@
           <p:cNvPr id="7" name="">
             <a:extLst xmlns:a="http://schemas.openxmlformats.org/drawingml/2006/main">
               <a:ext uri="{FF2B5EF4-FFF2-40B4-BE49-F238E27FC236}">
-                <a16:creationId xmlns:a16="http://schemas.microsoft.com/office/drawing/2014/main" id="{CA8AB55E-A849-4A61-95FA-1223964E5991}"/>
+                <a16:creationId xmlns:a16="http://schemas.microsoft.com/office/drawing/2014/main" id="{ABC3A239-ADFD-4310-9894-179846A69537}"/>
               </a:ext>
             </a:extLst>
           </p:cNvPr>
@@ -30446,7 +30446,7 @@
           <p:cNvPr id="8" name="">
             <a:extLst xmlns:a="http://schemas.openxmlformats.org/drawingml/2006/main">
               <a:ext uri="{FF2B5EF4-FFF2-40B4-BE49-F238E27FC236}">
-                <a16:creationId xmlns:a16="http://schemas.microsoft.com/office/drawing/2014/main" id="{C5D28988-6CC4-41F7-8DCB-ECBEBF613F79}"/>
+                <a16:creationId xmlns:a16="http://schemas.microsoft.com/office/drawing/2014/main" id="{5681E9B2-FE6B-4BF7-87ED-3AC82B41CDFF}"/>
               </a:ext>
             </a:extLst>
           </p:cNvPr>
@@ -30496,7 +30496,7 @@
           <p:cNvPr id="9" name="">
             <a:extLst xmlns:a="http://schemas.openxmlformats.org/drawingml/2006/main">
               <a:ext uri="{FF2B5EF4-FFF2-40B4-BE49-F238E27FC236}">
-                <a16:creationId xmlns:a16="http://schemas.microsoft.com/office/drawing/2014/main" id="{D0B8DFA9-6A2A-453D-ABC1-34AA303A9F65}"/>
+                <a16:creationId xmlns:a16="http://schemas.microsoft.com/office/drawing/2014/main" id="{941DF032-14B9-4EE1-BC4B-DB967BCE4C7D}"/>
               </a:ext>
             </a:extLst>
           </p:cNvPr>
@@ -30531,7 +30531,7 @@
           <p:cNvPr id="10" name="">
             <a:extLst xmlns:a="http://schemas.openxmlformats.org/drawingml/2006/main">
               <a:ext uri="{FF2B5EF4-FFF2-40B4-BE49-F238E27FC236}">
-                <a16:creationId xmlns:a16="http://schemas.microsoft.com/office/drawing/2014/main" id="{19F31A74-A360-40AD-8824-AD2D93DC88E0}"/>
+                <a16:creationId xmlns:a16="http://schemas.microsoft.com/office/drawing/2014/main" id="{DFCFB772-7006-4E1A-8D46-109AB3813EAC}"/>
               </a:ext>
             </a:extLst>
           </p:cNvPr>
@@ -30581,7 +30581,7 @@
           <p:cNvPr id="11" name="">
             <a:extLst xmlns:a="http://schemas.openxmlformats.org/drawingml/2006/main">
               <a:ext uri="{FF2B5EF4-FFF2-40B4-BE49-F238E27FC236}">
-                <a16:creationId xmlns:a16="http://schemas.microsoft.com/office/drawing/2014/main" id="{C380DA0B-9F24-47BE-AAB0-3D8E3E60341B}"/>
+                <a16:creationId xmlns:a16="http://schemas.microsoft.com/office/drawing/2014/main" id="{82FB6663-E3C5-4296-B0C6-03B8B93B1187}"/>
               </a:ext>
             </a:extLst>
           </p:cNvPr>
@@ -30631,7 +30631,7 @@
           <p:cNvPr id="12" name="">
             <a:extLst xmlns:a="http://schemas.openxmlformats.org/drawingml/2006/main">
               <a:ext uri="{FF2B5EF4-FFF2-40B4-BE49-F238E27FC236}">
-                <a16:creationId xmlns:a16="http://schemas.microsoft.com/office/drawing/2014/main" id="{166C54AF-DB23-4482-BA4F-887F3C5E4CC2}"/>
+                <a16:creationId xmlns:a16="http://schemas.microsoft.com/office/drawing/2014/main" id="{DA185627-35E5-4941-AA22-BD0915C4DBF7}"/>
               </a:ext>
             </a:extLst>
           </p:cNvPr>
@@ -30681,7 +30681,7 @@
           <p:cNvPr id="13" name="">
             <a:extLst xmlns:a="http://schemas.openxmlformats.org/drawingml/2006/main">
               <a:ext uri="{FF2B5EF4-FFF2-40B4-BE49-F238E27FC236}">
-                <a16:creationId xmlns:a16="http://schemas.microsoft.com/office/drawing/2014/main" id="{BEA539AB-E6F8-46C8-B017-636B1C876A61}"/>
+                <a16:creationId xmlns:a16="http://schemas.microsoft.com/office/drawing/2014/main" id="{B3022EF2-938C-45AA-958A-F800BADE910B}"/>
               </a:ext>
             </a:extLst>
           </p:cNvPr>
@@ -30716,7 +30716,7 @@
           <p:cNvPr id="14" name="">
             <a:extLst xmlns:a="http://schemas.openxmlformats.org/drawingml/2006/main">
               <a:ext uri="{FF2B5EF4-FFF2-40B4-BE49-F238E27FC236}">
-                <a16:creationId xmlns:a16="http://schemas.microsoft.com/office/drawing/2014/main" id="{04412E7C-8F4C-4A70-B401-07F884450E1A}"/>
+                <a16:creationId xmlns:a16="http://schemas.microsoft.com/office/drawing/2014/main" id="{7152B246-DF6D-441F-9D52-8BB87E7E3E83}"/>
               </a:ext>
             </a:extLst>
           </p:cNvPr>
@@ -30766,7 +30766,7 @@
           <p:cNvPr id="15" name="">
             <a:extLst xmlns:a="http://schemas.openxmlformats.org/drawingml/2006/main">
               <a:ext uri="{FF2B5EF4-FFF2-40B4-BE49-F238E27FC236}">
-                <a16:creationId xmlns:a16="http://schemas.microsoft.com/office/drawing/2014/main" id="{D47AFB5A-F1E1-49D5-9C65-F421C16CB115}"/>
+                <a16:creationId xmlns:a16="http://schemas.microsoft.com/office/drawing/2014/main" id="{005ECF53-D6D6-434B-985B-C501E3B4BD74}"/>
               </a:ext>
             </a:extLst>
           </p:cNvPr>
@@ -30816,7 +30816,7 @@
           <p:cNvPr id="16" name="">
             <a:extLst xmlns:a="http://schemas.openxmlformats.org/drawingml/2006/main">
               <a:ext uri="{FF2B5EF4-FFF2-40B4-BE49-F238E27FC236}">
-                <a16:creationId xmlns:a16="http://schemas.microsoft.com/office/drawing/2014/main" id="{9EC561E6-8910-4F05-A5FB-5F132DD8D778}"/>
+                <a16:creationId xmlns:a16="http://schemas.microsoft.com/office/drawing/2014/main" id="{9F16E5CF-AE26-41A4-9AF3-9694AD2D89AA}"/>
               </a:ext>
             </a:extLst>
           </p:cNvPr>
@@ -30866,7 +30866,7 @@
           <p:cNvPr id="17" name="">
             <a:extLst xmlns:a="http://schemas.openxmlformats.org/drawingml/2006/main">
               <a:ext uri="{FF2B5EF4-FFF2-40B4-BE49-F238E27FC236}">
-                <a16:creationId xmlns:a16="http://schemas.microsoft.com/office/drawing/2014/main" id="{8AEDD1E9-66B2-4495-BC7B-20C3638B2D5A}"/>
+                <a16:creationId xmlns:a16="http://schemas.microsoft.com/office/drawing/2014/main" id="{348F7E14-C7E9-4E86-B915-B2651EC99993}"/>
               </a:ext>
             </a:extLst>
           </p:cNvPr>
@@ -30901,7 +30901,7 @@
           <p:cNvPr id="18" name="">
             <a:extLst xmlns:a="http://schemas.openxmlformats.org/drawingml/2006/main">
               <a:ext uri="{FF2B5EF4-FFF2-40B4-BE49-F238E27FC236}">
-                <a16:creationId xmlns:a16="http://schemas.microsoft.com/office/drawing/2014/main" id="{DEB5A485-E911-44D6-A252-EDD40ABFBE33}"/>
+                <a16:creationId xmlns:a16="http://schemas.microsoft.com/office/drawing/2014/main" id="{8EF961C4-60DF-440D-8B52-B6500FDF0C71}"/>
               </a:ext>
             </a:extLst>
           </p:cNvPr>
@@ -30951,7 +30951,7 @@
           <p:cNvPr id="19" name="">
             <a:extLst xmlns:a="http://schemas.openxmlformats.org/drawingml/2006/main">
               <a:ext uri="{FF2B5EF4-FFF2-40B4-BE49-F238E27FC236}">
-                <a16:creationId xmlns:a16="http://schemas.microsoft.com/office/drawing/2014/main" id="{67D66571-D1DF-4A8D-AECD-D70BF26C70E9}"/>
+                <a16:creationId xmlns:a16="http://schemas.microsoft.com/office/drawing/2014/main" id="{24F2BFF8-3E7E-4D10-8BD0-7F142912B046}"/>
               </a:ext>
             </a:extLst>
           </p:cNvPr>
@@ -31001,7 +31001,7 @@
           <p:cNvPr id="20" name="">
             <a:extLst xmlns:a="http://schemas.openxmlformats.org/drawingml/2006/main">
               <a:ext uri="{FF2B5EF4-FFF2-40B4-BE49-F238E27FC236}">
-                <a16:creationId xmlns:a16="http://schemas.microsoft.com/office/drawing/2014/main" id="{57947FEA-692D-49C2-AC31-EC2300D62CFE}"/>
+                <a16:creationId xmlns:a16="http://schemas.microsoft.com/office/drawing/2014/main" id="{F60D6458-E14D-4532-9AE8-C374A7080A0D}"/>
               </a:ext>
             </a:extLst>
           </p:cNvPr>
@@ -31051,7 +31051,7 @@
           <p:cNvPr id="21" name="">
             <a:extLst xmlns:a="http://schemas.openxmlformats.org/drawingml/2006/main">
               <a:ext uri="{FF2B5EF4-FFF2-40B4-BE49-F238E27FC236}">
-                <a16:creationId xmlns:a16="http://schemas.microsoft.com/office/drawing/2014/main" id="{C7D64447-F98B-4DB9-ADA1-6BD476CF640E}"/>
+                <a16:creationId xmlns:a16="http://schemas.microsoft.com/office/drawing/2014/main" id="{78F23571-BC32-4C0E-8A4A-22D9C643153B}"/>
               </a:ext>
             </a:extLst>
           </p:cNvPr>
@@ -31086,7 +31086,7 @@
           <p:cNvPr id="22" name="">
             <a:extLst xmlns:a="http://schemas.openxmlformats.org/drawingml/2006/main">
               <a:ext uri="{FF2B5EF4-FFF2-40B4-BE49-F238E27FC236}">
-                <a16:creationId xmlns:a16="http://schemas.microsoft.com/office/drawing/2014/main" id="{2FBF067D-EB58-4EF8-8DBF-81D728314C5B}"/>
+                <a16:creationId xmlns:a16="http://schemas.microsoft.com/office/drawing/2014/main" id="{AD420776-F42D-4DED-B5E1-CC43BF2B8233}"/>
               </a:ext>
             </a:extLst>
           </p:cNvPr>
@@ -31136,7 +31136,7 @@
           <p:cNvPr id="23" name="">
             <a:extLst xmlns:a="http://schemas.openxmlformats.org/drawingml/2006/main">
               <a:ext uri="{FF2B5EF4-FFF2-40B4-BE49-F238E27FC236}">
-                <a16:creationId xmlns:a16="http://schemas.microsoft.com/office/drawing/2014/main" id="{32FC5939-9741-4A10-BD72-1554235A9BD3}"/>
+                <a16:creationId xmlns:a16="http://schemas.microsoft.com/office/drawing/2014/main" id="{7F3018DB-FBF8-4AED-B4B8-7D02D333C74E}"/>
               </a:ext>
             </a:extLst>
           </p:cNvPr>
@@ -31186,7 +31186,7 @@
           <p:cNvPr id="24" name="">
             <a:extLst xmlns:a="http://schemas.openxmlformats.org/drawingml/2006/main">
               <a:ext uri="{FF2B5EF4-FFF2-40B4-BE49-F238E27FC236}">
-                <a16:creationId xmlns:a16="http://schemas.microsoft.com/office/drawing/2014/main" id="{39AEE95A-F5CB-416D-B49E-EAC40F8FF61C}"/>
+                <a16:creationId xmlns:a16="http://schemas.microsoft.com/office/drawing/2014/main" id="{77A1F41C-ED1A-4178-98C4-83EB865B300A}"/>
               </a:ext>
             </a:extLst>
           </p:cNvPr>
@@ -31221,7 +31221,7 @@
           <p:cNvPr id="25" name="">
             <a:extLst xmlns:a="http://schemas.openxmlformats.org/drawingml/2006/main">
               <a:ext uri="{FF2B5EF4-FFF2-40B4-BE49-F238E27FC236}">
-                <a16:creationId xmlns:a16="http://schemas.microsoft.com/office/drawing/2014/main" id="{E28C760D-2E4A-443F-BD47-671FB316D895}"/>
+                <a16:creationId xmlns:a16="http://schemas.microsoft.com/office/drawing/2014/main" id="{23E0FA51-1D60-4F6F-8CE9-4FC6AAC8994D}"/>
               </a:ext>
             </a:extLst>
           </p:cNvPr>
@@ -31271,7 +31271,7 @@
           <p:cNvPr id="26" name="">
             <a:extLst xmlns:a="http://schemas.openxmlformats.org/drawingml/2006/main">
               <a:ext uri="{FF2B5EF4-FFF2-40B4-BE49-F238E27FC236}">
-                <a16:creationId xmlns:a16="http://schemas.microsoft.com/office/drawing/2014/main" id="{CC6DF9CB-2DB0-4A67-8DD8-3B6D125D4A05}"/>
+                <a16:creationId xmlns:a16="http://schemas.microsoft.com/office/drawing/2014/main" id="{79888D1A-0CB2-4DB9-A371-51059DB89FB2}"/>
               </a:ext>
             </a:extLst>
           </p:cNvPr>
@@ -31321,7 +31321,7 @@
           <p:cNvPr id="27" name="">
             <a:extLst xmlns:a="http://schemas.openxmlformats.org/drawingml/2006/main">
               <a:ext uri="{FF2B5EF4-FFF2-40B4-BE49-F238E27FC236}">
-                <a16:creationId xmlns:a16="http://schemas.microsoft.com/office/drawing/2014/main" id="{40FCC485-DA88-4E35-A6AC-A71EB1799983}"/>
+                <a16:creationId xmlns:a16="http://schemas.microsoft.com/office/drawing/2014/main" id="{6BF07A04-B74B-4157-9280-19E69CEEF385}"/>
               </a:ext>
             </a:extLst>
           </p:cNvPr>
@@ -31356,7 +31356,7 @@
           <p:cNvPr id="28" name="">
             <a:extLst xmlns:a="http://schemas.openxmlformats.org/drawingml/2006/main">
               <a:ext uri="{FF2B5EF4-FFF2-40B4-BE49-F238E27FC236}">
-                <a16:creationId xmlns:a16="http://schemas.microsoft.com/office/drawing/2014/main" id="{FC574A3E-04A6-4B17-8775-8C651471DB4F}"/>
+                <a16:creationId xmlns:a16="http://schemas.microsoft.com/office/drawing/2014/main" id="{643B3FE0-4461-42D0-B57E-A76B0EDCBA28}"/>
               </a:ext>
             </a:extLst>
           </p:cNvPr>
@@ -31406,7 +31406,7 @@
           <p:cNvPr id="29" name="">
             <a:extLst xmlns:a="http://schemas.openxmlformats.org/drawingml/2006/main">
               <a:ext uri="{FF2B5EF4-FFF2-40B4-BE49-F238E27FC236}">
-                <a16:creationId xmlns:a16="http://schemas.microsoft.com/office/drawing/2014/main" id="{30F4E2E5-55F1-4D39-9888-532F15AEA1A7}"/>
+                <a16:creationId xmlns:a16="http://schemas.microsoft.com/office/drawing/2014/main" id="{896D7DAD-6CE9-47D0-A48E-7E0FDFC16243}"/>
               </a:ext>
             </a:extLst>
           </p:cNvPr>
@@ -31456,7 +31456,7 @@
           <p:cNvPr id="30" name="">
             <a:extLst xmlns:a="http://schemas.openxmlformats.org/drawingml/2006/main">
               <a:ext uri="{FF2B5EF4-FFF2-40B4-BE49-F238E27FC236}">
-                <a16:creationId xmlns:a16="http://schemas.microsoft.com/office/drawing/2014/main" id="{E8B90C19-20D2-4698-A868-D9C5BA94C7A0}"/>
+                <a16:creationId xmlns:a16="http://schemas.microsoft.com/office/drawing/2014/main" id="{D1D9930A-A812-419A-BF57-5C7C1E4AB0DE}"/>
               </a:ext>
             </a:extLst>
           </p:cNvPr>
@@ -31491,7 +31491,7 @@
           <p:cNvPr id="31" name="">
             <a:extLst xmlns:a="http://schemas.openxmlformats.org/drawingml/2006/main">
               <a:ext uri="{FF2B5EF4-FFF2-40B4-BE49-F238E27FC236}">
-                <a16:creationId xmlns:a16="http://schemas.microsoft.com/office/drawing/2014/main" id="{BB596501-0C32-4C3B-824E-7072DC545F59}"/>
+                <a16:creationId xmlns:a16="http://schemas.microsoft.com/office/drawing/2014/main" id="{BC0E856E-7DCE-421D-BA59-5A4AD4A26F6F}"/>
               </a:ext>
             </a:extLst>
           </p:cNvPr>
@@ -31541,7 +31541,7 @@
           <p:cNvPr id="32" name="">
             <a:extLst xmlns:a="http://schemas.openxmlformats.org/drawingml/2006/main">
               <a:ext uri="{FF2B5EF4-FFF2-40B4-BE49-F238E27FC236}">
-                <a16:creationId xmlns:a16="http://schemas.microsoft.com/office/drawing/2014/main" id="{4ADA92EE-4E98-4EC2-9FB6-D693431B706C}"/>
+                <a16:creationId xmlns:a16="http://schemas.microsoft.com/office/drawing/2014/main" id="{AFA1A32C-E960-4BE1-A47C-4A1559C14C0B}"/>
               </a:ext>
             </a:extLst>
           </p:cNvPr>
@@ -31591,7 +31591,7 @@
           <p:cNvPr id="33" name="">
             <a:extLst xmlns:a="http://schemas.openxmlformats.org/drawingml/2006/main">
               <a:ext uri="{FF2B5EF4-FFF2-40B4-BE49-F238E27FC236}">
-                <a16:creationId xmlns:a16="http://schemas.microsoft.com/office/drawing/2014/main" id="{ABC63961-F738-4C07-AFCF-796AA13A1ECC}"/>
+                <a16:creationId xmlns:a16="http://schemas.microsoft.com/office/drawing/2014/main" id="{735942A5-CC2E-49A8-B586-B128E36AB91C}"/>
               </a:ext>
             </a:extLst>
           </p:cNvPr>
@@ -31626,7 +31626,7 @@
           <p:cNvPr id="34" name="">
             <a:extLst xmlns:a="http://schemas.openxmlformats.org/drawingml/2006/main">
               <a:ext uri="{FF2B5EF4-FFF2-40B4-BE49-F238E27FC236}">
-                <a16:creationId xmlns:a16="http://schemas.microsoft.com/office/drawing/2014/main" id="{FB17656A-BD74-460C-B3CF-47351F8CE569}"/>
+                <a16:creationId xmlns:a16="http://schemas.microsoft.com/office/drawing/2014/main" id="{39C7B045-8992-46F4-8441-8C3B13C552C8}"/>
               </a:ext>
             </a:extLst>
           </p:cNvPr>
@@ -31676,7 +31676,7 @@
           <p:cNvPr id="35" name="">
             <a:extLst xmlns:a="http://schemas.openxmlformats.org/drawingml/2006/main">
               <a:ext uri="{FF2B5EF4-FFF2-40B4-BE49-F238E27FC236}">
-                <a16:creationId xmlns:a16="http://schemas.microsoft.com/office/drawing/2014/main" id="{95CF7CC3-55EA-43EE-8857-2E086FBEE1B0}"/>
+                <a16:creationId xmlns:a16="http://schemas.microsoft.com/office/drawing/2014/main" id="{F2A709A2-48FF-481A-9416-E4F267B2062C}"/>
               </a:ext>
             </a:extLst>
           </p:cNvPr>
@@ -31726,7 +31726,7 @@
           <p:cNvPr id="36" name="">
             <a:extLst xmlns:a="http://schemas.openxmlformats.org/drawingml/2006/main">
               <a:ext uri="{FF2B5EF4-FFF2-40B4-BE49-F238E27FC236}">
-                <a16:creationId xmlns:a16="http://schemas.microsoft.com/office/drawing/2014/main" id="{C42C743E-17C2-44A7-8563-34949642D26B}"/>
+                <a16:creationId xmlns:a16="http://schemas.microsoft.com/office/drawing/2014/main" id="{EE009EED-C065-4D07-89E0-3FF5F96B3FA4}"/>
               </a:ext>
             </a:extLst>
           </p:cNvPr>
@@ -31761,7 +31761,7 @@
           <p:cNvPr id="37" name="">
             <a:extLst xmlns:a="http://schemas.openxmlformats.org/drawingml/2006/main">
               <a:ext uri="{FF2B5EF4-FFF2-40B4-BE49-F238E27FC236}">
-                <a16:creationId xmlns:a16="http://schemas.microsoft.com/office/drawing/2014/main" id="{03511BD3-8C36-4EA5-8A7A-7E57ECE0D628}"/>
+                <a16:creationId xmlns:a16="http://schemas.microsoft.com/office/drawing/2014/main" id="{9DD168D8-4513-49FC-9E0D-6755B3988892}"/>
               </a:ext>
             </a:extLst>
           </p:cNvPr>
@@ -31811,7 +31811,7 @@
           <p:cNvPr id="38" name="">
             <a:extLst xmlns:a="http://schemas.openxmlformats.org/drawingml/2006/main">
               <a:ext uri="{FF2B5EF4-FFF2-40B4-BE49-F238E27FC236}">
-                <a16:creationId xmlns:a16="http://schemas.microsoft.com/office/drawing/2014/main" id="{DED0A64D-7D20-4810-B0F2-9CFEB37AB001}"/>
+                <a16:creationId xmlns:a16="http://schemas.microsoft.com/office/drawing/2014/main" id="{F85D4A3F-001D-4CF2-8CC7-0C7EB849BFEC}"/>
               </a:ext>
             </a:extLst>
           </p:cNvPr>
@@ -31861,7 +31861,7 @@
           <p:cNvPr id="39" name="">
             <a:extLst xmlns:a="http://schemas.openxmlformats.org/drawingml/2006/main">
               <a:ext uri="{FF2B5EF4-FFF2-40B4-BE49-F238E27FC236}">
-                <a16:creationId xmlns:a16="http://schemas.microsoft.com/office/drawing/2014/main" id="{7779C0B1-5219-4114-B1D8-DCD75EE6A4C0}"/>
+                <a16:creationId xmlns:a16="http://schemas.microsoft.com/office/drawing/2014/main" id="{69422532-77A9-49A2-8FE7-321BE671DD42}"/>
               </a:ext>
             </a:extLst>
           </p:cNvPr>
@@ -31909,7 +31909,7 @@
     </p:spTree>
     <p:extLst>
       <p:ext uri="{BB962C8B-B14F-4D97-AF65-F5344CB8AC3E}">
-        <p14:creationId xmlns:p14="http://schemas.microsoft.com/office/powerpoint/2010/main" val="35433726"/>
+        <p14:creationId xmlns:p14="http://schemas.microsoft.com/office/powerpoint/2010/main" val="1787808697"/>
       </p:ext>
     </p:extLst>
   </p:cSld>
@@ -31940,7 +31940,7 @@
           <p:cNvPr id="39" name="">
             <a:extLst xmlns:a="http://schemas.openxmlformats.org/drawingml/2006/main">
               <a:ext uri="{FF2B5EF4-FFF2-40B4-BE49-F238E27FC236}">
-                <a16:creationId xmlns:a16="http://schemas.microsoft.com/office/drawing/2014/main" id="{8C379F54-3935-4DF8-AB67-A759B76BB8AA}"/>
+                <a16:creationId xmlns:a16="http://schemas.microsoft.com/office/drawing/2014/main" id="{D46CE123-2BC0-4246-976C-1A0A5B3B95C9}"/>
               </a:ext>
             </a:extLst>
           </p:cNvPr>
@@ -31990,7 +31990,7 @@
           <p:cNvPr id="2" name="">
             <a:extLst xmlns:a="http://schemas.openxmlformats.org/drawingml/2006/main">
               <a:ext uri="{FF2B5EF4-FFF2-40B4-BE49-F238E27FC236}">
-                <a16:creationId xmlns:a16="http://schemas.microsoft.com/office/drawing/2014/main" id="{14BACC83-538E-4FA1-A67E-E70AE1CE975F}"/>
+                <a16:creationId xmlns:a16="http://schemas.microsoft.com/office/drawing/2014/main" id="{7C91937B-133B-427E-ABC6-434E9E1CCC71}"/>
               </a:ext>
             </a:extLst>
           </p:cNvPr>
@@ -32040,7 +32040,7 @@
           <p:cNvPr id="3" name="">
             <a:extLst xmlns:a="http://schemas.openxmlformats.org/drawingml/2006/main">
               <a:ext uri="{FF2B5EF4-FFF2-40B4-BE49-F238E27FC236}">
-                <a16:creationId xmlns:a16="http://schemas.microsoft.com/office/drawing/2014/main" id="{C347A91C-C52A-4951-946B-82FB1BA72DB3}"/>
+                <a16:creationId xmlns:a16="http://schemas.microsoft.com/office/drawing/2014/main" id="{790A848F-08B4-4546-8003-496F2A7BB526}"/>
               </a:ext>
             </a:extLst>
           </p:cNvPr>
@@ -32071,7 +32071,7 @@
           <p:cNvPr id="4" name="">
             <a:extLst xmlns:a="http://schemas.openxmlformats.org/drawingml/2006/main">
               <a:ext uri="{FF2B5EF4-FFF2-40B4-BE49-F238E27FC236}">
-                <a16:creationId xmlns:a16="http://schemas.microsoft.com/office/drawing/2014/main" id="{3933A8EA-1139-4E9B-B139-DDC7140373F9}"/>
+                <a16:creationId xmlns:a16="http://schemas.microsoft.com/office/drawing/2014/main" id="{2FBDB1C5-F6D2-43E9-AC96-C378C2A5AB33}"/>
               </a:ext>
             </a:extLst>
           </p:cNvPr>
@@ -32121,7 +32121,7 @@
           <p:cNvPr id="5" name="">
             <a:extLst xmlns:a="http://schemas.openxmlformats.org/drawingml/2006/main">
               <a:ext uri="{FF2B5EF4-FFF2-40B4-BE49-F238E27FC236}">
-                <a16:creationId xmlns:a16="http://schemas.microsoft.com/office/drawing/2014/main" id="{355D15A6-F1E7-49D5-B48E-5F0151D5B56E}"/>
+                <a16:creationId xmlns:a16="http://schemas.microsoft.com/office/drawing/2014/main" id="{EF46DAC1-C1A7-4FA0-88F3-4406382ACEEA}"/>
               </a:ext>
             </a:extLst>
           </p:cNvPr>
@@ -32156,7 +32156,7 @@
           <p:cNvPr id="6" name="">
             <a:extLst xmlns:a="http://schemas.openxmlformats.org/drawingml/2006/main">
               <a:ext uri="{FF2B5EF4-FFF2-40B4-BE49-F238E27FC236}">
-                <a16:creationId xmlns:a16="http://schemas.microsoft.com/office/drawing/2014/main" id="{4C8E28ED-221F-4708-A5F3-C51902A2B482}"/>
+                <a16:creationId xmlns:a16="http://schemas.microsoft.com/office/drawing/2014/main" id="{C21D8226-57CC-4D4F-971E-4A5CEF6FCEA0}"/>
               </a:ext>
             </a:extLst>
           </p:cNvPr>
@@ -32206,7 +32206,7 @@
           <p:cNvPr id="7" name="">
             <a:extLst xmlns:a="http://schemas.openxmlformats.org/drawingml/2006/main">
               <a:ext uri="{FF2B5EF4-FFF2-40B4-BE49-F238E27FC236}">
-                <a16:creationId xmlns:a16="http://schemas.microsoft.com/office/drawing/2014/main" id="{72211ACE-7BDD-469A-8629-78C608195A37}"/>
+                <a16:creationId xmlns:a16="http://schemas.microsoft.com/office/drawing/2014/main" id="{938A7440-B415-4CAB-814F-E688DD5B99CB}"/>
               </a:ext>
             </a:extLst>
           </p:cNvPr>
@@ -32256,7 +32256,7 @@
           <p:cNvPr id="8" name="">
             <a:extLst xmlns:a="http://schemas.openxmlformats.org/drawingml/2006/main">
               <a:ext uri="{FF2B5EF4-FFF2-40B4-BE49-F238E27FC236}">
-                <a16:creationId xmlns:a16="http://schemas.microsoft.com/office/drawing/2014/main" id="{AF868B6D-7A86-4CD1-B374-5966C3FBE3FB}"/>
+                <a16:creationId xmlns:a16="http://schemas.microsoft.com/office/drawing/2014/main" id="{4C3A6007-1ED8-44F9-A3FE-72C128735A8D}"/>
               </a:ext>
             </a:extLst>
           </p:cNvPr>
@@ -32306,7 +32306,7 @@
           <p:cNvPr id="9" name="">
             <a:extLst xmlns:a="http://schemas.openxmlformats.org/drawingml/2006/main">
               <a:ext uri="{FF2B5EF4-FFF2-40B4-BE49-F238E27FC236}">
-                <a16:creationId xmlns:a16="http://schemas.microsoft.com/office/drawing/2014/main" id="{96884E00-F11A-4425-8AA2-A6038522ADC4}"/>
+                <a16:creationId xmlns:a16="http://schemas.microsoft.com/office/drawing/2014/main" id="{AD9A0A7A-DD4F-45C5-BA84-7063DCCB0B9A}"/>
               </a:ext>
             </a:extLst>
           </p:cNvPr>
@@ -32341,7 +32341,7 @@
           <p:cNvPr id="10" name="">
             <a:extLst xmlns:a="http://schemas.openxmlformats.org/drawingml/2006/main">
               <a:ext uri="{FF2B5EF4-FFF2-40B4-BE49-F238E27FC236}">
-                <a16:creationId xmlns:a16="http://schemas.microsoft.com/office/drawing/2014/main" id="{168C4BE4-6FB0-45A7-A14C-7E65D61B238A}"/>
+                <a16:creationId xmlns:a16="http://schemas.microsoft.com/office/drawing/2014/main" id="{D517DA4E-4E69-4B90-8360-98B64B0864E5}"/>
               </a:ext>
             </a:extLst>
           </p:cNvPr>
@@ -32391,7 +32391,7 @@
           <p:cNvPr id="11" name="">
             <a:extLst xmlns:a="http://schemas.openxmlformats.org/drawingml/2006/main">
               <a:ext uri="{FF2B5EF4-FFF2-40B4-BE49-F238E27FC236}">
-                <a16:creationId xmlns:a16="http://schemas.microsoft.com/office/drawing/2014/main" id="{4F0BB110-2C2C-4EAF-97E3-1AE8ABEFD659}"/>
+                <a16:creationId xmlns:a16="http://schemas.microsoft.com/office/drawing/2014/main" id="{001CBE25-036B-4EE8-A101-4CD25F2712F3}"/>
               </a:ext>
             </a:extLst>
           </p:cNvPr>
@@ -32441,7 +32441,7 @@
           <p:cNvPr id="12" name="">
             <a:extLst xmlns:a="http://schemas.openxmlformats.org/drawingml/2006/main">
               <a:ext uri="{FF2B5EF4-FFF2-40B4-BE49-F238E27FC236}">
-                <a16:creationId xmlns:a16="http://schemas.microsoft.com/office/drawing/2014/main" id="{B2A29A63-FD01-41C1-98C0-5210887B53B2}"/>
+                <a16:creationId xmlns:a16="http://schemas.microsoft.com/office/drawing/2014/main" id="{2883AE06-B05E-49DA-B725-7F31240FCEFB}"/>
               </a:ext>
             </a:extLst>
           </p:cNvPr>
@@ -32491,7 +32491,7 @@
           <p:cNvPr id="13" name="">
             <a:extLst xmlns:a="http://schemas.openxmlformats.org/drawingml/2006/main">
               <a:ext uri="{FF2B5EF4-FFF2-40B4-BE49-F238E27FC236}">
-                <a16:creationId xmlns:a16="http://schemas.microsoft.com/office/drawing/2014/main" id="{7E9E1A6F-8C68-4206-A657-946845BE57A0}"/>
+                <a16:creationId xmlns:a16="http://schemas.microsoft.com/office/drawing/2014/main" id="{97978D46-F975-4B00-9970-886E093CBF98}"/>
               </a:ext>
             </a:extLst>
           </p:cNvPr>
@@ -32526,7 +32526,7 @@
           <p:cNvPr id="14" name="">
             <a:extLst xmlns:a="http://schemas.openxmlformats.org/drawingml/2006/main">
               <a:ext uri="{FF2B5EF4-FFF2-40B4-BE49-F238E27FC236}">
-                <a16:creationId xmlns:a16="http://schemas.microsoft.com/office/drawing/2014/main" id="{F23CEEBC-8389-4190-8FAC-9AA3DC78A48A}"/>
+                <a16:creationId xmlns:a16="http://schemas.microsoft.com/office/drawing/2014/main" id="{0F33D1B5-A451-4BB8-BB8C-7FA5E9E03A38}"/>
               </a:ext>
             </a:extLst>
           </p:cNvPr>
@@ -32576,7 +32576,7 @@
           <p:cNvPr id="15" name="">
             <a:extLst xmlns:a="http://schemas.openxmlformats.org/drawingml/2006/main">
               <a:ext uri="{FF2B5EF4-FFF2-40B4-BE49-F238E27FC236}">
-                <a16:creationId xmlns:a16="http://schemas.microsoft.com/office/drawing/2014/main" id="{D7074759-3FF6-4DC1-B15E-0087EA9431C1}"/>
+                <a16:creationId xmlns:a16="http://schemas.microsoft.com/office/drawing/2014/main" id="{6DCAF0BF-8AFB-4811-A48A-78388149FFA5}"/>
               </a:ext>
             </a:extLst>
           </p:cNvPr>
@@ -32626,7 +32626,7 @@
           <p:cNvPr id="16" name="">
             <a:extLst xmlns:a="http://schemas.openxmlformats.org/drawingml/2006/main">
               <a:ext uri="{FF2B5EF4-FFF2-40B4-BE49-F238E27FC236}">
-                <a16:creationId xmlns:a16="http://schemas.microsoft.com/office/drawing/2014/main" id="{41BAB2F2-D583-4C2C-BDD9-6CEF23E336D2}"/>
+                <a16:creationId xmlns:a16="http://schemas.microsoft.com/office/drawing/2014/main" id="{BA991EDF-721D-435C-B438-7BE561F3FF7A}"/>
               </a:ext>
             </a:extLst>
           </p:cNvPr>
@@ -32676,7 +32676,7 @@
           <p:cNvPr id="17" name="">
             <a:extLst xmlns:a="http://schemas.openxmlformats.org/drawingml/2006/main">
               <a:ext uri="{FF2B5EF4-FFF2-40B4-BE49-F238E27FC236}">
-                <a16:creationId xmlns:a16="http://schemas.microsoft.com/office/drawing/2014/main" id="{19BCD0FF-BCFA-4BDF-9413-E756783E74E0}"/>
+                <a16:creationId xmlns:a16="http://schemas.microsoft.com/office/drawing/2014/main" id="{857939D4-592E-47B6-AC1F-2F477ACCC11C}"/>
               </a:ext>
             </a:extLst>
           </p:cNvPr>
@@ -32711,7 +32711,7 @@
           <p:cNvPr id="18" name="">
             <a:extLst xmlns:a="http://schemas.openxmlformats.org/drawingml/2006/main">
               <a:ext uri="{FF2B5EF4-FFF2-40B4-BE49-F238E27FC236}">
-                <a16:creationId xmlns:a16="http://schemas.microsoft.com/office/drawing/2014/main" id="{5A5AD011-3DBA-45EF-A46B-9002AC302369}"/>
+                <a16:creationId xmlns:a16="http://schemas.microsoft.com/office/drawing/2014/main" id="{F55E3EAB-1DE6-4C57-8876-1F1363C6BDF4}"/>
               </a:ext>
             </a:extLst>
           </p:cNvPr>
@@ -32761,7 +32761,7 @@
           <p:cNvPr id="19" name="">
             <a:extLst xmlns:a="http://schemas.openxmlformats.org/drawingml/2006/main">
               <a:ext uri="{FF2B5EF4-FFF2-40B4-BE49-F238E27FC236}">
-                <a16:creationId xmlns:a16="http://schemas.microsoft.com/office/drawing/2014/main" id="{B344089C-0A02-470C-AB2C-78D75C70FEC0}"/>
+                <a16:creationId xmlns:a16="http://schemas.microsoft.com/office/drawing/2014/main" id="{046C7812-7BA8-4868-A6D6-B86DB91814F1}"/>
               </a:ext>
             </a:extLst>
           </p:cNvPr>
@@ -32811,7 +32811,7 @@
           <p:cNvPr id="20" name="">
             <a:extLst xmlns:a="http://schemas.openxmlformats.org/drawingml/2006/main">
               <a:ext uri="{FF2B5EF4-FFF2-40B4-BE49-F238E27FC236}">
-                <a16:creationId xmlns:a16="http://schemas.microsoft.com/office/drawing/2014/main" id="{C5D1260B-53F2-4CFC-91D8-840DD5EA2DBC}"/>
+                <a16:creationId xmlns:a16="http://schemas.microsoft.com/office/drawing/2014/main" id="{19AD8994-5BF9-46EE-982F-113EE56528D2}"/>
               </a:ext>
             </a:extLst>
           </p:cNvPr>
@@ -32861,7 +32861,7 @@
           <p:cNvPr id="21" name="">
             <a:extLst xmlns:a="http://schemas.openxmlformats.org/drawingml/2006/main">
               <a:ext uri="{FF2B5EF4-FFF2-40B4-BE49-F238E27FC236}">
-                <a16:creationId xmlns:a16="http://schemas.microsoft.com/office/drawing/2014/main" id="{A7BDCE3F-146B-4217-B4E4-037A674E1867}"/>
+                <a16:creationId xmlns:a16="http://schemas.microsoft.com/office/drawing/2014/main" id="{8C12D9A9-8382-44B9-BC43-39D8BBC7DA90}"/>
               </a:ext>
             </a:extLst>
           </p:cNvPr>
@@ -32896,7 +32896,7 @@
           <p:cNvPr id="22" name="">
             <a:extLst xmlns:a="http://schemas.openxmlformats.org/drawingml/2006/main">
               <a:ext uri="{FF2B5EF4-FFF2-40B4-BE49-F238E27FC236}">
-                <a16:creationId xmlns:a16="http://schemas.microsoft.com/office/drawing/2014/main" id="{9F25D69C-BD96-4D10-8BAA-5724EB194AED}"/>
+                <a16:creationId xmlns:a16="http://schemas.microsoft.com/office/drawing/2014/main" id="{167ECD2F-D89B-4C5D-89E0-53CB097ACCF9}"/>
               </a:ext>
             </a:extLst>
           </p:cNvPr>
@@ -32946,7 +32946,7 @@
           <p:cNvPr id="23" name="">
             <a:extLst xmlns:a="http://schemas.openxmlformats.org/drawingml/2006/main">
               <a:ext uri="{FF2B5EF4-FFF2-40B4-BE49-F238E27FC236}">
-                <a16:creationId xmlns:a16="http://schemas.microsoft.com/office/drawing/2014/main" id="{C673F7B7-D3A9-416E-81AF-8B66181A167B}"/>
+                <a16:creationId xmlns:a16="http://schemas.microsoft.com/office/drawing/2014/main" id="{9E5B1811-C075-4999-8ED8-AB5640BDB32C}"/>
               </a:ext>
             </a:extLst>
           </p:cNvPr>
@@ -32996,7 +32996,7 @@
           <p:cNvPr id="24" name="">
             <a:extLst xmlns:a="http://schemas.openxmlformats.org/drawingml/2006/main">
               <a:ext uri="{FF2B5EF4-FFF2-40B4-BE49-F238E27FC236}">
-                <a16:creationId xmlns:a16="http://schemas.microsoft.com/office/drawing/2014/main" id="{6882E258-C952-43E9-8274-0664B9EC5D26}"/>
+                <a16:creationId xmlns:a16="http://schemas.microsoft.com/office/drawing/2014/main" id="{812EB1D4-55D8-4AAA-AF96-A9315B8318CA}"/>
               </a:ext>
             </a:extLst>
           </p:cNvPr>
@@ -33046,7 +33046,7 @@
           <p:cNvPr id="25" name="">
             <a:extLst xmlns:a="http://schemas.openxmlformats.org/drawingml/2006/main">
               <a:ext uri="{FF2B5EF4-FFF2-40B4-BE49-F238E27FC236}">
-                <a16:creationId xmlns:a16="http://schemas.microsoft.com/office/drawing/2014/main" id="{7B4FE3D3-144B-4C11-8FEC-C0D8DFFC64F8}"/>
+                <a16:creationId xmlns:a16="http://schemas.microsoft.com/office/drawing/2014/main" id="{6ECC6F77-6FFB-4A22-B606-8E764539308A}"/>
               </a:ext>
             </a:extLst>
           </p:cNvPr>
@@ -33081,7 +33081,7 @@
           <p:cNvPr id="26" name="">
             <a:extLst xmlns:a="http://schemas.openxmlformats.org/drawingml/2006/main">
               <a:ext uri="{FF2B5EF4-FFF2-40B4-BE49-F238E27FC236}">
-                <a16:creationId xmlns:a16="http://schemas.microsoft.com/office/drawing/2014/main" id="{3B7EF941-C248-4752-820A-5E0146C6BE0C}"/>
+                <a16:creationId xmlns:a16="http://schemas.microsoft.com/office/drawing/2014/main" id="{05AB16AB-9CB6-420D-8483-F8E8213CB982}"/>
               </a:ext>
             </a:extLst>
           </p:cNvPr>
@@ -33131,7 +33131,7 @@
           <p:cNvPr id="27" name="">
             <a:extLst xmlns:a="http://schemas.openxmlformats.org/drawingml/2006/main">
               <a:ext uri="{FF2B5EF4-FFF2-40B4-BE49-F238E27FC236}">
-                <a16:creationId xmlns:a16="http://schemas.microsoft.com/office/drawing/2014/main" id="{C4430CD7-BD3A-4257-B177-6C546910B018}"/>
+                <a16:creationId xmlns:a16="http://schemas.microsoft.com/office/drawing/2014/main" id="{ACEDFB3F-9B97-47C5-B6F7-33E565493EBB}"/>
               </a:ext>
             </a:extLst>
           </p:cNvPr>
@@ -33181,7 +33181,7 @@
           <p:cNvPr id="28" name="">
             <a:extLst xmlns:a="http://schemas.openxmlformats.org/drawingml/2006/main">
               <a:ext uri="{FF2B5EF4-FFF2-40B4-BE49-F238E27FC236}">
-                <a16:creationId xmlns:a16="http://schemas.microsoft.com/office/drawing/2014/main" id="{FC1ACFBD-104C-47D6-8FDD-16CEBE627427}"/>
+                <a16:creationId xmlns:a16="http://schemas.microsoft.com/office/drawing/2014/main" id="{C473BD7E-922D-42FE-BD47-B9F82EC38702}"/>
               </a:ext>
             </a:extLst>
           </p:cNvPr>
@@ -33214,7 +33214,7 @@
           <p:cNvPr id="29" name="">
             <a:extLst xmlns:a="http://schemas.openxmlformats.org/drawingml/2006/main">
               <a:ext uri="{FF2B5EF4-FFF2-40B4-BE49-F238E27FC236}">
-                <a16:creationId xmlns:a16="http://schemas.microsoft.com/office/drawing/2014/main" id="{F192F3DA-3461-444C-B570-414A53FBABD0}"/>
+                <a16:creationId xmlns:a16="http://schemas.microsoft.com/office/drawing/2014/main" id="{9BE5DB4A-7E9F-497D-AE81-785F9967C9EE}"/>
               </a:ext>
             </a:extLst>
           </p:cNvPr>
@@ -33264,7 +33264,7 @@
           <p:cNvPr id="30" name="">
             <a:extLst xmlns:a="http://schemas.openxmlformats.org/drawingml/2006/main">
               <a:ext uri="{FF2B5EF4-FFF2-40B4-BE49-F238E27FC236}">
-                <a16:creationId xmlns:a16="http://schemas.microsoft.com/office/drawing/2014/main" id="{23B750A8-66C1-471E-B41E-9473FA6D7843}"/>
+                <a16:creationId xmlns:a16="http://schemas.microsoft.com/office/drawing/2014/main" id="{08D17685-90EE-4836-8A9F-2AB24C4F0D6D}"/>
               </a:ext>
             </a:extLst>
           </p:cNvPr>
@@ -33297,7 +33297,7 @@
           <p:cNvPr id="31" name="">
             <a:extLst xmlns:a="http://schemas.openxmlformats.org/drawingml/2006/main">
               <a:ext uri="{FF2B5EF4-FFF2-40B4-BE49-F238E27FC236}">
-                <a16:creationId xmlns:a16="http://schemas.microsoft.com/office/drawing/2014/main" id="{0EBBA3A5-7F74-4B62-9A2F-BD8E1F511CBF}"/>
+                <a16:creationId xmlns:a16="http://schemas.microsoft.com/office/drawing/2014/main" id="{A336D3D0-9D39-4735-AA84-1B7BD816B490}"/>
               </a:ext>
             </a:extLst>
           </p:cNvPr>
@@ -33347,7 +33347,7 @@
           <p:cNvPr id="32" name="">
             <a:extLst xmlns:a="http://schemas.openxmlformats.org/drawingml/2006/main">
               <a:ext uri="{FF2B5EF4-FFF2-40B4-BE49-F238E27FC236}">
-                <a16:creationId xmlns:a16="http://schemas.microsoft.com/office/drawing/2014/main" id="{E311CBAC-2BA1-4CB4-A769-AD45B3F29DDD}"/>
+                <a16:creationId xmlns:a16="http://schemas.microsoft.com/office/drawing/2014/main" id="{85454B2D-9193-4F23-9147-23416996C371}"/>
               </a:ext>
             </a:extLst>
           </p:cNvPr>
@@ -33380,7 +33380,7 @@
           <p:cNvPr id="33" name="">
             <a:extLst xmlns:a="http://schemas.openxmlformats.org/drawingml/2006/main">
               <a:ext uri="{FF2B5EF4-FFF2-40B4-BE49-F238E27FC236}">
-                <a16:creationId xmlns:a16="http://schemas.microsoft.com/office/drawing/2014/main" id="{FAEA604C-7171-48C9-BAC0-3DA3022E80B1}"/>
+                <a16:creationId xmlns:a16="http://schemas.microsoft.com/office/drawing/2014/main" id="{DD075E7F-06C8-441B-8831-258DE54AE9E6}"/>
               </a:ext>
             </a:extLst>
           </p:cNvPr>
@@ -33430,7 +33430,7 @@
           <p:cNvPr id="34" name="">
             <a:extLst xmlns:a="http://schemas.openxmlformats.org/drawingml/2006/main">
               <a:ext uri="{FF2B5EF4-FFF2-40B4-BE49-F238E27FC236}">
-                <a16:creationId xmlns:a16="http://schemas.microsoft.com/office/drawing/2014/main" id="{AADE8660-0BC5-443E-B95A-B58E1F677B7C}"/>
+                <a16:creationId xmlns:a16="http://schemas.microsoft.com/office/drawing/2014/main" id="{CE8DD39D-9B2B-404A-9FFD-BA7F1F76087F}"/>
               </a:ext>
             </a:extLst>
           </p:cNvPr>
@@ -33463,7 +33463,7 @@
           <p:cNvPr id="35" name="">
             <a:extLst xmlns:a="http://schemas.openxmlformats.org/drawingml/2006/main">
               <a:ext uri="{FF2B5EF4-FFF2-40B4-BE49-F238E27FC236}">
-                <a16:creationId xmlns:a16="http://schemas.microsoft.com/office/drawing/2014/main" id="{F0AE41DA-3895-4FF7-A279-088FCFBE4F9F}"/>
+                <a16:creationId xmlns:a16="http://schemas.microsoft.com/office/drawing/2014/main" id="{415A2D87-CBB3-4533-8570-13A282DBFE34}"/>
               </a:ext>
             </a:extLst>
           </p:cNvPr>
@@ -33513,7 +33513,7 @@
           <p:cNvPr id="36" name="">
             <a:extLst xmlns:a="http://schemas.openxmlformats.org/drawingml/2006/main">
               <a:ext uri="{FF2B5EF4-FFF2-40B4-BE49-F238E27FC236}">
-                <a16:creationId xmlns:a16="http://schemas.microsoft.com/office/drawing/2014/main" id="{9607F733-C5FF-4430-B692-535864899042}"/>
+                <a16:creationId xmlns:a16="http://schemas.microsoft.com/office/drawing/2014/main" id="{C4499E86-C7EB-4C64-8428-C57FCD491C01}"/>
               </a:ext>
             </a:extLst>
           </p:cNvPr>
@@ -33546,7 +33546,7 @@
           <p:cNvPr id="37" name="">
             <a:extLst xmlns:a="http://schemas.openxmlformats.org/drawingml/2006/main">
               <a:ext uri="{FF2B5EF4-FFF2-40B4-BE49-F238E27FC236}">
-                <a16:creationId xmlns:a16="http://schemas.microsoft.com/office/drawing/2014/main" id="{1F9F547D-F21F-49FF-B9CF-F882F3215761}"/>
+                <a16:creationId xmlns:a16="http://schemas.microsoft.com/office/drawing/2014/main" id="{C8BABABE-A342-49DE-BEB4-55C85F71309F}"/>
               </a:ext>
             </a:extLst>
           </p:cNvPr>
@@ -33596,7 +33596,7 @@
           <p:cNvPr id="38" name="">
             <a:extLst xmlns:a="http://schemas.openxmlformats.org/drawingml/2006/main">
               <a:ext uri="{FF2B5EF4-FFF2-40B4-BE49-F238E27FC236}">
-                <a16:creationId xmlns:a16="http://schemas.microsoft.com/office/drawing/2014/main" id="{D3DD0A6B-6A5B-402E-A21B-8B86C13C677E}"/>
+                <a16:creationId xmlns:a16="http://schemas.microsoft.com/office/drawing/2014/main" id="{B3548ED0-6E5A-433D-A4F4-0662C6799863}"/>
               </a:ext>
             </a:extLst>
           </p:cNvPr>
@@ -33644,7 +33644,7 @@
     </p:spTree>
     <p:extLst>
       <p:ext uri="{BB962C8B-B14F-4D97-AF65-F5344CB8AC3E}">
-        <p14:creationId xmlns:p14="http://schemas.microsoft.com/office/powerpoint/2010/main" val="550240683"/>
+        <p14:creationId xmlns:p14="http://schemas.microsoft.com/office/powerpoint/2010/main" val="1927015744"/>
       </p:ext>
     </p:extLst>
   </p:cSld>
@@ -33675,7 +33675,7 @@
           <p:cNvPr id="21" name="">
             <a:extLst xmlns:a="http://schemas.openxmlformats.org/drawingml/2006/main">
               <a:ext uri="{FF2B5EF4-FFF2-40B4-BE49-F238E27FC236}">
-                <a16:creationId xmlns:a16="http://schemas.microsoft.com/office/drawing/2014/main" id="{23B65434-D849-4D8A-B407-23F38F645B32}"/>
+                <a16:creationId xmlns:a16="http://schemas.microsoft.com/office/drawing/2014/main" id="{4CC97E1E-727B-4BFD-9763-0AF8529E981F}"/>
               </a:ext>
             </a:extLst>
           </p:cNvPr>
@@ -33725,7 +33725,7 @@
           <p:cNvPr id="2" name="">
             <a:extLst xmlns:a="http://schemas.openxmlformats.org/drawingml/2006/main">
               <a:ext uri="{FF2B5EF4-FFF2-40B4-BE49-F238E27FC236}">
-                <a16:creationId xmlns:a16="http://schemas.microsoft.com/office/drawing/2014/main" id="{8AC77947-D7B1-4C61-A090-067A71734F15}"/>
+                <a16:creationId xmlns:a16="http://schemas.microsoft.com/office/drawing/2014/main" id="{0C6F28B9-44A7-4325-9E79-274C26C55558}"/>
               </a:ext>
             </a:extLst>
           </p:cNvPr>
@@ -33775,7 +33775,7 @@
           <p:cNvPr id="3" name="">
             <a:extLst xmlns:a="http://schemas.openxmlformats.org/drawingml/2006/main">
               <a:ext uri="{FF2B5EF4-FFF2-40B4-BE49-F238E27FC236}">
-                <a16:creationId xmlns:a16="http://schemas.microsoft.com/office/drawing/2014/main" id="{196C6183-F1D8-48D5-8DAB-174E5A757086}"/>
+                <a16:creationId xmlns:a16="http://schemas.microsoft.com/office/drawing/2014/main" id="{593EBD9B-7451-4DCD-952F-17F13BD69F91}"/>
               </a:ext>
             </a:extLst>
           </p:cNvPr>
@@ -33806,7 +33806,7 @@
           <p:cNvPr id="4" name="">
             <a:extLst xmlns:a="http://schemas.openxmlformats.org/drawingml/2006/main">
               <a:ext uri="{FF2B5EF4-FFF2-40B4-BE49-F238E27FC236}">
-                <a16:creationId xmlns:a16="http://schemas.microsoft.com/office/drawing/2014/main" id="{9C930AF0-665B-47DE-A649-4586964C5F16}"/>
+                <a16:creationId xmlns:a16="http://schemas.microsoft.com/office/drawing/2014/main" id="{136EA507-B344-449B-BA6C-26D65721A3E6}"/>
               </a:ext>
             </a:extLst>
           </p:cNvPr>
@@ -33856,7 +33856,7 @@
           <p:cNvPr id="5" name="">
             <a:extLst xmlns:a="http://schemas.openxmlformats.org/drawingml/2006/main">
               <a:ext uri="{FF2B5EF4-FFF2-40B4-BE49-F238E27FC236}">
-                <a16:creationId xmlns:a16="http://schemas.microsoft.com/office/drawing/2014/main" id="{2EB22F60-304C-4619-B67A-32AABAFB888E}"/>
+                <a16:creationId xmlns:a16="http://schemas.microsoft.com/office/drawing/2014/main" id="{937302FA-1C3A-4FAE-9438-01E3EAAFC038}"/>
               </a:ext>
             </a:extLst>
           </p:cNvPr>
@@ -33906,7 +33906,7 @@
           <p:cNvPr id="6" name="">
             <a:extLst xmlns:a="http://schemas.openxmlformats.org/drawingml/2006/main">
               <a:ext uri="{FF2B5EF4-FFF2-40B4-BE49-F238E27FC236}">
-                <a16:creationId xmlns:a16="http://schemas.microsoft.com/office/drawing/2014/main" id="{15CB7AC2-4462-4DCE-9F91-6CE6C40566F7}"/>
+                <a16:creationId xmlns:a16="http://schemas.microsoft.com/office/drawing/2014/main" id="{97A47429-954B-421B-9994-36F48302BC92}"/>
               </a:ext>
             </a:extLst>
           </p:cNvPr>
@@ -33937,7 +33937,7 @@
           <p:cNvPr id="7" name="">
             <a:extLst xmlns:a="http://schemas.openxmlformats.org/drawingml/2006/main">
               <a:ext uri="{FF2B5EF4-FFF2-40B4-BE49-F238E27FC236}">
-                <a16:creationId xmlns:a16="http://schemas.microsoft.com/office/drawing/2014/main" id="{17B6B4D5-7099-4DB1-86F6-1E0638D02208}"/>
+                <a16:creationId xmlns:a16="http://schemas.microsoft.com/office/drawing/2014/main" id="{A95DB272-6EB0-4889-B233-F79763D6FD62}"/>
               </a:ext>
             </a:extLst>
           </p:cNvPr>
@@ -33987,7 +33987,7 @@
           <p:cNvPr id="8" name="">
             <a:extLst xmlns:a="http://schemas.openxmlformats.org/drawingml/2006/main">
               <a:ext uri="{FF2B5EF4-FFF2-40B4-BE49-F238E27FC236}">
-                <a16:creationId xmlns:a16="http://schemas.microsoft.com/office/drawing/2014/main" id="{6EF3491F-7C18-4A6F-860B-667A31C43CF6}"/>
+                <a16:creationId xmlns:a16="http://schemas.microsoft.com/office/drawing/2014/main" id="{E8AF2870-D3E3-437F-B575-F7DF7175D7B2}"/>
               </a:ext>
             </a:extLst>
           </p:cNvPr>
@@ -34037,7 +34037,7 @@
           <p:cNvPr id="9" name="">
             <a:extLst xmlns:a="http://schemas.openxmlformats.org/drawingml/2006/main">
               <a:ext uri="{FF2B5EF4-FFF2-40B4-BE49-F238E27FC236}">
-                <a16:creationId xmlns:a16="http://schemas.microsoft.com/office/drawing/2014/main" id="{058A31A4-56FD-458A-BD66-DFADBBBCC54F}"/>
+                <a16:creationId xmlns:a16="http://schemas.microsoft.com/office/drawing/2014/main" id="{97C0B0B9-B21A-40CB-BD33-667A3CF861AB}"/>
               </a:ext>
             </a:extLst>
           </p:cNvPr>
@@ -34068,7 +34068,7 @@
           <p:cNvPr id="10" name="">
             <a:extLst xmlns:a="http://schemas.openxmlformats.org/drawingml/2006/main">
               <a:ext uri="{FF2B5EF4-FFF2-40B4-BE49-F238E27FC236}">
-                <a16:creationId xmlns:a16="http://schemas.microsoft.com/office/drawing/2014/main" id="{1C7FCB58-28F6-4BDE-825B-871BEE6BE8B2}"/>
+                <a16:creationId xmlns:a16="http://schemas.microsoft.com/office/drawing/2014/main" id="{BDC02F76-81F2-4273-BEB1-CCEA1D9B1DF9}"/>
               </a:ext>
             </a:extLst>
           </p:cNvPr>
@@ -34118,7 +34118,7 @@
           <p:cNvPr id="11" name="">
             <a:extLst xmlns:a="http://schemas.openxmlformats.org/drawingml/2006/main">
               <a:ext uri="{FF2B5EF4-FFF2-40B4-BE49-F238E27FC236}">
-                <a16:creationId xmlns:a16="http://schemas.microsoft.com/office/drawing/2014/main" id="{31A3C1D8-82AC-44FF-8767-18A795E83D34}"/>
+                <a16:creationId xmlns:a16="http://schemas.microsoft.com/office/drawing/2014/main" id="{0EF30470-78D5-48C9-B092-A22FD92C8591}"/>
               </a:ext>
             </a:extLst>
           </p:cNvPr>
@@ -34168,7 +34168,7 @@
           <p:cNvPr id="12" name="">
             <a:extLst xmlns:a="http://schemas.openxmlformats.org/drawingml/2006/main">
               <a:ext uri="{FF2B5EF4-FFF2-40B4-BE49-F238E27FC236}">
-                <a16:creationId xmlns:a16="http://schemas.microsoft.com/office/drawing/2014/main" id="{B664266A-A2F3-4664-80DB-8BF64AA9265A}"/>
+                <a16:creationId xmlns:a16="http://schemas.microsoft.com/office/drawing/2014/main" id="{CAB082A6-FE9E-4CEC-9F2A-BA869F6D1053}"/>
               </a:ext>
             </a:extLst>
           </p:cNvPr>
@@ -34199,7 +34199,7 @@
           <p:cNvPr id="13" name="">
             <a:extLst xmlns:a="http://schemas.openxmlformats.org/drawingml/2006/main">
               <a:ext uri="{FF2B5EF4-FFF2-40B4-BE49-F238E27FC236}">
-                <a16:creationId xmlns:a16="http://schemas.microsoft.com/office/drawing/2014/main" id="{C71EBAB7-7BD7-41BD-9669-84E70998C83A}"/>
+                <a16:creationId xmlns:a16="http://schemas.microsoft.com/office/drawing/2014/main" id="{C90CCAA8-B955-4B51-8E10-83CB3A31B951}"/>
               </a:ext>
             </a:extLst>
           </p:cNvPr>
@@ -34249,7 +34249,7 @@
           <p:cNvPr id="14" name="">
             <a:extLst xmlns:a="http://schemas.openxmlformats.org/drawingml/2006/main">
               <a:ext uri="{FF2B5EF4-FFF2-40B4-BE49-F238E27FC236}">
-                <a16:creationId xmlns:a16="http://schemas.microsoft.com/office/drawing/2014/main" id="{6740E686-4D4A-47A4-8DA5-29DC52BF85A6}"/>
+                <a16:creationId xmlns:a16="http://schemas.microsoft.com/office/drawing/2014/main" id="{E09E4940-944A-45D1-B29B-0CBF5220723E}"/>
               </a:ext>
             </a:extLst>
           </p:cNvPr>
@@ -34299,7 +34299,7 @@
           <p:cNvPr id="15" name="">
             <a:extLst xmlns:a="http://schemas.openxmlformats.org/drawingml/2006/main">
               <a:ext uri="{FF2B5EF4-FFF2-40B4-BE49-F238E27FC236}">
-                <a16:creationId xmlns:a16="http://schemas.microsoft.com/office/drawing/2014/main" id="{ABDF45B8-B46B-4BCA-88AD-5D08754638DA}"/>
+                <a16:creationId xmlns:a16="http://schemas.microsoft.com/office/drawing/2014/main" id="{1C7BC1D3-34A7-4F9A-9575-8F96601A0E3C}"/>
               </a:ext>
             </a:extLst>
           </p:cNvPr>
@@ -34330,7 +34330,7 @@
           <p:cNvPr id="16" name="">
             <a:extLst xmlns:a="http://schemas.openxmlformats.org/drawingml/2006/main">
               <a:ext uri="{FF2B5EF4-FFF2-40B4-BE49-F238E27FC236}">
-                <a16:creationId xmlns:a16="http://schemas.microsoft.com/office/drawing/2014/main" id="{0BA4AF96-5F73-419E-8D3C-878E05916B74}"/>
+                <a16:creationId xmlns:a16="http://schemas.microsoft.com/office/drawing/2014/main" id="{7F7A345C-21E5-4F0E-8BF6-57A00207994D}"/>
               </a:ext>
             </a:extLst>
           </p:cNvPr>
@@ -34380,7 +34380,7 @@
           <p:cNvPr id="17" name="">
             <a:extLst xmlns:a="http://schemas.openxmlformats.org/drawingml/2006/main">
               <a:ext uri="{FF2B5EF4-FFF2-40B4-BE49-F238E27FC236}">
-                <a16:creationId xmlns:a16="http://schemas.microsoft.com/office/drawing/2014/main" id="{278B31A4-C88C-4E7A-8619-0278D4BD6989}"/>
+                <a16:creationId xmlns:a16="http://schemas.microsoft.com/office/drawing/2014/main" id="{E7A62BBD-DA94-4615-93FA-11AB01C31F3C}"/>
               </a:ext>
             </a:extLst>
           </p:cNvPr>
@@ -34430,7 +34430,7 @@
           <p:cNvPr id="18" name="">
             <a:extLst xmlns:a="http://schemas.openxmlformats.org/drawingml/2006/main">
               <a:ext uri="{FF2B5EF4-FFF2-40B4-BE49-F238E27FC236}">
-                <a16:creationId xmlns:a16="http://schemas.microsoft.com/office/drawing/2014/main" id="{E2705242-709A-41C6-897F-F23E045B556B}"/>
+                <a16:creationId xmlns:a16="http://schemas.microsoft.com/office/drawing/2014/main" id="{502A5969-47A8-4C63-A85E-868BB020B00E}"/>
               </a:ext>
             </a:extLst>
           </p:cNvPr>
@@ -34461,7 +34461,7 @@
           <p:cNvPr id="19" name="">
             <a:extLst xmlns:a="http://schemas.openxmlformats.org/drawingml/2006/main">
               <a:ext uri="{FF2B5EF4-FFF2-40B4-BE49-F238E27FC236}">
-                <a16:creationId xmlns:a16="http://schemas.microsoft.com/office/drawing/2014/main" id="{D97B5703-D8A7-40F5-ADC0-33A1C8959BBC}"/>
+                <a16:creationId xmlns:a16="http://schemas.microsoft.com/office/drawing/2014/main" id="{C5D60D00-F05E-4139-A559-FED0BB622243}"/>
               </a:ext>
             </a:extLst>
           </p:cNvPr>
@@ -34511,7 +34511,7 @@
           <p:cNvPr id="20" name="">
             <a:extLst xmlns:a="http://schemas.openxmlformats.org/drawingml/2006/main">
               <a:ext uri="{FF2B5EF4-FFF2-40B4-BE49-F238E27FC236}">
-                <a16:creationId xmlns:a16="http://schemas.microsoft.com/office/drawing/2014/main" id="{42C1045D-818C-489C-A3B2-E875BF3078FB}"/>
+                <a16:creationId xmlns:a16="http://schemas.microsoft.com/office/drawing/2014/main" id="{B7F636CF-27B6-497F-85A1-CF1D474B1C08}"/>
               </a:ext>
             </a:extLst>
           </p:cNvPr>
@@ -34559,7 +34559,7 @@
     </p:spTree>
     <p:extLst>
       <p:ext uri="{BB962C8B-B14F-4D97-AF65-F5344CB8AC3E}">
-        <p14:creationId xmlns:p14="http://schemas.microsoft.com/office/powerpoint/2010/main" val="1247830736"/>
+        <p14:creationId xmlns:p14="http://schemas.microsoft.com/office/powerpoint/2010/main" val="1729661181"/>
       </p:ext>
     </p:extLst>
   </p:cSld>
@@ -34590,7 +34590,7 @@
           <p:cNvPr id="17" name="">
             <a:extLst xmlns:a="http://schemas.openxmlformats.org/drawingml/2006/main">
               <a:ext uri="{FF2B5EF4-FFF2-40B4-BE49-F238E27FC236}">
-                <a16:creationId xmlns:a16="http://schemas.microsoft.com/office/drawing/2014/main" id="{FD0C013C-6F2A-42E0-91FB-8272D4C70086}"/>
+                <a16:creationId xmlns:a16="http://schemas.microsoft.com/office/drawing/2014/main" id="{0CF8AB63-BDF3-4B66-B4D3-1AB9F7E47992}"/>
               </a:ext>
             </a:extLst>
           </p:cNvPr>
@@ -34640,7 +34640,7 @@
           <p:cNvPr id="2" name="">
             <a:extLst xmlns:a="http://schemas.openxmlformats.org/drawingml/2006/main">
               <a:ext uri="{FF2B5EF4-FFF2-40B4-BE49-F238E27FC236}">
-                <a16:creationId xmlns:a16="http://schemas.microsoft.com/office/drawing/2014/main" id="{70C1EB11-0991-4A14-9CD3-CBD520832C6A}"/>
+                <a16:creationId xmlns:a16="http://schemas.microsoft.com/office/drawing/2014/main" id="{BD289743-1F39-4A64-A936-677031768F4C}"/>
               </a:ext>
             </a:extLst>
           </p:cNvPr>
@@ -34690,7 +34690,7 @@
           <p:cNvPr id="3" name="">
             <a:extLst xmlns:a="http://schemas.openxmlformats.org/drawingml/2006/main">
               <a:ext uri="{FF2B5EF4-FFF2-40B4-BE49-F238E27FC236}">
-                <a16:creationId xmlns:a16="http://schemas.microsoft.com/office/drawing/2014/main" id="{DB0F5EC8-4CB8-43C1-BAC8-7CA2676E4DBD}"/>
+                <a16:creationId xmlns:a16="http://schemas.microsoft.com/office/drawing/2014/main" id="{0D280C27-3CA2-48E2-A530-46AB9120D36E}"/>
               </a:ext>
             </a:extLst>
           </p:cNvPr>
@@ -34721,7 +34721,7 @@
           <p:cNvPr id="4" name="">
             <a:extLst xmlns:a="http://schemas.openxmlformats.org/drawingml/2006/main">
               <a:ext uri="{FF2B5EF4-FFF2-40B4-BE49-F238E27FC236}">
-                <a16:creationId xmlns:a16="http://schemas.microsoft.com/office/drawing/2014/main" id="{EDD4ABA7-99BE-42FE-AD49-35FE6F8620A9}"/>
+                <a16:creationId xmlns:a16="http://schemas.microsoft.com/office/drawing/2014/main" id="{975B4E14-FE55-4BD6-9139-F58044CD23B0}"/>
               </a:ext>
             </a:extLst>
           </p:cNvPr>
@@ -34771,7 +34771,7 @@
           <p:cNvPr id="5" name="">
             <a:extLst xmlns:a="http://schemas.openxmlformats.org/drawingml/2006/main">
               <a:ext uri="{FF2B5EF4-FFF2-40B4-BE49-F238E27FC236}">
-                <a16:creationId xmlns:a16="http://schemas.microsoft.com/office/drawing/2014/main" id="{5921D6AA-C886-4719-9135-7B3C1B02EA40}"/>
+                <a16:creationId xmlns:a16="http://schemas.microsoft.com/office/drawing/2014/main" id="{22EDB9B2-3D41-463C-94C7-808B75E2BA6A}"/>
               </a:ext>
             </a:extLst>
           </p:cNvPr>
@@ -34806,7 +34806,7 @@
           <p:cNvPr id="6" name="">
             <a:extLst xmlns:a="http://schemas.openxmlformats.org/drawingml/2006/main">
               <a:ext uri="{FF2B5EF4-FFF2-40B4-BE49-F238E27FC236}">
-                <a16:creationId xmlns:a16="http://schemas.microsoft.com/office/drawing/2014/main" id="{F4B278C1-E294-4650-BD8E-D6EB36B55E82}"/>
+                <a16:creationId xmlns:a16="http://schemas.microsoft.com/office/drawing/2014/main" id="{A1A9F8C4-EFDB-4A3A-91C0-87DCCDAD5794}"/>
               </a:ext>
             </a:extLst>
           </p:cNvPr>
@@ -34856,7 +34856,7 @@
           <p:cNvPr id="7" name="">
             <a:extLst xmlns:a="http://schemas.openxmlformats.org/drawingml/2006/main">
               <a:ext uri="{FF2B5EF4-FFF2-40B4-BE49-F238E27FC236}">
-                <a16:creationId xmlns:a16="http://schemas.microsoft.com/office/drawing/2014/main" id="{E8963A79-8CAD-451D-B826-9E82BAA8FE19}"/>
+                <a16:creationId xmlns:a16="http://schemas.microsoft.com/office/drawing/2014/main" id="{7F58F306-1E03-43EA-A87F-15F0B1BC796E}"/>
               </a:ext>
             </a:extLst>
           </p:cNvPr>
@@ -34906,7 +34906,7 @@
           <p:cNvPr id="8" name="">
             <a:extLst xmlns:a="http://schemas.openxmlformats.org/drawingml/2006/main">
               <a:ext uri="{FF2B5EF4-FFF2-40B4-BE49-F238E27FC236}">
-                <a16:creationId xmlns:a16="http://schemas.microsoft.com/office/drawing/2014/main" id="{DAB8B38E-5945-4F52-AFEC-4DC59CC535EF}"/>
+                <a16:creationId xmlns:a16="http://schemas.microsoft.com/office/drawing/2014/main" id="{73DCB59F-D9A2-4CFC-BADF-FBD5ABE9C56B}"/>
               </a:ext>
             </a:extLst>
           </p:cNvPr>
@@ -34956,7 +34956,7 @@
           <p:cNvPr id="9" name="">
             <a:extLst xmlns:a="http://schemas.openxmlformats.org/drawingml/2006/main">
               <a:ext uri="{FF2B5EF4-FFF2-40B4-BE49-F238E27FC236}">
-                <a16:creationId xmlns:a16="http://schemas.microsoft.com/office/drawing/2014/main" id="{AE51CE35-DAF4-4CAC-B771-8205E72B8981}"/>
+                <a16:creationId xmlns:a16="http://schemas.microsoft.com/office/drawing/2014/main" id="{B1A3A425-A525-4B16-A00C-AA963EDFCAFB}"/>
               </a:ext>
             </a:extLst>
           </p:cNvPr>
@@ -35006,7 +35006,7 @@
           <p:cNvPr id="10" name="">
             <a:extLst xmlns:a="http://schemas.openxmlformats.org/drawingml/2006/main">
               <a:ext uri="{FF2B5EF4-FFF2-40B4-BE49-F238E27FC236}">
-                <a16:creationId xmlns:a16="http://schemas.microsoft.com/office/drawing/2014/main" id="{112F99D0-8EF1-40AD-94B9-138C37521994}"/>
+                <a16:creationId xmlns:a16="http://schemas.microsoft.com/office/drawing/2014/main" id="{21F42102-6EEC-4148-AE7B-A081BFE01950}"/>
               </a:ext>
             </a:extLst>
           </p:cNvPr>
@@ -35041,7 +35041,7 @@
           <p:cNvPr id="11" name="">
             <a:extLst xmlns:a="http://schemas.openxmlformats.org/drawingml/2006/main">
               <a:ext uri="{FF2B5EF4-FFF2-40B4-BE49-F238E27FC236}">
-                <a16:creationId xmlns:a16="http://schemas.microsoft.com/office/drawing/2014/main" id="{7309F723-FDCA-42C5-A24F-432136A175AC}"/>
+                <a16:creationId xmlns:a16="http://schemas.microsoft.com/office/drawing/2014/main" id="{C78128B3-3667-423F-A69D-F9C241E5A26A}"/>
               </a:ext>
             </a:extLst>
           </p:cNvPr>
@@ -35091,7 +35091,7 @@
           <p:cNvPr id="12" name="">
             <a:extLst xmlns:a="http://schemas.openxmlformats.org/drawingml/2006/main">
               <a:ext uri="{FF2B5EF4-FFF2-40B4-BE49-F238E27FC236}">
-                <a16:creationId xmlns:a16="http://schemas.microsoft.com/office/drawing/2014/main" id="{1CB61A89-A51F-4EF2-BEA7-06AA1DA8EFBB}"/>
+                <a16:creationId xmlns:a16="http://schemas.microsoft.com/office/drawing/2014/main" id="{E1BF70EB-7A8B-4DAC-BED2-E6498DB429F9}"/>
               </a:ext>
             </a:extLst>
           </p:cNvPr>
@@ -35141,7 +35141,7 @@
           <p:cNvPr id="13" name="">
             <a:extLst xmlns:a="http://schemas.openxmlformats.org/drawingml/2006/main">
               <a:ext uri="{FF2B5EF4-FFF2-40B4-BE49-F238E27FC236}">
-                <a16:creationId xmlns:a16="http://schemas.microsoft.com/office/drawing/2014/main" id="{8983F539-03EA-4382-8AF5-016CADC38512}"/>
+                <a16:creationId xmlns:a16="http://schemas.microsoft.com/office/drawing/2014/main" id="{2759C356-6AF1-4E4D-8784-4FBFF02F2AB7}"/>
               </a:ext>
             </a:extLst>
           </p:cNvPr>
@@ -35191,7 +35191,7 @@
           <p:cNvPr id="14" name="">
             <a:extLst xmlns:a="http://schemas.openxmlformats.org/drawingml/2006/main">
               <a:ext uri="{FF2B5EF4-FFF2-40B4-BE49-F238E27FC236}">
-                <a16:creationId xmlns:a16="http://schemas.microsoft.com/office/drawing/2014/main" id="{A9F05A3E-C433-48E5-BC08-E554E70E5F49}"/>
+                <a16:creationId xmlns:a16="http://schemas.microsoft.com/office/drawing/2014/main" id="{BE984DD0-E369-4261-B6C3-26C43E52914F}"/>
               </a:ext>
             </a:extLst>
           </p:cNvPr>
@@ -35241,7 +35241,7 @@
           <p:cNvPr id="15" name="">
             <a:extLst xmlns:a="http://schemas.openxmlformats.org/drawingml/2006/main">
               <a:ext uri="{FF2B5EF4-FFF2-40B4-BE49-F238E27FC236}">
-                <a16:creationId xmlns:a16="http://schemas.microsoft.com/office/drawing/2014/main" id="{EDE2F4EB-B9C8-40E4-B459-C08EDC769DE9}"/>
+                <a16:creationId xmlns:a16="http://schemas.microsoft.com/office/drawing/2014/main" id="{9C40A7E4-26C9-4A4F-87B9-AD43040B6101}"/>
               </a:ext>
             </a:extLst>
           </p:cNvPr>
@@ -35291,7 +35291,7 @@
           <p:cNvPr id="16" name="">
             <a:extLst xmlns:a="http://schemas.openxmlformats.org/drawingml/2006/main">
               <a:ext uri="{FF2B5EF4-FFF2-40B4-BE49-F238E27FC236}">
-                <a16:creationId xmlns:a16="http://schemas.microsoft.com/office/drawing/2014/main" id="{A9DD1CE5-67B1-40DF-BCCE-D0BAC7478B17}"/>
+                <a16:creationId xmlns:a16="http://schemas.microsoft.com/office/drawing/2014/main" id="{464F878E-AF1D-4D88-B3B2-55BFD59051C9}"/>
               </a:ext>
             </a:extLst>
           </p:cNvPr>
@@ -35339,7 +35339,7 @@
     </p:spTree>
     <p:extLst>
       <p:ext uri="{BB962C8B-B14F-4D97-AF65-F5344CB8AC3E}">
-        <p14:creationId xmlns:p14="http://schemas.microsoft.com/office/powerpoint/2010/main" val="2057044511"/>
+        <p14:creationId xmlns:p14="http://schemas.microsoft.com/office/powerpoint/2010/main" val="1498055320"/>
       </p:ext>
     </p:extLst>
   </p:cSld>
@@ -35370,7 +35370,7 @@
           <p:cNvPr id="31" name="">
             <a:extLst xmlns:a="http://schemas.openxmlformats.org/drawingml/2006/main">
               <a:ext uri="{FF2B5EF4-FFF2-40B4-BE49-F238E27FC236}">
-                <a16:creationId xmlns:a16="http://schemas.microsoft.com/office/drawing/2014/main" id="{DA740ADF-C7C8-4052-A1A6-7E7809C098BC}"/>
+                <a16:creationId xmlns:a16="http://schemas.microsoft.com/office/drawing/2014/main" id="{030AEBA6-F097-4862-84D8-EF6994EC1857}"/>
               </a:ext>
             </a:extLst>
           </p:cNvPr>
@@ -35420,7 +35420,7 @@
           <p:cNvPr id="2" name="">
             <a:extLst xmlns:a="http://schemas.openxmlformats.org/drawingml/2006/main">
               <a:ext uri="{FF2B5EF4-FFF2-40B4-BE49-F238E27FC236}">
-                <a16:creationId xmlns:a16="http://schemas.microsoft.com/office/drawing/2014/main" id="{FA780B3B-4BA8-4D6D-BB84-90B513D68E69}"/>
+                <a16:creationId xmlns:a16="http://schemas.microsoft.com/office/drawing/2014/main" id="{15AEDE28-3301-4CAD-99EC-4283069980D6}"/>
               </a:ext>
             </a:extLst>
           </p:cNvPr>
@@ -35470,7 +35470,7 @@
           <p:cNvPr id="3" name="">
             <a:extLst xmlns:a="http://schemas.openxmlformats.org/drawingml/2006/main">
               <a:ext uri="{FF2B5EF4-FFF2-40B4-BE49-F238E27FC236}">
-                <a16:creationId xmlns:a16="http://schemas.microsoft.com/office/drawing/2014/main" id="{23733F04-AE13-4C98-9322-59253F5B0FF5}"/>
+                <a16:creationId xmlns:a16="http://schemas.microsoft.com/office/drawing/2014/main" id="{D0A57304-6167-46FD-847A-7C0C07ABF50A}"/>
               </a:ext>
             </a:extLst>
           </p:cNvPr>
@@ -35501,7 +35501,7 @@
           <p:cNvPr id="4" name="">
             <a:extLst xmlns:a="http://schemas.openxmlformats.org/drawingml/2006/main">
               <a:ext uri="{FF2B5EF4-FFF2-40B4-BE49-F238E27FC236}">
-                <a16:creationId xmlns:a16="http://schemas.microsoft.com/office/drawing/2014/main" id="{5682F86C-7FD7-4C66-AAD0-158DA1641360}"/>
+                <a16:creationId xmlns:a16="http://schemas.microsoft.com/office/drawing/2014/main" id="{E99CCF9F-B0AC-4509-8E18-E673A419D4B0}"/>
               </a:ext>
             </a:extLst>
           </p:cNvPr>
@@ -35551,7 +35551,7 @@
           <p:cNvPr id="5" name="">
             <a:extLst xmlns:a="http://schemas.openxmlformats.org/drawingml/2006/main">
               <a:ext uri="{FF2B5EF4-FFF2-40B4-BE49-F238E27FC236}">
-                <a16:creationId xmlns:a16="http://schemas.microsoft.com/office/drawing/2014/main" id="{810A5B98-CBA7-4100-9D38-AB4D48287576}"/>
+                <a16:creationId xmlns:a16="http://schemas.microsoft.com/office/drawing/2014/main" id="{2FB73632-4FF1-4955-9DB5-B3CFA0367627}"/>
               </a:ext>
             </a:extLst>
           </p:cNvPr>
@@ -35586,7 +35586,7 @@
           <p:cNvPr id="6" name="">
             <a:extLst xmlns:a="http://schemas.openxmlformats.org/drawingml/2006/main">
               <a:ext uri="{FF2B5EF4-FFF2-40B4-BE49-F238E27FC236}">
-                <a16:creationId xmlns:a16="http://schemas.microsoft.com/office/drawing/2014/main" id="{59053F8E-F075-4955-9B64-4270C42972E8}"/>
+                <a16:creationId xmlns:a16="http://schemas.microsoft.com/office/drawing/2014/main" id="{0ADB8A83-DD11-4AE0-A446-A6A17A7FE799}"/>
               </a:ext>
             </a:extLst>
           </p:cNvPr>
@@ -35621,7 +35621,7 @@
           <p:cNvPr id="7" name="">
             <a:extLst xmlns:a="http://schemas.openxmlformats.org/drawingml/2006/main">
               <a:ext uri="{FF2B5EF4-FFF2-40B4-BE49-F238E27FC236}">
-                <a16:creationId xmlns:a16="http://schemas.microsoft.com/office/drawing/2014/main" id="{D2C81509-5504-4DBE-8AC3-7A30EE4C165F}"/>
+                <a16:creationId xmlns:a16="http://schemas.microsoft.com/office/drawing/2014/main" id="{351F985D-F69C-4C8D-B0C8-99408D537C7B}"/>
               </a:ext>
             </a:extLst>
           </p:cNvPr>
@@ -35671,7 +35671,7 @@
           <p:cNvPr id="8" name="">
             <a:extLst xmlns:a="http://schemas.openxmlformats.org/drawingml/2006/main">
               <a:ext uri="{FF2B5EF4-FFF2-40B4-BE49-F238E27FC236}">
-                <a16:creationId xmlns:a16="http://schemas.microsoft.com/office/drawing/2014/main" id="{2D99F887-9943-4863-80F0-FBFE8B914944}"/>
+                <a16:creationId xmlns:a16="http://schemas.microsoft.com/office/drawing/2014/main" id="{14943481-0A96-46F8-9DA7-723681EA05C9}"/>
               </a:ext>
             </a:extLst>
           </p:cNvPr>
@@ -35721,7 +35721,7 @@
           <p:cNvPr id="9" name="">
             <a:extLst xmlns:a="http://schemas.openxmlformats.org/drawingml/2006/main">
               <a:ext uri="{FF2B5EF4-FFF2-40B4-BE49-F238E27FC236}">
-                <a16:creationId xmlns:a16="http://schemas.microsoft.com/office/drawing/2014/main" id="{EA2C947C-CAD2-4558-BF6A-F6D686D2F839}"/>
+                <a16:creationId xmlns:a16="http://schemas.microsoft.com/office/drawing/2014/main" id="{B1EB8512-3BE3-4751-82E0-EC59BE3D5038}"/>
               </a:ext>
             </a:extLst>
           </p:cNvPr>
@@ -35771,7 +35771,7 @@
           <p:cNvPr id="10" name="">
             <a:extLst xmlns:a="http://schemas.openxmlformats.org/drawingml/2006/main">
               <a:ext uri="{FF2B5EF4-FFF2-40B4-BE49-F238E27FC236}">
-                <a16:creationId xmlns:a16="http://schemas.microsoft.com/office/drawing/2014/main" id="{DD9E3BF0-CEBA-461D-BD44-F44D6830A97C}"/>
+                <a16:creationId xmlns:a16="http://schemas.microsoft.com/office/drawing/2014/main" id="{5B45D501-73B2-492D-AECA-826AF39D37BA}"/>
               </a:ext>
             </a:extLst>
           </p:cNvPr>
@@ -35802,7 +35802,7 @@
           <p:cNvPr id="11" name="">
             <a:extLst xmlns:a="http://schemas.openxmlformats.org/drawingml/2006/main">
               <a:ext uri="{FF2B5EF4-FFF2-40B4-BE49-F238E27FC236}">
-                <a16:creationId xmlns:a16="http://schemas.microsoft.com/office/drawing/2014/main" id="{29B48D7F-A395-4507-95D1-D3F4B235F5E8}"/>
+                <a16:creationId xmlns:a16="http://schemas.microsoft.com/office/drawing/2014/main" id="{83AFEFF4-BBBE-49E4-8191-88EC59FA4C87}"/>
               </a:ext>
             </a:extLst>
           </p:cNvPr>
@@ -35852,7 +35852,7 @@
           <p:cNvPr id="12" name="">
             <a:extLst xmlns:a="http://schemas.openxmlformats.org/drawingml/2006/main">
               <a:ext uri="{FF2B5EF4-FFF2-40B4-BE49-F238E27FC236}">
-                <a16:creationId xmlns:a16="http://schemas.microsoft.com/office/drawing/2014/main" id="{7D5CFA41-78F9-4C15-A1EA-F8EB3707E8FE}"/>
+                <a16:creationId xmlns:a16="http://schemas.microsoft.com/office/drawing/2014/main" id="{736B972D-8F23-4650-A2C2-0134177272D1}"/>
               </a:ext>
             </a:extLst>
           </p:cNvPr>
@@ -35902,7 +35902,7 @@
           <p:cNvPr id="13" name="">
             <a:extLst xmlns:a="http://schemas.openxmlformats.org/drawingml/2006/main">
               <a:ext uri="{FF2B5EF4-FFF2-40B4-BE49-F238E27FC236}">
-                <a16:creationId xmlns:a16="http://schemas.microsoft.com/office/drawing/2014/main" id="{275C81EB-9888-41E5-B625-3077F2D71F39}"/>
+                <a16:creationId xmlns:a16="http://schemas.microsoft.com/office/drawing/2014/main" id="{12955EED-83DB-4544-88F8-F4099C7DBB06}"/>
               </a:ext>
             </a:extLst>
           </p:cNvPr>
@@ -35937,7 +35937,7 @@
           <p:cNvPr id="14" name="">
             <a:extLst xmlns:a="http://schemas.openxmlformats.org/drawingml/2006/main">
               <a:ext uri="{FF2B5EF4-FFF2-40B4-BE49-F238E27FC236}">
-                <a16:creationId xmlns:a16="http://schemas.microsoft.com/office/drawing/2014/main" id="{301CCAFE-0CF3-4EEA-9CBD-00AF1C4CB114}"/>
+                <a16:creationId xmlns:a16="http://schemas.microsoft.com/office/drawing/2014/main" id="{84B79A81-7F3D-4A6F-B6E7-C430D720D726}"/>
               </a:ext>
             </a:extLst>
           </p:cNvPr>
@@ -35972,7 +35972,7 @@
           <p:cNvPr id="15" name="">
             <a:extLst xmlns:a="http://schemas.openxmlformats.org/drawingml/2006/main">
               <a:ext uri="{FF2B5EF4-FFF2-40B4-BE49-F238E27FC236}">
-                <a16:creationId xmlns:a16="http://schemas.microsoft.com/office/drawing/2014/main" id="{F114815F-A269-4A92-9A97-0ACEC15A3D38}"/>
+                <a16:creationId xmlns:a16="http://schemas.microsoft.com/office/drawing/2014/main" id="{C27F7D8A-63F5-41F9-848F-FE9F07714A31}"/>
               </a:ext>
             </a:extLst>
           </p:cNvPr>
@@ -36022,7 +36022,7 @@
           <p:cNvPr id="16" name="">
             <a:extLst xmlns:a="http://schemas.openxmlformats.org/drawingml/2006/main">
               <a:ext uri="{FF2B5EF4-FFF2-40B4-BE49-F238E27FC236}">
-                <a16:creationId xmlns:a16="http://schemas.microsoft.com/office/drawing/2014/main" id="{7ED6DC30-E960-442F-8A98-50CF437CDFB4}"/>
+                <a16:creationId xmlns:a16="http://schemas.microsoft.com/office/drawing/2014/main" id="{CEADF44E-4E22-4DD0-A740-F0789AA639D7}"/>
               </a:ext>
             </a:extLst>
           </p:cNvPr>
@@ -36072,7 +36072,7 @@
           <p:cNvPr id="17" name="">
             <a:extLst xmlns:a="http://schemas.openxmlformats.org/drawingml/2006/main">
               <a:ext uri="{FF2B5EF4-FFF2-40B4-BE49-F238E27FC236}">
-                <a16:creationId xmlns:a16="http://schemas.microsoft.com/office/drawing/2014/main" id="{9DC2CECA-341F-4425-9303-5D36F45712D4}"/>
+                <a16:creationId xmlns:a16="http://schemas.microsoft.com/office/drawing/2014/main" id="{84E5900F-8D64-4698-B5AC-388982B970BD}"/>
               </a:ext>
             </a:extLst>
           </p:cNvPr>
@@ -36122,7 +36122,7 @@
           <p:cNvPr id="18" name="">
             <a:extLst xmlns:a="http://schemas.openxmlformats.org/drawingml/2006/main">
               <a:ext uri="{FF2B5EF4-FFF2-40B4-BE49-F238E27FC236}">
-                <a16:creationId xmlns:a16="http://schemas.microsoft.com/office/drawing/2014/main" id="{A94E9E05-03F0-4F19-B4C4-5DD00BFDBA02}"/>
+                <a16:creationId xmlns:a16="http://schemas.microsoft.com/office/drawing/2014/main" id="{B634F1C3-B963-476A-A54E-3A87CD8A811E}"/>
               </a:ext>
             </a:extLst>
           </p:cNvPr>
@@ -36153,7 +36153,7 @@
           <p:cNvPr id="19" name="">
             <a:extLst xmlns:a="http://schemas.openxmlformats.org/drawingml/2006/main">
               <a:ext uri="{FF2B5EF4-FFF2-40B4-BE49-F238E27FC236}">
-                <a16:creationId xmlns:a16="http://schemas.microsoft.com/office/drawing/2014/main" id="{BEE44E49-54CE-4E65-B4B0-093111CC0E56}"/>
+                <a16:creationId xmlns:a16="http://schemas.microsoft.com/office/drawing/2014/main" id="{36F7A586-0153-43BA-9341-A9A2BCF7D100}"/>
               </a:ext>
             </a:extLst>
           </p:cNvPr>
@@ -36203,7 +36203,7 @@
           <p:cNvPr id="20" name="">
             <a:extLst xmlns:a="http://schemas.openxmlformats.org/drawingml/2006/main">
               <a:ext uri="{FF2B5EF4-FFF2-40B4-BE49-F238E27FC236}">
-                <a16:creationId xmlns:a16="http://schemas.microsoft.com/office/drawing/2014/main" id="{1BFA9F2D-2138-46F4-B428-AF2510491848}"/>
+                <a16:creationId xmlns:a16="http://schemas.microsoft.com/office/drawing/2014/main" id="{D48DCE0B-DFB4-401D-AA79-423785C4DD98}"/>
               </a:ext>
             </a:extLst>
           </p:cNvPr>
@@ -36253,7 +36253,7 @@
           <p:cNvPr id="21" name="">
             <a:extLst xmlns:a="http://schemas.openxmlformats.org/drawingml/2006/main">
               <a:ext uri="{FF2B5EF4-FFF2-40B4-BE49-F238E27FC236}">
-                <a16:creationId xmlns:a16="http://schemas.microsoft.com/office/drawing/2014/main" id="{4B451556-60FD-4EB7-8D5F-5FEBE0367800}"/>
+                <a16:creationId xmlns:a16="http://schemas.microsoft.com/office/drawing/2014/main" id="{91064E40-0B25-4203-AF8F-88DCCDD8C194}"/>
               </a:ext>
             </a:extLst>
           </p:cNvPr>
@@ -36288,7 +36288,7 @@
           <p:cNvPr id="22" name="">
             <a:extLst xmlns:a="http://schemas.openxmlformats.org/drawingml/2006/main">
               <a:ext uri="{FF2B5EF4-FFF2-40B4-BE49-F238E27FC236}">
-                <a16:creationId xmlns:a16="http://schemas.microsoft.com/office/drawing/2014/main" id="{AFA6C36F-0B78-4FEC-B331-B432A68AFFC7}"/>
+                <a16:creationId xmlns:a16="http://schemas.microsoft.com/office/drawing/2014/main" id="{68A0171E-EDB2-41C7-81B7-8BD2586964F1}"/>
               </a:ext>
             </a:extLst>
           </p:cNvPr>
@@ -36323,7 +36323,7 @@
           <p:cNvPr id="23" name="">
             <a:extLst xmlns:a="http://schemas.openxmlformats.org/drawingml/2006/main">
               <a:ext uri="{FF2B5EF4-FFF2-40B4-BE49-F238E27FC236}">
-                <a16:creationId xmlns:a16="http://schemas.microsoft.com/office/drawing/2014/main" id="{27813BAD-B455-41A1-BC69-707D7969B838}"/>
+                <a16:creationId xmlns:a16="http://schemas.microsoft.com/office/drawing/2014/main" id="{3051EE51-CAEA-4EA9-8D8D-2959F7F23AF4}"/>
               </a:ext>
             </a:extLst>
           </p:cNvPr>
@@ -36373,7 +36373,7 @@
           <p:cNvPr id="24" name="">
             <a:extLst xmlns:a="http://schemas.openxmlformats.org/drawingml/2006/main">
               <a:ext uri="{FF2B5EF4-FFF2-40B4-BE49-F238E27FC236}">
-                <a16:creationId xmlns:a16="http://schemas.microsoft.com/office/drawing/2014/main" id="{5DAC0E93-BFD1-4BB7-8218-D87AFF522BB5}"/>
+                <a16:creationId xmlns:a16="http://schemas.microsoft.com/office/drawing/2014/main" id="{E1296492-DF4A-40C5-8DEB-CAC0A4B54717}"/>
               </a:ext>
             </a:extLst>
           </p:cNvPr>
@@ -36423,7 +36423,7 @@
           <p:cNvPr id="25" name="">
             <a:extLst xmlns:a="http://schemas.openxmlformats.org/drawingml/2006/main">
               <a:ext uri="{FF2B5EF4-FFF2-40B4-BE49-F238E27FC236}">
-                <a16:creationId xmlns:a16="http://schemas.microsoft.com/office/drawing/2014/main" id="{BF9AFFF8-3179-4ACF-AE40-6328C52516DD}"/>
+                <a16:creationId xmlns:a16="http://schemas.microsoft.com/office/drawing/2014/main" id="{1CE39AEA-6FBE-491E-87F4-192CD4367C20}"/>
               </a:ext>
             </a:extLst>
           </p:cNvPr>
@@ -36473,7 +36473,7 @@
           <p:cNvPr id="26" name="">
             <a:extLst xmlns:a="http://schemas.openxmlformats.org/drawingml/2006/main">
               <a:ext uri="{FF2B5EF4-FFF2-40B4-BE49-F238E27FC236}">
-                <a16:creationId xmlns:a16="http://schemas.microsoft.com/office/drawing/2014/main" id="{074A42FB-D35D-4E28-B95B-2FF98853C859}"/>
+                <a16:creationId xmlns:a16="http://schemas.microsoft.com/office/drawing/2014/main" id="{601B86C2-0C0B-49F3-9F34-FE14CA96848B}"/>
               </a:ext>
             </a:extLst>
           </p:cNvPr>
@@ -36504,7 +36504,7 @@
           <p:cNvPr id="27" name="">
             <a:extLst xmlns:a="http://schemas.openxmlformats.org/drawingml/2006/main">
               <a:ext uri="{FF2B5EF4-FFF2-40B4-BE49-F238E27FC236}">
-                <a16:creationId xmlns:a16="http://schemas.microsoft.com/office/drawing/2014/main" id="{1E234268-529F-4E0A-8390-7F98F331D2FB}"/>
+                <a16:creationId xmlns:a16="http://schemas.microsoft.com/office/drawing/2014/main" id="{33CD2815-E7F0-45B0-AF98-F7736C79E484}"/>
               </a:ext>
             </a:extLst>
           </p:cNvPr>
@@ -36554,7 +36554,7 @@
           <p:cNvPr id="28" name="">
             <a:extLst xmlns:a="http://schemas.openxmlformats.org/drawingml/2006/main">
               <a:ext uri="{FF2B5EF4-FFF2-40B4-BE49-F238E27FC236}">
-                <a16:creationId xmlns:a16="http://schemas.microsoft.com/office/drawing/2014/main" id="{EBD921FF-B5CA-45B5-8786-365B71DC1BB3}"/>
+                <a16:creationId xmlns:a16="http://schemas.microsoft.com/office/drawing/2014/main" id="{6451BAFF-EB52-4CB5-B174-C1D48ED64B7A}"/>
               </a:ext>
             </a:extLst>
           </p:cNvPr>
@@ -36604,7 +36604,7 @@
           <p:cNvPr id="29" name="">
             <a:extLst xmlns:a="http://schemas.openxmlformats.org/drawingml/2006/main">
               <a:ext uri="{FF2B5EF4-FFF2-40B4-BE49-F238E27FC236}">
-                <a16:creationId xmlns:a16="http://schemas.microsoft.com/office/drawing/2014/main" id="{1FDD08F7-C40F-4B26-B675-EF9B6265D652}"/>
+                <a16:creationId xmlns:a16="http://schemas.microsoft.com/office/drawing/2014/main" id="{B859C5C6-986B-4B44-8520-A7F80235B48E}"/>
               </a:ext>
             </a:extLst>
           </p:cNvPr>
@@ -36654,7 +36654,7 @@
           <p:cNvPr id="30" name="">
             <a:extLst xmlns:a="http://schemas.openxmlformats.org/drawingml/2006/main">
               <a:ext uri="{FF2B5EF4-FFF2-40B4-BE49-F238E27FC236}">
-                <a16:creationId xmlns:a16="http://schemas.microsoft.com/office/drawing/2014/main" id="{0BA951C8-6A68-4F14-BB1F-B9A5E44A60FE}"/>
+                <a16:creationId xmlns:a16="http://schemas.microsoft.com/office/drawing/2014/main" id="{862232FC-4685-4956-A33E-8C2E1AB9111A}"/>
               </a:ext>
             </a:extLst>
           </p:cNvPr>
@@ -36702,7 +36702,7 @@
     </p:spTree>
     <p:extLst>
       <p:ext uri="{BB962C8B-B14F-4D97-AF65-F5344CB8AC3E}">
-        <p14:creationId xmlns:p14="http://schemas.microsoft.com/office/powerpoint/2010/main" val="341218889"/>
+        <p14:creationId xmlns:p14="http://schemas.microsoft.com/office/powerpoint/2010/main" val="1465392337"/>
       </p:ext>
     </p:extLst>
   </p:cSld>
@@ -36733,7 +36733,7 @@
           <p:cNvPr id="26" name="">
             <a:extLst xmlns:a="http://schemas.openxmlformats.org/drawingml/2006/main">
               <a:ext uri="{FF2B5EF4-FFF2-40B4-BE49-F238E27FC236}">
-                <a16:creationId xmlns:a16="http://schemas.microsoft.com/office/drawing/2014/main" id="{68CAA55E-FDF2-436B-B64F-70F42899255C}"/>
+                <a16:creationId xmlns:a16="http://schemas.microsoft.com/office/drawing/2014/main" id="{E1B1A91B-0D96-47B4-9064-FA440C74A3B2}"/>
               </a:ext>
             </a:extLst>
           </p:cNvPr>
@@ -36783,7 +36783,7 @@
           <p:cNvPr id="2" name="">
             <a:extLst xmlns:a="http://schemas.openxmlformats.org/drawingml/2006/main">
               <a:ext uri="{FF2B5EF4-FFF2-40B4-BE49-F238E27FC236}">
-                <a16:creationId xmlns:a16="http://schemas.microsoft.com/office/drawing/2014/main" id="{3A59C379-2191-4400-9678-A7424123C802}"/>
+                <a16:creationId xmlns:a16="http://schemas.microsoft.com/office/drawing/2014/main" id="{5D1278DB-94F4-4656-8050-84B53B4E1D08}"/>
               </a:ext>
             </a:extLst>
           </p:cNvPr>
@@ -36833,7 +36833,7 @@
           <p:cNvPr id="3" name="">
             <a:extLst xmlns:a="http://schemas.openxmlformats.org/drawingml/2006/main">
               <a:ext uri="{FF2B5EF4-FFF2-40B4-BE49-F238E27FC236}">
-                <a16:creationId xmlns:a16="http://schemas.microsoft.com/office/drawing/2014/main" id="{1BACC94F-F377-4DD3-B666-E92878CB2E10}"/>
+                <a16:creationId xmlns:a16="http://schemas.microsoft.com/office/drawing/2014/main" id="{950E8959-0E34-4C24-BD8F-2B96ED75F00F}"/>
               </a:ext>
             </a:extLst>
           </p:cNvPr>
@@ -36864,7 +36864,7 @@
           <p:cNvPr id="4" name="">
             <a:extLst xmlns:a="http://schemas.openxmlformats.org/drawingml/2006/main">
               <a:ext uri="{FF2B5EF4-FFF2-40B4-BE49-F238E27FC236}">
-                <a16:creationId xmlns:a16="http://schemas.microsoft.com/office/drawing/2014/main" id="{BAC86D86-7077-4191-93FF-51CA2FF1495E}"/>
+                <a16:creationId xmlns:a16="http://schemas.microsoft.com/office/drawing/2014/main" id="{89B13C22-9198-44BB-A058-379DA56A95CB}"/>
               </a:ext>
             </a:extLst>
           </p:cNvPr>
@@ -36914,7 +36914,7 @@
           <p:cNvPr id="5" name="">
             <a:extLst xmlns:a="http://schemas.openxmlformats.org/drawingml/2006/main">
               <a:ext uri="{FF2B5EF4-FFF2-40B4-BE49-F238E27FC236}">
-                <a16:creationId xmlns:a16="http://schemas.microsoft.com/office/drawing/2014/main" id="{92CD3664-2802-488E-AB90-8267ADF5AECD}"/>
+                <a16:creationId xmlns:a16="http://schemas.microsoft.com/office/drawing/2014/main" id="{8184FF4F-7F0E-40C6-A750-96AA7D8FA36D}"/>
               </a:ext>
             </a:extLst>
           </p:cNvPr>
@@ -36964,7 +36964,7 @@
           <p:cNvPr id="6" name="">
             <a:extLst xmlns:a="http://schemas.openxmlformats.org/drawingml/2006/main">
               <a:ext uri="{FF2B5EF4-FFF2-40B4-BE49-F238E27FC236}">
-                <a16:creationId xmlns:a16="http://schemas.microsoft.com/office/drawing/2014/main" id="{0E488DC4-37A1-4D97-A054-5495C8D47A8B}"/>
+                <a16:creationId xmlns:a16="http://schemas.microsoft.com/office/drawing/2014/main" id="{FAE0655C-781E-4B97-A1A3-DBC5A103251F}"/>
               </a:ext>
             </a:extLst>
           </p:cNvPr>
@@ -37014,7 +37014,7 @@
           <p:cNvPr id="7" name="">
             <a:extLst xmlns:a="http://schemas.openxmlformats.org/drawingml/2006/main">
               <a:ext uri="{FF2B5EF4-FFF2-40B4-BE49-F238E27FC236}">
-                <a16:creationId xmlns:a16="http://schemas.microsoft.com/office/drawing/2014/main" id="{6FF9C0BC-B2E0-45E8-BABB-8E6B934331C6}"/>
+                <a16:creationId xmlns:a16="http://schemas.microsoft.com/office/drawing/2014/main" id="{3785C16B-00A4-4907-AA4D-D85FFA633A56}"/>
               </a:ext>
             </a:extLst>
           </p:cNvPr>
@@ -37064,7 +37064,7 @@
           <p:cNvPr id="8" name="">
             <a:extLst xmlns:a="http://schemas.openxmlformats.org/drawingml/2006/main">
               <a:ext uri="{FF2B5EF4-FFF2-40B4-BE49-F238E27FC236}">
-                <a16:creationId xmlns:a16="http://schemas.microsoft.com/office/drawing/2014/main" id="{B0C3B5CD-CE76-46AA-BDD3-7D41F9A3DDBE}"/>
+                <a16:creationId xmlns:a16="http://schemas.microsoft.com/office/drawing/2014/main" id="{8751E2F8-28E1-4BAA-9AB8-6780B434AB9F}"/>
               </a:ext>
             </a:extLst>
           </p:cNvPr>
@@ -37114,7 +37114,7 @@
           <p:cNvPr id="9" name="">
             <a:extLst xmlns:a="http://schemas.openxmlformats.org/drawingml/2006/main">
               <a:ext uri="{FF2B5EF4-FFF2-40B4-BE49-F238E27FC236}">
-                <a16:creationId xmlns:a16="http://schemas.microsoft.com/office/drawing/2014/main" id="{8FD61E61-84C0-471D-A046-C606757F7EDC}"/>
+                <a16:creationId xmlns:a16="http://schemas.microsoft.com/office/drawing/2014/main" id="{4FF7900E-C25B-439E-AA3B-B124896FC987}"/>
               </a:ext>
             </a:extLst>
           </p:cNvPr>
@@ -37145,7 +37145,7 @@
           <p:cNvPr id="10" name="">
             <a:extLst xmlns:a="http://schemas.openxmlformats.org/drawingml/2006/main">
               <a:ext uri="{FF2B5EF4-FFF2-40B4-BE49-F238E27FC236}">
-                <a16:creationId xmlns:a16="http://schemas.microsoft.com/office/drawing/2014/main" id="{A22F3E5B-3BC4-4753-B6C7-B048950A9833}"/>
+                <a16:creationId xmlns:a16="http://schemas.microsoft.com/office/drawing/2014/main" id="{088CE03A-FDCE-4371-97C6-12C7DD472586}"/>
               </a:ext>
             </a:extLst>
           </p:cNvPr>
@@ -37195,7 +37195,7 @@
           <p:cNvPr id="11" name="">
             <a:extLst xmlns:a="http://schemas.openxmlformats.org/drawingml/2006/main">
               <a:ext uri="{FF2B5EF4-FFF2-40B4-BE49-F238E27FC236}">
-                <a16:creationId xmlns:a16="http://schemas.microsoft.com/office/drawing/2014/main" id="{3585B426-8FED-45B4-8F08-93193FCA43DF}"/>
+                <a16:creationId xmlns:a16="http://schemas.microsoft.com/office/drawing/2014/main" id="{69568015-DA47-4EF2-8866-5EFE2D971709}"/>
               </a:ext>
             </a:extLst>
           </p:cNvPr>
@@ -37245,7 +37245,7 @@
           <p:cNvPr id="12" name="">
             <a:extLst xmlns:a="http://schemas.openxmlformats.org/drawingml/2006/main">
               <a:ext uri="{FF2B5EF4-FFF2-40B4-BE49-F238E27FC236}">
-                <a16:creationId xmlns:a16="http://schemas.microsoft.com/office/drawing/2014/main" id="{6BE06BAA-CB6C-4F3D-9716-FB7C98279CF7}"/>
+                <a16:creationId xmlns:a16="http://schemas.microsoft.com/office/drawing/2014/main" id="{B3C2BE99-D1C1-41D0-BD4D-7A200D5D5745}"/>
               </a:ext>
             </a:extLst>
           </p:cNvPr>
@@ -37295,7 +37295,7 @@
           <p:cNvPr id="13" name="">
             <a:extLst xmlns:a="http://schemas.openxmlformats.org/drawingml/2006/main">
               <a:ext uri="{FF2B5EF4-FFF2-40B4-BE49-F238E27FC236}">
-                <a16:creationId xmlns:a16="http://schemas.microsoft.com/office/drawing/2014/main" id="{7D3B1D67-B1BB-4D0B-A6F8-33883351CA97}"/>
+                <a16:creationId xmlns:a16="http://schemas.microsoft.com/office/drawing/2014/main" id="{76A186E5-93CA-4FB7-9B23-4C869FC802FF}"/>
               </a:ext>
             </a:extLst>
           </p:cNvPr>
@@ -37345,7 +37345,7 @@
           <p:cNvPr id="14" name="">
             <a:extLst xmlns:a="http://schemas.openxmlformats.org/drawingml/2006/main">
               <a:ext uri="{FF2B5EF4-FFF2-40B4-BE49-F238E27FC236}">
-                <a16:creationId xmlns:a16="http://schemas.microsoft.com/office/drawing/2014/main" id="{914B6CD9-A694-4F51-9C67-CD3F943C9655}"/>
+                <a16:creationId xmlns:a16="http://schemas.microsoft.com/office/drawing/2014/main" id="{67838022-5FC1-4413-86DA-E74554B4073D}"/>
               </a:ext>
             </a:extLst>
           </p:cNvPr>
@@ -37376,7 +37376,7 @@
           <p:cNvPr id="15" name="">
             <a:extLst xmlns:a="http://schemas.openxmlformats.org/drawingml/2006/main">
               <a:ext uri="{FF2B5EF4-FFF2-40B4-BE49-F238E27FC236}">
-                <a16:creationId xmlns:a16="http://schemas.microsoft.com/office/drawing/2014/main" id="{A7DE5ECF-7179-4BB5-8034-305FB47B8C8A}"/>
+                <a16:creationId xmlns:a16="http://schemas.microsoft.com/office/drawing/2014/main" id="{0A354534-AC12-4663-BB9B-32DD40DB7DCA}"/>
               </a:ext>
             </a:extLst>
           </p:cNvPr>
@@ -37426,7 +37426,7 @@
           <p:cNvPr id="16" name="">
             <a:extLst xmlns:a="http://schemas.openxmlformats.org/drawingml/2006/main">
               <a:ext uri="{FF2B5EF4-FFF2-40B4-BE49-F238E27FC236}">
-                <a16:creationId xmlns:a16="http://schemas.microsoft.com/office/drawing/2014/main" id="{F93CA24B-CB25-40C6-A580-F7199BA72D64}"/>
+                <a16:creationId xmlns:a16="http://schemas.microsoft.com/office/drawing/2014/main" id="{56C76F6B-8133-4783-AC54-C6F182FE8347}"/>
               </a:ext>
             </a:extLst>
           </p:cNvPr>
@@ -37476,7 +37476,7 @@
           <p:cNvPr id="17" name="">
             <a:extLst xmlns:a="http://schemas.openxmlformats.org/drawingml/2006/main">
               <a:ext uri="{FF2B5EF4-FFF2-40B4-BE49-F238E27FC236}">
-                <a16:creationId xmlns:a16="http://schemas.microsoft.com/office/drawing/2014/main" id="{8B4A144A-F491-436D-8301-71209CD1CF27}"/>
+                <a16:creationId xmlns:a16="http://schemas.microsoft.com/office/drawing/2014/main" id="{5184767E-BC91-400F-B2D8-71807B599994}"/>
               </a:ext>
             </a:extLst>
           </p:cNvPr>
@@ -37526,7 +37526,7 @@
           <p:cNvPr id="18" name="">
             <a:extLst xmlns:a="http://schemas.openxmlformats.org/drawingml/2006/main">
               <a:ext uri="{FF2B5EF4-FFF2-40B4-BE49-F238E27FC236}">
-                <a16:creationId xmlns:a16="http://schemas.microsoft.com/office/drawing/2014/main" id="{CA0E0A4F-312A-42D8-BEC4-5D028A9154DC}"/>
+                <a16:creationId xmlns:a16="http://schemas.microsoft.com/office/drawing/2014/main" id="{77232919-9588-470B-8967-88711240A606}"/>
               </a:ext>
             </a:extLst>
           </p:cNvPr>
@@ -37576,7 +37576,7 @@
           <p:cNvPr id="19" name="">
             <a:extLst xmlns:a="http://schemas.openxmlformats.org/drawingml/2006/main">
               <a:ext uri="{FF2B5EF4-FFF2-40B4-BE49-F238E27FC236}">
-                <a16:creationId xmlns:a16="http://schemas.microsoft.com/office/drawing/2014/main" id="{7E0714BB-499D-4A41-921A-5841814BDEB9}"/>
+                <a16:creationId xmlns:a16="http://schemas.microsoft.com/office/drawing/2014/main" id="{60A04FC2-B511-46A6-A564-4CEBA468FB65}"/>
               </a:ext>
             </a:extLst>
           </p:cNvPr>
@@ -37607,7 +37607,7 @@
           <p:cNvPr id="20" name="">
             <a:extLst xmlns:a="http://schemas.openxmlformats.org/drawingml/2006/main">
               <a:ext uri="{FF2B5EF4-FFF2-40B4-BE49-F238E27FC236}">
-                <a16:creationId xmlns:a16="http://schemas.microsoft.com/office/drawing/2014/main" id="{EFE42E5A-1A53-4D9E-B05B-2177ACEF89EB}"/>
+                <a16:creationId xmlns:a16="http://schemas.microsoft.com/office/drawing/2014/main" id="{7ED64E10-9F3B-41F0-8788-AB0F3263AA9C}"/>
               </a:ext>
             </a:extLst>
           </p:cNvPr>
@@ -37657,7 +37657,7 @@
           <p:cNvPr id="21" name="">
             <a:extLst xmlns:a="http://schemas.openxmlformats.org/drawingml/2006/main">
               <a:ext uri="{FF2B5EF4-FFF2-40B4-BE49-F238E27FC236}">
-                <a16:creationId xmlns:a16="http://schemas.microsoft.com/office/drawing/2014/main" id="{F9A7029F-52BF-461D-A1DB-95CE0ECF9114}"/>
+                <a16:creationId xmlns:a16="http://schemas.microsoft.com/office/drawing/2014/main" id="{85CA7556-19B7-4430-8D64-F36A5EF5C183}"/>
               </a:ext>
             </a:extLst>
           </p:cNvPr>
@@ -37707,7 +37707,7 @@
           <p:cNvPr id="22" name="">
             <a:extLst xmlns:a="http://schemas.openxmlformats.org/drawingml/2006/main">
               <a:ext uri="{FF2B5EF4-FFF2-40B4-BE49-F238E27FC236}">
-                <a16:creationId xmlns:a16="http://schemas.microsoft.com/office/drawing/2014/main" id="{9A351ED1-EBDC-4781-A0A6-D85A71D53966}"/>
+                <a16:creationId xmlns:a16="http://schemas.microsoft.com/office/drawing/2014/main" id="{9CA72FCB-21CF-4E7C-98B3-E7271A8DAE6F}"/>
               </a:ext>
             </a:extLst>
           </p:cNvPr>
@@ -37757,7 +37757,7 @@
           <p:cNvPr id="23" name="">
             <a:extLst xmlns:a="http://schemas.openxmlformats.org/drawingml/2006/main">
               <a:ext uri="{FF2B5EF4-FFF2-40B4-BE49-F238E27FC236}">
-                <a16:creationId xmlns:a16="http://schemas.microsoft.com/office/drawing/2014/main" id="{591748DA-65B0-4C67-848C-FC7E701BA4FA}"/>
+                <a16:creationId xmlns:a16="http://schemas.microsoft.com/office/drawing/2014/main" id="{BF123B53-0BDB-4B24-90CC-C111ED9511AB}"/>
               </a:ext>
             </a:extLst>
           </p:cNvPr>
@@ -37807,7 +37807,7 @@
           <p:cNvPr id="24" name="">
             <a:extLst xmlns:a="http://schemas.openxmlformats.org/drawingml/2006/main">
               <a:ext uri="{FF2B5EF4-FFF2-40B4-BE49-F238E27FC236}">
-                <a16:creationId xmlns:a16="http://schemas.microsoft.com/office/drawing/2014/main" id="{E5EF051B-166B-46DB-9B98-9B16AEFD8A70}"/>
+                <a16:creationId xmlns:a16="http://schemas.microsoft.com/office/drawing/2014/main" id="{587527A4-DFCB-4CCC-A294-64FFCF9AB98A}"/>
               </a:ext>
             </a:extLst>
           </p:cNvPr>
@@ -37838,7 +37838,7 @@
           <p:cNvPr id="25" name="">
             <a:extLst xmlns:a="http://schemas.openxmlformats.org/drawingml/2006/main">
               <a:ext uri="{FF2B5EF4-FFF2-40B4-BE49-F238E27FC236}">
-                <a16:creationId xmlns:a16="http://schemas.microsoft.com/office/drawing/2014/main" id="{9FB19214-E129-49B9-8572-B01D5552F821}"/>
+                <a16:creationId xmlns:a16="http://schemas.microsoft.com/office/drawing/2014/main" id="{BB251705-0581-41A7-823E-FF2266CF9E3D}"/>
               </a:ext>
             </a:extLst>
           </p:cNvPr>
@@ -37886,7 +37886,7 @@
     </p:spTree>
     <p:extLst>
       <p:ext uri="{BB962C8B-B14F-4D97-AF65-F5344CB8AC3E}">
-        <p14:creationId xmlns:p14="http://schemas.microsoft.com/office/powerpoint/2010/main" val="1080142172"/>
+        <p14:creationId xmlns:p14="http://schemas.microsoft.com/office/powerpoint/2010/main" val="834227070"/>
       </p:ext>
     </p:extLst>
   </p:cSld>
@@ -37917,7 +37917,7 @@
           <p:cNvPr id="23" name="">
             <a:extLst xmlns:a="http://schemas.openxmlformats.org/drawingml/2006/main">
               <a:ext uri="{FF2B5EF4-FFF2-40B4-BE49-F238E27FC236}">
-                <a16:creationId xmlns:a16="http://schemas.microsoft.com/office/drawing/2014/main" id="{CC40B4D7-0D1D-49FC-9B9C-EA9157E3B091}"/>
+                <a16:creationId xmlns:a16="http://schemas.microsoft.com/office/drawing/2014/main" id="{4BC6D647-D3B2-4CD7-9BEC-D45ABB3FBF1E}"/>
               </a:ext>
             </a:extLst>
           </p:cNvPr>
@@ -37967,7 +37967,7 @@
           <p:cNvPr id="2" name="">
             <a:extLst xmlns:a="http://schemas.openxmlformats.org/drawingml/2006/main">
               <a:ext uri="{FF2B5EF4-FFF2-40B4-BE49-F238E27FC236}">
-                <a16:creationId xmlns:a16="http://schemas.microsoft.com/office/drawing/2014/main" id="{82C2AA64-7D48-42EC-A0D3-141208567730}"/>
+                <a16:creationId xmlns:a16="http://schemas.microsoft.com/office/drawing/2014/main" id="{2EFA4C70-1B4D-4EF8-A2F2-A70125FD901B}"/>
               </a:ext>
             </a:extLst>
           </p:cNvPr>
@@ -38017,7 +38017,7 @@
           <p:cNvPr id="3" name="">
             <a:extLst xmlns:a="http://schemas.openxmlformats.org/drawingml/2006/main">
               <a:ext uri="{FF2B5EF4-FFF2-40B4-BE49-F238E27FC236}">
-                <a16:creationId xmlns:a16="http://schemas.microsoft.com/office/drawing/2014/main" id="{F03037D9-6E85-4214-8C5A-B4D6DE59EF27}"/>
+                <a16:creationId xmlns:a16="http://schemas.microsoft.com/office/drawing/2014/main" id="{E7A00002-AD80-4A4D-AC6C-93F56F7B9A34}"/>
               </a:ext>
             </a:extLst>
           </p:cNvPr>
@@ -38048,7 +38048,7 @@
           <p:cNvPr id="4" name="">
             <a:extLst xmlns:a="http://schemas.openxmlformats.org/drawingml/2006/main">
               <a:ext uri="{FF2B5EF4-FFF2-40B4-BE49-F238E27FC236}">
-                <a16:creationId xmlns:a16="http://schemas.microsoft.com/office/drawing/2014/main" id="{11136F9C-C370-4048-BB92-983125F8406F}"/>
+                <a16:creationId xmlns:a16="http://schemas.microsoft.com/office/drawing/2014/main" id="{2EFF876C-D25C-47DA-B341-E922894D2885}"/>
               </a:ext>
             </a:extLst>
           </p:cNvPr>
@@ -38098,7 +38098,7 @@
           <p:cNvPr id="5" name="">
             <a:extLst xmlns:a="http://schemas.openxmlformats.org/drawingml/2006/main">
               <a:ext uri="{FF2B5EF4-FFF2-40B4-BE49-F238E27FC236}">
-                <a16:creationId xmlns:a16="http://schemas.microsoft.com/office/drawing/2014/main" id="{F64AFF05-554B-485A-88E7-74A623E842CC}"/>
+                <a16:creationId xmlns:a16="http://schemas.microsoft.com/office/drawing/2014/main" id="{E558D09F-D41F-41A4-A441-ECED081C8F15}"/>
               </a:ext>
             </a:extLst>
           </p:cNvPr>
@@ -38148,7 +38148,7 @@
           <p:cNvPr id="6" name="">
             <a:extLst xmlns:a="http://schemas.openxmlformats.org/drawingml/2006/main">
               <a:ext uri="{FF2B5EF4-FFF2-40B4-BE49-F238E27FC236}">
-                <a16:creationId xmlns:a16="http://schemas.microsoft.com/office/drawing/2014/main" id="{E17FE034-578C-43AB-8687-0CA8491B0427}"/>
+                <a16:creationId xmlns:a16="http://schemas.microsoft.com/office/drawing/2014/main" id="{2D3C668B-7D1A-4852-B34C-CD26B088E447}"/>
               </a:ext>
             </a:extLst>
           </p:cNvPr>
@@ -38198,7 +38198,7 @@
           <p:cNvPr id="7" name="">
             <a:extLst xmlns:a="http://schemas.openxmlformats.org/drawingml/2006/main">
               <a:ext uri="{FF2B5EF4-FFF2-40B4-BE49-F238E27FC236}">
-                <a16:creationId xmlns:a16="http://schemas.microsoft.com/office/drawing/2014/main" id="{0607E996-647C-474E-ABD7-879273733594}"/>
+                <a16:creationId xmlns:a16="http://schemas.microsoft.com/office/drawing/2014/main" id="{E3B881E5-6F0D-49C8-845C-F5B5FC4932C4}"/>
               </a:ext>
             </a:extLst>
           </p:cNvPr>
@@ -38248,7 +38248,7 @@
           <p:cNvPr id="8" name="">
             <a:extLst xmlns:a="http://schemas.openxmlformats.org/drawingml/2006/main">
               <a:ext uri="{FF2B5EF4-FFF2-40B4-BE49-F238E27FC236}">
-                <a16:creationId xmlns:a16="http://schemas.microsoft.com/office/drawing/2014/main" id="{34F71634-5832-4A3C-BD69-4B9C67F7B270}"/>
+                <a16:creationId xmlns:a16="http://schemas.microsoft.com/office/drawing/2014/main" id="{F0148C3D-5B73-4832-80C4-BD69683CE862}"/>
               </a:ext>
             </a:extLst>
           </p:cNvPr>
@@ -38298,7 +38298,7 @@
           <p:cNvPr id="9" name="">
             <a:extLst xmlns:a="http://schemas.openxmlformats.org/drawingml/2006/main">
               <a:ext uri="{FF2B5EF4-FFF2-40B4-BE49-F238E27FC236}">
-                <a16:creationId xmlns:a16="http://schemas.microsoft.com/office/drawing/2014/main" id="{9493C9A1-4957-4E0D-ABB7-63CD643C9FCA}"/>
+                <a16:creationId xmlns:a16="http://schemas.microsoft.com/office/drawing/2014/main" id="{C95F304B-063B-4054-9425-0AB5AB0E3A78}"/>
               </a:ext>
             </a:extLst>
           </p:cNvPr>
@@ -38348,7 +38348,7 @@
           <p:cNvPr id="10" name="">
             <a:extLst xmlns:a="http://schemas.openxmlformats.org/drawingml/2006/main">
               <a:ext uri="{FF2B5EF4-FFF2-40B4-BE49-F238E27FC236}">
-                <a16:creationId xmlns:a16="http://schemas.microsoft.com/office/drawing/2014/main" id="{DA7072CA-0EEF-451C-B523-5ADF6A3342B3}"/>
+                <a16:creationId xmlns:a16="http://schemas.microsoft.com/office/drawing/2014/main" id="{53880D5E-36B3-419D-BD2A-033BFB94D9A7}"/>
               </a:ext>
             </a:extLst>
           </p:cNvPr>
@@ -38398,7 +38398,7 @@
           <p:cNvPr id="11" name="">
             <a:extLst xmlns:a="http://schemas.openxmlformats.org/drawingml/2006/main">
               <a:ext uri="{FF2B5EF4-FFF2-40B4-BE49-F238E27FC236}">
-                <a16:creationId xmlns:a16="http://schemas.microsoft.com/office/drawing/2014/main" id="{BDEFB03E-5EAA-4AF7-B9A0-4B3E2410FB0D}"/>
+                <a16:creationId xmlns:a16="http://schemas.microsoft.com/office/drawing/2014/main" id="{C49D2573-77AA-4ED8-B355-80862CB0CB64}"/>
               </a:ext>
             </a:extLst>
           </p:cNvPr>
@@ -38448,7 +38448,7 @@
           <p:cNvPr id="12" name="">
             <a:extLst xmlns:a="http://schemas.openxmlformats.org/drawingml/2006/main">
               <a:ext uri="{FF2B5EF4-FFF2-40B4-BE49-F238E27FC236}">
-                <a16:creationId xmlns:a16="http://schemas.microsoft.com/office/drawing/2014/main" id="{64838CE3-ABD8-45E1-A8E6-B37641A55764}"/>
+                <a16:creationId xmlns:a16="http://schemas.microsoft.com/office/drawing/2014/main" id="{2E044879-D5D5-45FD-AD63-CA33E5B49B70}"/>
               </a:ext>
             </a:extLst>
           </p:cNvPr>
@@ -38498,7 +38498,7 @@
           <p:cNvPr id="13" name="">
             <a:extLst xmlns:a="http://schemas.openxmlformats.org/drawingml/2006/main">
               <a:ext uri="{FF2B5EF4-FFF2-40B4-BE49-F238E27FC236}">
-                <a16:creationId xmlns:a16="http://schemas.microsoft.com/office/drawing/2014/main" id="{1B822042-87F1-4CF7-B7C8-38A78C3ECBFA}"/>
+                <a16:creationId xmlns:a16="http://schemas.microsoft.com/office/drawing/2014/main" id="{991FD321-8B1B-4724-B682-BD4C18A61690}"/>
               </a:ext>
             </a:extLst>
           </p:cNvPr>
@@ -38529,7 +38529,7 @@
           <p:cNvPr id="14" name="">
             <a:extLst xmlns:a="http://schemas.openxmlformats.org/drawingml/2006/main">
               <a:ext uri="{FF2B5EF4-FFF2-40B4-BE49-F238E27FC236}">
-                <a16:creationId xmlns:a16="http://schemas.microsoft.com/office/drawing/2014/main" id="{47D8F9EB-C93F-4EF3-B3F2-1C3168216BD9}"/>
+                <a16:creationId xmlns:a16="http://schemas.microsoft.com/office/drawing/2014/main" id="{AEA62B13-2AF0-4EAE-B4A0-FD16B2EC9917}"/>
               </a:ext>
             </a:extLst>
           </p:cNvPr>
@@ -38562,7 +38562,7 @@
           <p:cNvPr id="15" name="">
             <a:extLst xmlns:a="http://schemas.openxmlformats.org/drawingml/2006/main">
               <a:ext uri="{FF2B5EF4-FFF2-40B4-BE49-F238E27FC236}">
-                <a16:creationId xmlns:a16="http://schemas.microsoft.com/office/drawing/2014/main" id="{B788706F-F323-464A-9C1E-809C7A1C9260}"/>
+                <a16:creationId xmlns:a16="http://schemas.microsoft.com/office/drawing/2014/main" id="{4C5F3E08-57C7-4B00-9D5C-44A7FCE4A2B5}"/>
               </a:ext>
             </a:extLst>
           </p:cNvPr>
@@ -38612,7 +38612,7 @@
           <p:cNvPr id="16" name="">
             <a:extLst xmlns:a="http://schemas.openxmlformats.org/drawingml/2006/main">
               <a:ext uri="{FF2B5EF4-FFF2-40B4-BE49-F238E27FC236}">
-                <a16:creationId xmlns:a16="http://schemas.microsoft.com/office/drawing/2014/main" id="{A62B8D77-6ADE-4B4D-98C9-2E7BB2662A42}"/>
+                <a16:creationId xmlns:a16="http://schemas.microsoft.com/office/drawing/2014/main" id="{15515D80-F862-4812-92D1-714E5B61DA96}"/>
               </a:ext>
             </a:extLst>
           </p:cNvPr>
@@ -38645,7 +38645,7 @@
           <p:cNvPr id="17" name="">
             <a:extLst xmlns:a="http://schemas.openxmlformats.org/drawingml/2006/main">
               <a:ext uri="{FF2B5EF4-FFF2-40B4-BE49-F238E27FC236}">
-                <a16:creationId xmlns:a16="http://schemas.microsoft.com/office/drawing/2014/main" id="{2849C285-13EE-46C2-ABDD-D2DEB5F6B8DF}"/>
+                <a16:creationId xmlns:a16="http://schemas.microsoft.com/office/drawing/2014/main" id="{281061EC-DD53-4BCE-9D24-5D4A22D64761}"/>
               </a:ext>
             </a:extLst>
           </p:cNvPr>
@@ -38695,7 +38695,7 @@
           <p:cNvPr id="18" name="">
             <a:extLst xmlns:a="http://schemas.openxmlformats.org/drawingml/2006/main">
               <a:ext uri="{FF2B5EF4-FFF2-40B4-BE49-F238E27FC236}">
-                <a16:creationId xmlns:a16="http://schemas.microsoft.com/office/drawing/2014/main" id="{E1A42417-FDA2-43AA-8DD9-9614AA3E0A6A}"/>
+                <a16:creationId xmlns:a16="http://schemas.microsoft.com/office/drawing/2014/main" id="{A41A6479-E6AD-4F32-8B7F-DC80EF9F6522}"/>
               </a:ext>
             </a:extLst>
           </p:cNvPr>
@@ -38728,7 +38728,7 @@
           <p:cNvPr id="19" name="">
             <a:extLst xmlns:a="http://schemas.openxmlformats.org/drawingml/2006/main">
               <a:ext uri="{FF2B5EF4-FFF2-40B4-BE49-F238E27FC236}">
-                <a16:creationId xmlns:a16="http://schemas.microsoft.com/office/drawing/2014/main" id="{2B9CC206-69D5-40AB-8A6B-10B5AC69BD60}"/>
+                <a16:creationId xmlns:a16="http://schemas.microsoft.com/office/drawing/2014/main" id="{34CFBD87-5D58-46CF-8BC9-BBEB02B294C6}"/>
               </a:ext>
             </a:extLst>
           </p:cNvPr>
@@ -38778,7 +38778,7 @@
           <p:cNvPr id="20" name="">
             <a:extLst xmlns:a="http://schemas.openxmlformats.org/drawingml/2006/main">
               <a:ext uri="{FF2B5EF4-FFF2-40B4-BE49-F238E27FC236}">
-                <a16:creationId xmlns:a16="http://schemas.microsoft.com/office/drawing/2014/main" id="{0B189B17-2226-4937-B3F9-CEBBF166138D}"/>
+                <a16:creationId xmlns:a16="http://schemas.microsoft.com/office/drawing/2014/main" id="{351F1B45-C451-43AE-B712-ADEA86525116}"/>
               </a:ext>
             </a:extLst>
           </p:cNvPr>
@@ -38811,7 +38811,7 @@
           <p:cNvPr id="21" name="">
             <a:extLst xmlns:a="http://schemas.openxmlformats.org/drawingml/2006/main">
               <a:ext uri="{FF2B5EF4-FFF2-40B4-BE49-F238E27FC236}">
-                <a16:creationId xmlns:a16="http://schemas.microsoft.com/office/drawing/2014/main" id="{913ACFA9-32F5-45FD-88FE-715451362402}"/>
+                <a16:creationId xmlns:a16="http://schemas.microsoft.com/office/drawing/2014/main" id="{9A8FAD11-F620-457D-A148-513A6C9D186A}"/>
               </a:ext>
             </a:extLst>
           </p:cNvPr>
@@ -38861,7 +38861,7 @@
           <p:cNvPr id="22" name="">
             <a:extLst xmlns:a="http://schemas.openxmlformats.org/drawingml/2006/main">
               <a:ext uri="{FF2B5EF4-FFF2-40B4-BE49-F238E27FC236}">
-                <a16:creationId xmlns:a16="http://schemas.microsoft.com/office/drawing/2014/main" id="{EC3A31FC-8118-4D88-97E1-429B5CAFA50D}"/>
+                <a16:creationId xmlns:a16="http://schemas.microsoft.com/office/drawing/2014/main" id="{C8AAC005-1813-45FE-AA05-93D1628C14BE}"/>
               </a:ext>
             </a:extLst>
           </p:cNvPr>
@@ -38909,7 +38909,7 @@
     </p:spTree>
     <p:extLst>
       <p:ext uri="{BB962C8B-B14F-4D97-AF65-F5344CB8AC3E}">
-        <p14:creationId xmlns:p14="http://schemas.microsoft.com/office/powerpoint/2010/main" val="2054882139"/>
+        <p14:creationId xmlns:p14="http://schemas.microsoft.com/office/powerpoint/2010/main" val="1529627258"/>
       </p:ext>
     </p:extLst>
   </p:cSld>
